--- a/betchaBooking-USECASE.pptx
+++ b/betchaBooking-USECASE.pptx
@@ -22,41 +22,42 @@
     <p:sldId id="268" r:id="rId16"/>
     <p:sldId id="269" r:id="rId17"/>
     <p:sldId id="271" r:id="rId18"/>
-    <p:sldId id="270" r:id="rId19"/>
-    <p:sldId id="287" r:id="rId20"/>
-    <p:sldId id="276" r:id="rId21"/>
-    <p:sldId id="278" r:id="rId22"/>
-    <p:sldId id="277" r:id="rId23"/>
-    <p:sldId id="272" r:id="rId24"/>
-    <p:sldId id="275" r:id="rId25"/>
-    <p:sldId id="273" r:id="rId26"/>
-    <p:sldId id="274" r:id="rId27"/>
-    <p:sldId id="279" r:id="rId28"/>
-    <p:sldId id="280" r:id="rId29"/>
-    <p:sldId id="281" r:id="rId30"/>
-    <p:sldId id="282" r:id="rId31"/>
-    <p:sldId id="283" r:id="rId32"/>
-    <p:sldId id="285" r:id="rId33"/>
-    <p:sldId id="286" r:id="rId34"/>
-    <p:sldId id="290" r:id="rId35"/>
-    <p:sldId id="291" r:id="rId36"/>
-    <p:sldId id="289" r:id="rId37"/>
-    <p:sldId id="292" r:id="rId38"/>
-    <p:sldId id="293" r:id="rId39"/>
-    <p:sldId id="294" r:id="rId40"/>
-    <p:sldId id="295" r:id="rId41"/>
-    <p:sldId id="296" r:id="rId42"/>
-    <p:sldId id="297" r:id="rId43"/>
-    <p:sldId id="299" r:id="rId44"/>
-    <p:sldId id="300" r:id="rId45"/>
-    <p:sldId id="309" r:id="rId46"/>
-    <p:sldId id="306" r:id="rId47"/>
-    <p:sldId id="307" r:id="rId48"/>
-    <p:sldId id="302" r:id="rId49"/>
-    <p:sldId id="308" r:id="rId50"/>
-    <p:sldId id="301" r:id="rId51"/>
-    <p:sldId id="303" r:id="rId52"/>
-    <p:sldId id="304" r:id="rId53"/>
+    <p:sldId id="310" r:id="rId19"/>
+    <p:sldId id="270" r:id="rId20"/>
+    <p:sldId id="287" r:id="rId21"/>
+    <p:sldId id="276" r:id="rId22"/>
+    <p:sldId id="278" r:id="rId23"/>
+    <p:sldId id="277" r:id="rId24"/>
+    <p:sldId id="272" r:id="rId25"/>
+    <p:sldId id="275" r:id="rId26"/>
+    <p:sldId id="273" r:id="rId27"/>
+    <p:sldId id="274" r:id="rId28"/>
+    <p:sldId id="279" r:id="rId29"/>
+    <p:sldId id="280" r:id="rId30"/>
+    <p:sldId id="281" r:id="rId31"/>
+    <p:sldId id="282" r:id="rId32"/>
+    <p:sldId id="283" r:id="rId33"/>
+    <p:sldId id="285" r:id="rId34"/>
+    <p:sldId id="286" r:id="rId35"/>
+    <p:sldId id="290" r:id="rId36"/>
+    <p:sldId id="291" r:id="rId37"/>
+    <p:sldId id="289" r:id="rId38"/>
+    <p:sldId id="292" r:id="rId39"/>
+    <p:sldId id="293" r:id="rId40"/>
+    <p:sldId id="294" r:id="rId41"/>
+    <p:sldId id="295" r:id="rId42"/>
+    <p:sldId id="296" r:id="rId43"/>
+    <p:sldId id="297" r:id="rId44"/>
+    <p:sldId id="299" r:id="rId45"/>
+    <p:sldId id="300" r:id="rId46"/>
+    <p:sldId id="309" r:id="rId47"/>
+    <p:sldId id="306" r:id="rId48"/>
+    <p:sldId id="307" r:id="rId49"/>
+    <p:sldId id="302" r:id="rId50"/>
+    <p:sldId id="308" r:id="rId51"/>
+    <p:sldId id="301" r:id="rId52"/>
+    <p:sldId id="303" r:id="rId53"/>
+    <p:sldId id="304" r:id="rId54"/>
   </p:sldIdLst>
   <p:sldSz cx="12192000" cy="6858000"/>
   <p:notesSz cx="6858000" cy="9144000"/>
@@ -310,7 +311,7 @@
           <a:p>
             <a:fld id="{D723CA93-4BBF-43AB-A538-39903E4C269C}" type="datetimeFigureOut">
               <a:rPr lang="en-US" smtClean="0"/>
-              <a:t>4/18/2025</a:t>
+              <a:t>5/11/2025</a:t>
             </a:fld>
             <a:endParaRPr lang="en-US"/>
           </a:p>
@@ -508,7 +509,7 @@
           <a:p>
             <a:fld id="{D723CA93-4BBF-43AB-A538-39903E4C269C}" type="datetimeFigureOut">
               <a:rPr lang="en-US" smtClean="0"/>
-              <a:t>4/18/2025</a:t>
+              <a:t>5/11/2025</a:t>
             </a:fld>
             <a:endParaRPr lang="en-US"/>
           </a:p>
@@ -716,7 +717,7 @@
           <a:p>
             <a:fld id="{D723CA93-4BBF-43AB-A538-39903E4C269C}" type="datetimeFigureOut">
               <a:rPr lang="en-US" smtClean="0"/>
-              <a:t>4/18/2025</a:t>
+              <a:t>5/11/2025</a:t>
             </a:fld>
             <a:endParaRPr lang="en-US"/>
           </a:p>
@@ -914,7 +915,7 @@
           <a:p>
             <a:fld id="{D723CA93-4BBF-43AB-A538-39903E4C269C}" type="datetimeFigureOut">
               <a:rPr lang="en-US" smtClean="0"/>
-              <a:t>4/18/2025</a:t>
+              <a:t>5/11/2025</a:t>
             </a:fld>
             <a:endParaRPr lang="en-US"/>
           </a:p>
@@ -1189,7 +1190,7 @@
           <a:p>
             <a:fld id="{D723CA93-4BBF-43AB-A538-39903E4C269C}" type="datetimeFigureOut">
               <a:rPr lang="en-US" smtClean="0"/>
-              <a:t>4/18/2025</a:t>
+              <a:t>5/11/2025</a:t>
             </a:fld>
             <a:endParaRPr lang="en-US"/>
           </a:p>
@@ -1454,7 +1455,7 @@
           <a:p>
             <a:fld id="{D723CA93-4BBF-43AB-A538-39903E4C269C}" type="datetimeFigureOut">
               <a:rPr lang="en-US" smtClean="0"/>
-              <a:t>4/18/2025</a:t>
+              <a:t>5/11/2025</a:t>
             </a:fld>
             <a:endParaRPr lang="en-US"/>
           </a:p>
@@ -1866,7 +1867,7 @@
           <a:p>
             <a:fld id="{D723CA93-4BBF-43AB-A538-39903E4C269C}" type="datetimeFigureOut">
               <a:rPr lang="en-US" smtClean="0"/>
-              <a:t>4/18/2025</a:t>
+              <a:t>5/11/2025</a:t>
             </a:fld>
             <a:endParaRPr lang="en-US"/>
           </a:p>
@@ -2007,7 +2008,7 @@
           <a:p>
             <a:fld id="{D723CA93-4BBF-43AB-A538-39903E4C269C}" type="datetimeFigureOut">
               <a:rPr lang="en-US" smtClean="0"/>
-              <a:t>4/18/2025</a:t>
+              <a:t>5/11/2025</a:t>
             </a:fld>
             <a:endParaRPr lang="en-US"/>
           </a:p>
@@ -2120,7 +2121,7 @@
           <a:p>
             <a:fld id="{D723CA93-4BBF-43AB-A538-39903E4C269C}" type="datetimeFigureOut">
               <a:rPr lang="en-US" smtClean="0"/>
-              <a:t>4/18/2025</a:t>
+              <a:t>5/11/2025</a:t>
             </a:fld>
             <a:endParaRPr lang="en-US"/>
           </a:p>
@@ -2431,7 +2432,7 @@
           <a:p>
             <a:fld id="{D723CA93-4BBF-43AB-A538-39903E4C269C}" type="datetimeFigureOut">
               <a:rPr lang="en-US" smtClean="0"/>
-              <a:t>4/18/2025</a:t>
+              <a:t>5/11/2025</a:t>
             </a:fld>
             <a:endParaRPr lang="en-US"/>
           </a:p>
@@ -2719,7 +2720,7 @@
           <a:p>
             <a:fld id="{D723CA93-4BBF-43AB-A538-39903E4C269C}" type="datetimeFigureOut">
               <a:rPr lang="en-US" smtClean="0"/>
-              <a:t>4/18/2025</a:t>
+              <a:t>5/11/2025</a:t>
             </a:fld>
             <a:endParaRPr lang="en-US"/>
           </a:p>
@@ -2960,7 +2961,7 @@
           <a:p>
             <a:fld id="{D723CA93-4BBF-43AB-A538-39903E4C269C}" type="datetimeFigureOut">
               <a:rPr lang="en-US" smtClean="0"/>
-              <a:t>4/18/2025</a:t>
+              <a:t>5/11/2025</a:t>
             </a:fld>
             <a:endParaRPr lang="en-US"/>
           </a:p>
@@ -6058,7 +6059,15 @@
             </a:pPr>
             <a:r>
               <a:rPr lang="en-US" b="1" dirty="0"/>
-              <a:t>City : text</a:t>
+              <a:t>City : select [dropdown all city in the </a:t>
+            </a:r>
+            <a:r>
+              <a:rPr lang="en-US" b="1" dirty="0" err="1"/>
+              <a:t>ph</a:t>
+            </a:r>
+            <a:r>
+              <a:rPr lang="en-US" b="1" dirty="0"/>
+              <a:t>]</a:t>
             </a:r>
           </a:p>
           <a:p>
@@ -6557,7 +6566,15 @@
             </a:pPr>
             <a:r>
               <a:rPr lang="en-US" b="1" dirty="0"/>
-              <a:t>City : text</a:t>
+              <a:t>City : select [dropdown all city in the </a:t>
+            </a:r>
+            <a:r>
+              <a:rPr lang="en-US" b="1" dirty="0" err="1"/>
+              <a:t>ph</a:t>
+            </a:r>
+            <a:r>
+              <a:rPr lang="en-US" b="1" dirty="0"/>
+              <a:t>]</a:t>
             </a:r>
           </a:p>
           <a:p>
@@ -6934,6 +6951,447 @@
           <a:p>
             <a:r>
               <a:rPr lang="en-US" sz="2000" b="1" dirty="0"/>
+              <a:t>adminCustomer.html</a:t>
+            </a:r>
+          </a:p>
+        </p:txBody>
+      </p:sp>
+      <p:sp>
+        <p:nvSpPr>
+          <p:cNvPr id="3" name="Rectangle: Rounded Corners 2">
+            <a:extLst>
+              <a:ext uri="{FF2B5EF4-FFF2-40B4-BE49-F238E27FC236}">
+                <a16:creationId xmlns:a16="http://schemas.microsoft.com/office/drawing/2014/main" id="{E84989AE-1420-7CFC-7A33-B4FACAA95828}"/>
+              </a:ext>
+            </a:extLst>
+          </p:cNvPr>
+          <p:cNvSpPr/>
+          <p:nvPr/>
+        </p:nvSpPr>
+        <p:spPr>
+          <a:xfrm>
+            <a:off x="112221" y="718993"/>
+            <a:ext cx="5374179" cy="4810414"/>
+          </a:xfrm>
+          <a:prstGeom prst="roundRect">
+            <a:avLst>
+              <a:gd name="adj" fmla="val 3063"/>
+            </a:avLst>
+          </a:prstGeom>
+          <a:solidFill>
+            <a:schemeClr val="accent6">
+              <a:lumMod val="50000"/>
+            </a:schemeClr>
+          </a:solidFill>
+          <a:ln>
+            <a:noFill/>
+          </a:ln>
+        </p:spPr>
+        <p:style>
+          <a:lnRef idx="2">
+            <a:schemeClr val="accent1">
+              <a:shade val="15000"/>
+            </a:schemeClr>
+          </a:lnRef>
+          <a:fillRef idx="1">
+            <a:schemeClr val="accent1"/>
+          </a:fillRef>
+          <a:effectRef idx="0">
+            <a:schemeClr val="accent1"/>
+          </a:effectRef>
+          <a:fontRef idx="minor">
+            <a:schemeClr val="lt1"/>
+          </a:fontRef>
+        </p:style>
+        <p:txBody>
+          <a:bodyPr rtlCol="0" anchor="ctr"/>
+          <a:lstStyle/>
+          <a:p>
+            <a:r>
+              <a:rPr lang="en-US" sz="2000" b="1" dirty="0"/>
+              <a:t>{</a:t>
+            </a:r>
+          </a:p>
+          <a:p>
+            <a:pPr marL="342900" indent="-342900">
+              <a:buFont typeface="Arial" panose="020B0604020202020204" pitchFamily="34" charset="0"/>
+              <a:buChar char="•"/>
+            </a:pPr>
+            <a:r>
+              <a:rPr lang="en-US" sz="2000" b="1" dirty="0"/>
+              <a:t>Search input</a:t>
+            </a:r>
+          </a:p>
+          <a:p>
+            <a:pPr marL="342900" indent="-342900">
+              <a:buFont typeface="Arial" panose="020B0604020202020204" pitchFamily="34" charset="0"/>
+              <a:buChar char="•"/>
+            </a:pPr>
+            <a:r>
+              <a:rPr lang="en-US" sz="2000" b="1" dirty="0"/>
+              <a:t>Search </a:t>
+            </a:r>
+            <a:r>
+              <a:rPr lang="en-US" sz="2000" b="1" dirty="0" err="1"/>
+              <a:t>btn</a:t>
+            </a:r>
+            <a:endParaRPr lang="en-US" sz="2000" b="1" dirty="0"/>
+          </a:p>
+          <a:p>
+            <a:r>
+              <a:rPr lang="en-US" sz="2000" b="1" dirty="0"/>
+              <a:t>}</a:t>
+            </a:r>
+          </a:p>
+          <a:p>
+            <a:endParaRPr lang="en-US" sz="2000" b="1" dirty="0"/>
+          </a:p>
+          <a:p>
+            <a:r>
+              <a:rPr lang="en-US" sz="2000" b="1" dirty="0"/>
+              <a:t>Customer Lists (Deactivated/Active toggle){</a:t>
+            </a:r>
+          </a:p>
+          <a:p>
+            <a:pPr marL="800100" lvl="1" indent="-342900">
+              <a:buFont typeface="Arial" panose="020B0604020202020204" pitchFamily="34" charset="0"/>
+              <a:buChar char="•"/>
+            </a:pPr>
+            <a:r>
+              <a:rPr lang="en-US" sz="2000" b="1" dirty="0"/>
+              <a:t>First, Last Name,</a:t>
+            </a:r>
+          </a:p>
+          <a:p>
+            <a:pPr marL="800100" lvl="1" indent="-342900">
+              <a:buFont typeface="Arial" panose="020B0604020202020204" pitchFamily="34" charset="0"/>
+              <a:buChar char="•"/>
+            </a:pPr>
+            <a:r>
+              <a:rPr lang="en-US" sz="2000" b="1" dirty="0"/>
+              <a:t>Email,</a:t>
+            </a:r>
+          </a:p>
+          <a:p>
+            <a:pPr marL="800100" lvl="1" indent="-342900">
+              <a:buFont typeface="Arial" panose="020B0604020202020204" pitchFamily="34" charset="0"/>
+              <a:buChar char="•"/>
+            </a:pPr>
+            <a:r>
+              <a:rPr lang="en-US" sz="2000" b="1" dirty="0"/>
+              <a:t>Violations: Integer{</a:t>
+            </a:r>
+          </a:p>
+          <a:p>
+            <a:pPr marL="1257300" lvl="2" indent="-342900">
+              <a:buFont typeface="Arial" panose="020B0604020202020204" pitchFamily="34" charset="0"/>
+              <a:buChar char="•"/>
+            </a:pPr>
+            <a:r>
+              <a:rPr lang="en-US" sz="2000" b="1" dirty="0"/>
+              <a:t>If more than 1 : color yellow</a:t>
+            </a:r>
+          </a:p>
+          <a:p>
+            <a:pPr marL="1257300" lvl="2" indent="-342900">
+              <a:buFont typeface="Arial" panose="020B0604020202020204" pitchFamily="34" charset="0"/>
+              <a:buChar char="•"/>
+            </a:pPr>
+            <a:r>
+              <a:rPr lang="en-US" sz="2000" b="1" dirty="0"/>
+              <a:t>If more than 3 : Red</a:t>
+            </a:r>
+          </a:p>
+          <a:p>
+            <a:pPr lvl="1"/>
+            <a:r>
+              <a:rPr lang="en-US" sz="2000" b="1" dirty="0"/>
+              <a:t>}</a:t>
+            </a:r>
+          </a:p>
+          <a:p>
+            <a:pPr marL="800100" lvl="1" indent="-342900">
+              <a:buFont typeface="Arial" panose="020B0604020202020204" pitchFamily="34" charset="0"/>
+              <a:buChar char="•"/>
+            </a:pPr>
+            <a:r>
+              <a:rPr lang="en-US" sz="2000" b="1" dirty="0" err="1"/>
+              <a:t>ViewViolationBtn</a:t>
+            </a:r>
+            <a:r>
+              <a:rPr lang="en-US" sz="2000" b="1" dirty="0"/>
+              <a:t> : modal</a:t>
+            </a:r>
+          </a:p>
+          <a:p>
+            <a:r>
+              <a:rPr lang="en-US" sz="2000" b="1" dirty="0"/>
+              <a:t>}</a:t>
+            </a:r>
+          </a:p>
+          <a:p>
+            <a:endParaRPr lang="en-US" sz="2000" b="1" dirty="0"/>
+          </a:p>
+        </p:txBody>
+      </p:sp>
+      <p:sp>
+        <p:nvSpPr>
+          <p:cNvPr id="2" name="Rectangle: Rounded Corners 1">
+            <a:extLst>
+              <a:ext uri="{FF2B5EF4-FFF2-40B4-BE49-F238E27FC236}">
+                <a16:creationId xmlns:a16="http://schemas.microsoft.com/office/drawing/2014/main" id="{53EECA4E-EA2E-8B17-6C2B-12466435E058}"/>
+              </a:ext>
+            </a:extLst>
+          </p:cNvPr>
+          <p:cNvSpPr/>
+          <p:nvPr/>
+        </p:nvSpPr>
+        <p:spPr>
+          <a:xfrm>
+            <a:off x="5917275" y="718993"/>
+            <a:ext cx="5374179" cy="4810414"/>
+          </a:xfrm>
+          <a:prstGeom prst="roundRect">
+            <a:avLst>
+              <a:gd name="adj" fmla="val 3063"/>
+            </a:avLst>
+          </a:prstGeom>
+          <a:solidFill>
+            <a:schemeClr val="accent6">
+              <a:lumMod val="50000"/>
+            </a:schemeClr>
+          </a:solidFill>
+          <a:ln>
+            <a:noFill/>
+          </a:ln>
+        </p:spPr>
+        <p:style>
+          <a:lnRef idx="2">
+            <a:schemeClr val="accent1">
+              <a:shade val="15000"/>
+            </a:schemeClr>
+          </a:lnRef>
+          <a:fillRef idx="1">
+            <a:schemeClr val="accent1"/>
+          </a:fillRef>
+          <a:effectRef idx="0">
+            <a:schemeClr val="accent1"/>
+          </a:effectRef>
+          <a:fontRef idx="minor">
+            <a:schemeClr val="lt1"/>
+          </a:fontRef>
+        </p:style>
+        <p:txBody>
+          <a:bodyPr rtlCol="0" anchor="ctr"/>
+          <a:lstStyle/>
+          <a:p>
+            <a:r>
+              <a:rPr lang="en-US" sz="2000" b="1" dirty="0"/>
+              <a:t>Modal{</a:t>
+            </a:r>
+          </a:p>
+          <a:p>
+            <a:pPr marL="800100" lvl="1" indent="-342900">
+              <a:buFont typeface="Arial" panose="020B0604020202020204" pitchFamily="34" charset="0"/>
+              <a:buChar char="•"/>
+            </a:pPr>
+            <a:r>
+              <a:rPr lang="en-US" sz="2000" b="1" dirty="0" err="1"/>
+              <a:t>DeactivateUserBtn</a:t>
+            </a:r>
+            <a:r>
+              <a:rPr lang="en-US" sz="2000" b="1" dirty="0"/>
+              <a:t> : “y/n”</a:t>
+            </a:r>
+          </a:p>
+          <a:p>
+            <a:r>
+              <a:rPr lang="en-US" sz="2000" b="1" dirty="0"/>
+              <a:t>// could be card or table</a:t>
+            </a:r>
+          </a:p>
+          <a:p>
+            <a:pPr marL="800100" lvl="1" indent="-342900">
+              <a:buFont typeface="Arial" panose="020B0604020202020204" pitchFamily="34" charset="0"/>
+              <a:buChar char="•"/>
+            </a:pPr>
+            <a:r>
+              <a:rPr lang="en-US" sz="2000" b="1" dirty="0" err="1"/>
+              <a:t>ListofViolation</a:t>
+            </a:r>
+            <a:r>
+              <a:rPr lang="en-US" sz="2000" b="1" dirty="0"/>
+              <a:t>{</a:t>
+            </a:r>
+          </a:p>
+          <a:p>
+            <a:pPr marL="1257300" lvl="2" indent="-342900">
+              <a:buFont typeface="Arial" panose="020B0604020202020204" pitchFamily="34" charset="0"/>
+              <a:buChar char="•"/>
+            </a:pPr>
+            <a:r>
+              <a:rPr lang="en-US" sz="2000" b="1" dirty="0"/>
+              <a:t>Reason</a:t>
+            </a:r>
+          </a:p>
+          <a:p>
+            <a:pPr marL="1257300" lvl="2" indent="-342900">
+              <a:buFont typeface="Arial" panose="020B0604020202020204" pitchFamily="34" charset="0"/>
+              <a:buChar char="•"/>
+            </a:pPr>
+            <a:r>
+              <a:rPr lang="en-US" sz="2000" b="1" dirty="0"/>
+              <a:t>Date</a:t>
+            </a:r>
+          </a:p>
+          <a:p>
+            <a:pPr marL="1257300" lvl="2" indent="-342900">
+              <a:buFont typeface="Arial" panose="020B0604020202020204" pitchFamily="34" charset="0"/>
+              <a:buChar char="•"/>
+            </a:pPr>
+            <a:r>
+              <a:rPr lang="en-US" sz="2000" b="1" dirty="0"/>
+              <a:t>Transaction #</a:t>
+            </a:r>
+          </a:p>
+          <a:p>
+            <a:pPr marL="1257300" lvl="2" indent="-342900">
+              <a:buFont typeface="Arial" panose="020B0604020202020204" pitchFamily="34" charset="0"/>
+              <a:buChar char="•"/>
+            </a:pPr>
+            <a:r>
+              <a:rPr lang="en-US" sz="2000" b="1" dirty="0" err="1"/>
+              <a:t>ReportedBy</a:t>
+            </a:r>
+            <a:endParaRPr lang="en-US" sz="2000" b="1" dirty="0"/>
+          </a:p>
+          <a:p>
+            <a:pPr lvl="1"/>
+            <a:r>
+              <a:rPr lang="en-US" sz="2000" b="1" dirty="0"/>
+              <a:t>}</a:t>
+            </a:r>
+          </a:p>
+          <a:p>
+            <a:r>
+              <a:rPr lang="en-US" sz="2000" b="1" dirty="0"/>
+              <a:t>}</a:t>
+            </a:r>
+          </a:p>
+          <a:p>
+            <a:endParaRPr lang="en-US" sz="2000" b="1" dirty="0"/>
+          </a:p>
+        </p:txBody>
+      </p:sp>
+      <p:cxnSp>
+        <p:nvCxnSpPr>
+          <p:cNvPr id="5" name="Connector: Curved 4">
+            <a:extLst>
+              <a:ext uri="{FF2B5EF4-FFF2-40B4-BE49-F238E27FC236}">
+                <a16:creationId xmlns:a16="http://schemas.microsoft.com/office/drawing/2014/main" id="{B79ECDB9-9D0A-5FF8-0777-A8B4A36186C3}"/>
+              </a:ext>
+            </a:extLst>
+          </p:cNvPr>
+          <p:cNvCxnSpPr>
+            <a:cxnSpLocks/>
+          </p:cNvCxnSpPr>
+          <p:nvPr/>
+        </p:nvCxnSpPr>
+        <p:spPr>
+          <a:xfrm rot="5400000">
+            <a:off x="3556002" y="2124365"/>
+            <a:ext cx="2964873" cy="2115125"/>
+          </a:xfrm>
+          <a:prstGeom prst="curvedConnector3">
+            <a:avLst>
+              <a:gd name="adj1" fmla="val 50000"/>
+            </a:avLst>
+          </a:prstGeom>
+          <a:ln w="19050" cap="flat" cmpd="sng" algn="ctr">
+            <a:solidFill>
+              <a:schemeClr val="accent4"/>
+            </a:solidFill>
+            <a:prstDash val="solid"/>
+            <a:round/>
+            <a:headEnd type="arrow" w="med" len="med"/>
+            <a:tailEnd type="arrow" w="med" len="med"/>
+          </a:ln>
+        </p:spPr>
+        <p:style>
+          <a:lnRef idx="0">
+            <a:scrgbClr r="0" g="0" b="0"/>
+          </a:lnRef>
+          <a:fillRef idx="0">
+            <a:scrgbClr r="0" g="0" b="0"/>
+          </a:fillRef>
+          <a:effectRef idx="0">
+            <a:scrgbClr r="0" g="0" b="0"/>
+          </a:effectRef>
+          <a:fontRef idx="minor">
+            <a:schemeClr val="tx1"/>
+          </a:fontRef>
+        </p:style>
+      </p:cxnSp>
+    </p:spTree>
+    <p:extLst>
+      <p:ext uri="{BB962C8B-B14F-4D97-AF65-F5344CB8AC3E}">
+        <p14:creationId xmlns:p14="http://schemas.microsoft.com/office/powerpoint/2010/main" val="3258476187"/>
+      </p:ext>
+    </p:extLst>
+  </p:cSld>
+  <p:clrMapOvr>
+    <a:masterClrMapping/>
+  </p:clrMapOvr>
+</p:sld>
+</file>
+
+<file path=ppt/slides/slide19.xml><?xml version="1.0" encoding="utf-8"?>
+<p:sld xmlns:a="http://schemas.openxmlformats.org/drawingml/2006/main" xmlns:r="http://schemas.openxmlformats.org/officeDocument/2006/relationships" xmlns:p="http://schemas.openxmlformats.org/presentationml/2006/main">
+  <p:cSld>
+    <p:spTree>
+      <p:nvGrpSpPr>
+        <p:cNvPr id="1" name=""/>
+        <p:cNvGrpSpPr/>
+        <p:nvPr/>
+      </p:nvGrpSpPr>
+      <p:grpSpPr>
+        <a:xfrm>
+          <a:off x="0" y="0"/>
+          <a:ext cx="0" cy="0"/>
+          <a:chOff x="0" y="0"/>
+          <a:chExt cx="0" cy="0"/>
+        </a:xfrm>
+      </p:grpSpPr>
+      <p:sp>
+        <p:nvSpPr>
+          <p:cNvPr id="4" name="TextBox 3">
+            <a:extLst>
+              <a:ext uri="{FF2B5EF4-FFF2-40B4-BE49-F238E27FC236}">
+                <a16:creationId xmlns:a16="http://schemas.microsoft.com/office/drawing/2014/main" id="{E094F53A-6361-E94E-5BDE-6B5297C1498E}"/>
+              </a:ext>
+            </a:extLst>
+          </p:cNvPr>
+          <p:cNvSpPr txBox="1"/>
+          <p:nvPr/>
+        </p:nvSpPr>
+        <p:spPr>
+          <a:xfrm>
+            <a:off x="-1" y="0"/>
+            <a:ext cx="3519055" cy="400110"/>
+          </a:xfrm>
+          <a:prstGeom prst="rect">
+            <a:avLst/>
+          </a:prstGeom>
+          <a:noFill/>
+        </p:spPr>
+        <p:txBody>
+          <a:bodyPr wrap="square" rtlCol="0">
+            <a:spAutoFit/>
+          </a:bodyPr>
+          <a:lstStyle/>
+          <a:p>
+            <a:r>
+              <a:rPr lang="en-US" sz="2000" b="1" dirty="0"/>
               <a:t>adminEmpoyee.html</a:t>
             </a:r>
           </a:p>
@@ -7126,7 +7584,129 @@
 </p:sld>
 </file>
 
-<file path=ppt/slides/slide19.xml><?xml version="1.0" encoding="utf-8"?>
+<file path=ppt/slides/slide2.xml><?xml version="1.0" encoding="utf-8"?>
+<p:sld xmlns:a="http://schemas.openxmlformats.org/drawingml/2006/main" xmlns:r="http://schemas.openxmlformats.org/officeDocument/2006/relationships" xmlns:p="http://schemas.openxmlformats.org/presentationml/2006/main">
+  <p:cSld>
+    <p:spTree>
+      <p:nvGrpSpPr>
+        <p:cNvPr id="1" name=""/>
+        <p:cNvGrpSpPr/>
+        <p:nvPr/>
+      </p:nvGrpSpPr>
+      <p:grpSpPr>
+        <a:xfrm>
+          <a:off x="0" y="0"/>
+          <a:ext cx="0" cy="0"/>
+          <a:chOff x="0" y="0"/>
+          <a:chExt cx="0" cy="0"/>
+        </a:xfrm>
+      </p:grpSpPr>
+      <p:pic>
+        <p:nvPicPr>
+          <p:cNvPr id="5" name="Picture 4" descr="A screen shot of a computer program&#10;&#10;AI-generated content may be incorrect.">
+            <a:extLst>
+              <a:ext uri="{FF2B5EF4-FFF2-40B4-BE49-F238E27FC236}">
+                <a16:creationId xmlns:a16="http://schemas.microsoft.com/office/drawing/2014/main" id="{1485D8FE-FA3B-F048-2D95-8FE5EBFD1521}"/>
+              </a:ext>
+            </a:extLst>
+          </p:cNvPr>
+          <p:cNvPicPr>
+            <a:picLocks noChangeAspect="1"/>
+          </p:cNvPicPr>
+          <p:nvPr/>
+        </p:nvPicPr>
+        <p:blipFill>
+          <a:blip r:embed="rId2">
+            <a:extLst>
+              <a:ext uri="{28A0092B-C50C-407E-A947-70E740481C1C}">
+                <a14:useLocalDpi xmlns:a14="http://schemas.microsoft.com/office/drawing/2010/main" val="0"/>
+              </a:ext>
+            </a:extLst>
+          </a:blip>
+          <a:stretch>
+            <a:fillRect/>
+          </a:stretch>
+        </p:blipFill>
+        <p:spPr>
+          <a:xfrm>
+            <a:off x="-457200" y="-285652"/>
+            <a:ext cx="12856069" cy="7576837"/>
+          </a:xfrm>
+          <a:prstGeom prst="rect">
+            <a:avLst/>
+          </a:prstGeom>
+        </p:spPr>
+      </p:pic>
+      <p:sp>
+        <p:nvSpPr>
+          <p:cNvPr id="2" name="TextBox 1">
+            <a:extLst>
+              <a:ext uri="{FF2B5EF4-FFF2-40B4-BE49-F238E27FC236}">
+                <a16:creationId xmlns:a16="http://schemas.microsoft.com/office/drawing/2014/main" id="{D7905721-4A05-C1B3-9952-8B578834C87C}"/>
+              </a:ext>
+            </a:extLst>
+          </p:cNvPr>
+          <p:cNvSpPr txBox="1"/>
+          <p:nvPr/>
+        </p:nvSpPr>
+        <p:spPr>
+          <a:xfrm>
+            <a:off x="4679605" y="1057380"/>
+            <a:ext cx="6638174" cy="1938992"/>
+          </a:xfrm>
+          <a:prstGeom prst="rect">
+            <a:avLst/>
+          </a:prstGeom>
+          <a:noFill/>
+        </p:spPr>
+        <p:txBody>
+          <a:bodyPr wrap="square" rtlCol="0">
+            <a:spAutoFit/>
+          </a:bodyPr>
+          <a:lstStyle/>
+          <a:p>
+            <a:pPr algn="ctr"/>
+            <a:r>
+              <a:rPr lang="en-US" sz="4000" b="1" dirty="0">
+                <a:solidFill>
+                  <a:schemeClr val="bg1"/>
+                </a:solidFill>
+              </a:rPr>
+              <a:t>All the color palettes are stored in </a:t>
+            </a:r>
+            <a:r>
+              <a:rPr lang="en-US" sz="4000" b="1" dirty="0">
+                <a:solidFill>
+                  <a:srgbClr val="FF0000"/>
+                </a:solidFill>
+              </a:rPr>
+              <a:t>CSS variables </a:t>
+            </a:r>
+            <a:r>
+              <a:rPr lang="en-US" sz="4000" b="1" dirty="0">
+                <a:solidFill>
+                  <a:schemeClr val="bg1"/>
+                </a:solidFill>
+              </a:rPr>
+              <a:t>to toggle dark/light mode</a:t>
+            </a:r>
+          </a:p>
+        </p:txBody>
+      </p:sp>
+    </p:spTree>
+    <p:extLst>
+      <p:ext uri="{BB962C8B-B14F-4D97-AF65-F5344CB8AC3E}">
+        <p14:creationId xmlns:p14="http://schemas.microsoft.com/office/powerpoint/2010/main" val="3537636929"/>
+      </p:ext>
+    </p:extLst>
+  </p:cSld>
+  <p:clrMapOvr>
+    <a:masterClrMapping/>
+  </p:clrMapOvr>
+</p:sld>
+</file>
+
+<file path=ppt/slides/slide20.xml><?xml version="1.0" encoding="utf-8"?>
 <p:sld xmlns:a="http://schemas.openxmlformats.org/drawingml/2006/main" xmlns:r="http://schemas.openxmlformats.org/officeDocument/2006/relationships" xmlns:p="http://schemas.openxmlformats.org/presentationml/2006/main">
   <p:cSld>
     <p:spTree>
@@ -7321,129 +7901,7 @@
 </p:sld>
 </file>
 
-<file path=ppt/slides/slide2.xml><?xml version="1.0" encoding="utf-8"?>
-<p:sld xmlns:a="http://schemas.openxmlformats.org/drawingml/2006/main" xmlns:r="http://schemas.openxmlformats.org/officeDocument/2006/relationships" xmlns:p="http://schemas.openxmlformats.org/presentationml/2006/main">
-  <p:cSld>
-    <p:spTree>
-      <p:nvGrpSpPr>
-        <p:cNvPr id="1" name=""/>
-        <p:cNvGrpSpPr/>
-        <p:nvPr/>
-      </p:nvGrpSpPr>
-      <p:grpSpPr>
-        <a:xfrm>
-          <a:off x="0" y="0"/>
-          <a:ext cx="0" cy="0"/>
-          <a:chOff x="0" y="0"/>
-          <a:chExt cx="0" cy="0"/>
-        </a:xfrm>
-      </p:grpSpPr>
-      <p:pic>
-        <p:nvPicPr>
-          <p:cNvPr id="5" name="Picture 4" descr="A screen shot of a computer program&#10;&#10;AI-generated content may be incorrect.">
-            <a:extLst>
-              <a:ext uri="{FF2B5EF4-FFF2-40B4-BE49-F238E27FC236}">
-                <a16:creationId xmlns:a16="http://schemas.microsoft.com/office/drawing/2014/main" id="{1485D8FE-FA3B-F048-2D95-8FE5EBFD1521}"/>
-              </a:ext>
-            </a:extLst>
-          </p:cNvPr>
-          <p:cNvPicPr>
-            <a:picLocks noChangeAspect="1"/>
-          </p:cNvPicPr>
-          <p:nvPr/>
-        </p:nvPicPr>
-        <p:blipFill>
-          <a:blip r:embed="rId2">
-            <a:extLst>
-              <a:ext uri="{28A0092B-C50C-407E-A947-70E740481C1C}">
-                <a14:useLocalDpi xmlns:a14="http://schemas.microsoft.com/office/drawing/2010/main" val="0"/>
-              </a:ext>
-            </a:extLst>
-          </a:blip>
-          <a:stretch>
-            <a:fillRect/>
-          </a:stretch>
-        </p:blipFill>
-        <p:spPr>
-          <a:xfrm>
-            <a:off x="-457200" y="-285652"/>
-            <a:ext cx="12856069" cy="7576837"/>
-          </a:xfrm>
-          <a:prstGeom prst="rect">
-            <a:avLst/>
-          </a:prstGeom>
-        </p:spPr>
-      </p:pic>
-      <p:sp>
-        <p:nvSpPr>
-          <p:cNvPr id="2" name="TextBox 1">
-            <a:extLst>
-              <a:ext uri="{FF2B5EF4-FFF2-40B4-BE49-F238E27FC236}">
-                <a16:creationId xmlns:a16="http://schemas.microsoft.com/office/drawing/2014/main" id="{D7905721-4A05-C1B3-9952-8B578834C87C}"/>
-              </a:ext>
-            </a:extLst>
-          </p:cNvPr>
-          <p:cNvSpPr txBox="1"/>
-          <p:nvPr/>
-        </p:nvSpPr>
-        <p:spPr>
-          <a:xfrm>
-            <a:off x="4679605" y="1057380"/>
-            <a:ext cx="6638174" cy="1938992"/>
-          </a:xfrm>
-          <a:prstGeom prst="rect">
-            <a:avLst/>
-          </a:prstGeom>
-          <a:noFill/>
-        </p:spPr>
-        <p:txBody>
-          <a:bodyPr wrap="square" rtlCol="0">
-            <a:spAutoFit/>
-          </a:bodyPr>
-          <a:lstStyle/>
-          <a:p>
-            <a:pPr algn="ctr"/>
-            <a:r>
-              <a:rPr lang="en-US" sz="4000" b="1" dirty="0">
-                <a:solidFill>
-                  <a:schemeClr val="bg1"/>
-                </a:solidFill>
-              </a:rPr>
-              <a:t>All the color palettes are stored in </a:t>
-            </a:r>
-            <a:r>
-              <a:rPr lang="en-US" sz="4000" b="1" dirty="0">
-                <a:solidFill>
-                  <a:srgbClr val="FF0000"/>
-                </a:solidFill>
-              </a:rPr>
-              <a:t>CSS variables </a:t>
-            </a:r>
-            <a:r>
-              <a:rPr lang="en-US" sz="4000" b="1" dirty="0">
-                <a:solidFill>
-                  <a:schemeClr val="bg1"/>
-                </a:solidFill>
-              </a:rPr>
-              <a:t>to toggle dark/light mode</a:t>
-            </a:r>
-          </a:p>
-        </p:txBody>
-      </p:sp>
-    </p:spTree>
-    <p:extLst>
-      <p:ext uri="{BB962C8B-B14F-4D97-AF65-F5344CB8AC3E}">
-        <p14:creationId xmlns:p14="http://schemas.microsoft.com/office/powerpoint/2010/main" val="3537636929"/>
-      </p:ext>
-    </p:extLst>
-  </p:cSld>
-  <p:clrMapOvr>
-    <a:masterClrMapping/>
-  </p:clrMapOvr>
-</p:sld>
-</file>
-
-<file path=ppt/slides/slide20.xml><?xml version="1.0" encoding="utf-8"?>
+<file path=ppt/slides/slide21.xml><?xml version="1.0" encoding="utf-8"?>
 <p:sld xmlns:a="http://schemas.openxmlformats.org/drawingml/2006/main" xmlns:r="http://schemas.openxmlformats.org/officeDocument/2006/relationships" xmlns:p="http://schemas.openxmlformats.org/presentationml/2006/main">
   <p:cSld>
     <p:spTree>
@@ -7670,7 +8128,7 @@
 </p:sld>
 </file>
 
-<file path=ppt/slides/slide21.xml><?xml version="1.0" encoding="utf-8"?>
+<file path=ppt/slides/slide22.xml><?xml version="1.0" encoding="utf-8"?>
 <p:sld xmlns:a="http://schemas.openxmlformats.org/drawingml/2006/main" xmlns:r="http://schemas.openxmlformats.org/officeDocument/2006/relationships" xmlns:p="http://schemas.openxmlformats.org/presentationml/2006/main">
   <p:cSld>
     <p:spTree>
@@ -7926,7 +8384,7 @@
 </p:sld>
 </file>
 
-<file path=ppt/slides/slide22.xml><?xml version="1.0" encoding="utf-8"?>
+<file path=ppt/slides/slide23.xml><?xml version="1.0" encoding="utf-8"?>
 <p:sld xmlns:a="http://schemas.openxmlformats.org/drawingml/2006/main" xmlns:r="http://schemas.openxmlformats.org/officeDocument/2006/relationships" xmlns:p="http://schemas.openxmlformats.org/presentationml/2006/main">
   <p:cSld>
     <p:spTree>
@@ -8182,7 +8640,7 @@
 </p:sld>
 </file>
 
-<file path=ppt/slides/slide23.xml><?xml version="1.0" encoding="utf-8"?>
+<file path=ppt/slides/slide24.xml><?xml version="1.0" encoding="utf-8"?>
 <p:sld xmlns:a="http://schemas.openxmlformats.org/drawingml/2006/main" xmlns:r="http://schemas.openxmlformats.org/officeDocument/2006/relationships" xmlns:p="http://schemas.openxmlformats.org/presentationml/2006/main">
   <p:cSld>
     <p:spTree>
@@ -8379,7 +8837,7 @@
 </p:sld>
 </file>
 
-<file path=ppt/slides/slide24.xml><?xml version="1.0" encoding="utf-8"?>
+<file path=ppt/slides/slide25.xml><?xml version="1.0" encoding="utf-8"?>
 <p:sld xmlns:a="http://schemas.openxmlformats.org/drawingml/2006/main" xmlns:r="http://schemas.openxmlformats.org/officeDocument/2006/relationships" xmlns:p="http://schemas.openxmlformats.org/presentationml/2006/main">
   <p:cSld>
     <p:spTree>
@@ -8549,7 +9007,7 @@
 </p:sld>
 </file>
 
-<file path=ppt/slides/slide25.xml><?xml version="1.0" encoding="utf-8"?>
+<file path=ppt/slides/slide26.xml><?xml version="1.0" encoding="utf-8"?>
 <p:sld xmlns:a="http://schemas.openxmlformats.org/drawingml/2006/main" xmlns:r="http://schemas.openxmlformats.org/officeDocument/2006/relationships" xmlns:p="http://schemas.openxmlformats.org/presentationml/2006/main">
   <p:cSld>
     <p:spTree>
@@ -8763,7 +9221,7 @@
 </p:sld>
 </file>
 
-<file path=ppt/slides/slide26.xml><?xml version="1.0" encoding="utf-8"?>
+<file path=ppt/slides/slide27.xml><?xml version="1.0" encoding="utf-8"?>
 <p:sld xmlns:a="http://schemas.openxmlformats.org/drawingml/2006/main" xmlns:r="http://schemas.openxmlformats.org/officeDocument/2006/relationships" xmlns:p="http://schemas.openxmlformats.org/presentationml/2006/main">
   <p:cSld>
     <p:spTree>
@@ -8977,7 +9435,7 @@
 </p:sld>
 </file>
 
-<file path=ppt/slides/slide27.xml><?xml version="1.0" encoding="utf-8"?>
+<file path=ppt/slides/slide28.xml><?xml version="1.0" encoding="utf-8"?>
 <p:sld xmlns:a="http://schemas.openxmlformats.org/drawingml/2006/main" xmlns:r="http://schemas.openxmlformats.org/officeDocument/2006/relationships" xmlns:p="http://schemas.openxmlformats.org/presentationml/2006/main">
   <p:cSld>
     <p:spTree>
@@ -9463,7 +9921,7 @@
 </p:sld>
 </file>
 
-<file path=ppt/slides/slide28.xml><?xml version="1.0" encoding="utf-8"?>
+<file path=ppt/slides/slide29.xml><?xml version="1.0" encoding="utf-8"?>
 <p:sld xmlns:a="http://schemas.openxmlformats.org/drawingml/2006/main" xmlns:r="http://schemas.openxmlformats.org/officeDocument/2006/relationships" xmlns:p="http://schemas.openxmlformats.org/presentationml/2006/main">
   <p:cSld>
     <p:spTree>
@@ -9949,7 +10407,78 @@
 </p:sld>
 </file>
 
-<file path=ppt/slides/slide29.xml><?xml version="1.0" encoding="utf-8"?>
+<file path=ppt/slides/slide3.xml><?xml version="1.0" encoding="utf-8"?>
+<p:sld xmlns:a="http://schemas.openxmlformats.org/drawingml/2006/main" xmlns:r="http://schemas.openxmlformats.org/officeDocument/2006/relationships" xmlns:p="http://schemas.openxmlformats.org/presentationml/2006/main">
+  <p:cSld>
+    <p:spTree>
+      <p:nvGrpSpPr>
+        <p:cNvPr id="1" name=""/>
+        <p:cNvGrpSpPr/>
+        <p:nvPr/>
+      </p:nvGrpSpPr>
+      <p:grpSpPr>
+        <a:xfrm>
+          <a:off x="0" y="0"/>
+          <a:ext cx="0" cy="0"/>
+          <a:chOff x="0" y="0"/>
+          <a:chExt cx="0" cy="0"/>
+        </a:xfrm>
+      </p:grpSpPr>
+      <p:sp>
+        <p:nvSpPr>
+          <p:cNvPr id="2" name="TextBox 1">
+            <a:extLst>
+              <a:ext uri="{FF2B5EF4-FFF2-40B4-BE49-F238E27FC236}">
+                <a16:creationId xmlns:a16="http://schemas.microsoft.com/office/drawing/2014/main" id="{D7905721-4A05-C1B3-9952-8B578834C87C}"/>
+              </a:ext>
+            </a:extLst>
+          </p:cNvPr>
+          <p:cNvSpPr txBox="1"/>
+          <p:nvPr/>
+        </p:nvSpPr>
+        <p:spPr>
+          <a:xfrm>
+            <a:off x="2085802" y="2767280"/>
+            <a:ext cx="8020395" cy="1323439"/>
+          </a:xfrm>
+          <a:prstGeom prst="rect">
+            <a:avLst/>
+          </a:prstGeom>
+          <a:noFill/>
+        </p:spPr>
+        <p:txBody>
+          <a:bodyPr wrap="square" rtlCol="0">
+            <a:spAutoFit/>
+          </a:bodyPr>
+          <a:lstStyle/>
+          <a:p>
+            <a:pPr algn="ctr"/>
+            <a:r>
+              <a:rPr lang="en-US" sz="4000" b="1" dirty="0"/>
+              <a:t>Reusable Modal message in JS. Using  </a:t>
+            </a:r>
+            <a:r>
+              <a:rPr lang="en-US" sz="4000" b="1" dirty="0" err="1"/>
+              <a:t>document.createElement</a:t>
+            </a:r>
+            <a:endParaRPr lang="en-US" sz="4000" b="1" dirty="0"/>
+          </a:p>
+        </p:txBody>
+      </p:sp>
+    </p:spTree>
+    <p:extLst>
+      <p:ext uri="{BB962C8B-B14F-4D97-AF65-F5344CB8AC3E}">
+        <p14:creationId xmlns:p14="http://schemas.microsoft.com/office/powerpoint/2010/main" val="2959178089"/>
+      </p:ext>
+    </p:extLst>
+  </p:cSld>
+  <p:clrMapOvr>
+    <a:masterClrMapping/>
+  </p:clrMapOvr>
+</p:sld>
+</file>
+
+<file path=ppt/slides/slide30.xml><?xml version="1.0" encoding="utf-8"?>
 <p:sld xmlns:a="http://schemas.openxmlformats.org/drawingml/2006/main" xmlns:r="http://schemas.openxmlformats.org/officeDocument/2006/relationships" xmlns:p="http://schemas.openxmlformats.org/presentationml/2006/main">
   <p:cSld>
     <p:spTree>
@@ -10391,78 +10920,7 @@
 </p:sld>
 </file>
 
-<file path=ppt/slides/slide3.xml><?xml version="1.0" encoding="utf-8"?>
-<p:sld xmlns:a="http://schemas.openxmlformats.org/drawingml/2006/main" xmlns:r="http://schemas.openxmlformats.org/officeDocument/2006/relationships" xmlns:p="http://schemas.openxmlformats.org/presentationml/2006/main">
-  <p:cSld>
-    <p:spTree>
-      <p:nvGrpSpPr>
-        <p:cNvPr id="1" name=""/>
-        <p:cNvGrpSpPr/>
-        <p:nvPr/>
-      </p:nvGrpSpPr>
-      <p:grpSpPr>
-        <a:xfrm>
-          <a:off x="0" y="0"/>
-          <a:ext cx="0" cy="0"/>
-          <a:chOff x="0" y="0"/>
-          <a:chExt cx="0" cy="0"/>
-        </a:xfrm>
-      </p:grpSpPr>
-      <p:sp>
-        <p:nvSpPr>
-          <p:cNvPr id="2" name="TextBox 1">
-            <a:extLst>
-              <a:ext uri="{FF2B5EF4-FFF2-40B4-BE49-F238E27FC236}">
-                <a16:creationId xmlns:a16="http://schemas.microsoft.com/office/drawing/2014/main" id="{D7905721-4A05-C1B3-9952-8B578834C87C}"/>
-              </a:ext>
-            </a:extLst>
-          </p:cNvPr>
-          <p:cNvSpPr txBox="1"/>
-          <p:nvPr/>
-        </p:nvSpPr>
-        <p:spPr>
-          <a:xfrm>
-            <a:off x="2085802" y="2767280"/>
-            <a:ext cx="8020395" cy="1323439"/>
-          </a:xfrm>
-          <a:prstGeom prst="rect">
-            <a:avLst/>
-          </a:prstGeom>
-          <a:noFill/>
-        </p:spPr>
-        <p:txBody>
-          <a:bodyPr wrap="square" rtlCol="0">
-            <a:spAutoFit/>
-          </a:bodyPr>
-          <a:lstStyle/>
-          <a:p>
-            <a:pPr algn="ctr"/>
-            <a:r>
-              <a:rPr lang="en-US" sz="4000" b="1" dirty="0"/>
-              <a:t>Reusable Modal message in JS. Using  </a:t>
-            </a:r>
-            <a:r>
-              <a:rPr lang="en-US" sz="4000" b="1" dirty="0" err="1"/>
-              <a:t>document.createElement</a:t>
-            </a:r>
-            <a:endParaRPr lang="en-US" sz="4000" b="1" dirty="0"/>
-          </a:p>
-        </p:txBody>
-      </p:sp>
-    </p:spTree>
-    <p:extLst>
-      <p:ext uri="{BB962C8B-B14F-4D97-AF65-F5344CB8AC3E}">
-        <p14:creationId xmlns:p14="http://schemas.microsoft.com/office/powerpoint/2010/main" val="2959178089"/>
-      </p:ext>
-    </p:extLst>
-  </p:cSld>
-  <p:clrMapOvr>
-    <a:masterClrMapping/>
-  </p:clrMapOvr>
-</p:sld>
-</file>
-
-<file path=ppt/slides/slide30.xml><?xml version="1.0" encoding="utf-8"?>
+<file path=ppt/slides/slide31.xml><?xml version="1.0" encoding="utf-8"?>
 <p:sld xmlns:a="http://schemas.openxmlformats.org/drawingml/2006/main" xmlns:r="http://schemas.openxmlformats.org/officeDocument/2006/relationships" xmlns:p="http://schemas.openxmlformats.org/presentationml/2006/main">
   <p:cSld>
     <p:spTree>
@@ -10616,7 +11074,7 @@
 </p:sld>
 </file>
 
-<file path=ppt/slides/slide31.xml><?xml version="1.0" encoding="utf-8"?>
+<file path=ppt/slides/slide32.xml><?xml version="1.0" encoding="utf-8"?>
 <p:sld xmlns:a="http://schemas.openxmlformats.org/drawingml/2006/main" xmlns:r="http://schemas.openxmlformats.org/officeDocument/2006/relationships" xmlns:p="http://schemas.openxmlformats.org/presentationml/2006/main">
   <p:cSld>
     <p:spTree>
@@ -10682,7 +11140,7 @@
 </p:sld>
 </file>
 
-<file path=ppt/slides/slide32.xml><?xml version="1.0" encoding="utf-8"?>
+<file path=ppt/slides/slide33.xml><?xml version="1.0" encoding="utf-8"?>
 <p:sld xmlns:a="http://schemas.openxmlformats.org/drawingml/2006/main" xmlns:r="http://schemas.openxmlformats.org/officeDocument/2006/relationships" xmlns:p="http://schemas.openxmlformats.org/presentationml/2006/main">
   <p:cSld>
     <p:spTree>
@@ -10718,7 +11176,7 @@
           </a:xfrm>
           <a:prstGeom prst="roundRect">
             <a:avLst>
-              <a:gd name="adj" fmla="val 10428"/>
+              <a:gd name="adj" fmla="val 5607"/>
             </a:avLst>
           </a:prstGeom>
           <a:solidFill>
@@ -11164,7 +11622,7 @@
 </p:sld>
 </file>
 
-<file path=ppt/slides/slide33.xml><?xml version="1.0" encoding="utf-8"?>
+<file path=ppt/slides/slide34.xml><?xml version="1.0" encoding="utf-8"?>
 <p:sld xmlns:a="http://schemas.openxmlformats.org/drawingml/2006/main" xmlns:r="http://schemas.openxmlformats.org/officeDocument/2006/relationships" xmlns:p="http://schemas.openxmlformats.org/presentationml/2006/main">
   <p:cSld>
     <p:spTree>
@@ -11783,7 +12241,7 @@
 </p:sld>
 </file>
 
-<file path=ppt/slides/slide34.xml><?xml version="1.0" encoding="utf-8"?>
+<file path=ppt/slides/slide35.xml><?xml version="1.0" encoding="utf-8"?>
 <p:sld xmlns:a="http://schemas.openxmlformats.org/drawingml/2006/main" xmlns:r="http://schemas.openxmlformats.org/officeDocument/2006/relationships" xmlns:p="http://schemas.openxmlformats.org/presentationml/2006/main">
   <p:cSld>
     <p:spTree>
@@ -11962,7 +12420,7 @@
 </p:sld>
 </file>
 
-<file path=ppt/slides/slide35.xml><?xml version="1.0" encoding="utf-8"?>
+<file path=ppt/slides/slide36.xml><?xml version="1.0" encoding="utf-8"?>
 <p:sld xmlns:a="http://schemas.openxmlformats.org/drawingml/2006/main" xmlns:r="http://schemas.openxmlformats.org/officeDocument/2006/relationships" xmlns:p="http://schemas.openxmlformats.org/presentationml/2006/main">
   <p:cSld>
     <p:spTree>
@@ -12148,7 +12606,7 @@
 </p:sld>
 </file>
 
-<file path=ppt/slides/slide36.xml><?xml version="1.0" encoding="utf-8"?>
+<file path=ppt/slides/slide37.xml><?xml version="1.0" encoding="utf-8"?>
 <p:sld xmlns:a="http://schemas.openxmlformats.org/drawingml/2006/main" xmlns:r="http://schemas.openxmlformats.org/officeDocument/2006/relationships" xmlns:p="http://schemas.openxmlformats.org/presentationml/2006/main">
   <p:cSld>
     <p:spTree>
@@ -12498,7 +12956,7 @@
 </p:sld>
 </file>
 
-<file path=ppt/slides/slide37.xml><?xml version="1.0" encoding="utf-8"?>
+<file path=ppt/slides/slide38.xml><?xml version="1.0" encoding="utf-8"?>
 <p:sld xmlns:a="http://schemas.openxmlformats.org/drawingml/2006/main" xmlns:r="http://schemas.openxmlformats.org/officeDocument/2006/relationships" xmlns:p="http://schemas.openxmlformats.org/presentationml/2006/main">
   <p:cSld>
     <p:spTree>
@@ -12637,7 +13095,7 @@
 </p:sld>
 </file>
 
-<file path=ppt/slides/slide38.xml><?xml version="1.0" encoding="utf-8"?>
+<file path=ppt/slides/slide39.xml><?xml version="1.0" encoding="utf-8"?>
 <p:sld xmlns:a="http://schemas.openxmlformats.org/drawingml/2006/main" xmlns:r="http://schemas.openxmlformats.org/officeDocument/2006/relationships" xmlns:p="http://schemas.openxmlformats.org/presentationml/2006/main">
   <p:cSld>
     <p:spTree>
@@ -12703,7 +13161,7 @@
         </p:nvSpPr>
         <p:spPr>
           <a:xfrm>
-            <a:off x="3057236" y="2012722"/>
+            <a:off x="277090" y="2012722"/>
             <a:ext cx="6077528" cy="2832556"/>
           </a:xfrm>
           <a:prstGeom prst="roundRect">
@@ -12821,6 +13279,151 @@
           </a:p>
         </p:txBody>
       </p:sp>
+      <p:sp>
+        <p:nvSpPr>
+          <p:cNvPr id="2" name="Rectangle: Rounded Corners 1">
+            <a:extLst>
+              <a:ext uri="{FF2B5EF4-FFF2-40B4-BE49-F238E27FC236}">
+                <a16:creationId xmlns:a16="http://schemas.microsoft.com/office/drawing/2014/main" id="{5A4456B4-4281-F7F5-962D-D430BDB4B876}"/>
+              </a:ext>
+            </a:extLst>
+          </p:cNvPr>
+          <p:cNvSpPr/>
+          <p:nvPr/>
+        </p:nvSpPr>
+        <p:spPr>
+          <a:xfrm>
+            <a:off x="6890329" y="2012722"/>
+            <a:ext cx="4858326" cy="2832556"/>
+          </a:xfrm>
+          <a:prstGeom prst="roundRect">
+            <a:avLst>
+              <a:gd name="adj" fmla="val 5218"/>
+            </a:avLst>
+          </a:prstGeom>
+          <a:solidFill>
+            <a:schemeClr val="accent6">
+              <a:lumMod val="50000"/>
+            </a:schemeClr>
+          </a:solidFill>
+          <a:ln>
+            <a:noFill/>
+          </a:ln>
+        </p:spPr>
+        <p:style>
+          <a:lnRef idx="2">
+            <a:schemeClr val="accent1">
+              <a:shade val="15000"/>
+            </a:schemeClr>
+          </a:lnRef>
+          <a:fillRef idx="1">
+            <a:schemeClr val="accent1"/>
+          </a:fillRef>
+          <a:effectRef idx="0">
+            <a:schemeClr val="accent1"/>
+          </a:effectRef>
+          <a:fontRef idx="minor">
+            <a:schemeClr val="lt1"/>
+          </a:fontRef>
+        </p:style>
+        <p:txBody>
+          <a:bodyPr rtlCol="0" anchor="ctr"/>
+          <a:lstStyle/>
+          <a:p>
+            <a:r>
+              <a:rPr lang="en-US" b="1" dirty="0"/>
+              <a:t>Confirm Payment{</a:t>
+            </a:r>
+          </a:p>
+          <a:p>
+            <a:pPr marL="742950" lvl="1" indent="-285750">
+              <a:buFont typeface="Arial" panose="020B0604020202020204" pitchFamily="34" charset="0"/>
+              <a:buChar char="•"/>
+            </a:pPr>
+            <a:r>
+              <a:rPr lang="en-US" b="1" dirty="0"/>
+              <a:t>For: Reservation/Full Payment</a:t>
+            </a:r>
+          </a:p>
+          <a:p>
+            <a:pPr marL="742950" lvl="1" indent="-285750">
+              <a:buFont typeface="Arial" panose="020B0604020202020204" pitchFamily="34" charset="0"/>
+              <a:buChar char="•"/>
+            </a:pPr>
+            <a:r>
+              <a:rPr lang="en-US" b="1" dirty="0"/>
+              <a:t>Mode of Payment (</a:t>
+            </a:r>
+            <a:r>
+              <a:rPr lang="en-US" b="1" dirty="0" err="1"/>
+              <a:t>Gcash</a:t>
+            </a:r>
+            <a:r>
+              <a:rPr lang="en-US" b="1" dirty="0"/>
+              <a:t>, </a:t>
+            </a:r>
+            <a:r>
+              <a:rPr lang="en-US" b="1" dirty="0" err="1"/>
+              <a:t>Gotyme</a:t>
+            </a:r>
+            <a:r>
+              <a:rPr lang="en-US" b="1" dirty="0"/>
+              <a:t>, maya, </a:t>
+            </a:r>
+            <a:r>
+              <a:rPr lang="en-US" b="1" dirty="0" err="1"/>
+              <a:t>UnionBank</a:t>
+            </a:r>
+            <a:r>
+              <a:rPr lang="en-US" b="1" dirty="0"/>
+              <a:t>)</a:t>
+            </a:r>
+          </a:p>
+          <a:p>
+            <a:pPr marL="742950" lvl="1" indent="-285750">
+              <a:buFont typeface="Arial" panose="020B0604020202020204" pitchFamily="34" charset="0"/>
+              <a:buChar char="•"/>
+            </a:pPr>
+            <a:r>
+              <a:rPr lang="en-US" b="1" dirty="0"/>
+              <a:t>Transaction Number</a:t>
+            </a:r>
+          </a:p>
+          <a:p>
+            <a:pPr marL="742950" lvl="1" indent="-285750">
+              <a:buFont typeface="Arial" panose="020B0604020202020204" pitchFamily="34" charset="0"/>
+              <a:buChar char="•"/>
+            </a:pPr>
+            <a:r>
+              <a:rPr lang="en-US" b="1" dirty="0"/>
+              <a:t>Date &amp; time of payment</a:t>
+            </a:r>
+          </a:p>
+          <a:p>
+            <a:pPr marL="742950" lvl="1" indent="-285750">
+              <a:buFont typeface="Arial" panose="020B0604020202020204" pitchFamily="34" charset="0"/>
+              <a:buChar char="•"/>
+            </a:pPr>
+            <a:endParaRPr lang="en-US" b="1" dirty="0"/>
+          </a:p>
+          <a:p>
+            <a:pPr marL="742950" lvl="1" indent="-285750">
+              <a:buFont typeface="Arial" panose="020B0604020202020204" pitchFamily="34" charset="0"/>
+              <a:buChar char="•"/>
+            </a:pPr>
+            <a:r>
+              <a:rPr lang="en-US" b="1" dirty="0"/>
+              <a:t>Button : Confirm and Decline</a:t>
+            </a:r>
+          </a:p>
+          <a:p>
+            <a:r>
+              <a:rPr lang="en-US" b="1" dirty="0"/>
+              <a:t>}</a:t>
+            </a:r>
+          </a:p>
+        </p:txBody>
+      </p:sp>
     </p:spTree>
     <p:extLst>
       <p:ext uri="{BB962C8B-B14F-4D97-AF65-F5344CB8AC3E}">
@@ -12834,7 +13437,90 @@
 </p:sld>
 </file>
 
-<file path=ppt/slides/slide39.xml><?xml version="1.0" encoding="utf-8"?>
+<file path=ppt/slides/slide4.xml><?xml version="1.0" encoding="utf-8"?>
+<p:sld xmlns:a="http://schemas.openxmlformats.org/drawingml/2006/main" xmlns:r="http://schemas.openxmlformats.org/officeDocument/2006/relationships" xmlns:p="http://schemas.openxmlformats.org/presentationml/2006/main">
+  <p:cSld>
+    <p:spTree>
+      <p:nvGrpSpPr>
+        <p:cNvPr id="1" name=""/>
+        <p:cNvGrpSpPr/>
+        <p:nvPr/>
+      </p:nvGrpSpPr>
+      <p:grpSpPr>
+        <a:xfrm>
+          <a:off x="0" y="0"/>
+          <a:ext cx="0" cy="0"/>
+          <a:chOff x="0" y="0"/>
+          <a:chExt cx="0" cy="0"/>
+        </a:xfrm>
+      </p:grpSpPr>
+      <p:sp>
+        <p:nvSpPr>
+          <p:cNvPr id="2" name="TextBox 1">
+            <a:extLst>
+              <a:ext uri="{FF2B5EF4-FFF2-40B4-BE49-F238E27FC236}">
+                <a16:creationId xmlns:a16="http://schemas.microsoft.com/office/drawing/2014/main" id="{D7905721-4A05-C1B3-9952-8B578834C87C}"/>
+              </a:ext>
+            </a:extLst>
+          </p:cNvPr>
+          <p:cNvSpPr txBox="1"/>
+          <p:nvPr/>
+        </p:nvSpPr>
+        <p:spPr>
+          <a:xfrm>
+            <a:off x="832023" y="2459504"/>
+            <a:ext cx="10527954" cy="1938992"/>
+          </a:xfrm>
+          <a:prstGeom prst="rect">
+            <a:avLst/>
+          </a:prstGeom>
+          <a:noFill/>
+        </p:spPr>
+        <p:txBody>
+          <a:bodyPr wrap="square" rtlCol="0">
+            <a:spAutoFit/>
+          </a:bodyPr>
+          <a:lstStyle/>
+          <a:p>
+            <a:pPr algn="ctr"/>
+            <a:r>
+              <a:rPr lang="en-US" sz="4000" b="1" dirty="0"/>
+              <a:t>All lists or other elements that display data should have </a:t>
+            </a:r>
+            <a:r>
+              <a:rPr lang="en-US" sz="4000" b="1" dirty="0">
+                <a:solidFill>
+                  <a:srgbClr val="C00000"/>
+                </a:solidFill>
+              </a:rPr>
+              <a:t>default CSS Class </a:t>
+            </a:r>
+            <a:r>
+              <a:rPr lang="en-US" sz="4000" b="1" dirty="0"/>
+              <a:t>to toggle the display when there is no content.</a:t>
+            </a:r>
+            <a:endParaRPr lang="en-US" sz="4000" b="1" dirty="0">
+              <a:solidFill>
+                <a:srgbClr val="C00000"/>
+              </a:solidFill>
+            </a:endParaRPr>
+          </a:p>
+        </p:txBody>
+      </p:sp>
+    </p:spTree>
+    <p:extLst>
+      <p:ext uri="{BB962C8B-B14F-4D97-AF65-F5344CB8AC3E}">
+        <p14:creationId xmlns:p14="http://schemas.microsoft.com/office/powerpoint/2010/main" val="2156814539"/>
+      </p:ext>
+    </p:extLst>
+  </p:cSld>
+  <p:clrMapOvr>
+    <a:masterClrMapping/>
+  </p:clrMapOvr>
+</p:sld>
+</file>
+
+<file path=ppt/slides/slide40.xml><?xml version="1.0" encoding="utf-8"?>
 <p:sld xmlns:a="http://schemas.openxmlformats.org/drawingml/2006/main" xmlns:r="http://schemas.openxmlformats.org/officeDocument/2006/relationships" xmlns:p="http://schemas.openxmlformats.org/presentationml/2006/main">
   <p:cSld>
     <p:spTree>
@@ -13070,90 +13756,7 @@
 </p:sld>
 </file>
 
-<file path=ppt/slides/slide4.xml><?xml version="1.0" encoding="utf-8"?>
-<p:sld xmlns:a="http://schemas.openxmlformats.org/drawingml/2006/main" xmlns:r="http://schemas.openxmlformats.org/officeDocument/2006/relationships" xmlns:p="http://schemas.openxmlformats.org/presentationml/2006/main">
-  <p:cSld>
-    <p:spTree>
-      <p:nvGrpSpPr>
-        <p:cNvPr id="1" name=""/>
-        <p:cNvGrpSpPr/>
-        <p:nvPr/>
-      </p:nvGrpSpPr>
-      <p:grpSpPr>
-        <a:xfrm>
-          <a:off x="0" y="0"/>
-          <a:ext cx="0" cy="0"/>
-          <a:chOff x="0" y="0"/>
-          <a:chExt cx="0" cy="0"/>
-        </a:xfrm>
-      </p:grpSpPr>
-      <p:sp>
-        <p:nvSpPr>
-          <p:cNvPr id="2" name="TextBox 1">
-            <a:extLst>
-              <a:ext uri="{FF2B5EF4-FFF2-40B4-BE49-F238E27FC236}">
-                <a16:creationId xmlns:a16="http://schemas.microsoft.com/office/drawing/2014/main" id="{D7905721-4A05-C1B3-9952-8B578834C87C}"/>
-              </a:ext>
-            </a:extLst>
-          </p:cNvPr>
-          <p:cNvSpPr txBox="1"/>
-          <p:nvPr/>
-        </p:nvSpPr>
-        <p:spPr>
-          <a:xfrm>
-            <a:off x="832023" y="2459504"/>
-            <a:ext cx="10527954" cy="1938992"/>
-          </a:xfrm>
-          <a:prstGeom prst="rect">
-            <a:avLst/>
-          </a:prstGeom>
-          <a:noFill/>
-        </p:spPr>
-        <p:txBody>
-          <a:bodyPr wrap="square" rtlCol="0">
-            <a:spAutoFit/>
-          </a:bodyPr>
-          <a:lstStyle/>
-          <a:p>
-            <a:pPr algn="ctr"/>
-            <a:r>
-              <a:rPr lang="en-US" sz="4000" b="1" dirty="0"/>
-              <a:t>All lists or other elements that display data should have </a:t>
-            </a:r>
-            <a:r>
-              <a:rPr lang="en-US" sz="4000" b="1" dirty="0">
-                <a:solidFill>
-                  <a:srgbClr val="C00000"/>
-                </a:solidFill>
-              </a:rPr>
-              <a:t>default CSS Class </a:t>
-            </a:r>
-            <a:r>
-              <a:rPr lang="en-US" sz="4000" b="1" dirty="0"/>
-              <a:t>to toggle the display when there is no content.</a:t>
-            </a:r>
-            <a:endParaRPr lang="en-US" sz="4000" b="1" dirty="0">
-              <a:solidFill>
-                <a:srgbClr val="C00000"/>
-              </a:solidFill>
-            </a:endParaRPr>
-          </a:p>
-        </p:txBody>
-      </p:sp>
-    </p:spTree>
-    <p:extLst>
-      <p:ext uri="{BB962C8B-B14F-4D97-AF65-F5344CB8AC3E}">
-        <p14:creationId xmlns:p14="http://schemas.microsoft.com/office/powerpoint/2010/main" val="2156814539"/>
-      </p:ext>
-    </p:extLst>
-  </p:cSld>
-  <p:clrMapOvr>
-    <a:masterClrMapping/>
-  </p:clrMapOvr>
-</p:sld>
-</file>
-
-<file path=ppt/slides/slide40.xml><?xml version="1.0" encoding="utf-8"?>
+<file path=ppt/slides/slide41.xml><?xml version="1.0" encoding="utf-8"?>
 <p:sld xmlns:a="http://schemas.openxmlformats.org/drawingml/2006/main" xmlns:r="http://schemas.openxmlformats.org/officeDocument/2006/relationships" xmlns:p="http://schemas.openxmlformats.org/presentationml/2006/main">
   <p:cSld>
     <p:spTree>
@@ -13220,7 +13823,7 @@
         <p:spPr>
           <a:xfrm>
             <a:off x="122383" y="267855"/>
-            <a:ext cx="7081981" cy="4137890"/>
+            <a:ext cx="7081981" cy="4100945"/>
           </a:xfrm>
           <a:prstGeom prst="roundRect">
             <a:avLst>
@@ -13369,13 +13972,44 @@
             </a:r>
           </a:p>
           <a:p>
+            <a:pPr lvl="2"/>
+            <a:r>
+              <a:rPr lang="en-US" sz="1600" b="1" dirty="0"/>
+              <a:t>(for check in only)</a:t>
+            </a:r>
+          </a:p>
+          <a:p>
             <a:pPr marL="1200150" lvl="2" indent="-285750">
               <a:buFont typeface="Arial" panose="020B0604020202020204" pitchFamily="34" charset="0"/>
               <a:buChar char="•"/>
             </a:pPr>
             <a:r>
               <a:rPr lang="en-US" sz="1600" b="1" dirty="0"/>
-              <a:t>Button : confirmation of check in and cash payment modal</a:t>
+              <a:t>Button : confirmation of </a:t>
+            </a:r>
+            <a:r>
+              <a:rPr lang="en-US" sz="1600" b="1" dirty="0">
+                <a:solidFill>
+                  <a:srgbClr val="FF0000"/>
+                </a:solidFill>
+              </a:rPr>
+              <a:t>check in </a:t>
+            </a:r>
+            <a:r>
+              <a:rPr lang="en-US" sz="1600" b="1" dirty="0"/>
+              <a:t>and</a:t>
+            </a:r>
+            <a:r>
+              <a:rPr lang="en-US" sz="1600" b="1" dirty="0">
+                <a:solidFill>
+                  <a:srgbClr val="FF0000"/>
+                </a:solidFill>
+              </a:rPr>
+              <a:t> cash payment </a:t>
+            </a:r>
+            <a:r>
+              <a:rPr lang="en-US" sz="1600" b="1" dirty="0"/>
+              <a:t>modal</a:t>
             </a:r>
           </a:p>
           <a:p>
@@ -13385,7 +14019,7 @@
             </a:pPr>
             <a:r>
               <a:rPr lang="en-US" sz="1600" b="1" dirty="0"/>
-              <a:t>Property Name</a:t>
+              <a:t> Property Name</a:t>
             </a:r>
           </a:p>
           <a:p>
@@ -13431,7 +14065,7 @@
             </a:r>
             <a:r>
               <a:rPr lang="en-US" sz="1600" b="1" dirty="0"/>
-              <a:t>)</a:t>
+              <a:t>) for checkout</a:t>
             </a:r>
           </a:p>
           <a:p>
@@ -13889,8 +14523,8 @@
         </p:nvCxnSpPr>
         <p:spPr>
           <a:xfrm flipV="1">
-            <a:off x="5006109" y="3537527"/>
-            <a:ext cx="2932549" cy="471055"/>
+            <a:off x="5089236" y="3537527"/>
+            <a:ext cx="2849422" cy="757382"/>
           </a:xfrm>
           <a:prstGeom prst="curvedConnector3">
             <a:avLst>
@@ -13935,7 +14569,7 @@
 </p:sld>
 </file>
 
-<file path=ppt/slides/slide41.xml><?xml version="1.0" encoding="utf-8"?>
+<file path=ppt/slides/slide42.xml><?xml version="1.0" encoding="utf-8"?>
 <p:sld xmlns:a="http://schemas.openxmlformats.org/drawingml/2006/main" xmlns:r="http://schemas.openxmlformats.org/officeDocument/2006/relationships" xmlns:p="http://schemas.openxmlformats.org/presentationml/2006/main">
   <p:cSld>
     <p:spTree>
@@ -14001,7 +14635,7 @@
 </p:sld>
 </file>
 
-<file path=ppt/slides/slide42.xml><?xml version="1.0" encoding="utf-8"?>
+<file path=ppt/slides/slide43.xml><?xml version="1.0" encoding="utf-8"?>
 <p:sld xmlns:a="http://schemas.openxmlformats.org/drawingml/2006/main" xmlns:r="http://schemas.openxmlformats.org/officeDocument/2006/relationships" xmlns:p="http://schemas.openxmlformats.org/presentationml/2006/main">
   <p:cSld>
     <p:spTree>
@@ -14724,7 +15358,7 @@
 </p:sld>
 </file>
 
-<file path=ppt/slides/slide43.xml><?xml version="1.0" encoding="utf-8"?>
+<file path=ppt/slides/slide44.xml><?xml version="1.0" encoding="utf-8"?>
 <p:sld xmlns:a="http://schemas.openxmlformats.org/drawingml/2006/main" xmlns:r="http://schemas.openxmlformats.org/officeDocument/2006/relationships" xmlns:p="http://schemas.openxmlformats.org/presentationml/2006/main">
   <p:cSld>
     <p:spTree>
@@ -14910,7 +15544,7 @@
 </p:sld>
 </file>
 
-<file path=ppt/slides/slide44.xml><?xml version="1.0" encoding="utf-8"?>
+<file path=ppt/slides/slide45.xml><?xml version="1.0" encoding="utf-8"?>
 <p:sld xmlns:a="http://schemas.openxmlformats.org/drawingml/2006/main" xmlns:r="http://schemas.openxmlformats.org/officeDocument/2006/relationships" xmlns:p="http://schemas.openxmlformats.org/presentationml/2006/main">
   <p:cSld>
     <p:spTree>
@@ -15056,7 +15690,7 @@
 </p:sld>
 </file>
 
-<file path=ppt/slides/slide45.xml><?xml version="1.0" encoding="utf-8"?>
+<file path=ppt/slides/slide46.xml><?xml version="1.0" encoding="utf-8"?>
 <p:sld xmlns:a="http://schemas.openxmlformats.org/drawingml/2006/main" xmlns:r="http://schemas.openxmlformats.org/officeDocument/2006/relationships" xmlns:p="http://schemas.openxmlformats.org/presentationml/2006/main">
   <p:cSld>
     <p:spTree>
@@ -15313,8 +15947,8 @@
         </p:nvSpPr>
         <p:spPr>
           <a:xfrm>
-            <a:off x="6890326" y="2750127"/>
-            <a:ext cx="3962401" cy="1357745"/>
+            <a:off x="6825673" y="101601"/>
+            <a:ext cx="5297056" cy="1173017"/>
           </a:xfrm>
           <a:prstGeom prst="roundRect">
             <a:avLst>
@@ -15366,8 +16000,32 @@
             </a:r>
           </a:p>
           <a:p>
-            <a:pPr lvl="1"/>
-            <a:endParaRPr lang="en-US" sz="1600" b="1" dirty="0"/>
+            <a:pPr marL="742950" lvl="1" indent="-285750">
+              <a:buFont typeface="Arial" panose="020B0604020202020204" pitchFamily="34" charset="0"/>
+              <a:buChar char="•"/>
+            </a:pPr>
+            <a:r>
+              <a:rPr lang="en-US" sz="1600" b="1" dirty="0"/>
+              <a:t>Proceed to payment </a:t>
+            </a:r>
+            <a:r>
+              <a:rPr lang="en-US" sz="1600" b="1" dirty="0" err="1"/>
+              <a:t>Btn</a:t>
+            </a:r>
+            <a:r>
+              <a:rPr lang="en-US" sz="1600" b="1" dirty="0"/>
+              <a:t>: Payment</a:t>
+            </a:r>
+          </a:p>
+          <a:p>
+            <a:pPr marL="742950" lvl="1" indent="-285750">
+              <a:buFont typeface="Arial" panose="020B0604020202020204" pitchFamily="34" charset="0"/>
+              <a:buChar char="•"/>
+            </a:pPr>
+            <a:r>
+              <a:rPr lang="en-US" sz="1600" b="1" dirty="0"/>
+              <a:t>Reservation or Package Payment</a:t>
+            </a:r>
           </a:p>
           <a:p>
             <a:r>
@@ -15377,6 +16035,320 @@
           </a:p>
         </p:txBody>
       </p:sp>
+      <p:sp>
+        <p:nvSpPr>
+          <p:cNvPr id="3" name="Rectangle: Rounded Corners 2">
+            <a:extLst>
+              <a:ext uri="{FF2B5EF4-FFF2-40B4-BE49-F238E27FC236}">
+                <a16:creationId xmlns:a16="http://schemas.microsoft.com/office/drawing/2014/main" id="{338085F6-E2E5-5EAF-D4F0-98EA037E644A}"/>
+              </a:ext>
+            </a:extLst>
+          </p:cNvPr>
+          <p:cNvSpPr/>
+          <p:nvPr/>
+        </p:nvSpPr>
+        <p:spPr>
+          <a:xfrm>
+            <a:off x="6825672" y="1274619"/>
+            <a:ext cx="5297056" cy="5481782"/>
+          </a:xfrm>
+          <a:prstGeom prst="roundRect">
+            <a:avLst>
+              <a:gd name="adj" fmla="val 1311"/>
+            </a:avLst>
+          </a:prstGeom>
+          <a:solidFill>
+            <a:schemeClr val="accent6">
+              <a:lumMod val="50000"/>
+            </a:schemeClr>
+          </a:solidFill>
+          <a:ln>
+            <a:noFill/>
+          </a:ln>
+        </p:spPr>
+        <p:style>
+          <a:lnRef idx="2">
+            <a:schemeClr val="accent1">
+              <a:shade val="15000"/>
+            </a:schemeClr>
+          </a:lnRef>
+          <a:fillRef idx="1">
+            <a:schemeClr val="accent1"/>
+          </a:fillRef>
+          <a:effectRef idx="0">
+            <a:schemeClr val="accent1"/>
+          </a:effectRef>
+          <a:fontRef idx="minor">
+            <a:schemeClr val="lt1"/>
+          </a:fontRef>
+        </p:style>
+        <p:txBody>
+          <a:bodyPr rtlCol="0" anchor="ctr"/>
+          <a:lstStyle/>
+          <a:p>
+            <a:r>
+              <a:rPr lang="en-US" sz="1600" b="1" dirty="0"/>
+              <a:t>guestPayment.html{</a:t>
+            </a:r>
+          </a:p>
+          <a:p>
+            <a:pPr lvl="1"/>
+            <a:r>
+              <a:rPr lang="en-US" sz="1600" b="1" dirty="0"/>
+              <a:t>Section1{</a:t>
+            </a:r>
+          </a:p>
+          <a:p>
+            <a:pPr marL="1200150" lvl="2" indent="-285750">
+              <a:buFont typeface="Arial" panose="020B0604020202020204" pitchFamily="34" charset="0"/>
+              <a:buChar char="•"/>
+            </a:pPr>
+            <a:r>
+              <a:rPr lang="en-US" sz="1600" b="1" dirty="0"/>
+              <a:t>For: Reservation/Full Payment (Dynamic)</a:t>
+            </a:r>
+          </a:p>
+          <a:p>
+            <a:pPr marL="1200150" lvl="2" indent="-285750">
+              <a:buFont typeface="Arial" panose="020B0604020202020204" pitchFamily="34" charset="0"/>
+              <a:buChar char="•"/>
+            </a:pPr>
+            <a:r>
+              <a:rPr lang="en-US" sz="1600" b="1" dirty="0"/>
+              <a:t>Price</a:t>
+            </a:r>
+          </a:p>
+          <a:p>
+            <a:pPr marL="1200150" lvl="2" indent="-285750">
+              <a:buFont typeface="Arial" panose="020B0604020202020204" pitchFamily="34" charset="0"/>
+              <a:buChar char="•"/>
+            </a:pPr>
+            <a:r>
+              <a:rPr lang="en-US" sz="1600" b="1" dirty="0"/>
+              <a:t>Selection (</a:t>
+            </a:r>
+            <a:r>
+              <a:rPr lang="en-US" sz="1600" b="1" dirty="0" err="1"/>
+              <a:t>Gcash</a:t>
+            </a:r>
+            <a:r>
+              <a:rPr lang="en-US" sz="1600" b="1" dirty="0"/>
+              <a:t>, </a:t>
+            </a:r>
+            <a:r>
+              <a:rPr lang="en-US" sz="1600" b="1" dirty="0" err="1"/>
+              <a:t>Gotyme</a:t>
+            </a:r>
+            <a:r>
+              <a:rPr lang="en-US" sz="1600" b="1" dirty="0"/>
+              <a:t>, maya, </a:t>
+            </a:r>
+            <a:r>
+              <a:rPr lang="en-US" sz="1600" b="1" dirty="0" err="1"/>
+              <a:t>UnionBank</a:t>
+            </a:r>
+            <a:r>
+              <a:rPr lang="en-US" sz="1600" b="1" dirty="0"/>
+              <a:t>)</a:t>
+            </a:r>
+          </a:p>
+          <a:p>
+            <a:pPr marL="1200150" lvl="2" indent="-285750">
+              <a:buFont typeface="Arial" panose="020B0604020202020204" pitchFamily="34" charset="0"/>
+              <a:buChar char="•"/>
+            </a:pPr>
+            <a:r>
+              <a:rPr lang="en-US" sz="1600" b="1" dirty="0"/>
+              <a:t>QR Code</a:t>
+            </a:r>
+          </a:p>
+          <a:p>
+            <a:pPr lvl="1"/>
+            <a:r>
+              <a:rPr lang="en-US" sz="1600" b="1" dirty="0"/>
+              <a:t>}</a:t>
+            </a:r>
+          </a:p>
+          <a:p>
+            <a:pPr lvl="1"/>
+            <a:r>
+              <a:rPr lang="en-US" sz="1600" b="1" dirty="0"/>
+              <a:t>Section2{</a:t>
+            </a:r>
+          </a:p>
+          <a:p>
+            <a:pPr marL="1200150" lvl="2" indent="-285750">
+              <a:buFont typeface="Arial" panose="020B0604020202020204" pitchFamily="34" charset="0"/>
+              <a:buChar char="•"/>
+            </a:pPr>
+            <a:r>
+              <a:rPr lang="en-US" sz="1600" b="1" dirty="0"/>
+              <a:t>Text: “Upload a Screenshot”</a:t>
+            </a:r>
+          </a:p>
+          <a:p>
+            <a:pPr marL="1200150" lvl="2" indent="-285750">
+              <a:buFont typeface="Arial" panose="020B0604020202020204" pitchFamily="34" charset="0"/>
+              <a:buChar char="•"/>
+            </a:pPr>
+            <a:r>
+              <a:rPr lang="en-US" sz="1600" b="1" dirty="0"/>
+              <a:t>Upload drag and drop or click the upload button</a:t>
+            </a:r>
+          </a:p>
+          <a:p>
+            <a:pPr marL="1200150" lvl="2" indent="-285750">
+              <a:buFont typeface="Arial" panose="020B0604020202020204" pitchFamily="34" charset="0"/>
+              <a:buChar char="•"/>
+            </a:pPr>
+            <a:r>
+              <a:rPr lang="en-US" sz="1600" b="1" dirty="0"/>
+              <a:t>Image preview</a:t>
+            </a:r>
+          </a:p>
+          <a:p>
+            <a:pPr marL="1200150" lvl="2" indent="-285750">
+              <a:buFont typeface="Arial" panose="020B0604020202020204" pitchFamily="34" charset="0"/>
+              <a:buChar char="•"/>
+            </a:pPr>
+            <a:endParaRPr lang="en-US" sz="1600" b="1" dirty="0"/>
+          </a:p>
+          <a:p>
+            <a:pPr marL="1200150" lvl="2" indent="-285750">
+              <a:buFont typeface="Arial" panose="020B0604020202020204" pitchFamily="34" charset="0"/>
+              <a:buChar char="•"/>
+            </a:pPr>
+            <a:r>
+              <a:rPr lang="en-US" sz="1600" b="1" dirty="0"/>
+              <a:t>Input: // This will populate the transaction#</a:t>
+            </a:r>
+          </a:p>
+          <a:p>
+            <a:pPr marL="1200150" lvl="2" indent="-285750">
+              <a:buFont typeface="Arial" panose="020B0604020202020204" pitchFamily="34" charset="0"/>
+              <a:buChar char="•"/>
+            </a:pPr>
+            <a:r>
+              <a:rPr lang="en-US" sz="1600" b="1" dirty="0"/>
+              <a:t>Button: Confirm Payment</a:t>
+            </a:r>
+          </a:p>
+          <a:p>
+            <a:pPr marL="1200150" lvl="2" indent="-285750">
+              <a:buFont typeface="Arial" panose="020B0604020202020204" pitchFamily="34" charset="0"/>
+              <a:buChar char="•"/>
+            </a:pPr>
+            <a:r>
+              <a:rPr lang="en-US" sz="1400" b="1" dirty="0"/>
+              <a:t>Warning: Please verify the transaction number carefully. It cannot be changed after confirmation, and errors may lead to booking cancellation.</a:t>
+            </a:r>
+          </a:p>
+          <a:p>
+            <a:r>
+              <a:rPr lang="en-US" sz="1600" b="1" dirty="0"/>
+              <a:t>}</a:t>
+            </a:r>
+          </a:p>
+        </p:txBody>
+      </p:sp>
+      <p:cxnSp>
+        <p:nvCxnSpPr>
+          <p:cNvPr id="4" name="Connector: Curved 3">
+            <a:extLst>
+              <a:ext uri="{FF2B5EF4-FFF2-40B4-BE49-F238E27FC236}">
+                <a16:creationId xmlns:a16="http://schemas.microsoft.com/office/drawing/2014/main" id="{D4E191A5-48A4-C58C-B4C0-B608243F776E}"/>
+              </a:ext>
+            </a:extLst>
+          </p:cNvPr>
+          <p:cNvCxnSpPr>
+            <a:cxnSpLocks/>
+          </p:cNvCxnSpPr>
+          <p:nvPr/>
+        </p:nvCxnSpPr>
+        <p:spPr>
+          <a:xfrm rot="10800000" flipV="1">
+            <a:off x="8914247" y="1110675"/>
+            <a:ext cx="685798" cy="623452"/>
+          </a:xfrm>
+          <a:prstGeom prst="curvedConnector3">
+            <a:avLst>
+              <a:gd name="adj1" fmla="val 50000"/>
+            </a:avLst>
+          </a:prstGeom>
+          <a:ln w="19050" cap="flat" cmpd="sng" algn="ctr">
+            <a:solidFill>
+              <a:schemeClr val="accent4"/>
+            </a:solidFill>
+            <a:prstDash val="solid"/>
+            <a:round/>
+            <a:headEnd type="arrow" w="med" len="med"/>
+            <a:tailEnd type="arrow" w="med" len="med"/>
+          </a:ln>
+        </p:spPr>
+        <p:style>
+          <a:lnRef idx="0">
+            <a:scrgbClr r="0" g="0" b="0"/>
+          </a:lnRef>
+          <a:fillRef idx="0">
+            <a:scrgbClr r="0" g="0" b="0"/>
+          </a:fillRef>
+          <a:effectRef idx="0">
+            <a:scrgbClr r="0" g="0" b="0"/>
+          </a:effectRef>
+          <a:fontRef idx="minor">
+            <a:schemeClr val="tx1"/>
+          </a:fontRef>
+        </p:style>
+      </p:cxnSp>
+      <p:cxnSp>
+        <p:nvCxnSpPr>
+          <p:cNvPr id="7" name="Connector: Curved 6">
+            <a:extLst>
+              <a:ext uri="{FF2B5EF4-FFF2-40B4-BE49-F238E27FC236}">
+                <a16:creationId xmlns:a16="http://schemas.microsoft.com/office/drawing/2014/main" id="{47FE4FF9-E8FA-AE95-5756-49769EBF35F5}"/>
+              </a:ext>
+            </a:extLst>
+          </p:cNvPr>
+          <p:cNvCxnSpPr>
+            <a:cxnSpLocks/>
+          </p:cNvCxnSpPr>
+          <p:nvPr/>
+        </p:nvCxnSpPr>
+        <p:spPr>
+          <a:xfrm rot="10800000" flipV="1">
+            <a:off x="1302331" y="300182"/>
+            <a:ext cx="5643414" cy="5394034"/>
+          </a:xfrm>
+          <a:prstGeom prst="curvedConnector3">
+            <a:avLst>
+              <a:gd name="adj1" fmla="val 20213"/>
+            </a:avLst>
+          </a:prstGeom>
+          <a:ln w="19050" cap="flat" cmpd="sng" algn="ctr">
+            <a:solidFill>
+              <a:schemeClr val="accent4"/>
+            </a:solidFill>
+            <a:prstDash val="solid"/>
+            <a:round/>
+            <a:headEnd type="arrow" w="med" len="med"/>
+            <a:tailEnd type="arrow" w="med" len="med"/>
+          </a:ln>
+        </p:spPr>
+        <p:style>
+          <a:lnRef idx="0">
+            <a:scrgbClr r="0" g="0" b="0"/>
+          </a:lnRef>
+          <a:fillRef idx="0">
+            <a:scrgbClr r="0" g="0" b="0"/>
+          </a:fillRef>
+          <a:effectRef idx="0">
+            <a:scrgbClr r="0" g="0" b="0"/>
+          </a:effectRef>
+          <a:fontRef idx="minor">
+            <a:schemeClr val="tx1"/>
+          </a:fontRef>
+        </p:style>
+      </p:cxnSp>
     </p:spTree>
     <p:extLst>
       <p:ext uri="{BB962C8B-B14F-4D97-AF65-F5344CB8AC3E}">
@@ -15390,7 +16362,7 @@
 </p:sld>
 </file>
 
-<file path=ppt/slides/slide46.xml><?xml version="1.0" encoding="utf-8"?>
+<file path=ppt/slides/slide47.xml><?xml version="1.0" encoding="utf-8"?>
 <p:sld xmlns:a="http://schemas.openxmlformats.org/drawingml/2006/main" xmlns:r="http://schemas.openxmlformats.org/officeDocument/2006/relationships" xmlns:p="http://schemas.openxmlformats.org/presentationml/2006/main">
   <p:cSld>
     <p:spTree>
@@ -15684,7 +16656,7 @@
 </p:sld>
 </file>
 
-<file path=ppt/slides/slide47.xml><?xml version="1.0" encoding="utf-8"?>
+<file path=ppt/slides/slide48.xml><?xml version="1.0" encoding="utf-8"?>
 <p:sld xmlns:a="http://schemas.openxmlformats.org/drawingml/2006/main" xmlns:r="http://schemas.openxmlformats.org/officeDocument/2006/relationships" xmlns:p="http://schemas.openxmlformats.org/presentationml/2006/main">
   <p:cSld>
     <p:spTree>
@@ -15989,7 +16961,7 @@
 </p:sld>
 </file>
 
-<file path=ppt/slides/slide48.xml><?xml version="1.0" encoding="utf-8"?>
+<file path=ppt/slides/slide49.xml><?xml version="1.0" encoding="utf-8"?>
 <p:sld xmlns:a="http://schemas.openxmlformats.org/drawingml/2006/main" xmlns:r="http://schemas.openxmlformats.org/officeDocument/2006/relationships" xmlns:p="http://schemas.openxmlformats.org/presentationml/2006/main">
   <p:cSld>
     <p:spTree>
@@ -16259,206 +17231,6 @@
     <p:extLst>
       <p:ext uri="{BB962C8B-B14F-4D97-AF65-F5344CB8AC3E}">
         <p14:creationId xmlns:p14="http://schemas.microsoft.com/office/powerpoint/2010/main" val="1833272379"/>
-      </p:ext>
-    </p:extLst>
-  </p:cSld>
-  <p:clrMapOvr>
-    <a:masterClrMapping/>
-  </p:clrMapOvr>
-</p:sld>
-</file>
-
-<file path=ppt/slides/slide49.xml><?xml version="1.0" encoding="utf-8"?>
-<p:sld xmlns:a="http://schemas.openxmlformats.org/drawingml/2006/main" xmlns:r="http://schemas.openxmlformats.org/officeDocument/2006/relationships" xmlns:p="http://schemas.openxmlformats.org/presentationml/2006/main">
-  <p:cSld>
-    <p:spTree>
-      <p:nvGrpSpPr>
-        <p:cNvPr id="1" name=""/>
-        <p:cNvGrpSpPr/>
-        <p:nvPr/>
-      </p:nvGrpSpPr>
-      <p:grpSpPr>
-        <a:xfrm>
-          <a:off x="0" y="0"/>
-          <a:ext cx="0" cy="0"/>
-          <a:chOff x="0" y="0"/>
-          <a:chExt cx="0" cy="0"/>
-        </a:xfrm>
-      </p:grpSpPr>
-      <p:sp>
-        <p:nvSpPr>
-          <p:cNvPr id="5" name="Rectangle: Rounded Corners 4">
-            <a:extLst>
-              <a:ext uri="{FF2B5EF4-FFF2-40B4-BE49-F238E27FC236}">
-                <a16:creationId xmlns:a16="http://schemas.microsoft.com/office/drawing/2014/main" id="{BADBB24C-5F57-A411-EB25-4559A2AFDB94}"/>
-              </a:ext>
-            </a:extLst>
-          </p:cNvPr>
-          <p:cNvSpPr/>
-          <p:nvPr/>
-        </p:nvSpPr>
-        <p:spPr>
-          <a:xfrm>
-            <a:off x="325581" y="701375"/>
-            <a:ext cx="11540837" cy="5455249"/>
-          </a:xfrm>
-          <a:prstGeom prst="roundRect">
-            <a:avLst>
-              <a:gd name="adj" fmla="val 8182"/>
-            </a:avLst>
-          </a:prstGeom>
-          <a:solidFill>
-            <a:schemeClr val="accent6">
-              <a:lumMod val="50000"/>
-            </a:schemeClr>
-          </a:solidFill>
-          <a:ln>
-            <a:noFill/>
-          </a:ln>
-        </p:spPr>
-        <p:style>
-          <a:lnRef idx="2">
-            <a:schemeClr val="accent1">
-              <a:shade val="15000"/>
-            </a:schemeClr>
-          </a:lnRef>
-          <a:fillRef idx="1">
-            <a:schemeClr val="accent1"/>
-          </a:fillRef>
-          <a:effectRef idx="0">
-            <a:schemeClr val="accent1"/>
-          </a:effectRef>
-          <a:fontRef idx="minor">
-            <a:schemeClr val="lt1"/>
-          </a:fontRef>
-        </p:style>
-        <p:txBody>
-          <a:bodyPr rtlCol="0" anchor="ctr"/>
-          <a:lstStyle/>
-          <a:p>
-            <a:r>
-              <a:rPr lang="en-US" b="1" dirty="0" err="1"/>
-              <a:t>backBtn</a:t>
-            </a:r>
-            <a:r>
-              <a:rPr lang="en-US" b="1" dirty="0"/>
-              <a:t> : Button (guestTickets.html)</a:t>
-            </a:r>
-          </a:p>
-          <a:p>
-            <a:r>
-              <a:rPr lang="en-US" b="1" dirty="0"/>
-              <a:t>Generate a Ticket{</a:t>
-            </a:r>
-          </a:p>
-          <a:p>
-            <a:pPr marL="742950" lvl="1" indent="-285750">
-              <a:buFont typeface="Arial" panose="020B0604020202020204" pitchFamily="34" charset="0"/>
-              <a:buChar char="•"/>
-            </a:pPr>
-            <a:r>
-              <a:rPr lang="en-US" b="1" dirty="0"/>
-              <a:t>Inputs{</a:t>
-            </a:r>
-          </a:p>
-          <a:p>
-            <a:pPr marL="1200150" lvl="2" indent="-285750">
-              <a:buFont typeface="Arial" panose="020B0604020202020204" pitchFamily="34" charset="0"/>
-              <a:buChar char="•"/>
-            </a:pPr>
-            <a:r>
-              <a:rPr lang="en-US" b="1" dirty="0"/>
-              <a:t>Select a Customer Service Agent : (`CS - FirstName`…) : selection</a:t>
-            </a:r>
-          </a:p>
-          <a:p>
-            <a:pPr marL="1200150" lvl="2" indent="-285750">
-              <a:buFont typeface="Arial" panose="020B0604020202020204" pitchFamily="34" charset="0"/>
-              <a:buChar char="•"/>
-            </a:pPr>
-            <a:r>
-              <a:rPr lang="en-US" b="1" dirty="0"/>
-              <a:t>Select a concern : (“Location”, “Appliances”, “Amenities”, “Payment”, “Others”) : selection</a:t>
-            </a:r>
-          </a:p>
-          <a:p>
-            <a:pPr marL="1200150" lvl="2" indent="-285750">
-              <a:buFont typeface="Arial" panose="020B0604020202020204" pitchFamily="34" charset="0"/>
-              <a:buChar char="•"/>
-            </a:pPr>
-            <a:r>
-              <a:rPr lang="en-US" b="1" dirty="0"/>
-              <a:t>Description (min of character ?) : text</a:t>
-            </a:r>
-          </a:p>
-          <a:p>
-            <a:pPr lvl="1"/>
-            <a:r>
-              <a:rPr lang="en-US" b="1" dirty="0"/>
-              <a:t>}</a:t>
-            </a:r>
-          </a:p>
-          <a:p>
-            <a:pPr marL="742950" lvl="1" indent="-285750">
-              <a:buFont typeface="Arial" panose="020B0604020202020204" pitchFamily="34" charset="0"/>
-              <a:buChar char="•"/>
-            </a:pPr>
-            <a:r>
-              <a:rPr lang="en-US" b="1" dirty="0" err="1"/>
-              <a:t>generateBtn</a:t>
-            </a:r>
-            <a:r>
-              <a:rPr lang="en-US" b="1" dirty="0"/>
-              <a:t> : Buttons (API) &gt; go back to guestTickets.html</a:t>
-            </a:r>
-          </a:p>
-          <a:p>
-            <a:r>
-              <a:rPr lang="en-US" b="1" dirty="0"/>
-              <a:t>}</a:t>
-            </a:r>
-          </a:p>
-        </p:txBody>
-      </p:sp>
-      <p:sp>
-        <p:nvSpPr>
-          <p:cNvPr id="4" name="TextBox 3">
-            <a:extLst>
-              <a:ext uri="{FF2B5EF4-FFF2-40B4-BE49-F238E27FC236}">
-                <a16:creationId xmlns:a16="http://schemas.microsoft.com/office/drawing/2014/main" id="{F259B9EF-2882-3D95-7422-68A27385F852}"/>
-              </a:ext>
-            </a:extLst>
-          </p:cNvPr>
-          <p:cNvSpPr txBox="1"/>
-          <p:nvPr/>
-        </p:nvSpPr>
-        <p:spPr>
-          <a:xfrm>
-            <a:off x="-1" y="0"/>
-            <a:ext cx="4341092" cy="400110"/>
-          </a:xfrm>
-          <a:prstGeom prst="rect">
-            <a:avLst/>
-          </a:prstGeom>
-          <a:noFill/>
-        </p:spPr>
-        <p:txBody>
-          <a:bodyPr wrap="square" rtlCol="0">
-            <a:spAutoFit/>
-          </a:bodyPr>
-          <a:lstStyle/>
-          <a:p>
-            <a:r>
-              <a:rPr lang="en-US" sz="2000" b="1" dirty="0"/>
-              <a:t>guestGenerateTicket.html</a:t>
-            </a:r>
-          </a:p>
-        </p:txBody>
-      </p:sp>
-    </p:spTree>
-    <p:extLst>
-      <p:ext uri="{BB962C8B-B14F-4D97-AF65-F5344CB8AC3E}">
-        <p14:creationId xmlns:p14="http://schemas.microsoft.com/office/powerpoint/2010/main" val="3858012836"/>
       </p:ext>
     </p:extLst>
   </p:cSld>
@@ -17044,6 +17816,206 @@
         </p:nvSpPr>
         <p:spPr>
           <a:xfrm>
+            <a:off x="325581" y="701375"/>
+            <a:ext cx="11540837" cy="5455249"/>
+          </a:xfrm>
+          <a:prstGeom prst="roundRect">
+            <a:avLst>
+              <a:gd name="adj" fmla="val 8182"/>
+            </a:avLst>
+          </a:prstGeom>
+          <a:solidFill>
+            <a:schemeClr val="accent6">
+              <a:lumMod val="50000"/>
+            </a:schemeClr>
+          </a:solidFill>
+          <a:ln>
+            <a:noFill/>
+          </a:ln>
+        </p:spPr>
+        <p:style>
+          <a:lnRef idx="2">
+            <a:schemeClr val="accent1">
+              <a:shade val="15000"/>
+            </a:schemeClr>
+          </a:lnRef>
+          <a:fillRef idx="1">
+            <a:schemeClr val="accent1"/>
+          </a:fillRef>
+          <a:effectRef idx="0">
+            <a:schemeClr val="accent1"/>
+          </a:effectRef>
+          <a:fontRef idx="minor">
+            <a:schemeClr val="lt1"/>
+          </a:fontRef>
+        </p:style>
+        <p:txBody>
+          <a:bodyPr rtlCol="0" anchor="ctr"/>
+          <a:lstStyle/>
+          <a:p>
+            <a:r>
+              <a:rPr lang="en-US" b="1" dirty="0" err="1"/>
+              <a:t>backBtn</a:t>
+            </a:r>
+            <a:r>
+              <a:rPr lang="en-US" b="1" dirty="0"/>
+              <a:t> : Button (guestTickets.html)</a:t>
+            </a:r>
+          </a:p>
+          <a:p>
+            <a:r>
+              <a:rPr lang="en-US" b="1" dirty="0"/>
+              <a:t>Generate a Ticket{</a:t>
+            </a:r>
+          </a:p>
+          <a:p>
+            <a:pPr marL="742950" lvl="1" indent="-285750">
+              <a:buFont typeface="Arial" panose="020B0604020202020204" pitchFamily="34" charset="0"/>
+              <a:buChar char="•"/>
+            </a:pPr>
+            <a:r>
+              <a:rPr lang="en-US" b="1" dirty="0"/>
+              <a:t>Inputs{</a:t>
+            </a:r>
+          </a:p>
+          <a:p>
+            <a:pPr marL="1200150" lvl="2" indent="-285750">
+              <a:buFont typeface="Arial" panose="020B0604020202020204" pitchFamily="34" charset="0"/>
+              <a:buChar char="•"/>
+            </a:pPr>
+            <a:r>
+              <a:rPr lang="en-US" b="1" dirty="0"/>
+              <a:t>Select a Customer Service Agent : (`CS - FirstName`…) : selection</a:t>
+            </a:r>
+          </a:p>
+          <a:p>
+            <a:pPr marL="1200150" lvl="2" indent="-285750">
+              <a:buFont typeface="Arial" panose="020B0604020202020204" pitchFamily="34" charset="0"/>
+              <a:buChar char="•"/>
+            </a:pPr>
+            <a:r>
+              <a:rPr lang="en-US" b="1" dirty="0"/>
+              <a:t>Select a concern : (“Location”, “Appliances”, “Amenities”, “Payment”, “Others”) : selection</a:t>
+            </a:r>
+          </a:p>
+          <a:p>
+            <a:pPr marL="1200150" lvl="2" indent="-285750">
+              <a:buFont typeface="Arial" panose="020B0604020202020204" pitchFamily="34" charset="0"/>
+              <a:buChar char="•"/>
+            </a:pPr>
+            <a:r>
+              <a:rPr lang="en-US" b="1" dirty="0"/>
+              <a:t>Description (min of character ?) : text</a:t>
+            </a:r>
+          </a:p>
+          <a:p>
+            <a:pPr lvl="1"/>
+            <a:r>
+              <a:rPr lang="en-US" b="1" dirty="0"/>
+              <a:t>}</a:t>
+            </a:r>
+          </a:p>
+          <a:p>
+            <a:pPr marL="742950" lvl="1" indent="-285750">
+              <a:buFont typeface="Arial" panose="020B0604020202020204" pitchFamily="34" charset="0"/>
+              <a:buChar char="•"/>
+            </a:pPr>
+            <a:r>
+              <a:rPr lang="en-US" b="1" dirty="0" err="1"/>
+              <a:t>generateBtn</a:t>
+            </a:r>
+            <a:r>
+              <a:rPr lang="en-US" b="1" dirty="0"/>
+              <a:t> : Buttons (API) &gt; go back to guestTickets.html</a:t>
+            </a:r>
+          </a:p>
+          <a:p>
+            <a:r>
+              <a:rPr lang="en-US" b="1" dirty="0"/>
+              <a:t>}</a:t>
+            </a:r>
+          </a:p>
+        </p:txBody>
+      </p:sp>
+      <p:sp>
+        <p:nvSpPr>
+          <p:cNvPr id="4" name="TextBox 3">
+            <a:extLst>
+              <a:ext uri="{FF2B5EF4-FFF2-40B4-BE49-F238E27FC236}">
+                <a16:creationId xmlns:a16="http://schemas.microsoft.com/office/drawing/2014/main" id="{F259B9EF-2882-3D95-7422-68A27385F852}"/>
+              </a:ext>
+            </a:extLst>
+          </p:cNvPr>
+          <p:cNvSpPr txBox="1"/>
+          <p:nvPr/>
+        </p:nvSpPr>
+        <p:spPr>
+          <a:xfrm>
+            <a:off x="-1" y="0"/>
+            <a:ext cx="4341092" cy="400110"/>
+          </a:xfrm>
+          <a:prstGeom prst="rect">
+            <a:avLst/>
+          </a:prstGeom>
+          <a:noFill/>
+        </p:spPr>
+        <p:txBody>
+          <a:bodyPr wrap="square" rtlCol="0">
+            <a:spAutoFit/>
+          </a:bodyPr>
+          <a:lstStyle/>
+          <a:p>
+            <a:r>
+              <a:rPr lang="en-US" sz="2000" b="1" dirty="0"/>
+              <a:t>guestGenerateTicket.html</a:t>
+            </a:r>
+          </a:p>
+        </p:txBody>
+      </p:sp>
+    </p:spTree>
+    <p:extLst>
+      <p:ext uri="{BB962C8B-B14F-4D97-AF65-F5344CB8AC3E}">
+        <p14:creationId xmlns:p14="http://schemas.microsoft.com/office/powerpoint/2010/main" val="3858012836"/>
+      </p:ext>
+    </p:extLst>
+  </p:cSld>
+  <p:clrMapOvr>
+    <a:masterClrMapping/>
+  </p:clrMapOvr>
+</p:sld>
+</file>
+
+<file path=ppt/slides/slide51.xml><?xml version="1.0" encoding="utf-8"?>
+<p:sld xmlns:a="http://schemas.openxmlformats.org/drawingml/2006/main" xmlns:r="http://schemas.openxmlformats.org/officeDocument/2006/relationships" xmlns:p="http://schemas.openxmlformats.org/presentationml/2006/main">
+  <p:cSld>
+    <p:spTree>
+      <p:nvGrpSpPr>
+        <p:cNvPr id="1" name=""/>
+        <p:cNvGrpSpPr/>
+        <p:nvPr/>
+      </p:nvGrpSpPr>
+      <p:grpSpPr>
+        <a:xfrm>
+          <a:off x="0" y="0"/>
+          <a:ext cx="0" cy="0"/>
+          <a:chOff x="0" y="0"/>
+          <a:chExt cx="0" cy="0"/>
+        </a:xfrm>
+      </p:grpSpPr>
+      <p:sp>
+        <p:nvSpPr>
+          <p:cNvPr id="5" name="Rectangle: Rounded Corners 4">
+            <a:extLst>
+              <a:ext uri="{FF2B5EF4-FFF2-40B4-BE49-F238E27FC236}">
+                <a16:creationId xmlns:a16="http://schemas.microsoft.com/office/drawing/2014/main" id="{BADBB24C-5F57-A411-EB25-4559A2AFDB94}"/>
+              </a:ext>
+            </a:extLst>
+          </p:cNvPr>
+          <p:cNvSpPr/>
+          <p:nvPr/>
+        </p:nvSpPr>
+        <p:spPr>
+          <a:xfrm>
             <a:off x="4217554" y="2540248"/>
             <a:ext cx="3756892" cy="1777504"/>
           </a:xfrm>
@@ -17172,7 +18144,7 @@
 </p:sld>
 </file>
 
-<file path=ppt/slides/slide51.xml><?xml version="1.0" encoding="utf-8"?>
+<file path=ppt/slides/slide52.xml><?xml version="1.0" encoding="utf-8"?>
 <p:sld xmlns:a="http://schemas.openxmlformats.org/drawingml/2006/main" xmlns:r="http://schemas.openxmlformats.org/officeDocument/2006/relationships" xmlns:p="http://schemas.openxmlformats.org/presentationml/2006/main">
   <p:cSld>
     <p:spTree>
@@ -17321,7 +18293,7 @@
 </p:sld>
 </file>
 
-<file path=ppt/slides/slide52.xml><?xml version="1.0" encoding="utf-8"?>
+<file path=ppt/slides/slide53.xml><?xml version="1.0" encoding="utf-8"?>
 <p:sld xmlns:a="http://schemas.openxmlformats.org/drawingml/2006/main" xmlns:r="http://schemas.openxmlformats.org/officeDocument/2006/relationships" xmlns:p="http://schemas.openxmlformats.org/presentationml/2006/main">
   <p:cSld>
     <p:spTree>
@@ -17570,7 +18542,7 @@
             </a:r>
             <a:r>
               <a:rPr lang="en-US" b="1" dirty="0"/>
-              <a:t>){button: pay remaining balance (redirection)}</a:t>
+              <a:t>){button: pay remaining balance (go to guestPayment.html)}</a:t>
             </a:r>
           </a:p>
           <a:p>
@@ -18637,6 +19609,55 @@
           <a:xfrm flipV="1">
             <a:off x="4368800" y="4836160"/>
             <a:ext cx="629920" cy="447040"/>
+          </a:xfrm>
+          <a:prstGeom prst="curvedConnector3">
+            <a:avLst>
+              <a:gd name="adj1" fmla="val 50000"/>
+            </a:avLst>
+          </a:prstGeom>
+          <a:ln w="19050" cap="flat" cmpd="sng" algn="ctr">
+            <a:solidFill>
+              <a:schemeClr val="accent4"/>
+            </a:solidFill>
+            <a:prstDash val="solid"/>
+            <a:round/>
+            <a:headEnd type="arrow" w="med" len="med"/>
+            <a:tailEnd type="arrow" w="med" len="med"/>
+          </a:ln>
+        </p:spPr>
+        <p:style>
+          <a:lnRef idx="0">
+            <a:scrgbClr r="0" g="0" b="0"/>
+          </a:lnRef>
+          <a:fillRef idx="0">
+            <a:scrgbClr r="0" g="0" b="0"/>
+          </a:fillRef>
+          <a:effectRef idx="0">
+            <a:scrgbClr r="0" g="0" b="0"/>
+          </a:effectRef>
+          <a:fontRef idx="minor">
+            <a:schemeClr val="tx1"/>
+          </a:fontRef>
+        </p:style>
+      </p:cxnSp>
+      <p:cxnSp>
+        <p:nvCxnSpPr>
+          <p:cNvPr id="5" name="Connector: Curved 4">
+            <a:extLst>
+              <a:ext uri="{FF2B5EF4-FFF2-40B4-BE49-F238E27FC236}">
+                <a16:creationId xmlns:a16="http://schemas.microsoft.com/office/drawing/2014/main" id="{1D5BBE9A-8A86-5CDE-9D4D-E222B4AB3CC9}"/>
+              </a:ext>
+            </a:extLst>
+          </p:cNvPr>
+          <p:cNvCxnSpPr>
+            <a:cxnSpLocks/>
+          </p:cNvCxnSpPr>
+          <p:nvPr/>
+        </p:nvCxnSpPr>
+        <p:spPr>
+          <a:xfrm rot="5400000" flipH="1" flipV="1">
+            <a:off x="-193963" y="3740728"/>
+            <a:ext cx="1551709" cy="461818"/>
           </a:xfrm>
           <a:prstGeom prst="curvedConnector3">
             <a:avLst>

--- a/betchaBooking-USECASE.pptx
+++ b/betchaBooking-USECASE.pptx
@@ -36,28 +36,33 @@
     <p:sldId id="280" r:id="rId30"/>
     <p:sldId id="281" r:id="rId31"/>
     <p:sldId id="282" r:id="rId32"/>
-    <p:sldId id="283" r:id="rId33"/>
-    <p:sldId id="285" r:id="rId34"/>
-    <p:sldId id="286" r:id="rId35"/>
-    <p:sldId id="290" r:id="rId36"/>
-    <p:sldId id="291" r:id="rId37"/>
-    <p:sldId id="289" r:id="rId38"/>
-    <p:sldId id="292" r:id="rId39"/>
-    <p:sldId id="293" r:id="rId40"/>
-    <p:sldId id="294" r:id="rId41"/>
-    <p:sldId id="295" r:id="rId42"/>
-    <p:sldId id="296" r:id="rId43"/>
-    <p:sldId id="297" r:id="rId44"/>
-    <p:sldId id="299" r:id="rId45"/>
-    <p:sldId id="300" r:id="rId46"/>
-    <p:sldId id="309" r:id="rId47"/>
-    <p:sldId id="306" r:id="rId48"/>
-    <p:sldId id="307" r:id="rId49"/>
-    <p:sldId id="302" r:id="rId50"/>
-    <p:sldId id="308" r:id="rId51"/>
-    <p:sldId id="301" r:id="rId52"/>
-    <p:sldId id="303" r:id="rId53"/>
-    <p:sldId id="304" r:id="rId54"/>
+    <p:sldId id="312" r:id="rId33"/>
+    <p:sldId id="313" r:id="rId34"/>
+    <p:sldId id="314" r:id="rId35"/>
+    <p:sldId id="315" r:id="rId36"/>
+    <p:sldId id="316" r:id="rId37"/>
+    <p:sldId id="283" r:id="rId38"/>
+    <p:sldId id="285" r:id="rId39"/>
+    <p:sldId id="286" r:id="rId40"/>
+    <p:sldId id="290" r:id="rId41"/>
+    <p:sldId id="291" r:id="rId42"/>
+    <p:sldId id="289" r:id="rId43"/>
+    <p:sldId id="292" r:id="rId44"/>
+    <p:sldId id="293" r:id="rId45"/>
+    <p:sldId id="294" r:id="rId46"/>
+    <p:sldId id="295" r:id="rId47"/>
+    <p:sldId id="296" r:id="rId48"/>
+    <p:sldId id="297" r:id="rId49"/>
+    <p:sldId id="299" r:id="rId50"/>
+    <p:sldId id="300" r:id="rId51"/>
+    <p:sldId id="309" r:id="rId52"/>
+    <p:sldId id="306" r:id="rId53"/>
+    <p:sldId id="307" r:id="rId54"/>
+    <p:sldId id="302" r:id="rId55"/>
+    <p:sldId id="308" r:id="rId56"/>
+    <p:sldId id="301" r:id="rId57"/>
+    <p:sldId id="303" r:id="rId58"/>
+    <p:sldId id="304" r:id="rId59"/>
   </p:sldIdLst>
   <p:sldSz cx="12192000" cy="6858000"/>
   <p:notesSz cx="6858000" cy="9144000"/>
@@ -311,7 +316,7 @@
           <a:p>
             <a:fld id="{D723CA93-4BBF-43AB-A538-39903E4C269C}" type="datetimeFigureOut">
               <a:rPr lang="en-US" smtClean="0"/>
-              <a:t>5/11/2025</a:t>
+              <a:t>5/21/2025</a:t>
             </a:fld>
             <a:endParaRPr lang="en-US"/>
           </a:p>
@@ -509,7 +514,7 @@
           <a:p>
             <a:fld id="{D723CA93-4BBF-43AB-A538-39903E4C269C}" type="datetimeFigureOut">
               <a:rPr lang="en-US" smtClean="0"/>
-              <a:t>5/11/2025</a:t>
+              <a:t>5/21/2025</a:t>
             </a:fld>
             <a:endParaRPr lang="en-US"/>
           </a:p>
@@ -717,7 +722,7 @@
           <a:p>
             <a:fld id="{D723CA93-4BBF-43AB-A538-39903E4C269C}" type="datetimeFigureOut">
               <a:rPr lang="en-US" smtClean="0"/>
-              <a:t>5/11/2025</a:t>
+              <a:t>5/21/2025</a:t>
             </a:fld>
             <a:endParaRPr lang="en-US"/>
           </a:p>
@@ -915,7 +920,7 @@
           <a:p>
             <a:fld id="{D723CA93-4BBF-43AB-A538-39903E4C269C}" type="datetimeFigureOut">
               <a:rPr lang="en-US" smtClean="0"/>
-              <a:t>5/11/2025</a:t>
+              <a:t>5/21/2025</a:t>
             </a:fld>
             <a:endParaRPr lang="en-US"/>
           </a:p>
@@ -1190,7 +1195,7 @@
           <a:p>
             <a:fld id="{D723CA93-4BBF-43AB-A538-39903E4C269C}" type="datetimeFigureOut">
               <a:rPr lang="en-US" smtClean="0"/>
-              <a:t>5/11/2025</a:t>
+              <a:t>5/21/2025</a:t>
             </a:fld>
             <a:endParaRPr lang="en-US"/>
           </a:p>
@@ -1455,7 +1460,7 @@
           <a:p>
             <a:fld id="{D723CA93-4BBF-43AB-A538-39903E4C269C}" type="datetimeFigureOut">
               <a:rPr lang="en-US" smtClean="0"/>
-              <a:t>5/11/2025</a:t>
+              <a:t>5/21/2025</a:t>
             </a:fld>
             <a:endParaRPr lang="en-US"/>
           </a:p>
@@ -1867,7 +1872,7 @@
           <a:p>
             <a:fld id="{D723CA93-4BBF-43AB-A538-39903E4C269C}" type="datetimeFigureOut">
               <a:rPr lang="en-US" smtClean="0"/>
-              <a:t>5/11/2025</a:t>
+              <a:t>5/21/2025</a:t>
             </a:fld>
             <a:endParaRPr lang="en-US"/>
           </a:p>
@@ -2008,7 +2013,7 @@
           <a:p>
             <a:fld id="{D723CA93-4BBF-43AB-A538-39903E4C269C}" type="datetimeFigureOut">
               <a:rPr lang="en-US" smtClean="0"/>
-              <a:t>5/11/2025</a:t>
+              <a:t>5/21/2025</a:t>
             </a:fld>
             <a:endParaRPr lang="en-US"/>
           </a:p>
@@ -2121,7 +2126,7 @@
           <a:p>
             <a:fld id="{D723CA93-4BBF-43AB-A538-39903E4C269C}" type="datetimeFigureOut">
               <a:rPr lang="en-US" smtClean="0"/>
-              <a:t>5/11/2025</a:t>
+              <a:t>5/21/2025</a:t>
             </a:fld>
             <a:endParaRPr lang="en-US"/>
           </a:p>
@@ -2432,7 +2437,7 @@
           <a:p>
             <a:fld id="{D723CA93-4BBF-43AB-A538-39903E4C269C}" type="datetimeFigureOut">
               <a:rPr lang="en-US" smtClean="0"/>
-              <a:t>5/11/2025</a:t>
+              <a:t>5/21/2025</a:t>
             </a:fld>
             <a:endParaRPr lang="en-US"/>
           </a:p>
@@ -2720,7 +2725,7 @@
           <a:p>
             <a:fld id="{D723CA93-4BBF-43AB-A538-39903E4C269C}" type="datetimeFigureOut">
               <a:rPr lang="en-US" smtClean="0"/>
-              <a:t>5/11/2025</a:t>
+              <a:t>5/21/2025</a:t>
             </a:fld>
             <a:endParaRPr lang="en-US"/>
           </a:p>
@@ -2961,7 +2966,7 @@
           <a:p>
             <a:fld id="{D723CA93-4BBF-43AB-A538-39903E4C269C}" type="datetimeFigureOut">
               <a:rPr lang="en-US" smtClean="0"/>
-              <a:t>5/11/2025</a:t>
+              <a:t>5/21/2025</a:t>
             </a:fld>
             <a:endParaRPr lang="en-US"/>
           </a:p>
@@ -3844,6 +3849,16 @@
             </a:r>
           </a:p>
           <a:p>
+            <a:pPr marL="1257300" lvl="2" indent="-342900">
+              <a:buFont typeface="Arial" panose="020B0604020202020204" pitchFamily="34" charset="0"/>
+              <a:buChar char="•"/>
+            </a:pPr>
+            <a:r>
+              <a:rPr lang="en-US" sz="2000" b="1" dirty="0"/>
+              <a:t>adminPayment.html</a:t>
+            </a:r>
+          </a:p>
+          <a:p>
             <a:pPr lvl="1"/>
             <a:r>
               <a:rPr lang="en-US" sz="2000" b="1" dirty="0"/>
@@ -11093,6 +11108,1025 @@
       </p:grpSpPr>
       <p:sp>
         <p:nvSpPr>
+          <p:cNvPr id="4" name="TextBox 3">
+            <a:extLst>
+              <a:ext uri="{FF2B5EF4-FFF2-40B4-BE49-F238E27FC236}">
+                <a16:creationId xmlns:a16="http://schemas.microsoft.com/office/drawing/2014/main" id="{E094F53A-6361-E94E-5BDE-6B5297C1498E}"/>
+              </a:ext>
+            </a:extLst>
+          </p:cNvPr>
+          <p:cNvSpPr txBox="1"/>
+          <p:nvPr/>
+        </p:nvSpPr>
+        <p:spPr>
+          <a:xfrm>
+            <a:off x="-1" y="0"/>
+            <a:ext cx="3519055" cy="400110"/>
+          </a:xfrm>
+          <a:prstGeom prst="rect">
+            <a:avLst/>
+          </a:prstGeom>
+          <a:noFill/>
+        </p:spPr>
+        <p:txBody>
+          <a:bodyPr wrap="square" rtlCol="0">
+            <a:spAutoFit/>
+          </a:bodyPr>
+          <a:lstStyle/>
+          <a:p>
+            <a:r>
+              <a:rPr lang="en-US" sz="2000" b="1" dirty="0"/>
+              <a:t>adminPayment.html</a:t>
+            </a:r>
+          </a:p>
+        </p:txBody>
+      </p:sp>
+      <p:sp>
+        <p:nvSpPr>
+          <p:cNvPr id="3" name="Rectangle: Rounded Corners 2">
+            <a:extLst>
+              <a:ext uri="{FF2B5EF4-FFF2-40B4-BE49-F238E27FC236}">
+                <a16:creationId xmlns:a16="http://schemas.microsoft.com/office/drawing/2014/main" id="{E84989AE-1420-7CFC-7A33-B4FACAA95828}"/>
+              </a:ext>
+            </a:extLst>
+          </p:cNvPr>
+          <p:cNvSpPr/>
+          <p:nvPr/>
+        </p:nvSpPr>
+        <p:spPr>
+          <a:xfrm>
+            <a:off x="2328948" y="1216313"/>
+            <a:ext cx="7534103" cy="4425374"/>
+          </a:xfrm>
+          <a:prstGeom prst="roundRect">
+            <a:avLst>
+              <a:gd name="adj" fmla="val 8439"/>
+            </a:avLst>
+          </a:prstGeom>
+          <a:solidFill>
+            <a:schemeClr val="accent6">
+              <a:lumMod val="50000"/>
+            </a:schemeClr>
+          </a:solidFill>
+          <a:ln>
+            <a:noFill/>
+          </a:ln>
+        </p:spPr>
+        <p:style>
+          <a:lnRef idx="2">
+            <a:schemeClr val="accent1">
+              <a:shade val="15000"/>
+            </a:schemeClr>
+          </a:lnRef>
+          <a:fillRef idx="1">
+            <a:schemeClr val="accent1"/>
+          </a:fillRef>
+          <a:effectRef idx="0">
+            <a:schemeClr val="accent1"/>
+          </a:effectRef>
+          <a:fontRef idx="minor">
+            <a:schemeClr val="lt1"/>
+          </a:fontRef>
+        </p:style>
+        <p:txBody>
+          <a:bodyPr rtlCol="0" anchor="ctr"/>
+          <a:lstStyle/>
+          <a:p>
+            <a:r>
+              <a:rPr lang="en-US" sz="2000" b="1" dirty="0"/>
+              <a:t>Button : Add Payment (adminAddPayment.html)</a:t>
+            </a:r>
+          </a:p>
+          <a:p>
+            <a:r>
+              <a:rPr lang="en-US" sz="2000" b="1" dirty="0" err="1"/>
+              <a:t>PaymentList</a:t>
+            </a:r>
+            <a:r>
+              <a:rPr lang="en-US" sz="2000" b="1" dirty="0"/>
+              <a:t>{</a:t>
+            </a:r>
+          </a:p>
+          <a:p>
+            <a:r>
+              <a:rPr lang="en-US" sz="2000" b="1" dirty="0"/>
+              <a:t>// card or table</a:t>
+            </a:r>
+          </a:p>
+          <a:p>
+            <a:pPr marL="800100" lvl="1" indent="-342900">
+              <a:buFont typeface="Arial" panose="020B0604020202020204" pitchFamily="34" charset="0"/>
+              <a:buChar char="•"/>
+            </a:pPr>
+            <a:r>
+              <a:rPr lang="en-US" sz="2000" b="1" dirty="0"/>
+              <a:t>Payment Platform Name</a:t>
+            </a:r>
+          </a:p>
+          <a:p>
+            <a:pPr marL="800100" lvl="1" indent="-342900">
+              <a:buFont typeface="Arial" panose="020B0604020202020204" pitchFamily="34" charset="0"/>
+              <a:buChar char="•"/>
+            </a:pPr>
+            <a:r>
+              <a:rPr lang="en-US" sz="2000" b="1" dirty="0"/>
+              <a:t>Button : edit (adminEditPayment.html)</a:t>
+            </a:r>
+          </a:p>
+          <a:p>
+            <a:r>
+              <a:rPr lang="en-US" sz="2000" b="1" dirty="0"/>
+              <a:t>}</a:t>
+            </a:r>
+          </a:p>
+        </p:txBody>
+      </p:sp>
+    </p:spTree>
+    <p:extLst>
+      <p:ext uri="{BB962C8B-B14F-4D97-AF65-F5344CB8AC3E}">
+        <p14:creationId xmlns:p14="http://schemas.microsoft.com/office/powerpoint/2010/main" val="2608960860"/>
+      </p:ext>
+    </p:extLst>
+  </p:cSld>
+  <p:clrMapOvr>
+    <a:masterClrMapping/>
+  </p:clrMapOvr>
+</p:sld>
+</file>
+
+<file path=ppt/slides/slide33.xml><?xml version="1.0" encoding="utf-8"?>
+<p:sld xmlns:a="http://schemas.openxmlformats.org/drawingml/2006/main" xmlns:r="http://schemas.openxmlformats.org/officeDocument/2006/relationships" xmlns:p="http://schemas.openxmlformats.org/presentationml/2006/main">
+  <p:cSld>
+    <p:spTree>
+      <p:nvGrpSpPr>
+        <p:cNvPr id="1" name=""/>
+        <p:cNvGrpSpPr/>
+        <p:nvPr/>
+      </p:nvGrpSpPr>
+      <p:grpSpPr>
+        <a:xfrm>
+          <a:off x="0" y="0"/>
+          <a:ext cx="0" cy="0"/>
+          <a:chOff x="0" y="0"/>
+          <a:chExt cx="0" cy="0"/>
+        </a:xfrm>
+      </p:grpSpPr>
+      <p:sp>
+        <p:nvSpPr>
+          <p:cNvPr id="4" name="TextBox 3">
+            <a:extLst>
+              <a:ext uri="{FF2B5EF4-FFF2-40B4-BE49-F238E27FC236}">
+                <a16:creationId xmlns:a16="http://schemas.microsoft.com/office/drawing/2014/main" id="{E094F53A-6361-E94E-5BDE-6B5297C1498E}"/>
+              </a:ext>
+            </a:extLst>
+          </p:cNvPr>
+          <p:cNvSpPr txBox="1"/>
+          <p:nvPr/>
+        </p:nvSpPr>
+        <p:spPr>
+          <a:xfrm>
+            <a:off x="-1" y="0"/>
+            <a:ext cx="3519055" cy="400110"/>
+          </a:xfrm>
+          <a:prstGeom prst="rect">
+            <a:avLst/>
+          </a:prstGeom>
+          <a:noFill/>
+        </p:spPr>
+        <p:txBody>
+          <a:bodyPr wrap="square" rtlCol="0">
+            <a:spAutoFit/>
+          </a:bodyPr>
+          <a:lstStyle/>
+          <a:p>
+            <a:r>
+              <a:rPr lang="en-US" sz="2000" b="1" dirty="0"/>
+              <a:t>adminPayment.html</a:t>
+            </a:r>
+          </a:p>
+        </p:txBody>
+      </p:sp>
+      <p:sp>
+        <p:nvSpPr>
+          <p:cNvPr id="3" name="Rectangle: Rounded Corners 2">
+            <a:extLst>
+              <a:ext uri="{FF2B5EF4-FFF2-40B4-BE49-F238E27FC236}">
+                <a16:creationId xmlns:a16="http://schemas.microsoft.com/office/drawing/2014/main" id="{E84989AE-1420-7CFC-7A33-B4FACAA95828}"/>
+              </a:ext>
+            </a:extLst>
+          </p:cNvPr>
+          <p:cNvSpPr/>
+          <p:nvPr/>
+        </p:nvSpPr>
+        <p:spPr>
+          <a:xfrm>
+            <a:off x="2328948" y="1216313"/>
+            <a:ext cx="7534103" cy="4425374"/>
+          </a:xfrm>
+          <a:prstGeom prst="roundRect">
+            <a:avLst>
+              <a:gd name="adj" fmla="val 8439"/>
+            </a:avLst>
+          </a:prstGeom>
+          <a:solidFill>
+            <a:schemeClr val="accent6">
+              <a:lumMod val="50000"/>
+            </a:schemeClr>
+          </a:solidFill>
+          <a:ln>
+            <a:noFill/>
+          </a:ln>
+        </p:spPr>
+        <p:style>
+          <a:lnRef idx="2">
+            <a:schemeClr val="accent1">
+              <a:shade val="15000"/>
+            </a:schemeClr>
+          </a:lnRef>
+          <a:fillRef idx="1">
+            <a:schemeClr val="accent1"/>
+          </a:fillRef>
+          <a:effectRef idx="0">
+            <a:schemeClr val="accent1"/>
+          </a:effectRef>
+          <a:fontRef idx="minor">
+            <a:schemeClr val="lt1"/>
+          </a:fontRef>
+        </p:style>
+        <p:txBody>
+          <a:bodyPr rtlCol="0" anchor="ctr"/>
+          <a:lstStyle/>
+          <a:p>
+            <a:r>
+              <a:rPr lang="en-US" sz="2000" b="1" dirty="0"/>
+              <a:t>Button : Add Payment (adminAddPayment.html)</a:t>
+            </a:r>
+          </a:p>
+          <a:p>
+            <a:r>
+              <a:rPr lang="en-US" sz="2000" b="1" dirty="0" err="1"/>
+              <a:t>PaymentList</a:t>
+            </a:r>
+            <a:r>
+              <a:rPr lang="en-US" sz="2000" b="1" dirty="0"/>
+              <a:t>{</a:t>
+            </a:r>
+          </a:p>
+          <a:p>
+            <a:r>
+              <a:rPr lang="en-US" sz="2000" b="1" dirty="0"/>
+              <a:t>// card or table</a:t>
+            </a:r>
+          </a:p>
+          <a:p>
+            <a:pPr marL="800100" lvl="1" indent="-342900">
+              <a:buFont typeface="Arial" panose="020B0604020202020204" pitchFamily="34" charset="0"/>
+              <a:buChar char="•"/>
+            </a:pPr>
+            <a:r>
+              <a:rPr lang="en-US" sz="2000" b="1" dirty="0"/>
+              <a:t>Payment Platform Name</a:t>
+            </a:r>
+          </a:p>
+          <a:p>
+            <a:pPr marL="800100" lvl="1" indent="-342900">
+              <a:buFont typeface="Arial" panose="020B0604020202020204" pitchFamily="34" charset="0"/>
+              <a:buChar char="•"/>
+            </a:pPr>
+            <a:r>
+              <a:rPr lang="en-US" sz="2000" b="1" dirty="0"/>
+              <a:t>Button : view details (adminViewPayment.html)</a:t>
+            </a:r>
+          </a:p>
+          <a:p>
+            <a:r>
+              <a:rPr lang="en-US" sz="2000" b="1" dirty="0"/>
+              <a:t>}</a:t>
+            </a:r>
+          </a:p>
+        </p:txBody>
+      </p:sp>
+    </p:spTree>
+    <p:extLst>
+      <p:ext uri="{BB962C8B-B14F-4D97-AF65-F5344CB8AC3E}">
+        <p14:creationId xmlns:p14="http://schemas.microsoft.com/office/powerpoint/2010/main" val="2484489619"/>
+      </p:ext>
+    </p:extLst>
+  </p:cSld>
+  <p:clrMapOvr>
+    <a:masterClrMapping/>
+  </p:clrMapOvr>
+</p:sld>
+</file>
+
+<file path=ppt/slides/slide34.xml><?xml version="1.0" encoding="utf-8"?>
+<p:sld xmlns:a="http://schemas.openxmlformats.org/drawingml/2006/main" xmlns:r="http://schemas.openxmlformats.org/officeDocument/2006/relationships" xmlns:p="http://schemas.openxmlformats.org/presentationml/2006/main">
+  <p:cSld>
+    <p:spTree>
+      <p:nvGrpSpPr>
+        <p:cNvPr id="1" name=""/>
+        <p:cNvGrpSpPr/>
+        <p:nvPr/>
+      </p:nvGrpSpPr>
+      <p:grpSpPr>
+        <a:xfrm>
+          <a:off x="0" y="0"/>
+          <a:ext cx="0" cy="0"/>
+          <a:chOff x="0" y="0"/>
+          <a:chExt cx="0" cy="0"/>
+        </a:xfrm>
+      </p:grpSpPr>
+      <p:sp>
+        <p:nvSpPr>
+          <p:cNvPr id="4" name="TextBox 3">
+            <a:extLst>
+              <a:ext uri="{FF2B5EF4-FFF2-40B4-BE49-F238E27FC236}">
+                <a16:creationId xmlns:a16="http://schemas.microsoft.com/office/drawing/2014/main" id="{E094F53A-6361-E94E-5BDE-6B5297C1498E}"/>
+              </a:ext>
+            </a:extLst>
+          </p:cNvPr>
+          <p:cNvSpPr txBox="1"/>
+          <p:nvPr/>
+        </p:nvSpPr>
+        <p:spPr>
+          <a:xfrm>
+            <a:off x="-1" y="0"/>
+            <a:ext cx="3519055" cy="400110"/>
+          </a:xfrm>
+          <a:prstGeom prst="rect">
+            <a:avLst/>
+          </a:prstGeom>
+          <a:noFill/>
+        </p:spPr>
+        <p:txBody>
+          <a:bodyPr wrap="square" rtlCol="0">
+            <a:spAutoFit/>
+          </a:bodyPr>
+          <a:lstStyle/>
+          <a:p>
+            <a:r>
+              <a:rPr lang="en-US" sz="2000" b="1" dirty="0"/>
+              <a:t>adminViewPayment.html</a:t>
+            </a:r>
+          </a:p>
+        </p:txBody>
+      </p:sp>
+      <p:sp>
+        <p:nvSpPr>
+          <p:cNvPr id="3" name="Rectangle: Rounded Corners 2">
+            <a:extLst>
+              <a:ext uri="{FF2B5EF4-FFF2-40B4-BE49-F238E27FC236}">
+                <a16:creationId xmlns:a16="http://schemas.microsoft.com/office/drawing/2014/main" id="{E84989AE-1420-7CFC-7A33-B4FACAA95828}"/>
+              </a:ext>
+            </a:extLst>
+          </p:cNvPr>
+          <p:cNvSpPr/>
+          <p:nvPr/>
+        </p:nvSpPr>
+        <p:spPr>
+          <a:xfrm>
+            <a:off x="2328948" y="1216313"/>
+            <a:ext cx="7534103" cy="4425374"/>
+          </a:xfrm>
+          <a:prstGeom prst="roundRect">
+            <a:avLst>
+              <a:gd name="adj" fmla="val 8439"/>
+            </a:avLst>
+          </a:prstGeom>
+          <a:solidFill>
+            <a:schemeClr val="accent6">
+              <a:lumMod val="50000"/>
+            </a:schemeClr>
+          </a:solidFill>
+          <a:ln>
+            <a:noFill/>
+          </a:ln>
+        </p:spPr>
+        <p:style>
+          <a:lnRef idx="2">
+            <a:schemeClr val="accent1">
+              <a:shade val="15000"/>
+            </a:schemeClr>
+          </a:lnRef>
+          <a:fillRef idx="1">
+            <a:schemeClr val="accent1"/>
+          </a:fillRef>
+          <a:effectRef idx="0">
+            <a:schemeClr val="accent1"/>
+          </a:effectRef>
+          <a:fontRef idx="minor">
+            <a:schemeClr val="lt1"/>
+          </a:fontRef>
+        </p:style>
+        <p:txBody>
+          <a:bodyPr rtlCol="0" anchor="ctr"/>
+          <a:lstStyle/>
+          <a:p>
+            <a:r>
+              <a:rPr lang="en-US" sz="2000" b="1" dirty="0" err="1"/>
+              <a:t>PaymentDetails</a:t>
+            </a:r>
+            <a:r>
+              <a:rPr lang="en-US" sz="2000" b="1" dirty="0"/>
+              <a:t>{</a:t>
+            </a:r>
+          </a:p>
+          <a:p>
+            <a:pPr marL="800100" lvl="1" indent="-342900">
+              <a:buFont typeface="Arial" panose="020B0604020202020204" pitchFamily="34" charset="0"/>
+              <a:buChar char="•"/>
+            </a:pPr>
+            <a:r>
+              <a:rPr lang="en-US" sz="2000" b="1" dirty="0"/>
+              <a:t>Payment Platform Name</a:t>
+            </a:r>
+          </a:p>
+          <a:p>
+            <a:pPr marL="800100" lvl="1" indent="-342900">
+              <a:buFont typeface="Arial" panose="020B0604020202020204" pitchFamily="34" charset="0"/>
+              <a:buChar char="•"/>
+            </a:pPr>
+            <a:r>
+              <a:rPr lang="en-US" sz="2000" b="1" dirty="0"/>
+              <a:t>Date created</a:t>
+            </a:r>
+          </a:p>
+          <a:p>
+            <a:pPr marL="800100" lvl="1" indent="-342900">
+              <a:buFont typeface="Arial" panose="020B0604020202020204" pitchFamily="34" charset="0"/>
+              <a:buChar char="•"/>
+            </a:pPr>
+            <a:r>
+              <a:rPr lang="en-US" sz="2000" b="1" dirty="0" err="1"/>
+              <a:t>Img</a:t>
+            </a:r>
+            <a:r>
+              <a:rPr lang="en-US" sz="2000" b="1" dirty="0"/>
+              <a:t>: </a:t>
+            </a:r>
+            <a:r>
+              <a:rPr lang="en-US" sz="2000" b="1" dirty="0" err="1"/>
+              <a:t>Qr</a:t>
+            </a:r>
+            <a:r>
+              <a:rPr lang="en-US" sz="2000" b="1" dirty="0"/>
+              <a:t> code image</a:t>
+            </a:r>
+          </a:p>
+          <a:p>
+            <a:pPr marL="800100" lvl="1" indent="-342900">
+              <a:buFont typeface="Arial" panose="020B0604020202020204" pitchFamily="34" charset="0"/>
+              <a:buChar char="•"/>
+            </a:pPr>
+            <a:r>
+              <a:rPr lang="en-US" sz="2000" b="1" dirty="0"/>
+              <a:t>Button : edit (admineditPayment.html), Delete</a:t>
+            </a:r>
+          </a:p>
+          <a:p>
+            <a:r>
+              <a:rPr lang="en-US" sz="2000" b="1" dirty="0"/>
+              <a:t>}</a:t>
+            </a:r>
+          </a:p>
+        </p:txBody>
+      </p:sp>
+    </p:spTree>
+    <p:extLst>
+      <p:ext uri="{BB962C8B-B14F-4D97-AF65-F5344CB8AC3E}">
+        <p14:creationId xmlns:p14="http://schemas.microsoft.com/office/powerpoint/2010/main" val="4175991990"/>
+      </p:ext>
+    </p:extLst>
+  </p:cSld>
+  <p:clrMapOvr>
+    <a:masterClrMapping/>
+  </p:clrMapOvr>
+</p:sld>
+</file>
+
+<file path=ppt/slides/slide35.xml><?xml version="1.0" encoding="utf-8"?>
+<p:sld xmlns:a="http://schemas.openxmlformats.org/drawingml/2006/main" xmlns:r="http://schemas.openxmlformats.org/officeDocument/2006/relationships" xmlns:p="http://schemas.openxmlformats.org/presentationml/2006/main">
+  <p:cSld>
+    <p:spTree>
+      <p:nvGrpSpPr>
+        <p:cNvPr id="1" name=""/>
+        <p:cNvGrpSpPr/>
+        <p:nvPr/>
+      </p:nvGrpSpPr>
+      <p:grpSpPr>
+        <a:xfrm>
+          <a:off x="0" y="0"/>
+          <a:ext cx="0" cy="0"/>
+          <a:chOff x="0" y="0"/>
+          <a:chExt cx="0" cy="0"/>
+        </a:xfrm>
+      </p:grpSpPr>
+      <p:sp>
+        <p:nvSpPr>
+          <p:cNvPr id="4" name="TextBox 3">
+            <a:extLst>
+              <a:ext uri="{FF2B5EF4-FFF2-40B4-BE49-F238E27FC236}">
+                <a16:creationId xmlns:a16="http://schemas.microsoft.com/office/drawing/2014/main" id="{E094F53A-6361-E94E-5BDE-6B5297C1498E}"/>
+              </a:ext>
+            </a:extLst>
+          </p:cNvPr>
+          <p:cNvSpPr txBox="1"/>
+          <p:nvPr/>
+        </p:nvSpPr>
+        <p:spPr>
+          <a:xfrm>
+            <a:off x="-1" y="0"/>
+            <a:ext cx="3519055" cy="400110"/>
+          </a:xfrm>
+          <a:prstGeom prst="rect">
+            <a:avLst/>
+          </a:prstGeom>
+          <a:noFill/>
+        </p:spPr>
+        <p:txBody>
+          <a:bodyPr wrap="square" rtlCol="0">
+            <a:spAutoFit/>
+          </a:bodyPr>
+          <a:lstStyle/>
+          <a:p>
+            <a:r>
+              <a:rPr lang="en-US" sz="2000" b="1" dirty="0"/>
+              <a:t>adminViewPayment.html</a:t>
+            </a:r>
+          </a:p>
+        </p:txBody>
+      </p:sp>
+      <p:sp>
+        <p:nvSpPr>
+          <p:cNvPr id="3" name="Rectangle: Rounded Corners 2">
+            <a:extLst>
+              <a:ext uri="{FF2B5EF4-FFF2-40B4-BE49-F238E27FC236}">
+                <a16:creationId xmlns:a16="http://schemas.microsoft.com/office/drawing/2014/main" id="{E84989AE-1420-7CFC-7A33-B4FACAA95828}"/>
+              </a:ext>
+            </a:extLst>
+          </p:cNvPr>
+          <p:cNvSpPr/>
+          <p:nvPr/>
+        </p:nvSpPr>
+        <p:spPr>
+          <a:xfrm>
+            <a:off x="2328948" y="1216313"/>
+            <a:ext cx="7534103" cy="4425374"/>
+          </a:xfrm>
+          <a:prstGeom prst="roundRect">
+            <a:avLst>
+              <a:gd name="adj" fmla="val 8439"/>
+            </a:avLst>
+          </a:prstGeom>
+          <a:solidFill>
+            <a:schemeClr val="accent6">
+              <a:lumMod val="50000"/>
+            </a:schemeClr>
+          </a:solidFill>
+          <a:ln>
+            <a:noFill/>
+          </a:ln>
+        </p:spPr>
+        <p:style>
+          <a:lnRef idx="2">
+            <a:schemeClr val="accent1">
+              <a:shade val="15000"/>
+            </a:schemeClr>
+          </a:lnRef>
+          <a:fillRef idx="1">
+            <a:schemeClr val="accent1"/>
+          </a:fillRef>
+          <a:effectRef idx="0">
+            <a:schemeClr val="accent1"/>
+          </a:effectRef>
+          <a:fontRef idx="minor">
+            <a:schemeClr val="lt1"/>
+          </a:fontRef>
+        </p:style>
+        <p:txBody>
+          <a:bodyPr rtlCol="0" anchor="ctr"/>
+          <a:lstStyle/>
+          <a:p>
+            <a:r>
+              <a:rPr lang="en-US" sz="2000" b="1" dirty="0" err="1"/>
+              <a:t>PaymentEdit</a:t>
+            </a:r>
+            <a:r>
+              <a:rPr lang="en-US" sz="2000" b="1" dirty="0"/>
+              <a:t>{</a:t>
+            </a:r>
+          </a:p>
+          <a:p>
+            <a:pPr marL="800100" lvl="1" indent="-342900">
+              <a:buFont typeface="Arial" panose="020B0604020202020204" pitchFamily="34" charset="0"/>
+              <a:buChar char="•"/>
+            </a:pPr>
+            <a:r>
+              <a:rPr lang="en-US" sz="2000" b="1" dirty="0"/>
+              <a:t>Payment Platform Name : auto fill</a:t>
+            </a:r>
+          </a:p>
+          <a:p>
+            <a:pPr marL="800100" lvl="1" indent="-342900">
+              <a:buFont typeface="Arial" panose="020B0604020202020204" pitchFamily="34" charset="0"/>
+              <a:buChar char="•"/>
+            </a:pPr>
+            <a:r>
+              <a:rPr lang="en-US" sz="2000" b="1" dirty="0"/>
+              <a:t>Date created : auto fill</a:t>
+            </a:r>
+          </a:p>
+          <a:p>
+            <a:pPr marL="800100" lvl="1" indent="-342900">
+              <a:buFont typeface="Arial" panose="020B0604020202020204" pitchFamily="34" charset="0"/>
+              <a:buChar char="•"/>
+            </a:pPr>
+            <a:r>
+              <a:rPr lang="en-US" sz="2000" b="1" dirty="0" err="1"/>
+              <a:t>Img</a:t>
+            </a:r>
+            <a:r>
+              <a:rPr lang="en-US" sz="2000" b="1" dirty="0"/>
+              <a:t>: </a:t>
+            </a:r>
+            <a:r>
+              <a:rPr lang="en-US" sz="2000" b="1" dirty="0" err="1"/>
+              <a:t>Qr</a:t>
+            </a:r>
+            <a:r>
+              <a:rPr lang="en-US" sz="2000" b="1" dirty="0"/>
+              <a:t> code image : auto fill</a:t>
+            </a:r>
+          </a:p>
+          <a:p>
+            <a:pPr marL="800100" lvl="1" indent="-342900">
+              <a:buFont typeface="Arial" panose="020B0604020202020204" pitchFamily="34" charset="0"/>
+              <a:buChar char="•"/>
+            </a:pPr>
+            <a:r>
+              <a:rPr lang="en-US" sz="2000" b="1" dirty="0"/>
+              <a:t>Input: image </a:t>
+            </a:r>
+            <a:r>
+              <a:rPr lang="en-US" sz="2000" b="1" dirty="0" err="1"/>
+              <a:t>qr</a:t>
+            </a:r>
+            <a:r>
+              <a:rPr lang="en-US" sz="2000" b="1" dirty="0"/>
+              <a:t> code</a:t>
+            </a:r>
+          </a:p>
+          <a:p>
+            <a:pPr marL="800100" lvl="1" indent="-342900">
+              <a:buFont typeface="Arial" panose="020B0604020202020204" pitchFamily="34" charset="0"/>
+              <a:buChar char="•"/>
+            </a:pPr>
+            <a:r>
+              <a:rPr lang="en-US" sz="2000" b="1" dirty="0"/>
+              <a:t>Button : save, cancel</a:t>
+            </a:r>
+          </a:p>
+          <a:p>
+            <a:r>
+              <a:rPr lang="en-US" sz="2000" b="1" dirty="0"/>
+              <a:t>}</a:t>
+            </a:r>
+          </a:p>
+        </p:txBody>
+      </p:sp>
+      <p:cxnSp>
+        <p:nvCxnSpPr>
+          <p:cNvPr id="2" name="Connector: Curved 1">
+            <a:extLst>
+              <a:ext uri="{FF2B5EF4-FFF2-40B4-BE49-F238E27FC236}">
+                <a16:creationId xmlns:a16="http://schemas.microsoft.com/office/drawing/2014/main" id="{FBF2BCD9-0C2E-FEBC-83D6-2497A2A7C16D}"/>
+              </a:ext>
+            </a:extLst>
+          </p:cNvPr>
+          <p:cNvCxnSpPr>
+            <a:cxnSpLocks/>
+          </p:cNvCxnSpPr>
+          <p:nvPr/>
+        </p:nvCxnSpPr>
+        <p:spPr>
+          <a:xfrm rot="10800000" flipV="1">
+            <a:off x="5680365" y="3429000"/>
+            <a:ext cx="849744" cy="311724"/>
+          </a:xfrm>
+          <a:prstGeom prst="curvedConnector3">
+            <a:avLst>
+              <a:gd name="adj1" fmla="val 11956"/>
+            </a:avLst>
+          </a:prstGeom>
+          <a:ln w="19050" cap="flat" cmpd="sng" algn="ctr">
+            <a:solidFill>
+              <a:schemeClr val="accent4"/>
+            </a:solidFill>
+            <a:prstDash val="solid"/>
+            <a:round/>
+            <a:headEnd type="arrow" w="med" len="med"/>
+            <a:tailEnd type="arrow" w="med" len="med"/>
+          </a:ln>
+        </p:spPr>
+        <p:style>
+          <a:lnRef idx="0">
+            <a:scrgbClr r="0" g="0" b="0"/>
+          </a:lnRef>
+          <a:fillRef idx="0">
+            <a:scrgbClr r="0" g="0" b="0"/>
+          </a:fillRef>
+          <a:effectRef idx="0">
+            <a:scrgbClr r="0" g="0" b="0"/>
+          </a:effectRef>
+          <a:fontRef idx="minor">
+            <a:schemeClr val="tx1"/>
+          </a:fontRef>
+        </p:style>
+      </p:cxnSp>
+    </p:spTree>
+    <p:extLst>
+      <p:ext uri="{BB962C8B-B14F-4D97-AF65-F5344CB8AC3E}">
+        <p14:creationId xmlns:p14="http://schemas.microsoft.com/office/powerpoint/2010/main" val="2089885084"/>
+      </p:ext>
+    </p:extLst>
+  </p:cSld>
+  <p:clrMapOvr>
+    <a:masterClrMapping/>
+  </p:clrMapOvr>
+</p:sld>
+</file>
+
+<file path=ppt/slides/slide36.xml><?xml version="1.0" encoding="utf-8"?>
+<p:sld xmlns:a="http://schemas.openxmlformats.org/drawingml/2006/main" xmlns:r="http://schemas.openxmlformats.org/officeDocument/2006/relationships" xmlns:p="http://schemas.openxmlformats.org/presentationml/2006/main">
+  <p:cSld>
+    <p:spTree>
+      <p:nvGrpSpPr>
+        <p:cNvPr id="1" name=""/>
+        <p:cNvGrpSpPr/>
+        <p:nvPr/>
+      </p:nvGrpSpPr>
+      <p:grpSpPr>
+        <a:xfrm>
+          <a:off x="0" y="0"/>
+          <a:ext cx="0" cy="0"/>
+          <a:chOff x="0" y="0"/>
+          <a:chExt cx="0" cy="0"/>
+        </a:xfrm>
+      </p:grpSpPr>
+      <p:sp>
+        <p:nvSpPr>
+          <p:cNvPr id="4" name="TextBox 3">
+            <a:extLst>
+              <a:ext uri="{FF2B5EF4-FFF2-40B4-BE49-F238E27FC236}">
+                <a16:creationId xmlns:a16="http://schemas.microsoft.com/office/drawing/2014/main" id="{E094F53A-6361-E94E-5BDE-6B5297C1498E}"/>
+              </a:ext>
+            </a:extLst>
+          </p:cNvPr>
+          <p:cNvSpPr txBox="1"/>
+          <p:nvPr/>
+        </p:nvSpPr>
+        <p:spPr>
+          <a:xfrm>
+            <a:off x="-1" y="0"/>
+            <a:ext cx="3519055" cy="400110"/>
+          </a:xfrm>
+          <a:prstGeom prst="rect">
+            <a:avLst/>
+          </a:prstGeom>
+          <a:noFill/>
+        </p:spPr>
+        <p:txBody>
+          <a:bodyPr wrap="square" rtlCol="0">
+            <a:spAutoFit/>
+          </a:bodyPr>
+          <a:lstStyle/>
+          <a:p>
+            <a:r>
+              <a:rPr lang="en-US" sz="2000" b="1" dirty="0"/>
+              <a:t>adminAddPayment.html</a:t>
+            </a:r>
+          </a:p>
+        </p:txBody>
+      </p:sp>
+      <p:sp>
+        <p:nvSpPr>
+          <p:cNvPr id="3" name="Rectangle: Rounded Corners 2">
+            <a:extLst>
+              <a:ext uri="{FF2B5EF4-FFF2-40B4-BE49-F238E27FC236}">
+                <a16:creationId xmlns:a16="http://schemas.microsoft.com/office/drawing/2014/main" id="{E84989AE-1420-7CFC-7A33-B4FACAA95828}"/>
+              </a:ext>
+            </a:extLst>
+          </p:cNvPr>
+          <p:cNvSpPr/>
+          <p:nvPr/>
+        </p:nvSpPr>
+        <p:spPr>
+          <a:xfrm>
+            <a:off x="2328948" y="1216313"/>
+            <a:ext cx="7534103" cy="4425374"/>
+          </a:xfrm>
+          <a:prstGeom prst="roundRect">
+            <a:avLst>
+              <a:gd name="adj" fmla="val 8439"/>
+            </a:avLst>
+          </a:prstGeom>
+          <a:solidFill>
+            <a:schemeClr val="accent6">
+              <a:lumMod val="50000"/>
+            </a:schemeClr>
+          </a:solidFill>
+          <a:ln>
+            <a:noFill/>
+          </a:ln>
+        </p:spPr>
+        <p:style>
+          <a:lnRef idx="2">
+            <a:schemeClr val="accent1">
+              <a:shade val="15000"/>
+            </a:schemeClr>
+          </a:lnRef>
+          <a:fillRef idx="1">
+            <a:schemeClr val="accent1"/>
+          </a:fillRef>
+          <a:effectRef idx="0">
+            <a:schemeClr val="accent1"/>
+          </a:effectRef>
+          <a:fontRef idx="minor">
+            <a:schemeClr val="lt1"/>
+          </a:fontRef>
+        </p:style>
+        <p:txBody>
+          <a:bodyPr rtlCol="0" anchor="ctr"/>
+          <a:lstStyle/>
+          <a:p>
+            <a:r>
+              <a:rPr lang="en-US" sz="2000" b="1" dirty="0" err="1"/>
+              <a:t>PaymentAdd</a:t>
+            </a:r>
+            <a:r>
+              <a:rPr lang="en-US" sz="2000" b="1" dirty="0"/>
+              <a:t>{</a:t>
+            </a:r>
+          </a:p>
+          <a:p>
+            <a:pPr marL="800100" lvl="1" indent="-342900">
+              <a:buFont typeface="Arial" panose="020B0604020202020204" pitchFamily="34" charset="0"/>
+              <a:buChar char="•"/>
+            </a:pPr>
+            <a:r>
+              <a:rPr lang="en-US" sz="2000" b="1" dirty="0"/>
+              <a:t>Payment Platform Name</a:t>
+            </a:r>
+          </a:p>
+          <a:p>
+            <a:pPr marL="800100" lvl="1" indent="-342900">
+              <a:buFont typeface="Arial" panose="020B0604020202020204" pitchFamily="34" charset="0"/>
+              <a:buChar char="•"/>
+            </a:pPr>
+            <a:r>
+              <a:rPr lang="en-US" sz="2000" b="1" dirty="0"/>
+              <a:t>Date created </a:t>
+            </a:r>
+          </a:p>
+          <a:p>
+            <a:pPr marL="800100" lvl="1" indent="-342900">
+              <a:buFont typeface="Arial" panose="020B0604020202020204" pitchFamily="34" charset="0"/>
+              <a:buChar char="•"/>
+            </a:pPr>
+            <a:r>
+              <a:rPr lang="en-US" sz="2000" b="1" dirty="0" err="1"/>
+              <a:t>Img</a:t>
+            </a:r>
+            <a:r>
+              <a:rPr lang="en-US" sz="2000" b="1" dirty="0"/>
+              <a:t>: </a:t>
+            </a:r>
+            <a:r>
+              <a:rPr lang="en-US" sz="2000" b="1" dirty="0" err="1"/>
+              <a:t>Qr</a:t>
+            </a:r>
+            <a:r>
+              <a:rPr lang="en-US" sz="2000" b="1" dirty="0"/>
+              <a:t> code image : auto fill</a:t>
+            </a:r>
+          </a:p>
+          <a:p>
+            <a:pPr marL="800100" lvl="1" indent="-342900">
+              <a:buFont typeface="Arial" panose="020B0604020202020204" pitchFamily="34" charset="0"/>
+              <a:buChar char="•"/>
+            </a:pPr>
+            <a:r>
+              <a:rPr lang="en-US" sz="2000" b="1" dirty="0"/>
+              <a:t>Input: image </a:t>
+            </a:r>
+            <a:r>
+              <a:rPr lang="en-US" sz="2000" b="1" dirty="0" err="1"/>
+              <a:t>qr</a:t>
+            </a:r>
+            <a:r>
+              <a:rPr lang="en-US" sz="2000" b="1" dirty="0"/>
+              <a:t> code</a:t>
+            </a:r>
+          </a:p>
+          <a:p>
+            <a:pPr marL="800100" lvl="1" indent="-342900">
+              <a:buFont typeface="Arial" panose="020B0604020202020204" pitchFamily="34" charset="0"/>
+              <a:buChar char="•"/>
+            </a:pPr>
+            <a:r>
+              <a:rPr lang="en-US" sz="2000" b="1" dirty="0"/>
+              <a:t>Button : Create, Cancel</a:t>
+            </a:r>
+          </a:p>
+          <a:p>
+            <a:r>
+              <a:rPr lang="en-US" sz="2000" b="1" dirty="0"/>
+              <a:t>}</a:t>
+            </a:r>
+          </a:p>
+        </p:txBody>
+      </p:sp>
+      <p:cxnSp>
+        <p:nvCxnSpPr>
+          <p:cNvPr id="2" name="Connector: Curved 1">
+            <a:extLst>
+              <a:ext uri="{FF2B5EF4-FFF2-40B4-BE49-F238E27FC236}">
+                <a16:creationId xmlns:a16="http://schemas.microsoft.com/office/drawing/2014/main" id="{FBF2BCD9-0C2E-FEBC-83D6-2497A2A7C16D}"/>
+              </a:ext>
+            </a:extLst>
+          </p:cNvPr>
+          <p:cNvCxnSpPr>
+            <a:cxnSpLocks/>
+          </p:cNvCxnSpPr>
+          <p:nvPr/>
+        </p:nvCxnSpPr>
+        <p:spPr>
+          <a:xfrm rot="10800000" flipV="1">
+            <a:off x="5680365" y="3429000"/>
+            <a:ext cx="849744" cy="311724"/>
+          </a:xfrm>
+          <a:prstGeom prst="curvedConnector3">
+            <a:avLst>
+              <a:gd name="adj1" fmla="val 11956"/>
+            </a:avLst>
+          </a:prstGeom>
+          <a:ln w="19050" cap="flat" cmpd="sng" algn="ctr">
+            <a:solidFill>
+              <a:schemeClr val="accent4"/>
+            </a:solidFill>
+            <a:prstDash val="solid"/>
+            <a:round/>
+            <a:headEnd type="arrow" w="med" len="med"/>
+            <a:tailEnd type="arrow" w="med" len="med"/>
+          </a:ln>
+        </p:spPr>
+        <p:style>
+          <a:lnRef idx="0">
+            <a:scrgbClr r="0" g="0" b="0"/>
+          </a:lnRef>
+          <a:fillRef idx="0">
+            <a:scrgbClr r="0" g="0" b="0"/>
+          </a:fillRef>
+          <a:effectRef idx="0">
+            <a:scrgbClr r="0" g="0" b="0"/>
+          </a:effectRef>
+          <a:fontRef idx="minor">
+            <a:schemeClr val="tx1"/>
+          </a:fontRef>
+        </p:style>
+      </p:cxnSp>
+    </p:spTree>
+    <p:extLst>
+      <p:ext uri="{BB962C8B-B14F-4D97-AF65-F5344CB8AC3E}">
+        <p14:creationId xmlns:p14="http://schemas.microsoft.com/office/powerpoint/2010/main" val="661493376"/>
+      </p:ext>
+    </p:extLst>
+  </p:cSld>
+  <p:clrMapOvr>
+    <a:masterClrMapping/>
+  </p:clrMapOvr>
+</p:sld>
+</file>
+
+<file path=ppt/slides/slide37.xml><?xml version="1.0" encoding="utf-8"?>
+<p:sld xmlns:a="http://schemas.openxmlformats.org/drawingml/2006/main" xmlns:r="http://schemas.openxmlformats.org/officeDocument/2006/relationships" xmlns:p="http://schemas.openxmlformats.org/presentationml/2006/main">
+  <p:cSld>
+    <p:spTree>
+      <p:nvGrpSpPr>
+        <p:cNvPr id="1" name=""/>
+        <p:cNvGrpSpPr/>
+        <p:nvPr/>
+      </p:nvGrpSpPr>
+      <p:grpSpPr>
+        <a:xfrm>
+          <a:off x="0" y="0"/>
+          <a:ext cx="0" cy="0"/>
+          <a:chOff x="0" y="0"/>
+          <a:chExt cx="0" cy="0"/>
+        </a:xfrm>
+      </p:grpSpPr>
+      <p:sp>
+        <p:nvSpPr>
           <p:cNvPr id="2" name="TextBox 1">
             <a:extLst>
               <a:ext uri="{FF2B5EF4-FFF2-40B4-BE49-F238E27FC236}">
@@ -11140,7 +12174,7 @@
 </p:sld>
 </file>
 
-<file path=ppt/slides/slide33.xml><?xml version="1.0" encoding="utf-8"?>
+<file path=ppt/slides/slide38.xml><?xml version="1.0" encoding="utf-8"?>
 <p:sld xmlns:a="http://schemas.openxmlformats.org/drawingml/2006/main" xmlns:r="http://schemas.openxmlformats.org/officeDocument/2006/relationships" xmlns:p="http://schemas.openxmlformats.org/presentationml/2006/main">
   <p:cSld>
     <p:spTree>
@@ -11622,7 +12656,7 @@
 </p:sld>
 </file>
 
-<file path=ppt/slides/slide34.xml><?xml version="1.0" encoding="utf-8"?>
+<file path=ppt/slides/slide39.xml><?xml version="1.0" encoding="utf-8"?>
 <p:sld xmlns:a="http://schemas.openxmlformats.org/drawingml/2006/main" xmlns:r="http://schemas.openxmlformats.org/officeDocument/2006/relationships" xmlns:p="http://schemas.openxmlformats.org/presentationml/2006/main">
   <p:cSld>
     <p:spTree>
@@ -12241,7 +13275,90 @@
 </p:sld>
 </file>
 
-<file path=ppt/slides/slide35.xml><?xml version="1.0" encoding="utf-8"?>
+<file path=ppt/slides/slide4.xml><?xml version="1.0" encoding="utf-8"?>
+<p:sld xmlns:a="http://schemas.openxmlformats.org/drawingml/2006/main" xmlns:r="http://schemas.openxmlformats.org/officeDocument/2006/relationships" xmlns:p="http://schemas.openxmlformats.org/presentationml/2006/main">
+  <p:cSld>
+    <p:spTree>
+      <p:nvGrpSpPr>
+        <p:cNvPr id="1" name=""/>
+        <p:cNvGrpSpPr/>
+        <p:nvPr/>
+      </p:nvGrpSpPr>
+      <p:grpSpPr>
+        <a:xfrm>
+          <a:off x="0" y="0"/>
+          <a:ext cx="0" cy="0"/>
+          <a:chOff x="0" y="0"/>
+          <a:chExt cx="0" cy="0"/>
+        </a:xfrm>
+      </p:grpSpPr>
+      <p:sp>
+        <p:nvSpPr>
+          <p:cNvPr id="2" name="TextBox 1">
+            <a:extLst>
+              <a:ext uri="{FF2B5EF4-FFF2-40B4-BE49-F238E27FC236}">
+                <a16:creationId xmlns:a16="http://schemas.microsoft.com/office/drawing/2014/main" id="{D7905721-4A05-C1B3-9952-8B578834C87C}"/>
+              </a:ext>
+            </a:extLst>
+          </p:cNvPr>
+          <p:cNvSpPr txBox="1"/>
+          <p:nvPr/>
+        </p:nvSpPr>
+        <p:spPr>
+          <a:xfrm>
+            <a:off x="832023" y="2459504"/>
+            <a:ext cx="10527954" cy="1938992"/>
+          </a:xfrm>
+          <a:prstGeom prst="rect">
+            <a:avLst/>
+          </a:prstGeom>
+          <a:noFill/>
+        </p:spPr>
+        <p:txBody>
+          <a:bodyPr wrap="square" rtlCol="0">
+            <a:spAutoFit/>
+          </a:bodyPr>
+          <a:lstStyle/>
+          <a:p>
+            <a:pPr algn="ctr"/>
+            <a:r>
+              <a:rPr lang="en-US" sz="4000" b="1" dirty="0"/>
+              <a:t>All lists or other elements that display data should have </a:t>
+            </a:r>
+            <a:r>
+              <a:rPr lang="en-US" sz="4000" b="1" dirty="0">
+                <a:solidFill>
+                  <a:srgbClr val="C00000"/>
+                </a:solidFill>
+              </a:rPr>
+              <a:t>default CSS Class </a:t>
+            </a:r>
+            <a:r>
+              <a:rPr lang="en-US" sz="4000" b="1" dirty="0"/>
+              <a:t>to toggle the display when there is no content.</a:t>
+            </a:r>
+            <a:endParaRPr lang="en-US" sz="4000" b="1" dirty="0">
+              <a:solidFill>
+                <a:srgbClr val="C00000"/>
+              </a:solidFill>
+            </a:endParaRPr>
+          </a:p>
+        </p:txBody>
+      </p:sp>
+    </p:spTree>
+    <p:extLst>
+      <p:ext uri="{BB962C8B-B14F-4D97-AF65-F5344CB8AC3E}">
+        <p14:creationId xmlns:p14="http://schemas.microsoft.com/office/powerpoint/2010/main" val="2156814539"/>
+      </p:ext>
+    </p:extLst>
+  </p:cSld>
+  <p:clrMapOvr>
+    <a:masterClrMapping/>
+  </p:clrMapOvr>
+</p:sld>
+</file>
+
+<file path=ppt/slides/slide40.xml><?xml version="1.0" encoding="utf-8"?>
 <p:sld xmlns:a="http://schemas.openxmlformats.org/drawingml/2006/main" xmlns:r="http://schemas.openxmlformats.org/officeDocument/2006/relationships" xmlns:p="http://schemas.openxmlformats.org/presentationml/2006/main">
   <p:cSld>
     <p:spTree>
@@ -12420,7 +13537,7 @@
 </p:sld>
 </file>
 
-<file path=ppt/slides/slide36.xml><?xml version="1.0" encoding="utf-8"?>
+<file path=ppt/slides/slide41.xml><?xml version="1.0" encoding="utf-8"?>
 <p:sld xmlns:a="http://schemas.openxmlformats.org/drawingml/2006/main" xmlns:r="http://schemas.openxmlformats.org/officeDocument/2006/relationships" xmlns:p="http://schemas.openxmlformats.org/presentationml/2006/main">
   <p:cSld>
     <p:spTree>
@@ -12606,7 +13723,7 @@
 </p:sld>
 </file>
 
-<file path=ppt/slides/slide37.xml><?xml version="1.0" encoding="utf-8"?>
+<file path=ppt/slides/slide42.xml><?xml version="1.0" encoding="utf-8"?>
 <p:sld xmlns:a="http://schemas.openxmlformats.org/drawingml/2006/main" xmlns:r="http://schemas.openxmlformats.org/officeDocument/2006/relationships" xmlns:p="http://schemas.openxmlformats.org/presentationml/2006/main">
   <p:cSld>
     <p:spTree>
@@ -12828,8 +13945,8 @@
         </p:nvSpPr>
         <p:spPr>
           <a:xfrm>
-            <a:off x="6012876" y="1190686"/>
-            <a:ext cx="5246252" cy="4476628"/>
+            <a:off x="5541819" y="796234"/>
+            <a:ext cx="6326908" cy="5265532"/>
           </a:xfrm>
           <a:prstGeom prst="roundRect">
             <a:avLst>
@@ -12895,7 +14012,29 @@
           <a:p>
             <a:r>
               <a:rPr lang="en-US" b="1" dirty="0"/>
-              <a:t>Generate Summary report{</a:t>
+              <a:t>4{</a:t>
+            </a:r>
+          </a:p>
+          <a:p>
+            <a:pPr marL="742950" lvl="1" indent="-285750">
+              <a:buFont typeface="Arial" panose="020B0604020202020204" pitchFamily="34" charset="0"/>
+              <a:buChar char="•"/>
+            </a:pPr>
+            <a:r>
+              <a:rPr lang="en-US" b="1" dirty="0"/>
+              <a:t>Button : export =&gt;(employeeGeneratePSR.html)</a:t>
+            </a:r>
+          </a:p>
+          <a:p>
+            <a:r>
+              <a:rPr lang="en-US" b="1" dirty="0"/>
+              <a:t>}</a:t>
+            </a:r>
+          </a:p>
+          <a:p>
+            <a:r>
+              <a:rPr lang="en-US" b="1" dirty="0"/>
+              <a:t>employeeGeneratePSR.html{</a:t>
             </a:r>
           </a:p>
           <a:p>
@@ -12932,17 +14071,111 @@
             </a:pPr>
             <a:r>
               <a:rPr lang="en-US" b="1" dirty="0"/>
-              <a:t>Button : Generate (download pdf or excel)</a:t>
-            </a:r>
-          </a:p>
-          <a:p>
+              <a:t>HTML Table preview {</a:t>
+            </a:r>
+          </a:p>
+          <a:p>
+            <a:pPr marL="1200150" lvl="2" indent="-285750">
+              <a:buFont typeface="Arial" panose="020B0604020202020204" pitchFamily="34" charset="0"/>
+              <a:buChar char="•"/>
+            </a:pPr>
+            <a:r>
+              <a:rPr lang="en-US" b="1" dirty="0"/>
+              <a:t>M/Q/SA/A (year) </a:t>
+            </a:r>
+          </a:p>
+          <a:p>
+            <a:pPr marL="1200150" lvl="2" indent="-285750">
+              <a:buFont typeface="Arial" panose="020B0604020202020204" pitchFamily="34" charset="0"/>
+              <a:buChar char="•"/>
+            </a:pPr>
+            <a:r>
+              <a:rPr lang="en-US" b="1" dirty="0"/>
+              <a:t>e.g. January-July 2025  = </a:t>
+            </a:r>
+            <a:r>
+              <a:rPr lang="en-US" b="1" dirty="0" err="1"/>
+              <a:t>SemiAnual</a:t>
+            </a:r>
+            <a:r>
+              <a:rPr lang="en-US" b="1" dirty="0"/>
+              <a:t> 2025</a:t>
+            </a:r>
+          </a:p>
+          <a:p>
+            <a:pPr lvl="1"/>
             <a:r>
               <a:rPr lang="en-US" b="1" dirty="0"/>
               <a:t>}</a:t>
             </a:r>
           </a:p>
+          <a:p>
+            <a:pPr marL="742950" lvl="1" indent="-285750">
+              <a:buFont typeface="Arial" panose="020B0604020202020204" pitchFamily="34" charset="0"/>
+              <a:buChar char="•"/>
+            </a:pPr>
+            <a:r>
+              <a:rPr lang="en-US" b="1" dirty="0"/>
+              <a:t>Button : Generate (download pdf or excel) || Back</a:t>
+            </a:r>
+          </a:p>
+          <a:p>
+            <a:r>
+              <a:rPr lang="en-US" b="1" dirty="0"/>
+              <a:t>}</a:t>
+            </a:r>
+          </a:p>
         </p:txBody>
       </p:sp>
+      <p:cxnSp>
+        <p:nvCxnSpPr>
+          <p:cNvPr id="3" name="Connector: Curved 2">
+            <a:extLst>
+              <a:ext uri="{FF2B5EF4-FFF2-40B4-BE49-F238E27FC236}">
+                <a16:creationId xmlns:a16="http://schemas.microsoft.com/office/drawing/2014/main" id="{708E1A5F-CFB7-389A-8B04-6F98F9228E9D}"/>
+              </a:ext>
+            </a:extLst>
+          </p:cNvPr>
+          <p:cNvCxnSpPr>
+            <a:cxnSpLocks/>
+          </p:cNvCxnSpPr>
+          <p:nvPr/>
+        </p:nvCxnSpPr>
+        <p:spPr>
+          <a:xfrm rot="16200000" flipH="1">
+            <a:off x="6137565" y="2627746"/>
+            <a:ext cx="517238" cy="138541"/>
+          </a:xfrm>
+          <a:prstGeom prst="curvedConnector3">
+            <a:avLst>
+              <a:gd name="adj1" fmla="val 50000"/>
+            </a:avLst>
+          </a:prstGeom>
+          <a:ln w="19050" cap="flat" cmpd="sng" algn="ctr">
+            <a:solidFill>
+              <a:schemeClr val="accent4"/>
+            </a:solidFill>
+            <a:prstDash val="solid"/>
+            <a:round/>
+            <a:headEnd type="arrow" w="med" len="med"/>
+            <a:tailEnd type="arrow" w="med" len="med"/>
+          </a:ln>
+        </p:spPr>
+        <p:style>
+          <a:lnRef idx="0">
+            <a:scrgbClr r="0" g="0" b="0"/>
+          </a:lnRef>
+          <a:fillRef idx="0">
+            <a:scrgbClr r="0" g="0" b="0"/>
+          </a:fillRef>
+          <a:effectRef idx="0">
+            <a:scrgbClr r="0" g="0" b="0"/>
+          </a:effectRef>
+          <a:fontRef idx="minor">
+            <a:schemeClr val="tx1"/>
+          </a:fontRef>
+        </p:style>
+      </p:cxnSp>
     </p:spTree>
     <p:extLst>
       <p:ext uri="{BB962C8B-B14F-4D97-AF65-F5344CB8AC3E}">
@@ -12956,7 +14189,7 @@
 </p:sld>
 </file>
 
-<file path=ppt/slides/slide38.xml><?xml version="1.0" encoding="utf-8"?>
+<file path=ppt/slides/slide43.xml><?xml version="1.0" encoding="utf-8"?>
 <p:sld xmlns:a="http://schemas.openxmlformats.org/drawingml/2006/main" xmlns:r="http://schemas.openxmlformats.org/officeDocument/2006/relationships" xmlns:p="http://schemas.openxmlformats.org/presentationml/2006/main">
   <p:cSld>
     <p:spTree>
@@ -13095,7 +14328,7 @@
 </p:sld>
 </file>
 
-<file path=ppt/slides/slide39.xml><?xml version="1.0" encoding="utf-8"?>
+<file path=ppt/slides/slide44.xml><?xml version="1.0" encoding="utf-8"?>
 <p:sld xmlns:a="http://schemas.openxmlformats.org/drawingml/2006/main" xmlns:r="http://schemas.openxmlformats.org/officeDocument/2006/relationships" xmlns:p="http://schemas.openxmlformats.org/presentationml/2006/main">
   <p:cSld>
     <p:spTree>
@@ -13437,90 +14670,7 @@
 </p:sld>
 </file>
 
-<file path=ppt/slides/slide4.xml><?xml version="1.0" encoding="utf-8"?>
-<p:sld xmlns:a="http://schemas.openxmlformats.org/drawingml/2006/main" xmlns:r="http://schemas.openxmlformats.org/officeDocument/2006/relationships" xmlns:p="http://schemas.openxmlformats.org/presentationml/2006/main">
-  <p:cSld>
-    <p:spTree>
-      <p:nvGrpSpPr>
-        <p:cNvPr id="1" name=""/>
-        <p:cNvGrpSpPr/>
-        <p:nvPr/>
-      </p:nvGrpSpPr>
-      <p:grpSpPr>
-        <a:xfrm>
-          <a:off x="0" y="0"/>
-          <a:ext cx="0" cy="0"/>
-          <a:chOff x="0" y="0"/>
-          <a:chExt cx="0" cy="0"/>
-        </a:xfrm>
-      </p:grpSpPr>
-      <p:sp>
-        <p:nvSpPr>
-          <p:cNvPr id="2" name="TextBox 1">
-            <a:extLst>
-              <a:ext uri="{FF2B5EF4-FFF2-40B4-BE49-F238E27FC236}">
-                <a16:creationId xmlns:a16="http://schemas.microsoft.com/office/drawing/2014/main" id="{D7905721-4A05-C1B3-9952-8B578834C87C}"/>
-              </a:ext>
-            </a:extLst>
-          </p:cNvPr>
-          <p:cNvSpPr txBox="1"/>
-          <p:nvPr/>
-        </p:nvSpPr>
-        <p:spPr>
-          <a:xfrm>
-            <a:off x="832023" y="2459504"/>
-            <a:ext cx="10527954" cy="1938992"/>
-          </a:xfrm>
-          <a:prstGeom prst="rect">
-            <a:avLst/>
-          </a:prstGeom>
-          <a:noFill/>
-        </p:spPr>
-        <p:txBody>
-          <a:bodyPr wrap="square" rtlCol="0">
-            <a:spAutoFit/>
-          </a:bodyPr>
-          <a:lstStyle/>
-          <a:p>
-            <a:pPr algn="ctr"/>
-            <a:r>
-              <a:rPr lang="en-US" sz="4000" b="1" dirty="0"/>
-              <a:t>All lists or other elements that display data should have </a:t>
-            </a:r>
-            <a:r>
-              <a:rPr lang="en-US" sz="4000" b="1" dirty="0">
-                <a:solidFill>
-                  <a:srgbClr val="C00000"/>
-                </a:solidFill>
-              </a:rPr>
-              <a:t>default CSS Class </a:t>
-            </a:r>
-            <a:r>
-              <a:rPr lang="en-US" sz="4000" b="1" dirty="0"/>
-              <a:t>to toggle the display when there is no content.</a:t>
-            </a:r>
-            <a:endParaRPr lang="en-US" sz="4000" b="1" dirty="0">
-              <a:solidFill>
-                <a:srgbClr val="C00000"/>
-              </a:solidFill>
-            </a:endParaRPr>
-          </a:p>
-        </p:txBody>
-      </p:sp>
-    </p:spTree>
-    <p:extLst>
-      <p:ext uri="{BB962C8B-B14F-4D97-AF65-F5344CB8AC3E}">
-        <p14:creationId xmlns:p14="http://schemas.microsoft.com/office/powerpoint/2010/main" val="2156814539"/>
-      </p:ext>
-    </p:extLst>
-  </p:cSld>
-  <p:clrMapOvr>
-    <a:masterClrMapping/>
-  </p:clrMapOvr>
-</p:sld>
-</file>
-
-<file path=ppt/slides/slide40.xml><?xml version="1.0" encoding="utf-8"?>
+<file path=ppt/slides/slide45.xml><?xml version="1.0" encoding="utf-8"?>
 <p:sld xmlns:a="http://schemas.openxmlformats.org/drawingml/2006/main" xmlns:r="http://schemas.openxmlformats.org/officeDocument/2006/relationships" xmlns:p="http://schemas.openxmlformats.org/presentationml/2006/main">
   <p:cSld>
     <p:spTree>
@@ -13756,7 +14906,7 @@
 </p:sld>
 </file>
 
-<file path=ppt/slides/slide41.xml><?xml version="1.0" encoding="utf-8"?>
+<file path=ppt/slides/slide46.xml><?xml version="1.0" encoding="utf-8"?>
 <p:sld xmlns:a="http://schemas.openxmlformats.org/drawingml/2006/main" xmlns:r="http://schemas.openxmlformats.org/officeDocument/2006/relationships" xmlns:p="http://schemas.openxmlformats.org/presentationml/2006/main">
   <p:cSld>
     <p:spTree>
@@ -14569,7 +15719,7 @@
 </p:sld>
 </file>
 
-<file path=ppt/slides/slide42.xml><?xml version="1.0" encoding="utf-8"?>
+<file path=ppt/slides/slide47.xml><?xml version="1.0" encoding="utf-8"?>
 <p:sld xmlns:a="http://schemas.openxmlformats.org/drawingml/2006/main" xmlns:r="http://schemas.openxmlformats.org/officeDocument/2006/relationships" xmlns:p="http://schemas.openxmlformats.org/presentationml/2006/main">
   <p:cSld>
     <p:spTree>
@@ -14635,7 +15785,7 @@
 </p:sld>
 </file>
 
-<file path=ppt/slides/slide43.xml><?xml version="1.0" encoding="utf-8"?>
+<file path=ppt/slides/slide48.xml><?xml version="1.0" encoding="utf-8"?>
 <p:sld xmlns:a="http://schemas.openxmlformats.org/drawingml/2006/main" xmlns:r="http://schemas.openxmlformats.org/officeDocument/2006/relationships" xmlns:p="http://schemas.openxmlformats.org/presentationml/2006/main">
   <p:cSld>
     <p:spTree>
@@ -15358,7 +16508,7 @@
 </p:sld>
 </file>
 
-<file path=ppt/slides/slide44.xml><?xml version="1.0" encoding="utf-8"?>
+<file path=ppt/slides/slide49.xml><?xml version="1.0" encoding="utf-8"?>
 <p:sld xmlns:a="http://schemas.openxmlformats.org/drawingml/2006/main" xmlns:r="http://schemas.openxmlformats.org/officeDocument/2006/relationships" xmlns:p="http://schemas.openxmlformats.org/presentationml/2006/main">
   <p:cSld>
     <p:spTree>
@@ -15535,1702 +16685,6 @@
     <p:extLst>
       <p:ext uri="{BB962C8B-B14F-4D97-AF65-F5344CB8AC3E}">
         <p14:creationId xmlns:p14="http://schemas.microsoft.com/office/powerpoint/2010/main" val="1450779734"/>
-      </p:ext>
-    </p:extLst>
-  </p:cSld>
-  <p:clrMapOvr>
-    <a:masterClrMapping/>
-  </p:clrMapOvr>
-</p:sld>
-</file>
-
-<file path=ppt/slides/slide45.xml><?xml version="1.0" encoding="utf-8"?>
-<p:sld xmlns:a="http://schemas.openxmlformats.org/drawingml/2006/main" xmlns:r="http://schemas.openxmlformats.org/officeDocument/2006/relationships" xmlns:p="http://schemas.openxmlformats.org/presentationml/2006/main">
-  <p:cSld>
-    <p:spTree>
-      <p:nvGrpSpPr>
-        <p:cNvPr id="1" name=""/>
-        <p:cNvGrpSpPr/>
-        <p:nvPr/>
-      </p:nvGrpSpPr>
-      <p:grpSpPr>
-        <a:xfrm>
-          <a:off x="0" y="0"/>
-          <a:ext cx="0" cy="0"/>
-          <a:chOff x="0" y="0"/>
-          <a:chExt cx="0" cy="0"/>
-        </a:xfrm>
-      </p:grpSpPr>
-      <p:sp>
-        <p:nvSpPr>
-          <p:cNvPr id="7" name="TextBox 6">
-            <a:extLst>
-              <a:ext uri="{FF2B5EF4-FFF2-40B4-BE49-F238E27FC236}">
-                <a16:creationId xmlns:a16="http://schemas.microsoft.com/office/drawing/2014/main" id="{4AD94C5A-4B2B-CE4A-A062-FFB6DA57E364}"/>
-              </a:ext>
-            </a:extLst>
-          </p:cNvPr>
-          <p:cNvSpPr txBox="1"/>
-          <p:nvPr/>
-        </p:nvSpPr>
-        <p:spPr>
-          <a:xfrm>
-            <a:off x="147781" y="78570"/>
-            <a:ext cx="6096000" cy="369332"/>
-          </a:xfrm>
-          <a:prstGeom prst="rect">
-            <a:avLst/>
-          </a:prstGeom>
-          <a:noFill/>
-        </p:spPr>
-        <p:txBody>
-          <a:bodyPr wrap="square">
-            <a:spAutoFit/>
-          </a:bodyPr>
-          <a:lstStyle/>
-          <a:p>
-            <a:r>
-              <a:rPr lang="en-US" sz="1800" b="1" dirty="0"/>
-              <a:t>guestSearchResult.html</a:t>
-            </a:r>
-            <a:endParaRPr lang="en-US" dirty="0"/>
-          </a:p>
-        </p:txBody>
-      </p:sp>
-      <p:sp>
-        <p:nvSpPr>
-          <p:cNvPr id="9" name="Rectangle: Rounded Corners 8">
-            <a:extLst>
-              <a:ext uri="{FF2B5EF4-FFF2-40B4-BE49-F238E27FC236}">
-                <a16:creationId xmlns:a16="http://schemas.microsoft.com/office/drawing/2014/main" id="{CD27AA3B-0DC5-382F-3A91-2339EC339FE6}"/>
-              </a:ext>
-            </a:extLst>
-          </p:cNvPr>
-          <p:cNvSpPr/>
-          <p:nvPr/>
-        </p:nvSpPr>
-        <p:spPr>
-          <a:xfrm>
-            <a:off x="2443017" y="1857004"/>
-            <a:ext cx="7305965" cy="3143991"/>
-          </a:xfrm>
-          <a:prstGeom prst="roundRect">
-            <a:avLst>
-              <a:gd name="adj" fmla="val 8182"/>
-            </a:avLst>
-          </a:prstGeom>
-          <a:solidFill>
-            <a:schemeClr val="accent6">
-              <a:lumMod val="50000"/>
-            </a:schemeClr>
-          </a:solidFill>
-          <a:ln>
-            <a:noFill/>
-          </a:ln>
-        </p:spPr>
-        <p:style>
-          <a:lnRef idx="2">
-            <a:schemeClr val="accent1">
-              <a:shade val="15000"/>
-            </a:schemeClr>
-          </a:lnRef>
-          <a:fillRef idx="1">
-            <a:schemeClr val="accent1"/>
-          </a:fillRef>
-          <a:effectRef idx="0">
-            <a:schemeClr val="accent1"/>
-          </a:effectRef>
-          <a:fontRef idx="minor">
-            <a:schemeClr val="lt1"/>
-          </a:fontRef>
-        </p:style>
-        <p:txBody>
-          <a:bodyPr rtlCol="0" anchor="ctr"/>
-          <a:lstStyle/>
-          <a:p>
-            <a:r>
-              <a:rPr lang="en-US" sz="2000" b="1" dirty="0"/>
-              <a:t>Example text on top `Searched for Quezon City`</a:t>
-            </a:r>
-          </a:p>
-          <a:p>
-            <a:r>
-              <a:rPr lang="en-US" sz="2000" b="1" dirty="0"/>
-              <a:t>{</a:t>
-            </a:r>
-          </a:p>
-          <a:p>
-            <a:pPr marL="800100" lvl="1" indent="-342900">
-              <a:buFont typeface="Arial" panose="020B0604020202020204" pitchFamily="34" charset="0"/>
-              <a:buChar char="•"/>
-            </a:pPr>
-            <a:r>
-              <a:rPr lang="en-US" sz="2000" b="1" dirty="0"/>
-              <a:t>List Properties w/ button : {guestViewProperty.html} </a:t>
-            </a:r>
-          </a:p>
-          <a:p>
-            <a:r>
-              <a:rPr lang="en-US" sz="2000" b="1" dirty="0"/>
-              <a:t>}</a:t>
-            </a:r>
-          </a:p>
-        </p:txBody>
-      </p:sp>
-    </p:spTree>
-    <p:extLst>
-      <p:ext uri="{BB962C8B-B14F-4D97-AF65-F5344CB8AC3E}">
-        <p14:creationId xmlns:p14="http://schemas.microsoft.com/office/powerpoint/2010/main" val="426245921"/>
-      </p:ext>
-    </p:extLst>
-  </p:cSld>
-  <p:clrMapOvr>
-    <a:masterClrMapping/>
-  </p:clrMapOvr>
-</p:sld>
-</file>
-
-<file path=ppt/slides/slide46.xml><?xml version="1.0" encoding="utf-8"?>
-<p:sld xmlns:a="http://schemas.openxmlformats.org/drawingml/2006/main" xmlns:r="http://schemas.openxmlformats.org/officeDocument/2006/relationships" xmlns:p="http://schemas.openxmlformats.org/presentationml/2006/main">
-  <p:cSld>
-    <p:spTree>
-      <p:nvGrpSpPr>
-        <p:cNvPr id="1" name=""/>
-        <p:cNvGrpSpPr/>
-        <p:nvPr/>
-      </p:nvGrpSpPr>
-      <p:grpSpPr>
-        <a:xfrm>
-          <a:off x="0" y="0"/>
-          <a:ext cx="0" cy="0"/>
-          <a:chOff x="0" y="0"/>
-          <a:chExt cx="0" cy="0"/>
-        </a:xfrm>
-      </p:grpSpPr>
-      <p:sp>
-        <p:nvSpPr>
-          <p:cNvPr id="9" name="Rectangle: Rounded Corners 8">
-            <a:extLst>
-              <a:ext uri="{FF2B5EF4-FFF2-40B4-BE49-F238E27FC236}">
-                <a16:creationId xmlns:a16="http://schemas.microsoft.com/office/drawing/2014/main" id="{CD27AA3B-0DC5-382F-3A91-2339EC339FE6}"/>
-              </a:ext>
-            </a:extLst>
-          </p:cNvPr>
-          <p:cNvSpPr/>
-          <p:nvPr/>
-        </p:nvSpPr>
-        <p:spPr>
-          <a:xfrm>
-            <a:off x="69272" y="101600"/>
-            <a:ext cx="6599383" cy="6456218"/>
-          </a:xfrm>
-          <a:prstGeom prst="roundRect">
-            <a:avLst>
-              <a:gd name="adj" fmla="val 3175"/>
-            </a:avLst>
-          </a:prstGeom>
-          <a:solidFill>
-            <a:schemeClr val="accent6">
-              <a:lumMod val="50000"/>
-            </a:schemeClr>
-          </a:solidFill>
-          <a:ln>
-            <a:noFill/>
-          </a:ln>
-        </p:spPr>
-        <p:style>
-          <a:lnRef idx="2">
-            <a:schemeClr val="accent1">
-              <a:shade val="15000"/>
-            </a:schemeClr>
-          </a:lnRef>
-          <a:fillRef idx="1">
-            <a:schemeClr val="accent1"/>
-          </a:fillRef>
-          <a:effectRef idx="0">
-            <a:schemeClr val="accent1"/>
-          </a:effectRef>
-          <a:fontRef idx="minor">
-            <a:schemeClr val="lt1"/>
-          </a:fontRef>
-        </p:style>
-        <p:txBody>
-          <a:bodyPr rtlCol="0" anchor="ctr"/>
-          <a:lstStyle/>
-          <a:p>
-            <a:r>
-              <a:rPr lang="en-US" sz="1400" b="1" dirty="0"/>
-              <a:t>// same as before revamp the design</a:t>
-            </a:r>
-          </a:p>
-          <a:p>
-            <a:r>
-              <a:rPr lang="en-US" sz="1400" b="1" dirty="0"/>
-              <a:t>guestViewProperty.html {</a:t>
-            </a:r>
-          </a:p>
-          <a:p>
-            <a:r>
-              <a:rPr lang="en-US" sz="1400" b="1" dirty="0"/>
-              <a:t>	section 3 </a:t>
-            </a:r>
-            <a:r>
-              <a:rPr lang="en-US" sz="1400" b="1" dirty="0" err="1"/>
-              <a:t>eployeePM</a:t>
-            </a:r>
-            <a:r>
-              <a:rPr lang="en-US" sz="1400" b="1" dirty="0"/>
-              <a:t> cash check in</a:t>
-            </a:r>
-          </a:p>
-          <a:p>
-            <a:endParaRPr lang="en-US" sz="1400" b="1" dirty="0"/>
-          </a:p>
-          <a:p>
-            <a:r>
-              <a:rPr lang="en-US" sz="1400" b="1" dirty="0"/>
-              <a:t>delete slide 50</a:t>
-            </a:r>
-          </a:p>
-          <a:p>
-            <a:endParaRPr lang="en-US" sz="1400" b="1" dirty="0"/>
-          </a:p>
-          <a:p>
-            <a:r>
-              <a:rPr lang="en-US" sz="1400" b="1" dirty="0"/>
-              <a:t>Photos </a:t>
-            </a:r>
-          </a:p>
-          <a:p>
-            <a:r>
-              <a:rPr lang="en-US" sz="1400" b="1" dirty="0"/>
-              <a:t>Name </a:t>
-            </a:r>
-          </a:p>
-          <a:p>
-            <a:r>
-              <a:rPr lang="en-US" sz="1400" b="1" dirty="0"/>
-              <a:t>Address </a:t>
-            </a:r>
-          </a:p>
-          <a:p>
-            <a:r>
-              <a:rPr lang="en-US" sz="1400" b="1" dirty="0"/>
-              <a:t>Map</a:t>
-            </a:r>
-          </a:p>
-          <a:p>
-            <a:r>
-              <a:rPr lang="en-US" sz="1400" b="1" dirty="0"/>
-              <a:t>Description </a:t>
-            </a:r>
-          </a:p>
-          <a:p>
-            <a:r>
-              <a:rPr lang="en-US" sz="1400" b="1" dirty="0"/>
-              <a:t>Package Capacity - maximum capacity</a:t>
-            </a:r>
-          </a:p>
-          <a:p>
-            <a:r>
-              <a:rPr lang="en-US" sz="1400" b="1" dirty="0"/>
-              <a:t>Time of </a:t>
-            </a:r>
-            <a:r>
-              <a:rPr lang="en-US" sz="1400" b="1" dirty="0" err="1"/>
-              <a:t>CheckIn&amp;Out</a:t>
-            </a:r>
-            <a:endParaRPr lang="en-US" sz="1400" b="1" dirty="0"/>
-          </a:p>
-          <a:p>
-            <a:r>
-              <a:rPr lang="en-US" sz="1400" b="1" dirty="0"/>
-              <a:t>Category : select (</a:t>
-            </a:r>
-            <a:r>
-              <a:rPr lang="en-US" sz="1400" b="1" dirty="0" err="1"/>
-              <a:t>Barkada</a:t>
-            </a:r>
-            <a:r>
-              <a:rPr lang="en-US" sz="1400" b="1" dirty="0"/>
-              <a:t>, Couple, Family, Other)</a:t>
-            </a:r>
-          </a:p>
-          <a:p>
-            <a:endParaRPr lang="en-US" sz="1400" b="1" dirty="0"/>
-          </a:p>
-          <a:p>
-            <a:r>
-              <a:rPr lang="en-US" sz="1400" b="1" dirty="0"/>
-              <a:t>Package Price : Currency/Number w/ peso sign </a:t>
-            </a:r>
-          </a:p>
-          <a:p>
-            <a:r>
-              <a:rPr lang="en-US" sz="1400" b="1" dirty="0"/>
-              <a:t>Reservation Fee : Currency/Number w/ peso sign </a:t>
-            </a:r>
-          </a:p>
-          <a:p>
-            <a:r>
-              <a:rPr lang="en-US" sz="1400" b="1" dirty="0"/>
-              <a:t>Additional Pax Price: Currency/Number w/ peso sign </a:t>
-            </a:r>
-          </a:p>
-          <a:p>
-            <a:r>
-              <a:rPr lang="en-US" sz="1400" b="1" dirty="0"/>
-              <a:t>Discount </a:t>
-            </a:r>
-          </a:p>
-          <a:p>
-            <a:endParaRPr lang="en-US" sz="1400" b="1" dirty="0"/>
-          </a:p>
-          <a:p>
-            <a:r>
-              <a:rPr lang="en-US" sz="1400" b="1" dirty="0"/>
-              <a:t>Amenities</a:t>
-            </a:r>
-          </a:p>
-          <a:p>
-            <a:r>
-              <a:rPr lang="en-US" sz="1400" b="1" dirty="0"/>
-              <a:t>Other Amenities </a:t>
-            </a:r>
-          </a:p>
-          <a:p>
-            <a:endParaRPr lang="en-US" sz="1400" b="1" dirty="0"/>
-          </a:p>
-          <a:p>
-            <a:r>
-              <a:rPr lang="en-US" sz="1400" b="1" dirty="0"/>
-              <a:t>Calendar</a:t>
-            </a:r>
-          </a:p>
-          <a:p>
-            <a:endParaRPr lang="en-US" sz="1400" b="1" dirty="0"/>
-          </a:p>
-          <a:p>
-            <a:r>
-              <a:rPr lang="en-US" sz="1400" b="1" dirty="0"/>
-              <a:t>book button</a:t>
-            </a:r>
-          </a:p>
-          <a:p>
-            <a:endParaRPr lang="en-US" sz="1400" b="1" dirty="0"/>
-          </a:p>
-          <a:p>
-            <a:r>
-              <a:rPr lang="en-US" sz="1400" b="1" dirty="0"/>
-              <a:t>Review scale</a:t>
-            </a:r>
-          </a:p>
-          <a:p>
-            <a:r>
-              <a:rPr lang="en-US" sz="1400" b="1" dirty="0"/>
-              <a:t>}</a:t>
-            </a:r>
-          </a:p>
-        </p:txBody>
-      </p:sp>
-      <p:sp>
-        <p:nvSpPr>
-          <p:cNvPr id="2" name="Rectangle: Rounded Corners 1">
-            <a:extLst>
-              <a:ext uri="{FF2B5EF4-FFF2-40B4-BE49-F238E27FC236}">
-                <a16:creationId xmlns:a16="http://schemas.microsoft.com/office/drawing/2014/main" id="{4617DFCC-1807-A537-ABB4-FA14E60609A5}"/>
-              </a:ext>
-            </a:extLst>
-          </p:cNvPr>
-          <p:cNvSpPr/>
-          <p:nvPr/>
-        </p:nvSpPr>
-        <p:spPr>
-          <a:xfrm>
-            <a:off x="6825673" y="101601"/>
-            <a:ext cx="5297056" cy="1173017"/>
-          </a:xfrm>
-          <a:prstGeom prst="roundRect">
-            <a:avLst>
-              <a:gd name="adj" fmla="val 8182"/>
-            </a:avLst>
-          </a:prstGeom>
-          <a:solidFill>
-            <a:schemeClr val="accent6">
-              <a:lumMod val="50000"/>
-            </a:schemeClr>
-          </a:solidFill>
-          <a:ln>
-            <a:noFill/>
-          </a:ln>
-        </p:spPr>
-        <p:style>
-          <a:lnRef idx="2">
-            <a:schemeClr val="accent1">
-              <a:shade val="15000"/>
-            </a:schemeClr>
-          </a:lnRef>
-          <a:fillRef idx="1">
-            <a:schemeClr val="accent1"/>
-          </a:fillRef>
-          <a:effectRef idx="0">
-            <a:schemeClr val="accent1"/>
-          </a:effectRef>
-          <a:fontRef idx="minor">
-            <a:schemeClr val="lt1"/>
-          </a:fontRef>
-        </p:style>
-        <p:txBody>
-          <a:bodyPr rtlCol="0" anchor="ctr"/>
-          <a:lstStyle/>
-          <a:p>
-            <a:r>
-              <a:rPr lang="en-US" sz="1600" b="1" dirty="0"/>
-              <a:t>guestConfirmReservation.html{</a:t>
-            </a:r>
-          </a:p>
-          <a:p>
-            <a:pPr marL="628650" lvl="1" indent="-171450">
-              <a:buFont typeface="Arial" panose="020B0604020202020204" pitchFamily="34" charset="0"/>
-              <a:buChar char="•"/>
-            </a:pPr>
-            <a:r>
-              <a:rPr lang="en-US" sz="1600" b="1" dirty="0"/>
-              <a:t>// same as before revamp the design</a:t>
-            </a:r>
-          </a:p>
-          <a:p>
-            <a:pPr marL="742950" lvl="1" indent="-285750">
-              <a:buFont typeface="Arial" panose="020B0604020202020204" pitchFamily="34" charset="0"/>
-              <a:buChar char="•"/>
-            </a:pPr>
-            <a:r>
-              <a:rPr lang="en-US" sz="1600" b="1" dirty="0"/>
-              <a:t>Proceed to payment </a:t>
-            </a:r>
-            <a:r>
-              <a:rPr lang="en-US" sz="1600" b="1" dirty="0" err="1"/>
-              <a:t>Btn</a:t>
-            </a:r>
-            <a:r>
-              <a:rPr lang="en-US" sz="1600" b="1" dirty="0"/>
-              <a:t>: Payment</a:t>
-            </a:r>
-          </a:p>
-          <a:p>
-            <a:pPr marL="742950" lvl="1" indent="-285750">
-              <a:buFont typeface="Arial" panose="020B0604020202020204" pitchFamily="34" charset="0"/>
-              <a:buChar char="•"/>
-            </a:pPr>
-            <a:r>
-              <a:rPr lang="en-US" sz="1600" b="1" dirty="0"/>
-              <a:t>Reservation or Package Payment</a:t>
-            </a:r>
-          </a:p>
-          <a:p>
-            <a:r>
-              <a:rPr lang="en-US" sz="1600" b="1" dirty="0"/>
-              <a:t>}</a:t>
-            </a:r>
-          </a:p>
-        </p:txBody>
-      </p:sp>
-      <p:sp>
-        <p:nvSpPr>
-          <p:cNvPr id="3" name="Rectangle: Rounded Corners 2">
-            <a:extLst>
-              <a:ext uri="{FF2B5EF4-FFF2-40B4-BE49-F238E27FC236}">
-                <a16:creationId xmlns:a16="http://schemas.microsoft.com/office/drawing/2014/main" id="{338085F6-E2E5-5EAF-D4F0-98EA037E644A}"/>
-              </a:ext>
-            </a:extLst>
-          </p:cNvPr>
-          <p:cNvSpPr/>
-          <p:nvPr/>
-        </p:nvSpPr>
-        <p:spPr>
-          <a:xfrm>
-            <a:off x="6825672" y="1274619"/>
-            <a:ext cx="5297056" cy="5481782"/>
-          </a:xfrm>
-          <a:prstGeom prst="roundRect">
-            <a:avLst>
-              <a:gd name="adj" fmla="val 1311"/>
-            </a:avLst>
-          </a:prstGeom>
-          <a:solidFill>
-            <a:schemeClr val="accent6">
-              <a:lumMod val="50000"/>
-            </a:schemeClr>
-          </a:solidFill>
-          <a:ln>
-            <a:noFill/>
-          </a:ln>
-        </p:spPr>
-        <p:style>
-          <a:lnRef idx="2">
-            <a:schemeClr val="accent1">
-              <a:shade val="15000"/>
-            </a:schemeClr>
-          </a:lnRef>
-          <a:fillRef idx="1">
-            <a:schemeClr val="accent1"/>
-          </a:fillRef>
-          <a:effectRef idx="0">
-            <a:schemeClr val="accent1"/>
-          </a:effectRef>
-          <a:fontRef idx="minor">
-            <a:schemeClr val="lt1"/>
-          </a:fontRef>
-        </p:style>
-        <p:txBody>
-          <a:bodyPr rtlCol="0" anchor="ctr"/>
-          <a:lstStyle/>
-          <a:p>
-            <a:r>
-              <a:rPr lang="en-US" sz="1600" b="1" dirty="0"/>
-              <a:t>guestPayment.html{</a:t>
-            </a:r>
-          </a:p>
-          <a:p>
-            <a:pPr lvl="1"/>
-            <a:r>
-              <a:rPr lang="en-US" sz="1600" b="1" dirty="0"/>
-              <a:t>Section1{</a:t>
-            </a:r>
-          </a:p>
-          <a:p>
-            <a:pPr marL="1200150" lvl="2" indent="-285750">
-              <a:buFont typeface="Arial" panose="020B0604020202020204" pitchFamily="34" charset="0"/>
-              <a:buChar char="•"/>
-            </a:pPr>
-            <a:r>
-              <a:rPr lang="en-US" sz="1600" b="1" dirty="0"/>
-              <a:t>For: Reservation/Full Payment (Dynamic)</a:t>
-            </a:r>
-          </a:p>
-          <a:p>
-            <a:pPr marL="1200150" lvl="2" indent="-285750">
-              <a:buFont typeface="Arial" panose="020B0604020202020204" pitchFamily="34" charset="0"/>
-              <a:buChar char="•"/>
-            </a:pPr>
-            <a:r>
-              <a:rPr lang="en-US" sz="1600" b="1" dirty="0"/>
-              <a:t>Price</a:t>
-            </a:r>
-          </a:p>
-          <a:p>
-            <a:pPr marL="1200150" lvl="2" indent="-285750">
-              <a:buFont typeface="Arial" panose="020B0604020202020204" pitchFamily="34" charset="0"/>
-              <a:buChar char="•"/>
-            </a:pPr>
-            <a:r>
-              <a:rPr lang="en-US" sz="1600" b="1" dirty="0"/>
-              <a:t>Selection (</a:t>
-            </a:r>
-            <a:r>
-              <a:rPr lang="en-US" sz="1600" b="1" dirty="0" err="1"/>
-              <a:t>Gcash</a:t>
-            </a:r>
-            <a:r>
-              <a:rPr lang="en-US" sz="1600" b="1" dirty="0"/>
-              <a:t>, </a:t>
-            </a:r>
-            <a:r>
-              <a:rPr lang="en-US" sz="1600" b="1" dirty="0" err="1"/>
-              <a:t>Gotyme</a:t>
-            </a:r>
-            <a:r>
-              <a:rPr lang="en-US" sz="1600" b="1" dirty="0"/>
-              <a:t>, maya, </a:t>
-            </a:r>
-            <a:r>
-              <a:rPr lang="en-US" sz="1600" b="1" dirty="0" err="1"/>
-              <a:t>UnionBank</a:t>
-            </a:r>
-            <a:r>
-              <a:rPr lang="en-US" sz="1600" b="1" dirty="0"/>
-              <a:t>)</a:t>
-            </a:r>
-          </a:p>
-          <a:p>
-            <a:pPr marL="1200150" lvl="2" indent="-285750">
-              <a:buFont typeface="Arial" panose="020B0604020202020204" pitchFamily="34" charset="0"/>
-              <a:buChar char="•"/>
-            </a:pPr>
-            <a:r>
-              <a:rPr lang="en-US" sz="1600" b="1" dirty="0"/>
-              <a:t>QR Code</a:t>
-            </a:r>
-          </a:p>
-          <a:p>
-            <a:pPr lvl="1"/>
-            <a:r>
-              <a:rPr lang="en-US" sz="1600" b="1" dirty="0"/>
-              <a:t>}</a:t>
-            </a:r>
-          </a:p>
-          <a:p>
-            <a:pPr lvl="1"/>
-            <a:r>
-              <a:rPr lang="en-US" sz="1600" b="1" dirty="0"/>
-              <a:t>Section2{</a:t>
-            </a:r>
-          </a:p>
-          <a:p>
-            <a:pPr marL="1200150" lvl="2" indent="-285750">
-              <a:buFont typeface="Arial" panose="020B0604020202020204" pitchFamily="34" charset="0"/>
-              <a:buChar char="•"/>
-            </a:pPr>
-            <a:r>
-              <a:rPr lang="en-US" sz="1600" b="1" dirty="0"/>
-              <a:t>Text: “Upload a Screenshot”</a:t>
-            </a:r>
-          </a:p>
-          <a:p>
-            <a:pPr marL="1200150" lvl="2" indent="-285750">
-              <a:buFont typeface="Arial" panose="020B0604020202020204" pitchFamily="34" charset="0"/>
-              <a:buChar char="•"/>
-            </a:pPr>
-            <a:r>
-              <a:rPr lang="en-US" sz="1600" b="1" dirty="0"/>
-              <a:t>Upload drag and drop or click the upload button</a:t>
-            </a:r>
-          </a:p>
-          <a:p>
-            <a:pPr marL="1200150" lvl="2" indent="-285750">
-              <a:buFont typeface="Arial" panose="020B0604020202020204" pitchFamily="34" charset="0"/>
-              <a:buChar char="•"/>
-            </a:pPr>
-            <a:r>
-              <a:rPr lang="en-US" sz="1600" b="1" dirty="0"/>
-              <a:t>Image preview</a:t>
-            </a:r>
-          </a:p>
-          <a:p>
-            <a:pPr marL="1200150" lvl="2" indent="-285750">
-              <a:buFont typeface="Arial" panose="020B0604020202020204" pitchFamily="34" charset="0"/>
-              <a:buChar char="•"/>
-            </a:pPr>
-            <a:endParaRPr lang="en-US" sz="1600" b="1" dirty="0"/>
-          </a:p>
-          <a:p>
-            <a:pPr marL="1200150" lvl="2" indent="-285750">
-              <a:buFont typeface="Arial" panose="020B0604020202020204" pitchFamily="34" charset="0"/>
-              <a:buChar char="•"/>
-            </a:pPr>
-            <a:r>
-              <a:rPr lang="en-US" sz="1600" b="1" dirty="0"/>
-              <a:t>Input: // This will populate the transaction#</a:t>
-            </a:r>
-          </a:p>
-          <a:p>
-            <a:pPr marL="1200150" lvl="2" indent="-285750">
-              <a:buFont typeface="Arial" panose="020B0604020202020204" pitchFamily="34" charset="0"/>
-              <a:buChar char="•"/>
-            </a:pPr>
-            <a:r>
-              <a:rPr lang="en-US" sz="1600" b="1" dirty="0"/>
-              <a:t>Button: Confirm Payment</a:t>
-            </a:r>
-          </a:p>
-          <a:p>
-            <a:pPr marL="1200150" lvl="2" indent="-285750">
-              <a:buFont typeface="Arial" panose="020B0604020202020204" pitchFamily="34" charset="0"/>
-              <a:buChar char="•"/>
-            </a:pPr>
-            <a:r>
-              <a:rPr lang="en-US" sz="1400" b="1" dirty="0"/>
-              <a:t>Warning: Please verify the transaction number carefully. It cannot be changed after confirmation, and errors may lead to booking cancellation.</a:t>
-            </a:r>
-          </a:p>
-          <a:p>
-            <a:r>
-              <a:rPr lang="en-US" sz="1600" b="1" dirty="0"/>
-              <a:t>}</a:t>
-            </a:r>
-          </a:p>
-        </p:txBody>
-      </p:sp>
-      <p:cxnSp>
-        <p:nvCxnSpPr>
-          <p:cNvPr id="4" name="Connector: Curved 3">
-            <a:extLst>
-              <a:ext uri="{FF2B5EF4-FFF2-40B4-BE49-F238E27FC236}">
-                <a16:creationId xmlns:a16="http://schemas.microsoft.com/office/drawing/2014/main" id="{D4E191A5-48A4-C58C-B4C0-B608243F776E}"/>
-              </a:ext>
-            </a:extLst>
-          </p:cNvPr>
-          <p:cNvCxnSpPr>
-            <a:cxnSpLocks/>
-          </p:cNvCxnSpPr>
-          <p:nvPr/>
-        </p:nvCxnSpPr>
-        <p:spPr>
-          <a:xfrm rot="10800000" flipV="1">
-            <a:off x="8914247" y="1110675"/>
-            <a:ext cx="685798" cy="623452"/>
-          </a:xfrm>
-          <a:prstGeom prst="curvedConnector3">
-            <a:avLst>
-              <a:gd name="adj1" fmla="val 50000"/>
-            </a:avLst>
-          </a:prstGeom>
-          <a:ln w="19050" cap="flat" cmpd="sng" algn="ctr">
-            <a:solidFill>
-              <a:schemeClr val="accent4"/>
-            </a:solidFill>
-            <a:prstDash val="solid"/>
-            <a:round/>
-            <a:headEnd type="arrow" w="med" len="med"/>
-            <a:tailEnd type="arrow" w="med" len="med"/>
-          </a:ln>
-        </p:spPr>
-        <p:style>
-          <a:lnRef idx="0">
-            <a:scrgbClr r="0" g="0" b="0"/>
-          </a:lnRef>
-          <a:fillRef idx="0">
-            <a:scrgbClr r="0" g="0" b="0"/>
-          </a:fillRef>
-          <a:effectRef idx="0">
-            <a:scrgbClr r="0" g="0" b="0"/>
-          </a:effectRef>
-          <a:fontRef idx="minor">
-            <a:schemeClr val="tx1"/>
-          </a:fontRef>
-        </p:style>
-      </p:cxnSp>
-      <p:cxnSp>
-        <p:nvCxnSpPr>
-          <p:cNvPr id="7" name="Connector: Curved 6">
-            <a:extLst>
-              <a:ext uri="{FF2B5EF4-FFF2-40B4-BE49-F238E27FC236}">
-                <a16:creationId xmlns:a16="http://schemas.microsoft.com/office/drawing/2014/main" id="{47FE4FF9-E8FA-AE95-5756-49769EBF35F5}"/>
-              </a:ext>
-            </a:extLst>
-          </p:cNvPr>
-          <p:cNvCxnSpPr>
-            <a:cxnSpLocks/>
-          </p:cNvCxnSpPr>
-          <p:nvPr/>
-        </p:nvCxnSpPr>
-        <p:spPr>
-          <a:xfrm rot="10800000" flipV="1">
-            <a:off x="1302331" y="300182"/>
-            <a:ext cx="5643414" cy="5394034"/>
-          </a:xfrm>
-          <a:prstGeom prst="curvedConnector3">
-            <a:avLst>
-              <a:gd name="adj1" fmla="val 20213"/>
-            </a:avLst>
-          </a:prstGeom>
-          <a:ln w="19050" cap="flat" cmpd="sng" algn="ctr">
-            <a:solidFill>
-              <a:schemeClr val="accent4"/>
-            </a:solidFill>
-            <a:prstDash val="solid"/>
-            <a:round/>
-            <a:headEnd type="arrow" w="med" len="med"/>
-            <a:tailEnd type="arrow" w="med" len="med"/>
-          </a:ln>
-        </p:spPr>
-        <p:style>
-          <a:lnRef idx="0">
-            <a:scrgbClr r="0" g="0" b="0"/>
-          </a:lnRef>
-          <a:fillRef idx="0">
-            <a:scrgbClr r="0" g="0" b="0"/>
-          </a:fillRef>
-          <a:effectRef idx="0">
-            <a:scrgbClr r="0" g="0" b="0"/>
-          </a:effectRef>
-          <a:fontRef idx="minor">
-            <a:schemeClr val="tx1"/>
-          </a:fontRef>
-        </p:style>
-      </p:cxnSp>
-    </p:spTree>
-    <p:extLst>
-      <p:ext uri="{BB962C8B-B14F-4D97-AF65-F5344CB8AC3E}">
-        <p14:creationId xmlns:p14="http://schemas.microsoft.com/office/powerpoint/2010/main" val="278536806"/>
-      </p:ext>
-    </p:extLst>
-  </p:cSld>
-  <p:clrMapOvr>
-    <a:masterClrMapping/>
-  </p:clrMapOvr>
-</p:sld>
-</file>
-
-<file path=ppt/slides/slide47.xml><?xml version="1.0" encoding="utf-8"?>
-<p:sld xmlns:a="http://schemas.openxmlformats.org/drawingml/2006/main" xmlns:r="http://schemas.openxmlformats.org/officeDocument/2006/relationships" xmlns:p="http://schemas.openxmlformats.org/presentationml/2006/main">
-  <p:cSld>
-    <p:spTree>
-      <p:nvGrpSpPr>
-        <p:cNvPr id="1" name=""/>
-        <p:cNvGrpSpPr/>
-        <p:nvPr/>
-      </p:nvGrpSpPr>
-      <p:grpSpPr>
-        <a:xfrm>
-          <a:off x="0" y="0"/>
-          <a:ext cx="0" cy="0"/>
-          <a:chOff x="0" y="0"/>
-          <a:chExt cx="0" cy="0"/>
-        </a:xfrm>
-      </p:grpSpPr>
-      <p:sp>
-        <p:nvSpPr>
-          <p:cNvPr id="4" name="TextBox 3">
-            <a:extLst>
-              <a:ext uri="{FF2B5EF4-FFF2-40B4-BE49-F238E27FC236}">
-                <a16:creationId xmlns:a16="http://schemas.microsoft.com/office/drawing/2014/main" id="{E094F53A-6361-E94E-5BDE-6B5297C1498E}"/>
-              </a:ext>
-            </a:extLst>
-          </p:cNvPr>
-          <p:cNvSpPr txBox="1"/>
-          <p:nvPr/>
-        </p:nvSpPr>
-        <p:spPr>
-          <a:xfrm>
-            <a:off x="0" y="0"/>
-            <a:ext cx="2955636" cy="400110"/>
-          </a:xfrm>
-          <a:prstGeom prst="rect">
-            <a:avLst/>
-          </a:prstGeom>
-          <a:noFill/>
-        </p:spPr>
-        <p:txBody>
-          <a:bodyPr wrap="square" rtlCol="0">
-            <a:spAutoFit/>
-          </a:bodyPr>
-          <a:lstStyle/>
-          <a:p>
-            <a:r>
-              <a:rPr lang="en-US" sz="2000" b="1" dirty="0"/>
-              <a:t>guestProfile.html</a:t>
-            </a:r>
-          </a:p>
-        </p:txBody>
-      </p:sp>
-      <p:sp>
-        <p:nvSpPr>
-          <p:cNvPr id="5" name="Rectangle: Rounded Corners 4">
-            <a:extLst>
-              <a:ext uri="{FF2B5EF4-FFF2-40B4-BE49-F238E27FC236}">
-                <a16:creationId xmlns:a16="http://schemas.microsoft.com/office/drawing/2014/main" id="{F9ACFF90-048F-320A-A752-8D1492FAD30F}"/>
-              </a:ext>
-            </a:extLst>
-          </p:cNvPr>
-          <p:cNvSpPr/>
-          <p:nvPr/>
-        </p:nvSpPr>
-        <p:spPr>
-          <a:xfrm>
-            <a:off x="1427364" y="460454"/>
-            <a:ext cx="9337272" cy="5937091"/>
-          </a:xfrm>
-          <a:prstGeom prst="roundRect">
-            <a:avLst>
-              <a:gd name="adj" fmla="val 4146"/>
-            </a:avLst>
-          </a:prstGeom>
-          <a:solidFill>
-            <a:schemeClr val="accent6">
-              <a:lumMod val="50000"/>
-            </a:schemeClr>
-          </a:solidFill>
-          <a:ln>
-            <a:noFill/>
-          </a:ln>
-        </p:spPr>
-        <p:style>
-          <a:lnRef idx="2">
-            <a:schemeClr val="accent1">
-              <a:shade val="15000"/>
-            </a:schemeClr>
-          </a:lnRef>
-          <a:fillRef idx="1">
-            <a:schemeClr val="accent1"/>
-          </a:fillRef>
-          <a:effectRef idx="0">
-            <a:schemeClr val="accent1"/>
-          </a:effectRef>
-          <a:fontRef idx="minor">
-            <a:schemeClr val="lt1"/>
-          </a:fontRef>
-        </p:style>
-        <p:txBody>
-          <a:bodyPr rtlCol="0" anchor="ctr"/>
-          <a:lstStyle/>
-          <a:p>
-            <a:r>
-              <a:rPr lang="en-US" b="1" dirty="0"/>
-              <a:t>Profile{</a:t>
-            </a:r>
-          </a:p>
-          <a:p>
-            <a:pPr marL="800100" lvl="1" indent="-342900">
-              <a:buFont typeface="Arial" panose="020B0604020202020204" pitchFamily="34" charset="0"/>
-              <a:buChar char="•"/>
-            </a:pPr>
-            <a:r>
-              <a:rPr lang="en-US" b="1" dirty="0" err="1"/>
-              <a:t>EditBtn</a:t>
-            </a:r>
-            <a:r>
-              <a:rPr lang="en-US" b="1" dirty="0"/>
-              <a:t> : (guestEditProfile.html)</a:t>
-            </a:r>
-          </a:p>
-          <a:p>
-            <a:pPr marL="800100" lvl="1" indent="-342900">
-              <a:buFont typeface="Arial" panose="020B0604020202020204" pitchFamily="34" charset="0"/>
-              <a:buChar char="•"/>
-            </a:pPr>
-            <a:r>
-              <a:rPr lang="en-US" b="1" dirty="0"/>
-              <a:t>Profile Picture (onclick (</a:t>
-            </a:r>
-            <a:r>
-              <a:rPr lang="en-US" b="1" dirty="0" err="1"/>
-              <a:t>ZoomModal</a:t>
-            </a:r>
-            <a:r>
-              <a:rPr lang="en-US" b="1" dirty="0"/>
-              <a:t>))</a:t>
-            </a:r>
-          </a:p>
-          <a:p>
-            <a:pPr marL="800100" lvl="1" indent="-342900">
-              <a:buFont typeface="Arial" panose="020B0604020202020204" pitchFamily="34" charset="0"/>
-              <a:buChar char="•"/>
-            </a:pPr>
-            <a:r>
-              <a:rPr lang="en-US" b="1" dirty="0"/>
-              <a:t>Full Name (Verified or Unverified) ☑</a:t>
-            </a:r>
-          </a:p>
-          <a:p>
-            <a:pPr marL="800100" lvl="1" indent="-342900">
-              <a:buFont typeface="Arial" panose="020B0604020202020204" pitchFamily="34" charset="0"/>
-              <a:buChar char="•"/>
-            </a:pPr>
-            <a:r>
-              <a:rPr lang="en-US" b="1" dirty="0"/>
-              <a:t>Phone Number</a:t>
-            </a:r>
-          </a:p>
-          <a:p>
-            <a:pPr marL="800100" lvl="1" indent="-342900">
-              <a:buFont typeface="Arial" panose="020B0604020202020204" pitchFamily="34" charset="0"/>
-              <a:buChar char="•"/>
-            </a:pPr>
-            <a:r>
-              <a:rPr lang="en-US" b="1" dirty="0"/>
-              <a:t>Email</a:t>
-            </a:r>
-          </a:p>
-          <a:p>
-            <a:pPr marL="800100" lvl="1" indent="-342900">
-              <a:buFont typeface="Arial" panose="020B0604020202020204" pitchFamily="34" charset="0"/>
-              <a:buChar char="•"/>
-            </a:pPr>
-            <a:r>
-              <a:rPr lang="en-US" b="1" dirty="0" err="1"/>
-              <a:t>Bday</a:t>
-            </a:r>
-            <a:endParaRPr lang="en-US" b="1" dirty="0"/>
-          </a:p>
-          <a:p>
-            <a:pPr marL="800100" lvl="1" indent="-342900">
-              <a:buFont typeface="Arial" panose="020B0604020202020204" pitchFamily="34" charset="0"/>
-              <a:buChar char="•"/>
-            </a:pPr>
-            <a:r>
-              <a:rPr lang="en-US" b="1" dirty="0"/>
-              <a:t>Age</a:t>
-            </a:r>
-          </a:p>
-          <a:p>
-            <a:pPr marL="800100" lvl="1" indent="-342900">
-              <a:buFont typeface="Arial" panose="020B0604020202020204" pitchFamily="34" charset="0"/>
-              <a:buChar char="•"/>
-            </a:pPr>
-            <a:r>
-              <a:rPr lang="en-US" b="1" dirty="0"/>
-              <a:t>Sex</a:t>
-            </a:r>
-          </a:p>
-          <a:p>
-            <a:r>
-              <a:rPr lang="en-US" b="1" dirty="0"/>
-              <a:t>}</a:t>
-            </a:r>
-          </a:p>
-          <a:p>
-            <a:endParaRPr lang="en-US" b="1" dirty="0"/>
-          </a:p>
-          <a:p>
-            <a:r>
-              <a:rPr lang="en-US" b="1" dirty="0"/>
-              <a:t>If (unverified){</a:t>
-            </a:r>
-          </a:p>
-          <a:p>
-            <a:pPr marL="800100" lvl="1" indent="-342900">
-              <a:buFont typeface="Arial" panose="020B0604020202020204" pitchFamily="34" charset="0"/>
-              <a:buChar char="•"/>
-            </a:pPr>
-            <a:r>
-              <a:rPr lang="en-US" b="1" dirty="0"/>
-              <a:t>Clickable Div{</a:t>
-            </a:r>
-          </a:p>
-          <a:p>
-            <a:pPr marL="1257300" lvl="2" indent="-342900">
-              <a:buFont typeface="Arial" panose="020B0604020202020204" pitchFamily="34" charset="0"/>
-              <a:buChar char="•"/>
-            </a:pPr>
-            <a:r>
-              <a:rPr lang="en-US" b="1" dirty="0"/>
-              <a:t>Verify your account using Valid ID</a:t>
-            </a:r>
-          </a:p>
-          <a:p>
-            <a:pPr marL="1257300" lvl="2" indent="-342900">
-              <a:buFont typeface="Arial" panose="020B0604020202020204" pitchFamily="34" charset="0"/>
-              <a:buChar char="•"/>
-            </a:pPr>
-            <a:r>
-              <a:rPr lang="en-US" b="1" dirty="0"/>
-              <a:t>You can add picture of digital design of ID </a:t>
-            </a:r>
-          </a:p>
-          <a:p>
-            <a:pPr marL="1257300" lvl="2" indent="-342900">
-              <a:buFont typeface="Arial" panose="020B0604020202020204" pitchFamily="34" charset="0"/>
-              <a:buChar char="•"/>
-            </a:pPr>
-            <a:r>
-              <a:rPr lang="en-US" b="1" dirty="0"/>
-              <a:t>Description of Verifying ID (`To meet KYC requirements, we use AI tools to verify the authenticity of your ID and extract only key information—your actual ID is not stored by our system.`)</a:t>
-            </a:r>
-          </a:p>
-          <a:p>
-            <a:pPr marL="1257300" lvl="2" indent="-342900">
-              <a:buFont typeface="Arial" panose="020B0604020202020204" pitchFamily="34" charset="0"/>
-              <a:buChar char="•"/>
-            </a:pPr>
-            <a:r>
-              <a:rPr lang="en-US" b="1" dirty="0"/>
-              <a:t>Onclick (Redirection)</a:t>
-            </a:r>
-          </a:p>
-          <a:p>
-            <a:pPr lvl="1"/>
-            <a:r>
-              <a:rPr lang="en-US" b="1" dirty="0"/>
-              <a:t>}</a:t>
-            </a:r>
-          </a:p>
-          <a:p>
-            <a:r>
-              <a:rPr lang="en-US" b="1" dirty="0"/>
-              <a:t>}</a:t>
-            </a:r>
-          </a:p>
-        </p:txBody>
-      </p:sp>
-    </p:spTree>
-    <p:extLst>
-      <p:ext uri="{BB962C8B-B14F-4D97-AF65-F5344CB8AC3E}">
-        <p14:creationId xmlns:p14="http://schemas.microsoft.com/office/powerpoint/2010/main" val="1253830261"/>
-      </p:ext>
-    </p:extLst>
-  </p:cSld>
-  <p:clrMapOvr>
-    <a:masterClrMapping/>
-  </p:clrMapOvr>
-</p:sld>
-</file>
-
-<file path=ppt/slides/slide48.xml><?xml version="1.0" encoding="utf-8"?>
-<p:sld xmlns:a="http://schemas.openxmlformats.org/drawingml/2006/main" xmlns:r="http://schemas.openxmlformats.org/officeDocument/2006/relationships" xmlns:p="http://schemas.openxmlformats.org/presentationml/2006/main">
-  <p:cSld>
-    <p:spTree>
-      <p:nvGrpSpPr>
-        <p:cNvPr id="1" name=""/>
-        <p:cNvGrpSpPr/>
-        <p:nvPr/>
-      </p:nvGrpSpPr>
-      <p:grpSpPr>
-        <a:xfrm>
-          <a:off x="0" y="0"/>
-          <a:ext cx="0" cy="0"/>
-          <a:chOff x="0" y="0"/>
-          <a:chExt cx="0" cy="0"/>
-        </a:xfrm>
-      </p:grpSpPr>
-      <p:sp>
-        <p:nvSpPr>
-          <p:cNvPr id="4" name="TextBox 3">
-            <a:extLst>
-              <a:ext uri="{FF2B5EF4-FFF2-40B4-BE49-F238E27FC236}">
-                <a16:creationId xmlns:a16="http://schemas.microsoft.com/office/drawing/2014/main" id="{E094F53A-6361-E94E-5BDE-6B5297C1498E}"/>
-              </a:ext>
-            </a:extLst>
-          </p:cNvPr>
-          <p:cNvSpPr txBox="1"/>
-          <p:nvPr/>
-        </p:nvSpPr>
-        <p:spPr>
-          <a:xfrm>
-            <a:off x="0" y="0"/>
-            <a:ext cx="2955636" cy="400110"/>
-          </a:xfrm>
-          <a:prstGeom prst="rect">
-            <a:avLst/>
-          </a:prstGeom>
-          <a:noFill/>
-        </p:spPr>
-        <p:txBody>
-          <a:bodyPr wrap="square" rtlCol="0">
-            <a:spAutoFit/>
-          </a:bodyPr>
-          <a:lstStyle/>
-          <a:p>
-            <a:r>
-              <a:rPr lang="en-US" sz="2000" b="1" dirty="0"/>
-              <a:t>guestEditProfile.html</a:t>
-            </a:r>
-          </a:p>
-        </p:txBody>
-      </p:sp>
-      <p:sp>
-        <p:nvSpPr>
-          <p:cNvPr id="5" name="Rectangle: Rounded Corners 4">
-            <a:extLst>
-              <a:ext uri="{FF2B5EF4-FFF2-40B4-BE49-F238E27FC236}">
-                <a16:creationId xmlns:a16="http://schemas.microsoft.com/office/drawing/2014/main" id="{F9ACFF90-048F-320A-A752-8D1492FAD30F}"/>
-              </a:ext>
-            </a:extLst>
-          </p:cNvPr>
-          <p:cNvSpPr/>
-          <p:nvPr/>
-        </p:nvSpPr>
-        <p:spPr>
-          <a:xfrm>
-            <a:off x="1396075" y="331673"/>
-            <a:ext cx="9399849" cy="6194654"/>
-          </a:xfrm>
-          <a:prstGeom prst="roundRect">
-            <a:avLst>
-              <a:gd name="adj" fmla="val 8914"/>
-            </a:avLst>
-          </a:prstGeom>
-          <a:solidFill>
-            <a:schemeClr val="accent6">
-              <a:lumMod val="50000"/>
-            </a:schemeClr>
-          </a:solidFill>
-          <a:ln>
-            <a:noFill/>
-          </a:ln>
-        </p:spPr>
-        <p:style>
-          <a:lnRef idx="2">
-            <a:schemeClr val="accent1">
-              <a:shade val="15000"/>
-            </a:schemeClr>
-          </a:lnRef>
-          <a:fillRef idx="1">
-            <a:schemeClr val="accent1"/>
-          </a:fillRef>
-          <a:effectRef idx="0">
-            <a:schemeClr val="accent1"/>
-          </a:effectRef>
-          <a:fontRef idx="minor">
-            <a:schemeClr val="lt1"/>
-          </a:fontRef>
-        </p:style>
-        <p:txBody>
-          <a:bodyPr rtlCol="0" anchor="ctr"/>
-          <a:lstStyle/>
-          <a:p>
-            <a:r>
-              <a:rPr lang="en-US" sz="2000" b="1" dirty="0" err="1"/>
-              <a:t>EditProfileDetails</a:t>
-            </a:r>
-            <a:r>
-              <a:rPr lang="en-US" sz="2000" b="1" dirty="0"/>
-              <a:t>{</a:t>
-            </a:r>
-          </a:p>
-          <a:p>
-            <a:pPr marL="800100" lvl="1" indent="-342900">
-              <a:buFont typeface="Arial" panose="020B0604020202020204" pitchFamily="34" charset="0"/>
-              <a:buChar char="•"/>
-            </a:pPr>
-            <a:r>
-              <a:rPr lang="en-US" sz="2000" b="1" dirty="0"/>
-              <a:t>Auto-fill inputs{</a:t>
-            </a:r>
-          </a:p>
-          <a:p>
-            <a:pPr marL="1257300" lvl="2" indent="-342900">
-              <a:buFont typeface="Arial" panose="020B0604020202020204" pitchFamily="34" charset="0"/>
-              <a:buChar char="•"/>
-            </a:pPr>
-            <a:r>
-              <a:rPr lang="en-US" sz="2000" b="1" dirty="0" err="1"/>
-              <a:t>ProfilePictureBtn</a:t>
-            </a:r>
-            <a:r>
-              <a:rPr lang="en-US" sz="2000" b="1" dirty="0"/>
-              <a:t> (Upload)</a:t>
-            </a:r>
-          </a:p>
-          <a:p>
-            <a:pPr marL="1257300" lvl="2" indent="-342900">
-              <a:buFont typeface="Arial" panose="020B0604020202020204" pitchFamily="34" charset="0"/>
-              <a:buChar char="•"/>
-            </a:pPr>
-            <a:r>
-              <a:rPr lang="en-US" sz="2000" b="1" dirty="0"/>
-              <a:t>Full Name Input</a:t>
-            </a:r>
-          </a:p>
-          <a:p>
-            <a:pPr marL="1257300" lvl="2" indent="-342900">
-              <a:buFont typeface="Arial" panose="020B0604020202020204" pitchFamily="34" charset="0"/>
-              <a:buChar char="•"/>
-            </a:pPr>
-            <a:r>
-              <a:rPr lang="en-US" sz="2000" b="1" dirty="0"/>
-              <a:t>Phone Number</a:t>
-            </a:r>
-          </a:p>
-          <a:p>
-            <a:pPr marL="1257300" lvl="2" indent="-342900">
-              <a:buFont typeface="Arial" panose="020B0604020202020204" pitchFamily="34" charset="0"/>
-              <a:buChar char="•"/>
-            </a:pPr>
-            <a:r>
-              <a:rPr lang="en-US" sz="2000" b="1" dirty="0"/>
-              <a:t>Email input</a:t>
-            </a:r>
-          </a:p>
-          <a:p>
-            <a:pPr lvl="1"/>
-            <a:r>
-              <a:rPr lang="en-US" sz="2000" b="1" dirty="0"/>
-              <a:t>}</a:t>
-            </a:r>
-          </a:p>
-          <a:p>
-            <a:pPr marL="800100" lvl="1" indent="-342900">
-              <a:buFont typeface="Arial" panose="020B0604020202020204" pitchFamily="34" charset="0"/>
-              <a:buChar char="•"/>
-            </a:pPr>
-            <a:r>
-              <a:rPr lang="en-US" sz="2000" b="1" dirty="0" err="1"/>
-              <a:t>editPasswordBtn</a:t>
-            </a:r>
-            <a:r>
-              <a:rPr lang="en-US" sz="2000" b="1" dirty="0"/>
-              <a:t>{</a:t>
-            </a:r>
-          </a:p>
-          <a:p>
-            <a:pPr marL="1257300" lvl="2" indent="-342900">
-              <a:buFont typeface="Arial" panose="020B0604020202020204" pitchFamily="34" charset="0"/>
-              <a:buChar char="•"/>
-            </a:pPr>
-            <a:r>
-              <a:rPr lang="en-US" sz="2000" b="1" dirty="0" err="1"/>
-              <a:t>modalEditPassword</a:t>
-            </a:r>
-            <a:r>
-              <a:rPr lang="en-US" sz="2000" b="1" dirty="0"/>
-              <a:t>(</a:t>
-            </a:r>
-          </a:p>
-          <a:p>
-            <a:pPr marL="1714500" lvl="3" indent="-342900">
-              <a:buFont typeface="Arial" panose="020B0604020202020204" pitchFamily="34" charset="0"/>
-              <a:buChar char="•"/>
-            </a:pPr>
-            <a:r>
-              <a:rPr lang="en-US" sz="2000" b="1" dirty="0"/>
-              <a:t>Enter Current Password</a:t>
-            </a:r>
-          </a:p>
-          <a:p>
-            <a:pPr marL="1714500" lvl="3" indent="-342900">
-              <a:buFont typeface="Arial" panose="020B0604020202020204" pitchFamily="34" charset="0"/>
-              <a:buChar char="•"/>
-            </a:pPr>
-            <a:r>
-              <a:rPr lang="en-US" sz="2000" b="1" dirty="0"/>
-              <a:t>Enter New Password</a:t>
-            </a:r>
-          </a:p>
-          <a:p>
-            <a:pPr marL="1714500" lvl="3" indent="-342900">
-              <a:buFont typeface="Arial" panose="020B0604020202020204" pitchFamily="34" charset="0"/>
-              <a:buChar char="•"/>
-            </a:pPr>
-            <a:r>
-              <a:rPr lang="en-US" sz="2000" b="1" dirty="0"/>
-              <a:t>Confirm Password</a:t>
-            </a:r>
-          </a:p>
-          <a:p>
-            <a:pPr marL="1714500" lvl="3" indent="-342900">
-              <a:buFont typeface="Arial" panose="020B0604020202020204" pitchFamily="34" charset="0"/>
-              <a:buChar char="•"/>
-            </a:pPr>
-            <a:r>
-              <a:rPr lang="en-US" sz="2000" b="1" dirty="0" err="1"/>
-              <a:t>forgotPasswordBtn</a:t>
-            </a:r>
-            <a:r>
-              <a:rPr lang="en-US" sz="2000" b="1" dirty="0"/>
-              <a:t> : ForgotPassword.html</a:t>
-            </a:r>
-          </a:p>
-          <a:p>
-            <a:pPr marL="1714500" lvl="3" indent="-342900">
-              <a:buFont typeface="Arial" panose="020B0604020202020204" pitchFamily="34" charset="0"/>
-              <a:buChar char="•"/>
-            </a:pPr>
-            <a:r>
-              <a:rPr lang="en-US" sz="2000" b="1" dirty="0" err="1"/>
-              <a:t>Btnconfirm</a:t>
-            </a:r>
-            <a:r>
-              <a:rPr lang="en-US" sz="2000" b="1" dirty="0"/>
-              <a:t>(API update password)</a:t>
-            </a:r>
-          </a:p>
-          <a:p>
-            <a:pPr lvl="2"/>
-            <a:r>
-              <a:rPr lang="en-US" sz="2000" b="1" dirty="0"/>
-              <a:t>)</a:t>
-            </a:r>
-          </a:p>
-          <a:p>
-            <a:pPr lvl="1"/>
-            <a:r>
-              <a:rPr lang="en-US" sz="2000" b="1" dirty="0"/>
-              <a:t>}</a:t>
-            </a:r>
-          </a:p>
-          <a:p>
-            <a:pPr lvl="1"/>
-            <a:r>
-              <a:rPr lang="en-US" sz="2000" b="1" dirty="0" err="1"/>
-              <a:t>Btn</a:t>
-            </a:r>
-            <a:r>
-              <a:rPr lang="en-US" sz="2000" b="1" dirty="0"/>
-              <a:t> (Cancel, Update) : message if successful, then go back to Profile</a:t>
-            </a:r>
-          </a:p>
-          <a:p>
-            <a:r>
-              <a:rPr lang="en-US" sz="2000" b="1" dirty="0"/>
-              <a:t>}</a:t>
-            </a:r>
-          </a:p>
-        </p:txBody>
-      </p:sp>
-    </p:spTree>
-    <p:extLst>
-      <p:ext uri="{BB962C8B-B14F-4D97-AF65-F5344CB8AC3E}">
-        <p14:creationId xmlns:p14="http://schemas.microsoft.com/office/powerpoint/2010/main" val="1406413378"/>
-      </p:ext>
-    </p:extLst>
-  </p:cSld>
-  <p:clrMapOvr>
-    <a:masterClrMapping/>
-  </p:clrMapOvr>
-</p:sld>
-</file>
-
-<file path=ppt/slides/slide49.xml><?xml version="1.0" encoding="utf-8"?>
-<p:sld xmlns:a="http://schemas.openxmlformats.org/drawingml/2006/main" xmlns:r="http://schemas.openxmlformats.org/officeDocument/2006/relationships" xmlns:p="http://schemas.openxmlformats.org/presentationml/2006/main">
-  <p:cSld>
-    <p:spTree>
-      <p:nvGrpSpPr>
-        <p:cNvPr id="1" name=""/>
-        <p:cNvGrpSpPr/>
-        <p:nvPr/>
-      </p:nvGrpSpPr>
-      <p:grpSpPr>
-        <a:xfrm>
-          <a:off x="0" y="0"/>
-          <a:ext cx="0" cy="0"/>
-          <a:chOff x="0" y="0"/>
-          <a:chExt cx="0" cy="0"/>
-        </a:xfrm>
-      </p:grpSpPr>
-      <p:sp>
-        <p:nvSpPr>
-          <p:cNvPr id="5" name="Rectangle: Rounded Corners 4">
-            <a:extLst>
-              <a:ext uri="{FF2B5EF4-FFF2-40B4-BE49-F238E27FC236}">
-                <a16:creationId xmlns:a16="http://schemas.microsoft.com/office/drawing/2014/main" id="{BADBB24C-5F57-A411-EB25-4559A2AFDB94}"/>
-              </a:ext>
-            </a:extLst>
-          </p:cNvPr>
-          <p:cNvSpPr/>
-          <p:nvPr/>
-        </p:nvSpPr>
-        <p:spPr>
-          <a:xfrm>
-            <a:off x="325581" y="701375"/>
-            <a:ext cx="11540837" cy="5455249"/>
-          </a:xfrm>
-          <a:prstGeom prst="roundRect">
-            <a:avLst>
-              <a:gd name="adj" fmla="val 8182"/>
-            </a:avLst>
-          </a:prstGeom>
-          <a:solidFill>
-            <a:schemeClr val="accent6">
-              <a:lumMod val="50000"/>
-            </a:schemeClr>
-          </a:solidFill>
-          <a:ln>
-            <a:noFill/>
-          </a:ln>
-        </p:spPr>
-        <p:style>
-          <a:lnRef idx="2">
-            <a:schemeClr val="accent1">
-              <a:shade val="15000"/>
-            </a:schemeClr>
-          </a:lnRef>
-          <a:fillRef idx="1">
-            <a:schemeClr val="accent1"/>
-          </a:fillRef>
-          <a:effectRef idx="0">
-            <a:schemeClr val="accent1"/>
-          </a:effectRef>
-          <a:fontRef idx="minor">
-            <a:schemeClr val="lt1"/>
-          </a:fontRef>
-        </p:style>
-        <p:txBody>
-          <a:bodyPr rtlCol="0" anchor="ctr"/>
-          <a:lstStyle/>
-          <a:p>
-            <a:r>
-              <a:rPr lang="en-US" sz="2000" b="1" dirty="0" err="1"/>
-              <a:t>generateTicketBtn</a:t>
-            </a:r>
-            <a:r>
-              <a:rPr lang="en-US" sz="2000" b="1" dirty="0"/>
-              <a:t> : button (guesGenerateTicket.html)</a:t>
-            </a:r>
-          </a:p>
-          <a:p>
-            <a:r>
-              <a:rPr lang="en-US" sz="2000" b="1" dirty="0"/>
-              <a:t>Section 1 (list of tickets){</a:t>
-            </a:r>
-          </a:p>
-          <a:p>
-            <a:pPr marL="800100" lvl="1" indent="-342900">
-              <a:buFont typeface="Arial" panose="020B0604020202020204" pitchFamily="34" charset="0"/>
-              <a:buChar char="•"/>
-            </a:pPr>
-            <a:r>
-              <a:rPr lang="en-US" sz="2000" b="1" dirty="0"/>
-              <a:t>Ticket lists ( </a:t>
-            </a:r>
-            <a:r>
-              <a:rPr lang="en-US" sz="2000" b="1" dirty="0" err="1"/>
-              <a:t>ticketQueueID</a:t>
-            </a:r>
-            <a:r>
-              <a:rPr lang="en-US" sz="2000" b="1" dirty="0"/>
-              <a:t>,`</a:t>
-            </a:r>
-            <a:r>
-              <a:rPr lang="en-US" sz="2000" b="1" dirty="0" err="1"/>
-              <a:t>CustomerSupport</a:t>
-            </a:r>
-            <a:r>
-              <a:rPr lang="en-US" sz="2000" b="1" dirty="0"/>
-              <a:t> username`, Status (End, In Queue, Open))</a:t>
-            </a:r>
-          </a:p>
-          <a:p>
-            <a:r>
-              <a:rPr lang="en-US" sz="2000" b="1" dirty="0"/>
-              <a:t>}</a:t>
-            </a:r>
-          </a:p>
-          <a:p>
-            <a:r>
-              <a:rPr lang="en-US" b="1" dirty="0"/>
-              <a:t>Section 2 {</a:t>
-            </a:r>
-          </a:p>
-          <a:p>
-            <a:pPr marL="742950" lvl="1" indent="-285750">
-              <a:buFont typeface="Arial" panose="020B0604020202020204" pitchFamily="34" charset="0"/>
-              <a:buChar char="•"/>
-            </a:pPr>
-            <a:r>
-              <a:rPr lang="en-US" b="1" dirty="0"/>
-              <a:t>When user clicked one of the ticket lists, </a:t>
-            </a:r>
-            <a:r>
-              <a:rPr lang="en-US" b="1" dirty="0" err="1"/>
-              <a:t>Itll</a:t>
-            </a:r>
-            <a:r>
-              <a:rPr lang="en-US" b="1" dirty="0"/>
-              <a:t> show the conversation here.</a:t>
-            </a:r>
-          </a:p>
-          <a:p>
-            <a:pPr marL="742950" lvl="1" indent="-285750">
-              <a:buFont typeface="Arial" panose="020B0604020202020204" pitchFamily="34" charset="0"/>
-              <a:buChar char="•"/>
-            </a:pPr>
-            <a:r>
-              <a:rPr lang="en-US" b="1" dirty="0"/>
-              <a:t>{</a:t>
-            </a:r>
-          </a:p>
-          <a:p>
-            <a:pPr marL="1200150" lvl="2" indent="-285750">
-              <a:buFont typeface="Arial" panose="020B0604020202020204" pitchFamily="34" charset="0"/>
-              <a:buChar char="•"/>
-            </a:pPr>
-            <a:r>
-              <a:rPr lang="en-US" b="1" dirty="0"/>
-              <a:t>First blob message : Concern, submitted by guest</a:t>
-            </a:r>
-          </a:p>
-          <a:p>
-            <a:pPr marL="1200150" lvl="2" indent="-285750">
-              <a:buFont typeface="Arial" panose="020B0604020202020204" pitchFamily="34" charset="0"/>
-              <a:buChar char="•"/>
-            </a:pPr>
-            <a:endParaRPr lang="en-US" b="1" dirty="0"/>
-          </a:p>
-          <a:p>
-            <a:pPr marL="1200150" lvl="2" indent="-285750">
-              <a:buFont typeface="Arial" panose="020B0604020202020204" pitchFamily="34" charset="0"/>
-              <a:buChar char="•"/>
-            </a:pPr>
-            <a:r>
-              <a:rPr lang="en-US" b="1" dirty="0"/>
-              <a:t>If (status == Open){</a:t>
-            </a:r>
-          </a:p>
-          <a:p>
-            <a:pPr marL="1657350" lvl="3" indent="-285750">
-              <a:buFont typeface="Arial" panose="020B0604020202020204" pitchFamily="34" charset="0"/>
-              <a:buChar char="•"/>
-            </a:pPr>
-            <a:r>
-              <a:rPr lang="en-US" b="1" dirty="0"/>
-              <a:t>Reply Input : Text</a:t>
-            </a:r>
-          </a:p>
-          <a:p>
-            <a:pPr marL="1657350" lvl="3" indent="-285750">
-              <a:buFont typeface="Arial" panose="020B0604020202020204" pitchFamily="34" charset="0"/>
-              <a:buChar char="•"/>
-            </a:pPr>
-            <a:r>
-              <a:rPr lang="en-US" b="1" dirty="0"/>
-              <a:t>Button : Send</a:t>
-            </a:r>
-          </a:p>
-          <a:p>
-            <a:pPr marL="1657350" lvl="3" indent="-285750">
-              <a:buFont typeface="Arial" panose="020B0604020202020204" pitchFamily="34" charset="0"/>
-              <a:buChar char="•"/>
-            </a:pPr>
-            <a:r>
-              <a:rPr lang="en-US" b="1" dirty="0"/>
-              <a:t>Button : End Ticket</a:t>
-            </a:r>
-          </a:p>
-          <a:p>
-            <a:pPr lvl="2"/>
-            <a:r>
-              <a:rPr lang="en-US" b="1" dirty="0"/>
-              <a:t>}</a:t>
-            </a:r>
-          </a:p>
-          <a:p>
-            <a:pPr lvl="1"/>
-            <a:r>
-              <a:rPr lang="en-US" b="1" dirty="0"/>
-              <a:t>}</a:t>
-            </a:r>
-          </a:p>
-          <a:p>
-            <a:r>
-              <a:rPr lang="en-US" b="1" dirty="0"/>
-              <a:t>}</a:t>
-            </a:r>
-          </a:p>
-          <a:p>
-            <a:endParaRPr lang="en-US" b="1" dirty="0"/>
-          </a:p>
-        </p:txBody>
-      </p:sp>
-      <p:sp>
-        <p:nvSpPr>
-          <p:cNvPr id="4" name="TextBox 3">
-            <a:extLst>
-              <a:ext uri="{FF2B5EF4-FFF2-40B4-BE49-F238E27FC236}">
-                <a16:creationId xmlns:a16="http://schemas.microsoft.com/office/drawing/2014/main" id="{F259B9EF-2882-3D95-7422-68A27385F852}"/>
-              </a:ext>
-            </a:extLst>
-          </p:cNvPr>
-          <p:cNvSpPr txBox="1"/>
-          <p:nvPr/>
-        </p:nvSpPr>
-        <p:spPr>
-          <a:xfrm>
-            <a:off x="-1" y="0"/>
-            <a:ext cx="4341092" cy="400110"/>
-          </a:xfrm>
-          <a:prstGeom prst="rect">
-            <a:avLst/>
-          </a:prstGeom>
-          <a:noFill/>
-        </p:spPr>
-        <p:txBody>
-          <a:bodyPr wrap="square" rtlCol="0">
-            <a:spAutoFit/>
-          </a:bodyPr>
-          <a:lstStyle/>
-          <a:p>
-            <a:r>
-              <a:rPr lang="en-US" sz="2000" b="1" dirty="0"/>
-              <a:t>guestTickets.html</a:t>
-            </a:r>
-          </a:p>
-        </p:txBody>
-      </p:sp>
-    </p:spTree>
-    <p:extLst>
-      <p:ext uri="{BB962C8B-B14F-4D97-AF65-F5344CB8AC3E}">
-        <p14:creationId xmlns:p14="http://schemas.microsoft.com/office/powerpoint/2010/main" val="1833272379"/>
       </p:ext>
     </p:extLst>
   </p:cSld>
@@ -17804,6 +17258,1423 @@
       </p:grpSpPr>
       <p:sp>
         <p:nvSpPr>
+          <p:cNvPr id="7" name="TextBox 6">
+            <a:extLst>
+              <a:ext uri="{FF2B5EF4-FFF2-40B4-BE49-F238E27FC236}">
+                <a16:creationId xmlns:a16="http://schemas.microsoft.com/office/drawing/2014/main" id="{4AD94C5A-4B2B-CE4A-A062-FFB6DA57E364}"/>
+              </a:ext>
+            </a:extLst>
+          </p:cNvPr>
+          <p:cNvSpPr txBox="1"/>
+          <p:nvPr/>
+        </p:nvSpPr>
+        <p:spPr>
+          <a:xfrm>
+            <a:off x="147781" y="78570"/>
+            <a:ext cx="6096000" cy="369332"/>
+          </a:xfrm>
+          <a:prstGeom prst="rect">
+            <a:avLst/>
+          </a:prstGeom>
+          <a:noFill/>
+        </p:spPr>
+        <p:txBody>
+          <a:bodyPr wrap="square">
+            <a:spAutoFit/>
+          </a:bodyPr>
+          <a:lstStyle/>
+          <a:p>
+            <a:r>
+              <a:rPr lang="en-US" sz="1800" b="1" dirty="0"/>
+              <a:t>guestSearchResult.html</a:t>
+            </a:r>
+            <a:endParaRPr lang="en-US" dirty="0"/>
+          </a:p>
+        </p:txBody>
+      </p:sp>
+      <p:sp>
+        <p:nvSpPr>
+          <p:cNvPr id="9" name="Rectangle: Rounded Corners 8">
+            <a:extLst>
+              <a:ext uri="{FF2B5EF4-FFF2-40B4-BE49-F238E27FC236}">
+                <a16:creationId xmlns:a16="http://schemas.microsoft.com/office/drawing/2014/main" id="{CD27AA3B-0DC5-382F-3A91-2339EC339FE6}"/>
+              </a:ext>
+            </a:extLst>
+          </p:cNvPr>
+          <p:cNvSpPr/>
+          <p:nvPr/>
+        </p:nvSpPr>
+        <p:spPr>
+          <a:xfrm>
+            <a:off x="2443017" y="1857004"/>
+            <a:ext cx="7305965" cy="3143991"/>
+          </a:xfrm>
+          <a:prstGeom prst="roundRect">
+            <a:avLst>
+              <a:gd name="adj" fmla="val 8182"/>
+            </a:avLst>
+          </a:prstGeom>
+          <a:solidFill>
+            <a:schemeClr val="accent6">
+              <a:lumMod val="50000"/>
+            </a:schemeClr>
+          </a:solidFill>
+          <a:ln>
+            <a:noFill/>
+          </a:ln>
+        </p:spPr>
+        <p:style>
+          <a:lnRef idx="2">
+            <a:schemeClr val="accent1">
+              <a:shade val="15000"/>
+            </a:schemeClr>
+          </a:lnRef>
+          <a:fillRef idx="1">
+            <a:schemeClr val="accent1"/>
+          </a:fillRef>
+          <a:effectRef idx="0">
+            <a:schemeClr val="accent1"/>
+          </a:effectRef>
+          <a:fontRef idx="minor">
+            <a:schemeClr val="lt1"/>
+          </a:fontRef>
+        </p:style>
+        <p:txBody>
+          <a:bodyPr rtlCol="0" anchor="ctr"/>
+          <a:lstStyle/>
+          <a:p>
+            <a:r>
+              <a:rPr lang="en-US" sz="2000" b="1" dirty="0"/>
+              <a:t>Example text on top `Searched for Quezon City`</a:t>
+            </a:r>
+          </a:p>
+          <a:p>
+            <a:r>
+              <a:rPr lang="en-US" sz="2000" b="1" dirty="0"/>
+              <a:t>{</a:t>
+            </a:r>
+          </a:p>
+          <a:p>
+            <a:pPr marL="800100" lvl="1" indent="-342900">
+              <a:buFont typeface="Arial" panose="020B0604020202020204" pitchFamily="34" charset="0"/>
+              <a:buChar char="•"/>
+            </a:pPr>
+            <a:r>
+              <a:rPr lang="en-US" sz="2000" b="1" dirty="0"/>
+              <a:t>List Properties w/ button : {guestViewProperty.html} </a:t>
+            </a:r>
+          </a:p>
+          <a:p>
+            <a:r>
+              <a:rPr lang="en-US" sz="2000" b="1" dirty="0"/>
+              <a:t>}</a:t>
+            </a:r>
+          </a:p>
+        </p:txBody>
+      </p:sp>
+    </p:spTree>
+    <p:extLst>
+      <p:ext uri="{BB962C8B-B14F-4D97-AF65-F5344CB8AC3E}">
+        <p14:creationId xmlns:p14="http://schemas.microsoft.com/office/powerpoint/2010/main" val="426245921"/>
+      </p:ext>
+    </p:extLst>
+  </p:cSld>
+  <p:clrMapOvr>
+    <a:masterClrMapping/>
+  </p:clrMapOvr>
+</p:sld>
+</file>
+
+<file path=ppt/slides/slide51.xml><?xml version="1.0" encoding="utf-8"?>
+<p:sld xmlns:a="http://schemas.openxmlformats.org/drawingml/2006/main" xmlns:r="http://schemas.openxmlformats.org/officeDocument/2006/relationships" xmlns:p="http://schemas.openxmlformats.org/presentationml/2006/main">
+  <p:cSld>
+    <p:spTree>
+      <p:nvGrpSpPr>
+        <p:cNvPr id="1" name=""/>
+        <p:cNvGrpSpPr/>
+        <p:nvPr/>
+      </p:nvGrpSpPr>
+      <p:grpSpPr>
+        <a:xfrm>
+          <a:off x="0" y="0"/>
+          <a:ext cx="0" cy="0"/>
+          <a:chOff x="0" y="0"/>
+          <a:chExt cx="0" cy="0"/>
+        </a:xfrm>
+      </p:grpSpPr>
+      <p:sp>
+        <p:nvSpPr>
+          <p:cNvPr id="9" name="Rectangle: Rounded Corners 8">
+            <a:extLst>
+              <a:ext uri="{FF2B5EF4-FFF2-40B4-BE49-F238E27FC236}">
+                <a16:creationId xmlns:a16="http://schemas.microsoft.com/office/drawing/2014/main" id="{CD27AA3B-0DC5-382F-3A91-2339EC339FE6}"/>
+              </a:ext>
+            </a:extLst>
+          </p:cNvPr>
+          <p:cNvSpPr/>
+          <p:nvPr/>
+        </p:nvSpPr>
+        <p:spPr>
+          <a:xfrm>
+            <a:off x="69272" y="101600"/>
+            <a:ext cx="6599383" cy="6456218"/>
+          </a:xfrm>
+          <a:prstGeom prst="roundRect">
+            <a:avLst>
+              <a:gd name="adj" fmla="val 3175"/>
+            </a:avLst>
+          </a:prstGeom>
+          <a:solidFill>
+            <a:schemeClr val="accent6">
+              <a:lumMod val="50000"/>
+            </a:schemeClr>
+          </a:solidFill>
+          <a:ln>
+            <a:noFill/>
+          </a:ln>
+        </p:spPr>
+        <p:style>
+          <a:lnRef idx="2">
+            <a:schemeClr val="accent1">
+              <a:shade val="15000"/>
+            </a:schemeClr>
+          </a:lnRef>
+          <a:fillRef idx="1">
+            <a:schemeClr val="accent1"/>
+          </a:fillRef>
+          <a:effectRef idx="0">
+            <a:schemeClr val="accent1"/>
+          </a:effectRef>
+          <a:fontRef idx="minor">
+            <a:schemeClr val="lt1"/>
+          </a:fontRef>
+        </p:style>
+        <p:txBody>
+          <a:bodyPr rtlCol="0" anchor="ctr"/>
+          <a:lstStyle/>
+          <a:p>
+            <a:r>
+              <a:rPr lang="en-US" sz="1400" b="1" dirty="0"/>
+              <a:t>// same as before revamp the design</a:t>
+            </a:r>
+          </a:p>
+          <a:p>
+            <a:r>
+              <a:rPr lang="en-US" sz="1400" b="1" dirty="0"/>
+              <a:t>guestViewProperty.html {</a:t>
+            </a:r>
+          </a:p>
+          <a:p>
+            <a:r>
+              <a:rPr lang="en-US" sz="1400" b="1" dirty="0"/>
+              <a:t>	section 3 </a:t>
+            </a:r>
+            <a:r>
+              <a:rPr lang="en-US" sz="1400" b="1" dirty="0" err="1"/>
+              <a:t>eployeePM</a:t>
+            </a:r>
+            <a:r>
+              <a:rPr lang="en-US" sz="1400" b="1" dirty="0"/>
+              <a:t> cash check in</a:t>
+            </a:r>
+          </a:p>
+          <a:p>
+            <a:endParaRPr lang="en-US" sz="1400" b="1" dirty="0"/>
+          </a:p>
+          <a:p>
+            <a:r>
+              <a:rPr lang="en-US" sz="1400" b="1" dirty="0"/>
+              <a:t>delete slide 50</a:t>
+            </a:r>
+          </a:p>
+          <a:p>
+            <a:endParaRPr lang="en-US" sz="1400" b="1" dirty="0"/>
+          </a:p>
+          <a:p>
+            <a:r>
+              <a:rPr lang="en-US" sz="1400" b="1" dirty="0"/>
+              <a:t>Photos </a:t>
+            </a:r>
+          </a:p>
+          <a:p>
+            <a:r>
+              <a:rPr lang="en-US" sz="1400" b="1" dirty="0"/>
+              <a:t>Name </a:t>
+            </a:r>
+          </a:p>
+          <a:p>
+            <a:r>
+              <a:rPr lang="en-US" sz="1400" b="1" dirty="0"/>
+              <a:t>Address </a:t>
+            </a:r>
+          </a:p>
+          <a:p>
+            <a:r>
+              <a:rPr lang="en-US" sz="1400" b="1" dirty="0"/>
+              <a:t>Map</a:t>
+            </a:r>
+          </a:p>
+          <a:p>
+            <a:r>
+              <a:rPr lang="en-US" sz="1400" b="1" dirty="0"/>
+              <a:t>Description </a:t>
+            </a:r>
+          </a:p>
+          <a:p>
+            <a:r>
+              <a:rPr lang="en-US" sz="1400" b="1" dirty="0"/>
+              <a:t>Package Capacity - maximum capacity</a:t>
+            </a:r>
+          </a:p>
+          <a:p>
+            <a:r>
+              <a:rPr lang="en-US" sz="1400" b="1" dirty="0"/>
+              <a:t>Time of </a:t>
+            </a:r>
+            <a:r>
+              <a:rPr lang="en-US" sz="1400" b="1" dirty="0" err="1"/>
+              <a:t>CheckIn&amp;Out</a:t>
+            </a:r>
+            <a:endParaRPr lang="en-US" sz="1400" b="1" dirty="0"/>
+          </a:p>
+          <a:p>
+            <a:r>
+              <a:rPr lang="en-US" sz="1400" b="1" dirty="0"/>
+              <a:t>Category : select (</a:t>
+            </a:r>
+            <a:r>
+              <a:rPr lang="en-US" sz="1400" b="1" dirty="0" err="1"/>
+              <a:t>Barkada</a:t>
+            </a:r>
+            <a:r>
+              <a:rPr lang="en-US" sz="1400" b="1" dirty="0"/>
+              <a:t>, Couple, Family, Other)</a:t>
+            </a:r>
+          </a:p>
+          <a:p>
+            <a:endParaRPr lang="en-US" sz="1400" b="1" dirty="0"/>
+          </a:p>
+          <a:p>
+            <a:r>
+              <a:rPr lang="en-US" sz="1400" b="1" dirty="0"/>
+              <a:t>Package Price : Currency/Number w/ peso sign </a:t>
+            </a:r>
+          </a:p>
+          <a:p>
+            <a:r>
+              <a:rPr lang="en-US" sz="1400" b="1" dirty="0"/>
+              <a:t>Reservation Fee : Currency/Number w/ peso sign </a:t>
+            </a:r>
+          </a:p>
+          <a:p>
+            <a:r>
+              <a:rPr lang="en-US" sz="1400" b="1" dirty="0"/>
+              <a:t>Additional Pax Price: Currency/Number w/ peso sign </a:t>
+            </a:r>
+          </a:p>
+          <a:p>
+            <a:r>
+              <a:rPr lang="en-US" sz="1400" b="1" dirty="0"/>
+              <a:t>Discount </a:t>
+            </a:r>
+          </a:p>
+          <a:p>
+            <a:endParaRPr lang="en-US" sz="1400" b="1" dirty="0"/>
+          </a:p>
+          <a:p>
+            <a:r>
+              <a:rPr lang="en-US" sz="1400" b="1" dirty="0"/>
+              <a:t>Amenities</a:t>
+            </a:r>
+          </a:p>
+          <a:p>
+            <a:r>
+              <a:rPr lang="en-US" sz="1400" b="1" dirty="0"/>
+              <a:t>Other Amenities </a:t>
+            </a:r>
+          </a:p>
+          <a:p>
+            <a:endParaRPr lang="en-US" sz="1400" b="1" dirty="0"/>
+          </a:p>
+          <a:p>
+            <a:r>
+              <a:rPr lang="en-US" sz="1400" b="1" dirty="0"/>
+              <a:t>Calendar</a:t>
+            </a:r>
+          </a:p>
+          <a:p>
+            <a:endParaRPr lang="en-US" sz="1400" b="1" dirty="0"/>
+          </a:p>
+          <a:p>
+            <a:r>
+              <a:rPr lang="en-US" sz="1400" b="1" dirty="0"/>
+              <a:t>book button</a:t>
+            </a:r>
+          </a:p>
+          <a:p>
+            <a:endParaRPr lang="en-US" sz="1400" b="1" dirty="0"/>
+          </a:p>
+          <a:p>
+            <a:r>
+              <a:rPr lang="en-US" sz="1400" b="1" dirty="0"/>
+              <a:t>Review scale</a:t>
+            </a:r>
+          </a:p>
+          <a:p>
+            <a:r>
+              <a:rPr lang="en-US" sz="1400" b="1" dirty="0"/>
+              <a:t>}</a:t>
+            </a:r>
+          </a:p>
+        </p:txBody>
+      </p:sp>
+      <p:sp>
+        <p:nvSpPr>
+          <p:cNvPr id="2" name="Rectangle: Rounded Corners 1">
+            <a:extLst>
+              <a:ext uri="{FF2B5EF4-FFF2-40B4-BE49-F238E27FC236}">
+                <a16:creationId xmlns:a16="http://schemas.microsoft.com/office/drawing/2014/main" id="{4617DFCC-1807-A537-ABB4-FA14E60609A5}"/>
+              </a:ext>
+            </a:extLst>
+          </p:cNvPr>
+          <p:cNvSpPr/>
+          <p:nvPr/>
+        </p:nvSpPr>
+        <p:spPr>
+          <a:xfrm>
+            <a:off x="6825673" y="101601"/>
+            <a:ext cx="5297056" cy="1173017"/>
+          </a:xfrm>
+          <a:prstGeom prst="roundRect">
+            <a:avLst>
+              <a:gd name="adj" fmla="val 8182"/>
+            </a:avLst>
+          </a:prstGeom>
+          <a:solidFill>
+            <a:schemeClr val="accent6">
+              <a:lumMod val="50000"/>
+            </a:schemeClr>
+          </a:solidFill>
+          <a:ln>
+            <a:noFill/>
+          </a:ln>
+        </p:spPr>
+        <p:style>
+          <a:lnRef idx="2">
+            <a:schemeClr val="accent1">
+              <a:shade val="15000"/>
+            </a:schemeClr>
+          </a:lnRef>
+          <a:fillRef idx="1">
+            <a:schemeClr val="accent1"/>
+          </a:fillRef>
+          <a:effectRef idx="0">
+            <a:schemeClr val="accent1"/>
+          </a:effectRef>
+          <a:fontRef idx="minor">
+            <a:schemeClr val="lt1"/>
+          </a:fontRef>
+        </p:style>
+        <p:txBody>
+          <a:bodyPr rtlCol="0" anchor="ctr"/>
+          <a:lstStyle/>
+          <a:p>
+            <a:r>
+              <a:rPr lang="en-US" sz="1600" b="1" dirty="0"/>
+              <a:t>guestConfirmReservation.html{</a:t>
+            </a:r>
+          </a:p>
+          <a:p>
+            <a:pPr marL="628650" lvl="1" indent="-171450">
+              <a:buFont typeface="Arial" panose="020B0604020202020204" pitchFamily="34" charset="0"/>
+              <a:buChar char="•"/>
+            </a:pPr>
+            <a:r>
+              <a:rPr lang="en-US" sz="1600" b="1" dirty="0"/>
+              <a:t>// same as before revamp the design</a:t>
+            </a:r>
+          </a:p>
+          <a:p>
+            <a:pPr marL="742950" lvl="1" indent="-285750">
+              <a:buFont typeface="Arial" panose="020B0604020202020204" pitchFamily="34" charset="0"/>
+              <a:buChar char="•"/>
+            </a:pPr>
+            <a:r>
+              <a:rPr lang="en-US" sz="1600" b="1" dirty="0"/>
+              <a:t>Proceed to payment </a:t>
+            </a:r>
+            <a:r>
+              <a:rPr lang="en-US" sz="1600" b="1" dirty="0" err="1"/>
+              <a:t>Btn</a:t>
+            </a:r>
+            <a:r>
+              <a:rPr lang="en-US" sz="1600" b="1" dirty="0"/>
+              <a:t>: Payment</a:t>
+            </a:r>
+          </a:p>
+          <a:p>
+            <a:pPr marL="742950" lvl="1" indent="-285750">
+              <a:buFont typeface="Arial" panose="020B0604020202020204" pitchFamily="34" charset="0"/>
+              <a:buChar char="•"/>
+            </a:pPr>
+            <a:r>
+              <a:rPr lang="en-US" sz="1600" b="1" dirty="0"/>
+              <a:t>Reservation or Package Payment</a:t>
+            </a:r>
+          </a:p>
+          <a:p>
+            <a:r>
+              <a:rPr lang="en-US" sz="1600" b="1" dirty="0"/>
+              <a:t>}</a:t>
+            </a:r>
+          </a:p>
+        </p:txBody>
+      </p:sp>
+      <p:sp>
+        <p:nvSpPr>
+          <p:cNvPr id="3" name="Rectangle: Rounded Corners 2">
+            <a:extLst>
+              <a:ext uri="{FF2B5EF4-FFF2-40B4-BE49-F238E27FC236}">
+                <a16:creationId xmlns:a16="http://schemas.microsoft.com/office/drawing/2014/main" id="{338085F6-E2E5-5EAF-D4F0-98EA037E644A}"/>
+              </a:ext>
+            </a:extLst>
+          </p:cNvPr>
+          <p:cNvSpPr/>
+          <p:nvPr/>
+        </p:nvSpPr>
+        <p:spPr>
+          <a:xfrm>
+            <a:off x="6825672" y="1274619"/>
+            <a:ext cx="5297056" cy="5481782"/>
+          </a:xfrm>
+          <a:prstGeom prst="roundRect">
+            <a:avLst>
+              <a:gd name="adj" fmla="val 1311"/>
+            </a:avLst>
+          </a:prstGeom>
+          <a:solidFill>
+            <a:schemeClr val="accent6">
+              <a:lumMod val="50000"/>
+            </a:schemeClr>
+          </a:solidFill>
+          <a:ln>
+            <a:noFill/>
+          </a:ln>
+        </p:spPr>
+        <p:style>
+          <a:lnRef idx="2">
+            <a:schemeClr val="accent1">
+              <a:shade val="15000"/>
+            </a:schemeClr>
+          </a:lnRef>
+          <a:fillRef idx="1">
+            <a:schemeClr val="accent1"/>
+          </a:fillRef>
+          <a:effectRef idx="0">
+            <a:schemeClr val="accent1"/>
+          </a:effectRef>
+          <a:fontRef idx="minor">
+            <a:schemeClr val="lt1"/>
+          </a:fontRef>
+        </p:style>
+        <p:txBody>
+          <a:bodyPr rtlCol="0" anchor="ctr"/>
+          <a:lstStyle/>
+          <a:p>
+            <a:r>
+              <a:rPr lang="en-US" sz="1600" b="1" dirty="0"/>
+              <a:t>guestPayment.html{</a:t>
+            </a:r>
+          </a:p>
+          <a:p>
+            <a:pPr lvl="1"/>
+            <a:r>
+              <a:rPr lang="en-US" sz="1600" b="1" dirty="0"/>
+              <a:t>Section1{</a:t>
+            </a:r>
+          </a:p>
+          <a:p>
+            <a:pPr marL="1200150" lvl="2" indent="-285750">
+              <a:buFont typeface="Arial" panose="020B0604020202020204" pitchFamily="34" charset="0"/>
+              <a:buChar char="•"/>
+            </a:pPr>
+            <a:r>
+              <a:rPr lang="en-US" sz="1600" b="1" dirty="0"/>
+              <a:t>For: Reservation/Full Payment (Dynamic)</a:t>
+            </a:r>
+          </a:p>
+          <a:p>
+            <a:pPr marL="1200150" lvl="2" indent="-285750">
+              <a:buFont typeface="Arial" panose="020B0604020202020204" pitchFamily="34" charset="0"/>
+              <a:buChar char="•"/>
+            </a:pPr>
+            <a:r>
+              <a:rPr lang="en-US" sz="1600" b="1" dirty="0"/>
+              <a:t>Price</a:t>
+            </a:r>
+          </a:p>
+          <a:p>
+            <a:pPr marL="1200150" lvl="2" indent="-285750">
+              <a:buFont typeface="Arial" panose="020B0604020202020204" pitchFamily="34" charset="0"/>
+              <a:buChar char="•"/>
+            </a:pPr>
+            <a:r>
+              <a:rPr lang="en-US" sz="1600" b="1" dirty="0"/>
+              <a:t>Selection (</a:t>
+            </a:r>
+            <a:r>
+              <a:rPr lang="en-US" sz="1600" b="1" dirty="0" err="1"/>
+              <a:t>Gcash</a:t>
+            </a:r>
+            <a:r>
+              <a:rPr lang="en-US" sz="1600" b="1" dirty="0"/>
+              <a:t>, </a:t>
+            </a:r>
+            <a:r>
+              <a:rPr lang="en-US" sz="1600" b="1" dirty="0" err="1"/>
+              <a:t>Gotyme</a:t>
+            </a:r>
+            <a:r>
+              <a:rPr lang="en-US" sz="1600" b="1" dirty="0"/>
+              <a:t>, maya, </a:t>
+            </a:r>
+            <a:r>
+              <a:rPr lang="en-US" sz="1600" b="1" dirty="0" err="1"/>
+              <a:t>UnionBank</a:t>
+            </a:r>
+            <a:r>
+              <a:rPr lang="en-US" sz="1600" b="1" dirty="0"/>
+              <a:t>)</a:t>
+            </a:r>
+          </a:p>
+          <a:p>
+            <a:pPr marL="1200150" lvl="2" indent="-285750">
+              <a:buFont typeface="Arial" panose="020B0604020202020204" pitchFamily="34" charset="0"/>
+              <a:buChar char="•"/>
+            </a:pPr>
+            <a:r>
+              <a:rPr lang="en-US" sz="1600" b="1" dirty="0"/>
+              <a:t>QR Code</a:t>
+            </a:r>
+          </a:p>
+          <a:p>
+            <a:pPr lvl="1"/>
+            <a:r>
+              <a:rPr lang="en-US" sz="1600" b="1" dirty="0"/>
+              <a:t>}</a:t>
+            </a:r>
+          </a:p>
+          <a:p>
+            <a:pPr lvl="1"/>
+            <a:r>
+              <a:rPr lang="en-US" sz="1600" b="1" dirty="0"/>
+              <a:t>Section2{</a:t>
+            </a:r>
+          </a:p>
+          <a:p>
+            <a:pPr marL="1200150" lvl="2" indent="-285750">
+              <a:buFont typeface="Arial" panose="020B0604020202020204" pitchFamily="34" charset="0"/>
+              <a:buChar char="•"/>
+            </a:pPr>
+            <a:r>
+              <a:rPr lang="en-US" sz="1600" b="1" dirty="0"/>
+              <a:t>Text: “Upload a Screenshot”</a:t>
+            </a:r>
+          </a:p>
+          <a:p>
+            <a:pPr marL="1200150" lvl="2" indent="-285750">
+              <a:buFont typeface="Arial" panose="020B0604020202020204" pitchFamily="34" charset="0"/>
+              <a:buChar char="•"/>
+            </a:pPr>
+            <a:r>
+              <a:rPr lang="en-US" sz="1600" b="1" dirty="0"/>
+              <a:t>Upload drag and drop or click the upload button</a:t>
+            </a:r>
+          </a:p>
+          <a:p>
+            <a:pPr marL="1200150" lvl="2" indent="-285750">
+              <a:buFont typeface="Arial" panose="020B0604020202020204" pitchFamily="34" charset="0"/>
+              <a:buChar char="•"/>
+            </a:pPr>
+            <a:r>
+              <a:rPr lang="en-US" sz="1600" b="1" dirty="0"/>
+              <a:t>Image preview</a:t>
+            </a:r>
+          </a:p>
+          <a:p>
+            <a:pPr marL="1200150" lvl="2" indent="-285750">
+              <a:buFont typeface="Arial" panose="020B0604020202020204" pitchFamily="34" charset="0"/>
+              <a:buChar char="•"/>
+            </a:pPr>
+            <a:endParaRPr lang="en-US" sz="1600" b="1" dirty="0"/>
+          </a:p>
+          <a:p>
+            <a:pPr marL="1200150" lvl="2" indent="-285750">
+              <a:buFont typeface="Arial" panose="020B0604020202020204" pitchFamily="34" charset="0"/>
+              <a:buChar char="•"/>
+            </a:pPr>
+            <a:r>
+              <a:rPr lang="en-US" sz="1600" b="1" dirty="0"/>
+              <a:t>Input: // This will populate the transaction#</a:t>
+            </a:r>
+          </a:p>
+          <a:p>
+            <a:pPr marL="1200150" lvl="2" indent="-285750">
+              <a:buFont typeface="Arial" panose="020B0604020202020204" pitchFamily="34" charset="0"/>
+              <a:buChar char="•"/>
+            </a:pPr>
+            <a:r>
+              <a:rPr lang="en-US" sz="1600" b="1" dirty="0"/>
+              <a:t>Button: Confirm Payment</a:t>
+            </a:r>
+          </a:p>
+          <a:p>
+            <a:pPr marL="1200150" lvl="2" indent="-285750">
+              <a:buFont typeface="Arial" panose="020B0604020202020204" pitchFamily="34" charset="0"/>
+              <a:buChar char="•"/>
+            </a:pPr>
+            <a:r>
+              <a:rPr lang="en-US" sz="1400" b="1" dirty="0"/>
+              <a:t>Warning: Please verify the transaction number carefully. It cannot be changed after confirmation, and errors may lead to booking cancellation.</a:t>
+            </a:r>
+          </a:p>
+          <a:p>
+            <a:r>
+              <a:rPr lang="en-US" sz="1600" b="1" dirty="0"/>
+              <a:t>}</a:t>
+            </a:r>
+          </a:p>
+        </p:txBody>
+      </p:sp>
+      <p:cxnSp>
+        <p:nvCxnSpPr>
+          <p:cNvPr id="4" name="Connector: Curved 3">
+            <a:extLst>
+              <a:ext uri="{FF2B5EF4-FFF2-40B4-BE49-F238E27FC236}">
+                <a16:creationId xmlns:a16="http://schemas.microsoft.com/office/drawing/2014/main" id="{D4E191A5-48A4-C58C-B4C0-B608243F776E}"/>
+              </a:ext>
+            </a:extLst>
+          </p:cNvPr>
+          <p:cNvCxnSpPr>
+            <a:cxnSpLocks/>
+          </p:cNvCxnSpPr>
+          <p:nvPr/>
+        </p:nvCxnSpPr>
+        <p:spPr>
+          <a:xfrm rot="10800000" flipV="1">
+            <a:off x="8914247" y="1110675"/>
+            <a:ext cx="685798" cy="623452"/>
+          </a:xfrm>
+          <a:prstGeom prst="curvedConnector3">
+            <a:avLst>
+              <a:gd name="adj1" fmla="val 50000"/>
+            </a:avLst>
+          </a:prstGeom>
+          <a:ln w="19050" cap="flat" cmpd="sng" algn="ctr">
+            <a:solidFill>
+              <a:schemeClr val="accent4"/>
+            </a:solidFill>
+            <a:prstDash val="solid"/>
+            <a:round/>
+            <a:headEnd type="arrow" w="med" len="med"/>
+            <a:tailEnd type="arrow" w="med" len="med"/>
+          </a:ln>
+        </p:spPr>
+        <p:style>
+          <a:lnRef idx="0">
+            <a:scrgbClr r="0" g="0" b="0"/>
+          </a:lnRef>
+          <a:fillRef idx="0">
+            <a:scrgbClr r="0" g="0" b="0"/>
+          </a:fillRef>
+          <a:effectRef idx="0">
+            <a:scrgbClr r="0" g="0" b="0"/>
+          </a:effectRef>
+          <a:fontRef idx="minor">
+            <a:schemeClr val="tx1"/>
+          </a:fontRef>
+        </p:style>
+      </p:cxnSp>
+      <p:cxnSp>
+        <p:nvCxnSpPr>
+          <p:cNvPr id="7" name="Connector: Curved 6">
+            <a:extLst>
+              <a:ext uri="{FF2B5EF4-FFF2-40B4-BE49-F238E27FC236}">
+                <a16:creationId xmlns:a16="http://schemas.microsoft.com/office/drawing/2014/main" id="{47FE4FF9-E8FA-AE95-5756-49769EBF35F5}"/>
+              </a:ext>
+            </a:extLst>
+          </p:cNvPr>
+          <p:cNvCxnSpPr>
+            <a:cxnSpLocks/>
+          </p:cNvCxnSpPr>
+          <p:nvPr/>
+        </p:nvCxnSpPr>
+        <p:spPr>
+          <a:xfrm rot="10800000" flipV="1">
+            <a:off x="1302331" y="300182"/>
+            <a:ext cx="5643414" cy="5394034"/>
+          </a:xfrm>
+          <a:prstGeom prst="curvedConnector3">
+            <a:avLst>
+              <a:gd name="adj1" fmla="val 20213"/>
+            </a:avLst>
+          </a:prstGeom>
+          <a:ln w="19050" cap="flat" cmpd="sng" algn="ctr">
+            <a:solidFill>
+              <a:schemeClr val="accent4"/>
+            </a:solidFill>
+            <a:prstDash val="solid"/>
+            <a:round/>
+            <a:headEnd type="arrow" w="med" len="med"/>
+            <a:tailEnd type="arrow" w="med" len="med"/>
+          </a:ln>
+        </p:spPr>
+        <p:style>
+          <a:lnRef idx="0">
+            <a:scrgbClr r="0" g="0" b="0"/>
+          </a:lnRef>
+          <a:fillRef idx="0">
+            <a:scrgbClr r="0" g="0" b="0"/>
+          </a:fillRef>
+          <a:effectRef idx="0">
+            <a:scrgbClr r="0" g="0" b="0"/>
+          </a:effectRef>
+          <a:fontRef idx="minor">
+            <a:schemeClr val="tx1"/>
+          </a:fontRef>
+        </p:style>
+      </p:cxnSp>
+    </p:spTree>
+    <p:extLst>
+      <p:ext uri="{BB962C8B-B14F-4D97-AF65-F5344CB8AC3E}">
+        <p14:creationId xmlns:p14="http://schemas.microsoft.com/office/powerpoint/2010/main" val="278536806"/>
+      </p:ext>
+    </p:extLst>
+  </p:cSld>
+  <p:clrMapOvr>
+    <a:masterClrMapping/>
+  </p:clrMapOvr>
+</p:sld>
+</file>
+
+<file path=ppt/slides/slide52.xml><?xml version="1.0" encoding="utf-8"?>
+<p:sld xmlns:a="http://schemas.openxmlformats.org/drawingml/2006/main" xmlns:r="http://schemas.openxmlformats.org/officeDocument/2006/relationships" xmlns:p="http://schemas.openxmlformats.org/presentationml/2006/main">
+  <p:cSld>
+    <p:spTree>
+      <p:nvGrpSpPr>
+        <p:cNvPr id="1" name=""/>
+        <p:cNvGrpSpPr/>
+        <p:nvPr/>
+      </p:nvGrpSpPr>
+      <p:grpSpPr>
+        <a:xfrm>
+          <a:off x="0" y="0"/>
+          <a:ext cx="0" cy="0"/>
+          <a:chOff x="0" y="0"/>
+          <a:chExt cx="0" cy="0"/>
+        </a:xfrm>
+      </p:grpSpPr>
+      <p:sp>
+        <p:nvSpPr>
+          <p:cNvPr id="4" name="TextBox 3">
+            <a:extLst>
+              <a:ext uri="{FF2B5EF4-FFF2-40B4-BE49-F238E27FC236}">
+                <a16:creationId xmlns:a16="http://schemas.microsoft.com/office/drawing/2014/main" id="{E094F53A-6361-E94E-5BDE-6B5297C1498E}"/>
+              </a:ext>
+            </a:extLst>
+          </p:cNvPr>
+          <p:cNvSpPr txBox="1"/>
+          <p:nvPr/>
+        </p:nvSpPr>
+        <p:spPr>
+          <a:xfrm>
+            <a:off x="0" y="0"/>
+            <a:ext cx="2955636" cy="400110"/>
+          </a:xfrm>
+          <a:prstGeom prst="rect">
+            <a:avLst/>
+          </a:prstGeom>
+          <a:noFill/>
+        </p:spPr>
+        <p:txBody>
+          <a:bodyPr wrap="square" rtlCol="0">
+            <a:spAutoFit/>
+          </a:bodyPr>
+          <a:lstStyle/>
+          <a:p>
+            <a:r>
+              <a:rPr lang="en-US" sz="2000" b="1" dirty="0"/>
+              <a:t>guestProfile.html</a:t>
+            </a:r>
+          </a:p>
+        </p:txBody>
+      </p:sp>
+      <p:sp>
+        <p:nvSpPr>
+          <p:cNvPr id="5" name="Rectangle: Rounded Corners 4">
+            <a:extLst>
+              <a:ext uri="{FF2B5EF4-FFF2-40B4-BE49-F238E27FC236}">
+                <a16:creationId xmlns:a16="http://schemas.microsoft.com/office/drawing/2014/main" id="{F9ACFF90-048F-320A-A752-8D1492FAD30F}"/>
+              </a:ext>
+            </a:extLst>
+          </p:cNvPr>
+          <p:cNvSpPr/>
+          <p:nvPr/>
+        </p:nvSpPr>
+        <p:spPr>
+          <a:xfrm>
+            <a:off x="1427364" y="460454"/>
+            <a:ext cx="9337272" cy="5937091"/>
+          </a:xfrm>
+          <a:prstGeom prst="roundRect">
+            <a:avLst>
+              <a:gd name="adj" fmla="val 4146"/>
+            </a:avLst>
+          </a:prstGeom>
+          <a:solidFill>
+            <a:schemeClr val="accent6">
+              <a:lumMod val="50000"/>
+            </a:schemeClr>
+          </a:solidFill>
+          <a:ln>
+            <a:noFill/>
+          </a:ln>
+        </p:spPr>
+        <p:style>
+          <a:lnRef idx="2">
+            <a:schemeClr val="accent1">
+              <a:shade val="15000"/>
+            </a:schemeClr>
+          </a:lnRef>
+          <a:fillRef idx="1">
+            <a:schemeClr val="accent1"/>
+          </a:fillRef>
+          <a:effectRef idx="0">
+            <a:schemeClr val="accent1"/>
+          </a:effectRef>
+          <a:fontRef idx="minor">
+            <a:schemeClr val="lt1"/>
+          </a:fontRef>
+        </p:style>
+        <p:txBody>
+          <a:bodyPr rtlCol="0" anchor="ctr"/>
+          <a:lstStyle/>
+          <a:p>
+            <a:r>
+              <a:rPr lang="en-US" b="1" dirty="0"/>
+              <a:t>Profile{</a:t>
+            </a:r>
+          </a:p>
+          <a:p>
+            <a:pPr marL="800100" lvl="1" indent="-342900">
+              <a:buFont typeface="Arial" panose="020B0604020202020204" pitchFamily="34" charset="0"/>
+              <a:buChar char="•"/>
+            </a:pPr>
+            <a:r>
+              <a:rPr lang="en-US" b="1" dirty="0" err="1"/>
+              <a:t>EditBtn</a:t>
+            </a:r>
+            <a:r>
+              <a:rPr lang="en-US" b="1" dirty="0"/>
+              <a:t> : (guestEditProfile.html)</a:t>
+            </a:r>
+          </a:p>
+          <a:p>
+            <a:pPr marL="800100" lvl="1" indent="-342900">
+              <a:buFont typeface="Arial" panose="020B0604020202020204" pitchFamily="34" charset="0"/>
+              <a:buChar char="•"/>
+            </a:pPr>
+            <a:r>
+              <a:rPr lang="en-US" b="1" dirty="0"/>
+              <a:t>Profile Picture (onclick (</a:t>
+            </a:r>
+            <a:r>
+              <a:rPr lang="en-US" b="1" dirty="0" err="1"/>
+              <a:t>ZoomModal</a:t>
+            </a:r>
+            <a:r>
+              <a:rPr lang="en-US" b="1" dirty="0"/>
+              <a:t>))</a:t>
+            </a:r>
+          </a:p>
+          <a:p>
+            <a:pPr marL="800100" lvl="1" indent="-342900">
+              <a:buFont typeface="Arial" panose="020B0604020202020204" pitchFamily="34" charset="0"/>
+              <a:buChar char="•"/>
+            </a:pPr>
+            <a:r>
+              <a:rPr lang="en-US" b="1" dirty="0"/>
+              <a:t>Full Name (Verified or Unverified) ☑</a:t>
+            </a:r>
+          </a:p>
+          <a:p>
+            <a:pPr marL="800100" lvl="1" indent="-342900">
+              <a:buFont typeface="Arial" panose="020B0604020202020204" pitchFamily="34" charset="0"/>
+              <a:buChar char="•"/>
+            </a:pPr>
+            <a:r>
+              <a:rPr lang="en-US" b="1" dirty="0"/>
+              <a:t>Phone Number</a:t>
+            </a:r>
+          </a:p>
+          <a:p>
+            <a:pPr marL="800100" lvl="1" indent="-342900">
+              <a:buFont typeface="Arial" panose="020B0604020202020204" pitchFamily="34" charset="0"/>
+              <a:buChar char="•"/>
+            </a:pPr>
+            <a:r>
+              <a:rPr lang="en-US" b="1" dirty="0"/>
+              <a:t>Email</a:t>
+            </a:r>
+          </a:p>
+          <a:p>
+            <a:pPr marL="800100" lvl="1" indent="-342900">
+              <a:buFont typeface="Arial" panose="020B0604020202020204" pitchFamily="34" charset="0"/>
+              <a:buChar char="•"/>
+            </a:pPr>
+            <a:r>
+              <a:rPr lang="en-US" b="1" dirty="0" err="1"/>
+              <a:t>Bday</a:t>
+            </a:r>
+            <a:endParaRPr lang="en-US" b="1" dirty="0"/>
+          </a:p>
+          <a:p>
+            <a:pPr marL="800100" lvl="1" indent="-342900">
+              <a:buFont typeface="Arial" panose="020B0604020202020204" pitchFamily="34" charset="0"/>
+              <a:buChar char="•"/>
+            </a:pPr>
+            <a:r>
+              <a:rPr lang="en-US" b="1" dirty="0"/>
+              <a:t>Age</a:t>
+            </a:r>
+          </a:p>
+          <a:p>
+            <a:pPr marL="800100" lvl="1" indent="-342900">
+              <a:buFont typeface="Arial" panose="020B0604020202020204" pitchFamily="34" charset="0"/>
+              <a:buChar char="•"/>
+            </a:pPr>
+            <a:r>
+              <a:rPr lang="en-US" b="1" dirty="0"/>
+              <a:t>Sex</a:t>
+            </a:r>
+          </a:p>
+          <a:p>
+            <a:r>
+              <a:rPr lang="en-US" b="1" dirty="0"/>
+              <a:t>}</a:t>
+            </a:r>
+          </a:p>
+          <a:p>
+            <a:endParaRPr lang="en-US" b="1" dirty="0"/>
+          </a:p>
+          <a:p>
+            <a:r>
+              <a:rPr lang="en-US" b="1" dirty="0"/>
+              <a:t>If (unverified){</a:t>
+            </a:r>
+          </a:p>
+          <a:p>
+            <a:pPr marL="800100" lvl="1" indent="-342900">
+              <a:buFont typeface="Arial" panose="020B0604020202020204" pitchFamily="34" charset="0"/>
+              <a:buChar char="•"/>
+            </a:pPr>
+            <a:r>
+              <a:rPr lang="en-US" b="1" dirty="0"/>
+              <a:t>Clickable Div{</a:t>
+            </a:r>
+          </a:p>
+          <a:p>
+            <a:pPr marL="1257300" lvl="2" indent="-342900">
+              <a:buFont typeface="Arial" panose="020B0604020202020204" pitchFamily="34" charset="0"/>
+              <a:buChar char="•"/>
+            </a:pPr>
+            <a:r>
+              <a:rPr lang="en-US" b="1" dirty="0"/>
+              <a:t>Verify your account using Valid ID</a:t>
+            </a:r>
+          </a:p>
+          <a:p>
+            <a:pPr marL="1257300" lvl="2" indent="-342900">
+              <a:buFont typeface="Arial" panose="020B0604020202020204" pitchFamily="34" charset="0"/>
+              <a:buChar char="•"/>
+            </a:pPr>
+            <a:r>
+              <a:rPr lang="en-US" b="1" dirty="0"/>
+              <a:t>You can add picture of digital design of ID </a:t>
+            </a:r>
+          </a:p>
+          <a:p>
+            <a:pPr marL="1257300" lvl="2" indent="-342900">
+              <a:buFont typeface="Arial" panose="020B0604020202020204" pitchFamily="34" charset="0"/>
+              <a:buChar char="•"/>
+            </a:pPr>
+            <a:r>
+              <a:rPr lang="en-US" b="1" dirty="0"/>
+              <a:t>Description of Verifying ID (`To meet KYC requirements, we use AI tools to verify the authenticity of your ID and extract only key information—your actual ID is not stored by our system.`)</a:t>
+            </a:r>
+          </a:p>
+          <a:p>
+            <a:pPr marL="1257300" lvl="2" indent="-342900">
+              <a:buFont typeface="Arial" panose="020B0604020202020204" pitchFamily="34" charset="0"/>
+              <a:buChar char="•"/>
+            </a:pPr>
+            <a:r>
+              <a:rPr lang="en-US" b="1" dirty="0"/>
+              <a:t>Onclick (Redirection)</a:t>
+            </a:r>
+          </a:p>
+          <a:p>
+            <a:pPr lvl="1"/>
+            <a:r>
+              <a:rPr lang="en-US" b="1" dirty="0"/>
+              <a:t>}</a:t>
+            </a:r>
+          </a:p>
+          <a:p>
+            <a:r>
+              <a:rPr lang="en-US" b="1" dirty="0"/>
+              <a:t>}</a:t>
+            </a:r>
+          </a:p>
+        </p:txBody>
+      </p:sp>
+    </p:spTree>
+    <p:extLst>
+      <p:ext uri="{BB962C8B-B14F-4D97-AF65-F5344CB8AC3E}">
+        <p14:creationId xmlns:p14="http://schemas.microsoft.com/office/powerpoint/2010/main" val="1253830261"/>
+      </p:ext>
+    </p:extLst>
+  </p:cSld>
+  <p:clrMapOvr>
+    <a:masterClrMapping/>
+  </p:clrMapOvr>
+</p:sld>
+</file>
+
+<file path=ppt/slides/slide53.xml><?xml version="1.0" encoding="utf-8"?>
+<p:sld xmlns:a="http://schemas.openxmlformats.org/drawingml/2006/main" xmlns:r="http://schemas.openxmlformats.org/officeDocument/2006/relationships" xmlns:p="http://schemas.openxmlformats.org/presentationml/2006/main">
+  <p:cSld>
+    <p:spTree>
+      <p:nvGrpSpPr>
+        <p:cNvPr id="1" name=""/>
+        <p:cNvGrpSpPr/>
+        <p:nvPr/>
+      </p:nvGrpSpPr>
+      <p:grpSpPr>
+        <a:xfrm>
+          <a:off x="0" y="0"/>
+          <a:ext cx="0" cy="0"/>
+          <a:chOff x="0" y="0"/>
+          <a:chExt cx="0" cy="0"/>
+        </a:xfrm>
+      </p:grpSpPr>
+      <p:sp>
+        <p:nvSpPr>
+          <p:cNvPr id="4" name="TextBox 3">
+            <a:extLst>
+              <a:ext uri="{FF2B5EF4-FFF2-40B4-BE49-F238E27FC236}">
+                <a16:creationId xmlns:a16="http://schemas.microsoft.com/office/drawing/2014/main" id="{E094F53A-6361-E94E-5BDE-6B5297C1498E}"/>
+              </a:ext>
+            </a:extLst>
+          </p:cNvPr>
+          <p:cNvSpPr txBox="1"/>
+          <p:nvPr/>
+        </p:nvSpPr>
+        <p:spPr>
+          <a:xfrm>
+            <a:off x="0" y="0"/>
+            <a:ext cx="2955636" cy="400110"/>
+          </a:xfrm>
+          <a:prstGeom prst="rect">
+            <a:avLst/>
+          </a:prstGeom>
+          <a:noFill/>
+        </p:spPr>
+        <p:txBody>
+          <a:bodyPr wrap="square" rtlCol="0">
+            <a:spAutoFit/>
+          </a:bodyPr>
+          <a:lstStyle/>
+          <a:p>
+            <a:r>
+              <a:rPr lang="en-US" sz="2000" b="1" dirty="0"/>
+              <a:t>guestEditProfile.html</a:t>
+            </a:r>
+          </a:p>
+        </p:txBody>
+      </p:sp>
+      <p:sp>
+        <p:nvSpPr>
+          <p:cNvPr id="5" name="Rectangle: Rounded Corners 4">
+            <a:extLst>
+              <a:ext uri="{FF2B5EF4-FFF2-40B4-BE49-F238E27FC236}">
+                <a16:creationId xmlns:a16="http://schemas.microsoft.com/office/drawing/2014/main" id="{F9ACFF90-048F-320A-A752-8D1492FAD30F}"/>
+              </a:ext>
+            </a:extLst>
+          </p:cNvPr>
+          <p:cNvSpPr/>
+          <p:nvPr/>
+        </p:nvSpPr>
+        <p:spPr>
+          <a:xfrm>
+            <a:off x="1396075" y="331673"/>
+            <a:ext cx="9399849" cy="6194654"/>
+          </a:xfrm>
+          <a:prstGeom prst="roundRect">
+            <a:avLst>
+              <a:gd name="adj" fmla="val 8914"/>
+            </a:avLst>
+          </a:prstGeom>
+          <a:solidFill>
+            <a:schemeClr val="accent6">
+              <a:lumMod val="50000"/>
+            </a:schemeClr>
+          </a:solidFill>
+          <a:ln>
+            <a:noFill/>
+          </a:ln>
+        </p:spPr>
+        <p:style>
+          <a:lnRef idx="2">
+            <a:schemeClr val="accent1">
+              <a:shade val="15000"/>
+            </a:schemeClr>
+          </a:lnRef>
+          <a:fillRef idx="1">
+            <a:schemeClr val="accent1"/>
+          </a:fillRef>
+          <a:effectRef idx="0">
+            <a:schemeClr val="accent1"/>
+          </a:effectRef>
+          <a:fontRef idx="minor">
+            <a:schemeClr val="lt1"/>
+          </a:fontRef>
+        </p:style>
+        <p:txBody>
+          <a:bodyPr rtlCol="0" anchor="ctr"/>
+          <a:lstStyle/>
+          <a:p>
+            <a:r>
+              <a:rPr lang="en-US" sz="2000" b="1" dirty="0" err="1"/>
+              <a:t>EditProfileDetails</a:t>
+            </a:r>
+            <a:r>
+              <a:rPr lang="en-US" sz="2000" b="1" dirty="0"/>
+              <a:t>{</a:t>
+            </a:r>
+          </a:p>
+          <a:p>
+            <a:pPr marL="800100" lvl="1" indent="-342900">
+              <a:buFont typeface="Arial" panose="020B0604020202020204" pitchFamily="34" charset="0"/>
+              <a:buChar char="•"/>
+            </a:pPr>
+            <a:r>
+              <a:rPr lang="en-US" sz="2000" b="1" dirty="0"/>
+              <a:t>Auto-fill inputs{</a:t>
+            </a:r>
+          </a:p>
+          <a:p>
+            <a:pPr marL="1257300" lvl="2" indent="-342900">
+              <a:buFont typeface="Arial" panose="020B0604020202020204" pitchFamily="34" charset="0"/>
+              <a:buChar char="•"/>
+            </a:pPr>
+            <a:r>
+              <a:rPr lang="en-US" sz="2000" b="1" dirty="0" err="1"/>
+              <a:t>ProfilePictureBtn</a:t>
+            </a:r>
+            <a:r>
+              <a:rPr lang="en-US" sz="2000" b="1" dirty="0"/>
+              <a:t> (Upload)</a:t>
+            </a:r>
+          </a:p>
+          <a:p>
+            <a:pPr marL="1257300" lvl="2" indent="-342900">
+              <a:buFont typeface="Arial" panose="020B0604020202020204" pitchFamily="34" charset="0"/>
+              <a:buChar char="•"/>
+            </a:pPr>
+            <a:r>
+              <a:rPr lang="en-US" sz="2000" b="1" dirty="0"/>
+              <a:t>Full Name Input</a:t>
+            </a:r>
+          </a:p>
+          <a:p>
+            <a:pPr marL="1257300" lvl="2" indent="-342900">
+              <a:buFont typeface="Arial" panose="020B0604020202020204" pitchFamily="34" charset="0"/>
+              <a:buChar char="•"/>
+            </a:pPr>
+            <a:r>
+              <a:rPr lang="en-US" sz="2000" b="1" dirty="0"/>
+              <a:t>Phone Number</a:t>
+            </a:r>
+          </a:p>
+          <a:p>
+            <a:pPr marL="1257300" lvl="2" indent="-342900">
+              <a:buFont typeface="Arial" panose="020B0604020202020204" pitchFamily="34" charset="0"/>
+              <a:buChar char="•"/>
+            </a:pPr>
+            <a:r>
+              <a:rPr lang="en-US" sz="2000" b="1" dirty="0"/>
+              <a:t>Email input</a:t>
+            </a:r>
+          </a:p>
+          <a:p>
+            <a:pPr lvl="1"/>
+            <a:r>
+              <a:rPr lang="en-US" sz="2000" b="1" dirty="0"/>
+              <a:t>}</a:t>
+            </a:r>
+          </a:p>
+          <a:p>
+            <a:pPr marL="800100" lvl="1" indent="-342900">
+              <a:buFont typeface="Arial" panose="020B0604020202020204" pitchFamily="34" charset="0"/>
+              <a:buChar char="•"/>
+            </a:pPr>
+            <a:r>
+              <a:rPr lang="en-US" sz="2000" b="1" dirty="0" err="1"/>
+              <a:t>editPasswordBtn</a:t>
+            </a:r>
+            <a:r>
+              <a:rPr lang="en-US" sz="2000" b="1" dirty="0"/>
+              <a:t>{</a:t>
+            </a:r>
+          </a:p>
+          <a:p>
+            <a:pPr marL="1257300" lvl="2" indent="-342900">
+              <a:buFont typeface="Arial" panose="020B0604020202020204" pitchFamily="34" charset="0"/>
+              <a:buChar char="•"/>
+            </a:pPr>
+            <a:r>
+              <a:rPr lang="en-US" sz="2000" b="1" dirty="0" err="1"/>
+              <a:t>modalEditPassword</a:t>
+            </a:r>
+            <a:r>
+              <a:rPr lang="en-US" sz="2000" b="1" dirty="0"/>
+              <a:t>(</a:t>
+            </a:r>
+          </a:p>
+          <a:p>
+            <a:pPr marL="1714500" lvl="3" indent="-342900">
+              <a:buFont typeface="Arial" panose="020B0604020202020204" pitchFamily="34" charset="0"/>
+              <a:buChar char="•"/>
+            </a:pPr>
+            <a:r>
+              <a:rPr lang="en-US" sz="2000" b="1" dirty="0"/>
+              <a:t>Enter Current Password</a:t>
+            </a:r>
+          </a:p>
+          <a:p>
+            <a:pPr marL="1714500" lvl="3" indent="-342900">
+              <a:buFont typeface="Arial" panose="020B0604020202020204" pitchFamily="34" charset="0"/>
+              <a:buChar char="•"/>
+            </a:pPr>
+            <a:r>
+              <a:rPr lang="en-US" sz="2000" b="1" dirty="0"/>
+              <a:t>Enter New Password</a:t>
+            </a:r>
+          </a:p>
+          <a:p>
+            <a:pPr marL="1714500" lvl="3" indent="-342900">
+              <a:buFont typeface="Arial" panose="020B0604020202020204" pitchFamily="34" charset="0"/>
+              <a:buChar char="•"/>
+            </a:pPr>
+            <a:r>
+              <a:rPr lang="en-US" sz="2000" b="1" dirty="0"/>
+              <a:t>Confirm Password</a:t>
+            </a:r>
+          </a:p>
+          <a:p>
+            <a:pPr marL="1714500" lvl="3" indent="-342900">
+              <a:buFont typeface="Arial" panose="020B0604020202020204" pitchFamily="34" charset="0"/>
+              <a:buChar char="•"/>
+            </a:pPr>
+            <a:r>
+              <a:rPr lang="en-US" sz="2000" b="1" dirty="0" err="1"/>
+              <a:t>forgotPasswordBtn</a:t>
+            </a:r>
+            <a:r>
+              <a:rPr lang="en-US" sz="2000" b="1" dirty="0"/>
+              <a:t> : ForgotPassword.html</a:t>
+            </a:r>
+          </a:p>
+          <a:p>
+            <a:pPr marL="1714500" lvl="3" indent="-342900">
+              <a:buFont typeface="Arial" panose="020B0604020202020204" pitchFamily="34" charset="0"/>
+              <a:buChar char="•"/>
+            </a:pPr>
+            <a:r>
+              <a:rPr lang="en-US" sz="2000" b="1" dirty="0" err="1"/>
+              <a:t>Btnconfirm</a:t>
+            </a:r>
+            <a:r>
+              <a:rPr lang="en-US" sz="2000" b="1" dirty="0"/>
+              <a:t>(API update password)</a:t>
+            </a:r>
+          </a:p>
+          <a:p>
+            <a:pPr lvl="2"/>
+            <a:r>
+              <a:rPr lang="en-US" sz="2000" b="1" dirty="0"/>
+              <a:t>)</a:t>
+            </a:r>
+          </a:p>
+          <a:p>
+            <a:pPr lvl="1"/>
+            <a:r>
+              <a:rPr lang="en-US" sz="2000" b="1" dirty="0"/>
+              <a:t>}</a:t>
+            </a:r>
+          </a:p>
+          <a:p>
+            <a:pPr lvl="1"/>
+            <a:r>
+              <a:rPr lang="en-US" sz="2000" b="1" dirty="0" err="1"/>
+              <a:t>Btn</a:t>
+            </a:r>
+            <a:r>
+              <a:rPr lang="en-US" sz="2000" b="1" dirty="0"/>
+              <a:t> (Cancel, Update) : message if successful, then go back to Profile</a:t>
+            </a:r>
+          </a:p>
+          <a:p>
+            <a:r>
+              <a:rPr lang="en-US" sz="2000" b="1" dirty="0"/>
+              <a:t>}</a:t>
+            </a:r>
+          </a:p>
+        </p:txBody>
+      </p:sp>
+    </p:spTree>
+    <p:extLst>
+      <p:ext uri="{BB962C8B-B14F-4D97-AF65-F5344CB8AC3E}">
+        <p14:creationId xmlns:p14="http://schemas.microsoft.com/office/powerpoint/2010/main" val="1406413378"/>
+      </p:ext>
+    </p:extLst>
+  </p:cSld>
+  <p:clrMapOvr>
+    <a:masterClrMapping/>
+  </p:clrMapOvr>
+</p:sld>
+</file>
+
+<file path=ppt/slides/slide54.xml><?xml version="1.0" encoding="utf-8"?>
+<p:sld xmlns:a="http://schemas.openxmlformats.org/drawingml/2006/main" xmlns:r="http://schemas.openxmlformats.org/officeDocument/2006/relationships" xmlns:p="http://schemas.openxmlformats.org/presentationml/2006/main">
+  <p:cSld>
+    <p:spTree>
+      <p:nvGrpSpPr>
+        <p:cNvPr id="1" name=""/>
+        <p:cNvGrpSpPr/>
+        <p:nvPr/>
+      </p:nvGrpSpPr>
+      <p:grpSpPr>
+        <a:xfrm>
+          <a:off x="0" y="0"/>
+          <a:ext cx="0" cy="0"/>
+          <a:chOff x="0" y="0"/>
+          <a:chExt cx="0" cy="0"/>
+        </a:xfrm>
+      </p:grpSpPr>
+      <p:sp>
+        <p:nvSpPr>
           <p:cNvPr id="5" name="Rectangle: Rounded Corners 4">
             <a:extLst>
               <a:ext uri="{FF2B5EF4-FFF2-40B4-BE49-F238E27FC236}">
@@ -17854,28 +18725,94 @@
           <a:lstStyle/>
           <a:p>
             <a:r>
+              <a:rPr lang="en-US" sz="2000" b="1" dirty="0" err="1"/>
+              <a:t>generateTicketBtn</a:t>
+            </a:r>
+            <a:r>
+              <a:rPr lang="en-US" sz="2000" b="1" dirty="0"/>
+              <a:t> : button (guesGenerateTicket.html)</a:t>
+            </a:r>
+          </a:p>
+          <a:p>
+            <a:r>
+              <a:rPr lang="en-US" sz="2000" b="1" dirty="0"/>
+              <a:t>Section 1 (list of tickets){</a:t>
+            </a:r>
+          </a:p>
+          <a:p>
+            <a:pPr marL="800100" lvl="1" indent="-342900">
+              <a:buFont typeface="Arial" panose="020B0604020202020204" pitchFamily="34" charset="0"/>
+              <a:buChar char="•"/>
+            </a:pPr>
+            <a:r>
+              <a:rPr lang="en-US" sz="2000" b="1" dirty="0"/>
+              <a:t>Ticket lists ( </a:t>
+            </a:r>
+            <a:r>
+              <a:rPr lang="en-US" sz="2000" b="1" dirty="0" err="1"/>
+              <a:t>ticketQueueID</a:t>
+            </a:r>
+            <a:r>
+              <a:rPr lang="en-US" sz="2000" b="1" dirty="0"/>
+              <a:t>,`</a:t>
+            </a:r>
+            <a:r>
+              <a:rPr lang="en-US" sz="2000" b="1" dirty="0" err="1"/>
+              <a:t>CustomerSupport</a:t>
+            </a:r>
+            <a:r>
+              <a:rPr lang="en-US" sz="2000" b="1" dirty="0"/>
+              <a:t> username`, Status (End, In Queue, Open))</a:t>
+            </a:r>
+          </a:p>
+          <a:p>
+            <a:r>
+              <a:rPr lang="en-US" sz="2000" b="1" dirty="0"/>
+              <a:t>}</a:t>
+            </a:r>
+          </a:p>
+          <a:p>
+            <a:r>
+              <a:rPr lang="en-US" b="1" dirty="0"/>
+              <a:t>Section 2 {</a:t>
+            </a:r>
+          </a:p>
+          <a:p>
+            <a:pPr marL="742950" lvl="1" indent="-285750">
+              <a:buFont typeface="Arial" panose="020B0604020202020204" pitchFamily="34" charset="0"/>
+              <a:buChar char="•"/>
+            </a:pPr>
+            <a:r>
+              <a:rPr lang="en-US" b="1" dirty="0"/>
+              <a:t>When user clicked one of the ticket lists, </a:t>
+            </a:r>
+            <a:r>
               <a:rPr lang="en-US" b="1" dirty="0" err="1"/>
-              <a:t>backBtn</a:t>
+              <a:t>Itll</a:t>
             </a:r>
             <a:r>
               <a:rPr lang="en-US" b="1" dirty="0"/>
-              <a:t> : Button (guestTickets.html)</a:t>
-            </a:r>
-          </a:p>
-          <a:p>
+              <a:t> show the conversation here.</a:t>
+            </a:r>
+          </a:p>
+          <a:p>
+            <a:pPr marL="742950" lvl="1" indent="-285750">
+              <a:buFont typeface="Arial" panose="020B0604020202020204" pitchFamily="34" charset="0"/>
+              <a:buChar char="•"/>
+            </a:pPr>
             <a:r>
               <a:rPr lang="en-US" b="1" dirty="0"/>
-              <a:t>Generate a Ticket{</a:t>
-            </a:r>
-          </a:p>
-          <a:p>
-            <a:pPr marL="742950" lvl="1" indent="-285750">
+              <a:t>{</a:t>
+            </a:r>
+          </a:p>
+          <a:p>
+            <a:pPr marL="1200150" lvl="2" indent="-285750">
               <a:buFont typeface="Arial" panose="020B0604020202020204" pitchFamily="34" charset="0"/>
               <a:buChar char="•"/>
             </a:pPr>
             <a:r>
               <a:rPr lang="en-US" b="1" dirty="0"/>
-              <a:t>Inputs{</a:t>
+              <a:t>First blob message : Concern, submitted by guest</a:t>
             </a:r>
           </a:p>
           <a:p>
@@ -17883,57 +18820,70 @@
               <a:buFont typeface="Arial" panose="020B0604020202020204" pitchFamily="34" charset="0"/>
               <a:buChar char="•"/>
             </a:pPr>
+            <a:endParaRPr lang="en-US" b="1" dirty="0"/>
+          </a:p>
+          <a:p>
+            <a:pPr marL="1200150" lvl="2" indent="-285750">
+              <a:buFont typeface="Arial" panose="020B0604020202020204" pitchFamily="34" charset="0"/>
+              <a:buChar char="•"/>
+            </a:pPr>
             <a:r>
               <a:rPr lang="en-US" b="1" dirty="0"/>
-              <a:t>Select a Customer Service Agent : (`CS - FirstName`…) : selection</a:t>
-            </a:r>
-          </a:p>
-          <a:p>
-            <a:pPr marL="1200150" lvl="2" indent="-285750">
+              <a:t>If (status == Open){</a:t>
+            </a:r>
+          </a:p>
+          <a:p>
+            <a:pPr marL="1657350" lvl="3" indent="-285750">
               <a:buFont typeface="Arial" panose="020B0604020202020204" pitchFamily="34" charset="0"/>
               <a:buChar char="•"/>
             </a:pPr>
             <a:r>
               <a:rPr lang="en-US" b="1" dirty="0"/>
-              <a:t>Select a concern : (“Location”, “Appliances”, “Amenities”, “Payment”, “Others”) : selection</a:t>
-            </a:r>
-          </a:p>
-          <a:p>
-            <a:pPr marL="1200150" lvl="2" indent="-285750">
+              <a:t>Reply Input : Text</a:t>
+            </a:r>
+          </a:p>
+          <a:p>
+            <a:pPr marL="1657350" lvl="3" indent="-285750">
               <a:buFont typeface="Arial" panose="020B0604020202020204" pitchFamily="34" charset="0"/>
               <a:buChar char="•"/>
             </a:pPr>
             <a:r>
               <a:rPr lang="en-US" b="1" dirty="0"/>
-              <a:t>Description (min of character ?) : text</a:t>
-            </a:r>
-          </a:p>
-          <a:p>
-            <a:pPr lvl="1"/>
+              <a:t>Button : Send</a:t>
+            </a:r>
+          </a:p>
+          <a:p>
+            <a:pPr marL="1657350" lvl="3" indent="-285750">
+              <a:buFont typeface="Arial" panose="020B0604020202020204" pitchFamily="34" charset="0"/>
+              <a:buChar char="•"/>
+            </a:pPr>
+            <a:r>
+              <a:rPr lang="en-US" b="1" dirty="0"/>
+              <a:t>Button : End Ticket</a:t>
+            </a:r>
+          </a:p>
+          <a:p>
+            <a:pPr lvl="2"/>
             <a:r>
               <a:rPr lang="en-US" b="1" dirty="0"/>
               <a:t>}</a:t>
             </a:r>
           </a:p>
           <a:p>
-            <a:pPr marL="742950" lvl="1" indent="-285750">
-              <a:buFont typeface="Arial" panose="020B0604020202020204" pitchFamily="34" charset="0"/>
-              <a:buChar char="•"/>
-            </a:pPr>
-            <a:r>
-              <a:rPr lang="en-US" b="1" dirty="0" err="1"/>
-              <a:t>generateBtn</a:t>
-            </a:r>
-            <a:r>
-              <a:rPr lang="en-US" b="1" dirty="0"/>
-              <a:t> : Buttons (API) &gt; go back to guestTickets.html</a:t>
-            </a:r>
-          </a:p>
-          <a:p>
+            <a:pPr lvl="1"/>
             <a:r>
               <a:rPr lang="en-US" b="1" dirty="0"/>
               <a:t>}</a:t>
             </a:r>
+          </a:p>
+          <a:p>
+            <a:r>
+              <a:rPr lang="en-US" b="1" dirty="0"/>
+              <a:t>}</a:t>
+            </a:r>
+          </a:p>
+          <a:p>
+            <a:endParaRPr lang="en-US" b="1" dirty="0"/>
           </a:p>
         </p:txBody>
       </p:sp>
@@ -17967,6 +18917,206 @@
           <a:p>
             <a:r>
               <a:rPr lang="en-US" sz="2000" b="1" dirty="0"/>
+              <a:t>guestTickets.html</a:t>
+            </a:r>
+          </a:p>
+        </p:txBody>
+      </p:sp>
+    </p:spTree>
+    <p:extLst>
+      <p:ext uri="{BB962C8B-B14F-4D97-AF65-F5344CB8AC3E}">
+        <p14:creationId xmlns:p14="http://schemas.microsoft.com/office/powerpoint/2010/main" val="1833272379"/>
+      </p:ext>
+    </p:extLst>
+  </p:cSld>
+  <p:clrMapOvr>
+    <a:masterClrMapping/>
+  </p:clrMapOvr>
+</p:sld>
+</file>
+
+<file path=ppt/slides/slide55.xml><?xml version="1.0" encoding="utf-8"?>
+<p:sld xmlns:a="http://schemas.openxmlformats.org/drawingml/2006/main" xmlns:r="http://schemas.openxmlformats.org/officeDocument/2006/relationships" xmlns:p="http://schemas.openxmlformats.org/presentationml/2006/main">
+  <p:cSld>
+    <p:spTree>
+      <p:nvGrpSpPr>
+        <p:cNvPr id="1" name=""/>
+        <p:cNvGrpSpPr/>
+        <p:nvPr/>
+      </p:nvGrpSpPr>
+      <p:grpSpPr>
+        <a:xfrm>
+          <a:off x="0" y="0"/>
+          <a:ext cx="0" cy="0"/>
+          <a:chOff x="0" y="0"/>
+          <a:chExt cx="0" cy="0"/>
+        </a:xfrm>
+      </p:grpSpPr>
+      <p:sp>
+        <p:nvSpPr>
+          <p:cNvPr id="5" name="Rectangle: Rounded Corners 4">
+            <a:extLst>
+              <a:ext uri="{FF2B5EF4-FFF2-40B4-BE49-F238E27FC236}">
+                <a16:creationId xmlns:a16="http://schemas.microsoft.com/office/drawing/2014/main" id="{BADBB24C-5F57-A411-EB25-4559A2AFDB94}"/>
+              </a:ext>
+            </a:extLst>
+          </p:cNvPr>
+          <p:cNvSpPr/>
+          <p:nvPr/>
+        </p:nvSpPr>
+        <p:spPr>
+          <a:xfrm>
+            <a:off x="325581" y="701375"/>
+            <a:ext cx="11540837" cy="5455249"/>
+          </a:xfrm>
+          <a:prstGeom prst="roundRect">
+            <a:avLst>
+              <a:gd name="adj" fmla="val 8182"/>
+            </a:avLst>
+          </a:prstGeom>
+          <a:solidFill>
+            <a:schemeClr val="accent6">
+              <a:lumMod val="50000"/>
+            </a:schemeClr>
+          </a:solidFill>
+          <a:ln>
+            <a:noFill/>
+          </a:ln>
+        </p:spPr>
+        <p:style>
+          <a:lnRef idx="2">
+            <a:schemeClr val="accent1">
+              <a:shade val="15000"/>
+            </a:schemeClr>
+          </a:lnRef>
+          <a:fillRef idx="1">
+            <a:schemeClr val="accent1"/>
+          </a:fillRef>
+          <a:effectRef idx="0">
+            <a:schemeClr val="accent1"/>
+          </a:effectRef>
+          <a:fontRef idx="minor">
+            <a:schemeClr val="lt1"/>
+          </a:fontRef>
+        </p:style>
+        <p:txBody>
+          <a:bodyPr rtlCol="0" anchor="ctr"/>
+          <a:lstStyle/>
+          <a:p>
+            <a:r>
+              <a:rPr lang="en-US" b="1" dirty="0" err="1"/>
+              <a:t>backBtn</a:t>
+            </a:r>
+            <a:r>
+              <a:rPr lang="en-US" b="1" dirty="0"/>
+              <a:t> : Button (guestTickets.html)</a:t>
+            </a:r>
+          </a:p>
+          <a:p>
+            <a:r>
+              <a:rPr lang="en-US" b="1" dirty="0"/>
+              <a:t>Generate a Ticket{</a:t>
+            </a:r>
+          </a:p>
+          <a:p>
+            <a:pPr marL="742950" lvl="1" indent="-285750">
+              <a:buFont typeface="Arial" panose="020B0604020202020204" pitchFamily="34" charset="0"/>
+              <a:buChar char="•"/>
+            </a:pPr>
+            <a:r>
+              <a:rPr lang="en-US" b="1" dirty="0"/>
+              <a:t>Inputs{</a:t>
+            </a:r>
+          </a:p>
+          <a:p>
+            <a:pPr marL="1200150" lvl="2" indent="-285750">
+              <a:buFont typeface="Arial" panose="020B0604020202020204" pitchFamily="34" charset="0"/>
+              <a:buChar char="•"/>
+            </a:pPr>
+            <a:r>
+              <a:rPr lang="en-US" b="1" dirty="0"/>
+              <a:t>Select a Customer Service Agent : (`CS - FirstName`…) : selection</a:t>
+            </a:r>
+          </a:p>
+          <a:p>
+            <a:pPr marL="1200150" lvl="2" indent="-285750">
+              <a:buFont typeface="Arial" panose="020B0604020202020204" pitchFamily="34" charset="0"/>
+              <a:buChar char="•"/>
+            </a:pPr>
+            <a:r>
+              <a:rPr lang="en-US" b="1" dirty="0"/>
+              <a:t>Select a concern : (“Location”, “Appliances”, “Amenities”, “Payment”, “Others”) : selection</a:t>
+            </a:r>
+          </a:p>
+          <a:p>
+            <a:pPr marL="1200150" lvl="2" indent="-285750">
+              <a:buFont typeface="Arial" panose="020B0604020202020204" pitchFamily="34" charset="0"/>
+              <a:buChar char="•"/>
+            </a:pPr>
+            <a:r>
+              <a:rPr lang="en-US" b="1" dirty="0"/>
+              <a:t>Description (min of character ?) : text</a:t>
+            </a:r>
+          </a:p>
+          <a:p>
+            <a:pPr lvl="1"/>
+            <a:r>
+              <a:rPr lang="en-US" b="1" dirty="0"/>
+              <a:t>}</a:t>
+            </a:r>
+          </a:p>
+          <a:p>
+            <a:pPr marL="742950" lvl="1" indent="-285750">
+              <a:buFont typeface="Arial" panose="020B0604020202020204" pitchFamily="34" charset="0"/>
+              <a:buChar char="•"/>
+            </a:pPr>
+            <a:r>
+              <a:rPr lang="en-US" b="1" dirty="0" err="1"/>
+              <a:t>generateBtn</a:t>
+            </a:r>
+            <a:r>
+              <a:rPr lang="en-US" b="1" dirty="0"/>
+              <a:t> : Buttons (API) &gt; go back to guestTickets.html</a:t>
+            </a:r>
+          </a:p>
+          <a:p>
+            <a:r>
+              <a:rPr lang="en-US" b="1" dirty="0"/>
+              <a:t>}</a:t>
+            </a:r>
+          </a:p>
+        </p:txBody>
+      </p:sp>
+      <p:sp>
+        <p:nvSpPr>
+          <p:cNvPr id="4" name="TextBox 3">
+            <a:extLst>
+              <a:ext uri="{FF2B5EF4-FFF2-40B4-BE49-F238E27FC236}">
+                <a16:creationId xmlns:a16="http://schemas.microsoft.com/office/drawing/2014/main" id="{F259B9EF-2882-3D95-7422-68A27385F852}"/>
+              </a:ext>
+            </a:extLst>
+          </p:cNvPr>
+          <p:cNvSpPr txBox="1"/>
+          <p:nvPr/>
+        </p:nvSpPr>
+        <p:spPr>
+          <a:xfrm>
+            <a:off x="-1" y="0"/>
+            <a:ext cx="4341092" cy="400110"/>
+          </a:xfrm>
+          <a:prstGeom prst="rect">
+            <a:avLst/>
+          </a:prstGeom>
+          <a:noFill/>
+        </p:spPr>
+        <p:txBody>
+          <a:bodyPr wrap="square" rtlCol="0">
+            <a:spAutoFit/>
+          </a:bodyPr>
+          <a:lstStyle/>
+          <a:p>
+            <a:r>
+              <a:rPr lang="en-US" sz="2000" b="1" dirty="0"/>
               <a:t>guestGenerateTicket.html</a:t>
             </a:r>
           </a:p>
@@ -17985,7 +19135,7 @@
 </p:sld>
 </file>
 
-<file path=ppt/slides/slide51.xml><?xml version="1.0" encoding="utf-8"?>
+<file path=ppt/slides/slide56.xml><?xml version="1.0" encoding="utf-8"?>
 <p:sld xmlns:a="http://schemas.openxmlformats.org/drawingml/2006/main" xmlns:r="http://schemas.openxmlformats.org/officeDocument/2006/relationships" xmlns:p="http://schemas.openxmlformats.org/presentationml/2006/main">
   <p:cSld>
     <p:spTree>
@@ -18144,7 +19294,7 @@
 </p:sld>
 </file>
 
-<file path=ppt/slides/slide52.xml><?xml version="1.0" encoding="utf-8"?>
+<file path=ppt/slides/slide57.xml><?xml version="1.0" encoding="utf-8"?>
 <p:sld xmlns:a="http://schemas.openxmlformats.org/drawingml/2006/main" xmlns:r="http://schemas.openxmlformats.org/officeDocument/2006/relationships" xmlns:p="http://schemas.openxmlformats.org/presentationml/2006/main">
   <p:cSld>
     <p:spTree>
@@ -18293,7 +19443,7 @@
 </p:sld>
 </file>
 
-<file path=ppt/slides/slide53.xml><?xml version="1.0" encoding="utf-8"?>
+<file path=ppt/slides/slide58.xml><?xml version="1.0" encoding="utf-8"?>
 <p:sld xmlns:a="http://schemas.openxmlformats.org/drawingml/2006/main" xmlns:r="http://schemas.openxmlformats.org/officeDocument/2006/relationships" xmlns:p="http://schemas.openxmlformats.org/presentationml/2006/main">
   <p:cSld>
     <p:spTree>

--- a/betchaBooking-USECASE.pptx
+++ b/betchaBooking-USECASE.pptx
@@ -47,22 +47,23 @@
     <p:sldId id="290" r:id="rId41"/>
     <p:sldId id="291" r:id="rId42"/>
     <p:sldId id="289" r:id="rId43"/>
-    <p:sldId id="292" r:id="rId44"/>
-    <p:sldId id="293" r:id="rId45"/>
-    <p:sldId id="294" r:id="rId46"/>
-    <p:sldId id="295" r:id="rId47"/>
-    <p:sldId id="296" r:id="rId48"/>
-    <p:sldId id="297" r:id="rId49"/>
-    <p:sldId id="299" r:id="rId50"/>
-    <p:sldId id="300" r:id="rId51"/>
-    <p:sldId id="309" r:id="rId52"/>
-    <p:sldId id="306" r:id="rId53"/>
-    <p:sldId id="307" r:id="rId54"/>
-    <p:sldId id="302" r:id="rId55"/>
-    <p:sldId id="308" r:id="rId56"/>
-    <p:sldId id="301" r:id="rId57"/>
-    <p:sldId id="303" r:id="rId58"/>
-    <p:sldId id="304" r:id="rId59"/>
+    <p:sldId id="317" r:id="rId44"/>
+    <p:sldId id="292" r:id="rId45"/>
+    <p:sldId id="293" r:id="rId46"/>
+    <p:sldId id="294" r:id="rId47"/>
+    <p:sldId id="295" r:id="rId48"/>
+    <p:sldId id="296" r:id="rId49"/>
+    <p:sldId id="297" r:id="rId50"/>
+    <p:sldId id="299" r:id="rId51"/>
+    <p:sldId id="300" r:id="rId52"/>
+    <p:sldId id="309" r:id="rId53"/>
+    <p:sldId id="306" r:id="rId54"/>
+    <p:sldId id="307" r:id="rId55"/>
+    <p:sldId id="302" r:id="rId56"/>
+    <p:sldId id="308" r:id="rId57"/>
+    <p:sldId id="301" r:id="rId58"/>
+    <p:sldId id="303" r:id="rId59"/>
+    <p:sldId id="304" r:id="rId60"/>
   </p:sldIdLst>
   <p:sldSz cx="12192000" cy="6858000"/>
   <p:notesSz cx="6858000" cy="9144000"/>
@@ -14091,15 +14092,7 @@
             </a:pPr>
             <a:r>
               <a:rPr lang="en-US" b="1" dirty="0"/>
-              <a:t>e.g. January-July 2025  = </a:t>
-            </a:r>
-            <a:r>
-              <a:rPr lang="en-US" b="1" dirty="0" err="1"/>
-              <a:t>SemiAnual</a:t>
-            </a:r>
-            <a:r>
-              <a:rPr lang="en-US" b="1" dirty="0"/>
-              <a:t> 2025</a:t>
+              <a:t>Table (see next page for example)</a:t>
             </a:r>
           </a:p>
           <a:p>
@@ -14236,6 +14229,3281 @@
           <a:p>
             <a:r>
               <a:rPr lang="en-US" sz="2000" b="1" dirty="0"/>
+              <a:t>employeeGeneratePSR.html</a:t>
+            </a:r>
+          </a:p>
+        </p:txBody>
+      </p:sp>
+      <p:graphicFrame>
+        <p:nvGraphicFramePr>
+          <p:cNvPr id="5" name="Table 4">
+            <a:extLst>
+              <a:ext uri="{FF2B5EF4-FFF2-40B4-BE49-F238E27FC236}">
+                <a16:creationId xmlns:a16="http://schemas.microsoft.com/office/drawing/2014/main" id="{FB31F375-881E-9846-AD98-DCFAD8727171}"/>
+              </a:ext>
+            </a:extLst>
+          </p:cNvPr>
+          <p:cNvGraphicFramePr>
+            <a:graphicFrameLocks noGrp="1"/>
+          </p:cNvGraphicFramePr>
+          <p:nvPr>
+            <p:extLst>
+              <p:ext uri="{D42A27DB-BD31-4B8C-83A1-F6EECF244321}">
+                <p14:modId xmlns:p14="http://schemas.microsoft.com/office/powerpoint/2010/main" val="3862674773"/>
+              </p:ext>
+            </p:extLst>
+          </p:nvPr>
+        </p:nvGraphicFramePr>
+        <p:xfrm>
+          <a:off x="274226" y="1611240"/>
+          <a:ext cx="2503054" cy="978236"/>
+        </p:xfrm>
+        <a:graphic>
+          <a:graphicData uri="http://schemas.openxmlformats.org/drawingml/2006/table">
+            <a:tbl>
+              <a:tblPr firstRow="1" bandRow="1">
+                <a:tableStyleId>{5C22544A-7EE6-4342-B048-85BDC9FD1C3A}</a:tableStyleId>
+              </a:tblPr>
+              <a:tblGrid>
+                <a:gridCol w="1276180">
+                  <a:extLst>
+                    <a:ext uri="{9D8B030D-6E8A-4147-A177-3AD203B41FA5}">
+                      <a16:colId xmlns:a16="http://schemas.microsoft.com/office/drawing/2014/main" val="3731313920"/>
+                    </a:ext>
+                  </a:extLst>
+                </a:gridCol>
+                <a:gridCol w="1226874">
+                  <a:extLst>
+                    <a:ext uri="{9D8B030D-6E8A-4147-A177-3AD203B41FA5}">
+                      <a16:colId xmlns:a16="http://schemas.microsoft.com/office/drawing/2014/main" val="947986631"/>
+                    </a:ext>
+                  </a:extLst>
+                </a:gridCol>
+              </a:tblGrid>
+              <a:tr h="244559">
+                <a:tc>
+                  <a:txBody>
+                    <a:bodyPr/>
+                    <a:lstStyle/>
+                    <a:p>
+                      <a:r>
+                        <a:rPr lang="en-US" sz="1000" dirty="0"/>
+                        <a:t>Property Name</a:t>
+                      </a:r>
+                    </a:p>
+                  </a:txBody>
+                  <a:tcPr/>
+                </a:tc>
+                <a:tc>
+                  <a:txBody>
+                    <a:bodyPr/>
+                    <a:lstStyle/>
+                    <a:p>
+                      <a:r>
+                        <a:rPr lang="en-US" sz="1000" dirty="0"/>
+                        <a:t>Earned</a:t>
+                      </a:r>
+                    </a:p>
+                  </a:txBody>
+                  <a:tcPr/>
+                </a:tc>
+                <a:extLst>
+                  <a:ext uri="{0D108BD9-81ED-4DB2-BD59-A6C34878D82A}">
+                    <a16:rowId xmlns:a16="http://schemas.microsoft.com/office/drawing/2014/main" val="2288197724"/>
+                  </a:ext>
+                </a:extLst>
+              </a:tr>
+              <a:tr h="244559">
+                <a:tc>
+                  <a:txBody>
+                    <a:bodyPr/>
+                    <a:lstStyle/>
+                    <a:p>
+                      <a:r>
+                        <a:rPr lang="en-US" sz="1000" dirty="0"/>
+                        <a:t>P1</a:t>
+                      </a:r>
+                    </a:p>
+                  </a:txBody>
+                  <a:tcPr/>
+                </a:tc>
+                <a:tc>
+                  <a:txBody>
+                    <a:bodyPr/>
+                    <a:lstStyle/>
+                    <a:p>
+                      <a:r>
+                        <a:rPr lang="en-US" sz="1000" dirty="0"/>
+                        <a:t>6,000</a:t>
+                      </a:r>
+                    </a:p>
+                  </a:txBody>
+                  <a:tcPr/>
+                </a:tc>
+                <a:extLst>
+                  <a:ext uri="{0D108BD9-81ED-4DB2-BD59-A6C34878D82A}">
+                    <a16:rowId xmlns:a16="http://schemas.microsoft.com/office/drawing/2014/main" val="3125870186"/>
+                  </a:ext>
+                </a:extLst>
+              </a:tr>
+              <a:tr h="244559">
+                <a:tc>
+                  <a:txBody>
+                    <a:bodyPr/>
+                    <a:lstStyle/>
+                    <a:p>
+                      <a:r>
+                        <a:rPr lang="en-US" sz="1000" dirty="0"/>
+                        <a:t>P2</a:t>
+                      </a:r>
+                    </a:p>
+                  </a:txBody>
+                  <a:tcPr/>
+                </a:tc>
+                <a:tc>
+                  <a:txBody>
+                    <a:bodyPr/>
+                    <a:lstStyle/>
+                    <a:p>
+                      <a:r>
+                        <a:rPr lang="en-US" sz="1000" dirty="0"/>
+                        <a:t>4,000</a:t>
+                      </a:r>
+                    </a:p>
+                  </a:txBody>
+                  <a:tcPr/>
+                </a:tc>
+                <a:extLst>
+                  <a:ext uri="{0D108BD9-81ED-4DB2-BD59-A6C34878D82A}">
+                    <a16:rowId xmlns:a16="http://schemas.microsoft.com/office/drawing/2014/main" val="4104906619"/>
+                  </a:ext>
+                </a:extLst>
+              </a:tr>
+              <a:tr h="244559">
+                <a:tc>
+                  <a:txBody>
+                    <a:bodyPr/>
+                    <a:lstStyle/>
+                    <a:p>
+                      <a:r>
+                        <a:rPr lang="en-US" sz="1000" dirty="0"/>
+                        <a:t>TOTAL</a:t>
+                      </a:r>
+                    </a:p>
+                  </a:txBody>
+                  <a:tcPr/>
+                </a:tc>
+                <a:tc>
+                  <a:txBody>
+                    <a:bodyPr/>
+                    <a:lstStyle/>
+                    <a:p>
+                      <a:r>
+                        <a:rPr lang="en-US" sz="1000" dirty="0"/>
+                        <a:t>10,000</a:t>
+                      </a:r>
+                    </a:p>
+                  </a:txBody>
+                  <a:tcPr/>
+                </a:tc>
+                <a:extLst>
+                  <a:ext uri="{0D108BD9-81ED-4DB2-BD59-A6C34878D82A}">
+                    <a16:rowId xmlns:a16="http://schemas.microsoft.com/office/drawing/2014/main" val="742238911"/>
+                  </a:ext>
+                </a:extLst>
+              </a:tr>
+            </a:tbl>
+          </a:graphicData>
+        </a:graphic>
+      </p:graphicFrame>
+      <p:sp>
+        <p:nvSpPr>
+          <p:cNvPr id="6" name="TextBox 5">
+            <a:extLst>
+              <a:ext uri="{FF2B5EF4-FFF2-40B4-BE49-F238E27FC236}">
+                <a16:creationId xmlns:a16="http://schemas.microsoft.com/office/drawing/2014/main" id="{A007F5DE-F1E8-CFD5-FE58-EFD6FD8D4DF1}"/>
+              </a:ext>
+            </a:extLst>
+          </p:cNvPr>
+          <p:cNvSpPr txBox="1"/>
+          <p:nvPr/>
+        </p:nvSpPr>
+        <p:spPr>
+          <a:xfrm>
+            <a:off x="184980" y="1390246"/>
+            <a:ext cx="1952013" cy="276999"/>
+          </a:xfrm>
+          <a:prstGeom prst="rect">
+            <a:avLst/>
+          </a:prstGeom>
+          <a:noFill/>
+        </p:spPr>
+        <p:txBody>
+          <a:bodyPr wrap="square" rtlCol="0">
+            <a:spAutoFit/>
+          </a:bodyPr>
+          <a:lstStyle/>
+          <a:p>
+            <a:r>
+              <a:rPr lang="en-US" sz="1200" b="1" dirty="0"/>
+              <a:t>Week 1 of January, 2025</a:t>
+            </a:r>
+          </a:p>
+        </p:txBody>
+      </p:sp>
+      <p:sp>
+        <p:nvSpPr>
+          <p:cNvPr id="7" name="TextBox 6">
+            <a:extLst>
+              <a:ext uri="{FF2B5EF4-FFF2-40B4-BE49-F238E27FC236}">
+                <a16:creationId xmlns:a16="http://schemas.microsoft.com/office/drawing/2014/main" id="{661B8A9F-5A1A-9238-3F9E-FB83235A0BEF}"/>
+              </a:ext>
+            </a:extLst>
+          </p:cNvPr>
+          <p:cNvSpPr txBox="1"/>
+          <p:nvPr/>
+        </p:nvSpPr>
+        <p:spPr>
+          <a:xfrm>
+            <a:off x="198351" y="553237"/>
+            <a:ext cx="1376450" cy="276999"/>
+          </a:xfrm>
+          <a:prstGeom prst="rect">
+            <a:avLst/>
+          </a:prstGeom>
+          <a:noFill/>
+        </p:spPr>
+        <p:txBody>
+          <a:bodyPr wrap="square" rtlCol="0">
+            <a:spAutoFit/>
+          </a:bodyPr>
+          <a:lstStyle/>
+          <a:p>
+            <a:r>
+              <a:rPr lang="en-US" sz="1200" b="1" dirty="0"/>
+              <a:t>WEEK Example</a:t>
+            </a:r>
+          </a:p>
+        </p:txBody>
+      </p:sp>
+      <p:graphicFrame>
+        <p:nvGraphicFramePr>
+          <p:cNvPr id="9" name="Table 8">
+            <a:extLst>
+              <a:ext uri="{FF2B5EF4-FFF2-40B4-BE49-F238E27FC236}">
+                <a16:creationId xmlns:a16="http://schemas.microsoft.com/office/drawing/2014/main" id="{44C87501-E227-CDC1-E88A-55C097B527F6}"/>
+              </a:ext>
+            </a:extLst>
+          </p:cNvPr>
+          <p:cNvGraphicFramePr>
+            <a:graphicFrameLocks noGrp="1"/>
+          </p:cNvGraphicFramePr>
+          <p:nvPr>
+            <p:extLst>
+              <p:ext uri="{D42A27DB-BD31-4B8C-83A1-F6EECF244321}">
+                <p14:modId xmlns:p14="http://schemas.microsoft.com/office/powerpoint/2010/main" val="3774109859"/>
+              </p:ext>
+            </p:extLst>
+          </p:nvPr>
+        </p:nvGraphicFramePr>
+        <p:xfrm>
+          <a:off x="3195734" y="1611240"/>
+          <a:ext cx="3624168" cy="1129917"/>
+        </p:xfrm>
+        <a:graphic>
+          <a:graphicData uri="http://schemas.openxmlformats.org/drawingml/2006/table">
+            <a:tbl>
+              <a:tblPr firstRow="1" bandRow="1">
+                <a:tableStyleId>{5C22544A-7EE6-4342-B048-85BDC9FD1C3A}</a:tableStyleId>
+              </a:tblPr>
+              <a:tblGrid>
+                <a:gridCol w="624123">
+                  <a:extLst>
+                    <a:ext uri="{9D8B030D-6E8A-4147-A177-3AD203B41FA5}">
+                      <a16:colId xmlns:a16="http://schemas.microsoft.com/office/drawing/2014/main" val="3731313920"/>
+                    </a:ext>
+                  </a:extLst>
+                </a:gridCol>
+                <a:gridCol w="600009">
+                  <a:extLst>
+                    <a:ext uri="{9D8B030D-6E8A-4147-A177-3AD203B41FA5}">
+                      <a16:colId xmlns:a16="http://schemas.microsoft.com/office/drawing/2014/main" val="947986631"/>
+                    </a:ext>
+                  </a:extLst>
+                </a:gridCol>
+                <a:gridCol w="600009">
+                  <a:extLst>
+                    <a:ext uri="{9D8B030D-6E8A-4147-A177-3AD203B41FA5}">
+                      <a16:colId xmlns:a16="http://schemas.microsoft.com/office/drawing/2014/main" val="906388908"/>
+                    </a:ext>
+                  </a:extLst>
+                </a:gridCol>
+                <a:gridCol w="600009">
+                  <a:extLst>
+                    <a:ext uri="{9D8B030D-6E8A-4147-A177-3AD203B41FA5}">
+                      <a16:colId xmlns:a16="http://schemas.microsoft.com/office/drawing/2014/main" val="133631174"/>
+                    </a:ext>
+                  </a:extLst>
+                </a:gridCol>
+                <a:gridCol w="600009">
+                  <a:extLst>
+                    <a:ext uri="{9D8B030D-6E8A-4147-A177-3AD203B41FA5}">
+                      <a16:colId xmlns:a16="http://schemas.microsoft.com/office/drawing/2014/main" val="2705880004"/>
+                    </a:ext>
+                  </a:extLst>
+                </a:gridCol>
+                <a:gridCol w="600009">
+                  <a:extLst>
+                    <a:ext uri="{9D8B030D-6E8A-4147-A177-3AD203B41FA5}">
+                      <a16:colId xmlns:a16="http://schemas.microsoft.com/office/drawing/2014/main" val="2920025152"/>
+                    </a:ext>
+                  </a:extLst>
+                </a:gridCol>
+              </a:tblGrid>
+              <a:tr h="244559">
+                <a:tc>
+                  <a:txBody>
+                    <a:bodyPr/>
+                    <a:lstStyle/>
+                    <a:p>
+                      <a:r>
+                        <a:rPr lang="en-US" sz="1000" dirty="0"/>
+                        <a:t>Property Name</a:t>
+                      </a:r>
+                    </a:p>
+                  </a:txBody>
+                  <a:tcPr/>
+                </a:tc>
+                <a:tc>
+                  <a:txBody>
+                    <a:bodyPr/>
+                    <a:lstStyle/>
+                    <a:p>
+                      <a:r>
+                        <a:rPr lang="en-US" sz="1000" dirty="0"/>
+                        <a:t>May</a:t>
+                      </a:r>
+                    </a:p>
+                  </a:txBody>
+                  <a:tcPr/>
+                </a:tc>
+                <a:tc>
+                  <a:txBody>
+                    <a:bodyPr/>
+                    <a:lstStyle/>
+                    <a:p>
+                      <a:r>
+                        <a:rPr lang="en-US" sz="1000" dirty="0"/>
+                        <a:t>Jun</a:t>
+                      </a:r>
+                    </a:p>
+                  </a:txBody>
+                  <a:tcPr/>
+                </a:tc>
+                <a:tc>
+                  <a:txBody>
+                    <a:bodyPr/>
+                    <a:lstStyle/>
+                    <a:p>
+                      <a:r>
+                        <a:rPr lang="en-US" sz="1000" dirty="0"/>
+                        <a:t>Jul</a:t>
+                      </a:r>
+                    </a:p>
+                  </a:txBody>
+                  <a:tcPr/>
+                </a:tc>
+                <a:tc>
+                  <a:txBody>
+                    <a:bodyPr/>
+                    <a:lstStyle/>
+                    <a:p>
+                      <a:r>
+                        <a:rPr lang="en-US" sz="1000" dirty="0"/>
+                        <a:t>Aug</a:t>
+                      </a:r>
+                    </a:p>
+                  </a:txBody>
+                  <a:tcPr/>
+                </a:tc>
+                <a:tc>
+                  <a:txBody>
+                    <a:bodyPr/>
+                    <a:lstStyle/>
+                    <a:p>
+                      <a:r>
+                        <a:rPr lang="en-US" sz="1000" dirty="0"/>
+                        <a:t>Earned</a:t>
+                      </a:r>
+                    </a:p>
+                  </a:txBody>
+                  <a:tcPr/>
+                </a:tc>
+                <a:extLst>
+                  <a:ext uri="{0D108BD9-81ED-4DB2-BD59-A6C34878D82A}">
+                    <a16:rowId xmlns:a16="http://schemas.microsoft.com/office/drawing/2014/main" val="2288197724"/>
+                  </a:ext>
+                </a:extLst>
+              </a:tr>
+              <a:tr h="244559">
+                <a:tc>
+                  <a:txBody>
+                    <a:bodyPr/>
+                    <a:lstStyle/>
+                    <a:p>
+                      <a:r>
+                        <a:rPr lang="en-US" sz="1000" dirty="0"/>
+                        <a:t>P1</a:t>
+                      </a:r>
+                    </a:p>
+                  </a:txBody>
+                  <a:tcPr/>
+                </a:tc>
+                <a:tc>
+                  <a:txBody>
+                    <a:bodyPr/>
+                    <a:lstStyle/>
+                    <a:p>
+                      <a:r>
+                        <a:rPr lang="en-US" sz="1000" dirty="0"/>
+                        <a:t>6,000</a:t>
+                      </a:r>
+                    </a:p>
+                  </a:txBody>
+                  <a:tcPr/>
+                </a:tc>
+                <a:tc>
+                  <a:txBody>
+                    <a:bodyPr/>
+                    <a:lstStyle/>
+                    <a:p>
+                      <a:r>
+                        <a:rPr lang="en-US" sz="1000" dirty="0"/>
+                        <a:t>4,000</a:t>
+                      </a:r>
+                    </a:p>
+                  </a:txBody>
+                  <a:tcPr/>
+                </a:tc>
+                <a:tc>
+                  <a:txBody>
+                    <a:bodyPr/>
+                    <a:lstStyle/>
+                    <a:p>
+                      <a:r>
+                        <a:rPr lang="en-US" sz="1000" dirty="0"/>
+                        <a:t>8,000</a:t>
+                      </a:r>
+                    </a:p>
+                  </a:txBody>
+                  <a:tcPr/>
+                </a:tc>
+                <a:tc>
+                  <a:txBody>
+                    <a:bodyPr/>
+                    <a:lstStyle/>
+                    <a:p>
+                      <a:r>
+                        <a:rPr lang="en-US" sz="1000" dirty="0"/>
+                        <a:t>5,000</a:t>
+                      </a:r>
+                    </a:p>
+                  </a:txBody>
+                  <a:tcPr/>
+                </a:tc>
+                <a:tc>
+                  <a:txBody>
+                    <a:bodyPr/>
+                    <a:lstStyle/>
+                    <a:p>
+                      <a:r>
+                        <a:rPr lang="en-US" sz="1000" dirty="0"/>
+                        <a:t>27,000</a:t>
+                      </a:r>
+                    </a:p>
+                  </a:txBody>
+                  <a:tcPr/>
+                </a:tc>
+                <a:extLst>
+                  <a:ext uri="{0D108BD9-81ED-4DB2-BD59-A6C34878D82A}">
+                    <a16:rowId xmlns:a16="http://schemas.microsoft.com/office/drawing/2014/main" val="3125870186"/>
+                  </a:ext>
+                </a:extLst>
+              </a:tr>
+              <a:tr h="244559">
+                <a:tc>
+                  <a:txBody>
+                    <a:bodyPr/>
+                    <a:lstStyle/>
+                    <a:p>
+                      <a:r>
+                        <a:rPr lang="en-US" sz="1000" dirty="0"/>
+                        <a:t>P2</a:t>
+                      </a:r>
+                    </a:p>
+                  </a:txBody>
+                  <a:tcPr/>
+                </a:tc>
+                <a:tc>
+                  <a:txBody>
+                    <a:bodyPr/>
+                    <a:lstStyle/>
+                    <a:p>
+                      <a:r>
+                        <a:rPr lang="en-US" sz="1000" dirty="0"/>
+                        <a:t>6,000</a:t>
+                      </a:r>
+                    </a:p>
+                  </a:txBody>
+                  <a:tcPr/>
+                </a:tc>
+                <a:tc>
+                  <a:txBody>
+                    <a:bodyPr/>
+                    <a:lstStyle/>
+                    <a:p>
+                      <a:r>
+                        <a:rPr lang="en-US" sz="1000" dirty="0"/>
+                        <a:t>4,000</a:t>
+                      </a:r>
+                    </a:p>
+                  </a:txBody>
+                  <a:tcPr/>
+                </a:tc>
+                <a:tc>
+                  <a:txBody>
+                    <a:bodyPr/>
+                    <a:lstStyle/>
+                    <a:p>
+                      <a:r>
+                        <a:rPr lang="en-US" sz="1000" dirty="0"/>
+                        <a:t>8,000</a:t>
+                      </a:r>
+                    </a:p>
+                  </a:txBody>
+                  <a:tcPr/>
+                </a:tc>
+                <a:tc>
+                  <a:txBody>
+                    <a:bodyPr/>
+                    <a:lstStyle/>
+                    <a:p>
+                      <a:r>
+                        <a:rPr lang="en-US" sz="1000" dirty="0"/>
+                        <a:t>5,000</a:t>
+                      </a:r>
+                    </a:p>
+                  </a:txBody>
+                  <a:tcPr/>
+                </a:tc>
+                <a:tc>
+                  <a:txBody>
+                    <a:bodyPr/>
+                    <a:lstStyle/>
+                    <a:p>
+                      <a:r>
+                        <a:rPr lang="en-US" sz="1000" dirty="0"/>
+                        <a:t>27,000</a:t>
+                      </a:r>
+                    </a:p>
+                  </a:txBody>
+                  <a:tcPr/>
+                </a:tc>
+                <a:extLst>
+                  <a:ext uri="{0D108BD9-81ED-4DB2-BD59-A6C34878D82A}">
+                    <a16:rowId xmlns:a16="http://schemas.microsoft.com/office/drawing/2014/main" val="4104906619"/>
+                  </a:ext>
+                </a:extLst>
+              </a:tr>
+              <a:tr h="244559">
+                <a:tc gridSpan="5">
+                  <a:txBody>
+                    <a:bodyPr/>
+                    <a:lstStyle/>
+                    <a:p>
+                      <a:r>
+                        <a:rPr lang="en-US" sz="1000" dirty="0"/>
+                        <a:t>TOTAL</a:t>
+                      </a:r>
+                    </a:p>
+                  </a:txBody>
+                  <a:tcPr/>
+                </a:tc>
+                <a:tc hMerge="1">
+                  <a:txBody>
+                    <a:bodyPr/>
+                    <a:lstStyle/>
+                    <a:p>
+                      <a:endParaRPr lang="en-US" sz="1000" dirty="0"/>
+                    </a:p>
+                  </a:txBody>
+                  <a:tcPr/>
+                </a:tc>
+                <a:tc hMerge="1">
+                  <a:txBody>
+                    <a:bodyPr/>
+                    <a:lstStyle/>
+                    <a:p>
+                      <a:endParaRPr lang="en-US" sz="1000" dirty="0"/>
+                    </a:p>
+                  </a:txBody>
+                  <a:tcPr/>
+                </a:tc>
+                <a:tc hMerge="1">
+                  <a:txBody>
+                    <a:bodyPr/>
+                    <a:lstStyle/>
+                    <a:p>
+                      <a:endParaRPr lang="en-US" sz="1000" dirty="0"/>
+                    </a:p>
+                  </a:txBody>
+                  <a:tcPr/>
+                </a:tc>
+                <a:tc hMerge="1">
+                  <a:txBody>
+                    <a:bodyPr/>
+                    <a:lstStyle/>
+                    <a:p>
+                      <a:endParaRPr lang="en-US" sz="1000" dirty="0"/>
+                    </a:p>
+                  </a:txBody>
+                  <a:tcPr/>
+                </a:tc>
+                <a:tc>
+                  <a:txBody>
+                    <a:bodyPr/>
+                    <a:lstStyle/>
+                    <a:p>
+                      <a:r>
+                        <a:rPr lang="en-US" sz="1000" dirty="0"/>
+                        <a:t>54,000</a:t>
+                      </a:r>
+                    </a:p>
+                  </a:txBody>
+                  <a:tcPr/>
+                </a:tc>
+                <a:extLst>
+                  <a:ext uri="{0D108BD9-81ED-4DB2-BD59-A6C34878D82A}">
+                    <a16:rowId xmlns:a16="http://schemas.microsoft.com/office/drawing/2014/main" val="742238911"/>
+                  </a:ext>
+                </a:extLst>
+              </a:tr>
+            </a:tbl>
+          </a:graphicData>
+        </a:graphic>
+      </p:graphicFrame>
+      <p:sp>
+        <p:nvSpPr>
+          <p:cNvPr id="10" name="TextBox 9">
+            <a:extLst>
+              <a:ext uri="{FF2B5EF4-FFF2-40B4-BE49-F238E27FC236}">
+                <a16:creationId xmlns:a16="http://schemas.microsoft.com/office/drawing/2014/main" id="{FEEE18E1-17FE-BC49-29DD-B61DBB852953}"/>
+              </a:ext>
+            </a:extLst>
+          </p:cNvPr>
+          <p:cNvSpPr txBox="1"/>
+          <p:nvPr/>
+        </p:nvSpPr>
+        <p:spPr>
+          <a:xfrm>
+            <a:off x="3138886" y="1390245"/>
+            <a:ext cx="1724938" cy="276999"/>
+          </a:xfrm>
+          <a:prstGeom prst="rect">
+            <a:avLst/>
+          </a:prstGeom>
+          <a:noFill/>
+        </p:spPr>
+        <p:txBody>
+          <a:bodyPr wrap="square" rtlCol="0">
+            <a:spAutoFit/>
+          </a:bodyPr>
+          <a:lstStyle/>
+          <a:p>
+            <a:r>
+              <a:rPr lang="en-US" sz="1200" b="1" dirty="0"/>
+              <a:t>Second Quarter, 2025</a:t>
+            </a:r>
+          </a:p>
+        </p:txBody>
+      </p:sp>
+      <p:sp>
+        <p:nvSpPr>
+          <p:cNvPr id="11" name="TextBox 10">
+            <a:extLst>
+              <a:ext uri="{FF2B5EF4-FFF2-40B4-BE49-F238E27FC236}">
+                <a16:creationId xmlns:a16="http://schemas.microsoft.com/office/drawing/2014/main" id="{02940BDB-9DDA-EBF5-EEE5-F6A884F0C8EE}"/>
+              </a:ext>
+            </a:extLst>
+          </p:cNvPr>
+          <p:cNvSpPr txBox="1"/>
+          <p:nvPr/>
+        </p:nvSpPr>
+        <p:spPr>
+          <a:xfrm>
+            <a:off x="3138886" y="523387"/>
+            <a:ext cx="3932474" cy="276999"/>
+          </a:xfrm>
+          <a:prstGeom prst="rect">
+            <a:avLst/>
+          </a:prstGeom>
+          <a:noFill/>
+        </p:spPr>
+        <p:txBody>
+          <a:bodyPr wrap="square" rtlCol="0">
+            <a:spAutoFit/>
+          </a:bodyPr>
+          <a:lstStyle/>
+          <a:p>
+            <a:r>
+              <a:rPr lang="en-US" sz="1200" b="1" dirty="0"/>
+              <a:t>QUARTER Example 1{</a:t>
+            </a:r>
+            <a:r>
+              <a:rPr lang="en-US" sz="1200" b="1" dirty="0" err="1"/>
+              <a:t>jan-apr</a:t>
+            </a:r>
+            <a:r>
+              <a:rPr lang="en-US" sz="1200" b="1" dirty="0"/>
+              <a:t>} 2{may-</a:t>
+            </a:r>
+            <a:r>
+              <a:rPr lang="en-US" sz="1200" b="1" dirty="0" err="1"/>
+              <a:t>aug</a:t>
+            </a:r>
+            <a:r>
+              <a:rPr lang="en-US" sz="1200" b="1" dirty="0"/>
+              <a:t>} 3{</a:t>
+            </a:r>
+            <a:r>
+              <a:rPr lang="en-US" sz="1200" b="1" dirty="0" err="1"/>
+              <a:t>sep</a:t>
+            </a:r>
+            <a:r>
+              <a:rPr lang="en-US" sz="1200" b="1" dirty="0"/>
+              <a:t>-dec}</a:t>
+            </a:r>
+          </a:p>
+        </p:txBody>
+      </p:sp>
+      <p:sp>
+        <p:nvSpPr>
+          <p:cNvPr id="12" name="Rectangle: Rounded Corners 11">
+            <a:extLst>
+              <a:ext uri="{FF2B5EF4-FFF2-40B4-BE49-F238E27FC236}">
+                <a16:creationId xmlns:a16="http://schemas.microsoft.com/office/drawing/2014/main" id="{93198956-816C-3714-1871-15AE41385943}"/>
+              </a:ext>
+            </a:extLst>
+          </p:cNvPr>
+          <p:cNvSpPr/>
+          <p:nvPr/>
+        </p:nvSpPr>
+        <p:spPr>
+          <a:xfrm>
+            <a:off x="274226" y="807032"/>
+            <a:ext cx="737709" cy="244198"/>
+          </a:xfrm>
+          <a:prstGeom prst="roundRect">
+            <a:avLst/>
+          </a:prstGeom>
+        </p:spPr>
+        <p:style>
+          <a:lnRef idx="2">
+            <a:schemeClr val="accent1">
+              <a:shade val="15000"/>
+            </a:schemeClr>
+          </a:lnRef>
+          <a:fillRef idx="1">
+            <a:schemeClr val="accent1"/>
+          </a:fillRef>
+          <a:effectRef idx="0">
+            <a:schemeClr val="accent1"/>
+          </a:effectRef>
+          <a:fontRef idx="minor">
+            <a:schemeClr val="lt1"/>
+          </a:fontRef>
+        </p:style>
+        <p:txBody>
+          <a:bodyPr rtlCol="0" anchor="ctr"/>
+          <a:lstStyle/>
+          <a:p>
+            <a:pPr algn="ctr"/>
+            <a:r>
+              <a:rPr lang="en-US" sz="1000" dirty="0"/>
+              <a:t>Week ↓</a:t>
+            </a:r>
+          </a:p>
+        </p:txBody>
+      </p:sp>
+      <p:sp>
+        <p:nvSpPr>
+          <p:cNvPr id="13" name="Rectangle: Rounded Corners 12">
+            <a:extLst>
+              <a:ext uri="{FF2B5EF4-FFF2-40B4-BE49-F238E27FC236}">
+                <a16:creationId xmlns:a16="http://schemas.microsoft.com/office/drawing/2014/main" id="{30236F25-99BA-62CC-3360-EF23BBE433A5}"/>
+              </a:ext>
+            </a:extLst>
+          </p:cNvPr>
+          <p:cNvSpPr/>
+          <p:nvPr/>
+        </p:nvSpPr>
+        <p:spPr>
+          <a:xfrm>
+            <a:off x="1087810" y="807032"/>
+            <a:ext cx="737709" cy="244198"/>
+          </a:xfrm>
+          <a:prstGeom prst="roundRect">
+            <a:avLst/>
+          </a:prstGeom>
+        </p:spPr>
+        <p:style>
+          <a:lnRef idx="2">
+            <a:schemeClr val="accent1">
+              <a:shade val="15000"/>
+            </a:schemeClr>
+          </a:lnRef>
+          <a:fillRef idx="1">
+            <a:schemeClr val="accent1"/>
+          </a:fillRef>
+          <a:effectRef idx="0">
+            <a:schemeClr val="accent1"/>
+          </a:effectRef>
+          <a:fontRef idx="minor">
+            <a:schemeClr val="lt1"/>
+          </a:fontRef>
+        </p:style>
+        <p:txBody>
+          <a:bodyPr rtlCol="0" anchor="ctr"/>
+          <a:lstStyle/>
+          <a:p>
+            <a:pPr algn="ctr"/>
+            <a:r>
+              <a:rPr lang="en-US" sz="1000" dirty="0"/>
+              <a:t>Month ↓</a:t>
+            </a:r>
+          </a:p>
+        </p:txBody>
+      </p:sp>
+      <p:sp>
+        <p:nvSpPr>
+          <p:cNvPr id="14" name="Rectangle: Rounded Corners 13">
+            <a:extLst>
+              <a:ext uri="{FF2B5EF4-FFF2-40B4-BE49-F238E27FC236}">
+                <a16:creationId xmlns:a16="http://schemas.microsoft.com/office/drawing/2014/main" id="{38DE7BD0-EC8C-5DC6-A61D-740C292BA563}"/>
+              </a:ext>
+            </a:extLst>
+          </p:cNvPr>
+          <p:cNvSpPr/>
+          <p:nvPr/>
+        </p:nvSpPr>
+        <p:spPr>
+          <a:xfrm>
+            <a:off x="1891597" y="807032"/>
+            <a:ext cx="737709" cy="244198"/>
+          </a:xfrm>
+          <a:prstGeom prst="roundRect">
+            <a:avLst/>
+          </a:prstGeom>
+        </p:spPr>
+        <p:style>
+          <a:lnRef idx="2">
+            <a:schemeClr val="accent1">
+              <a:shade val="15000"/>
+            </a:schemeClr>
+          </a:lnRef>
+          <a:fillRef idx="1">
+            <a:schemeClr val="accent1"/>
+          </a:fillRef>
+          <a:effectRef idx="0">
+            <a:schemeClr val="accent1"/>
+          </a:effectRef>
+          <a:fontRef idx="minor">
+            <a:schemeClr val="lt1"/>
+          </a:fontRef>
+        </p:style>
+        <p:txBody>
+          <a:bodyPr rtlCol="0" anchor="ctr"/>
+          <a:lstStyle/>
+          <a:p>
+            <a:pPr algn="ctr"/>
+            <a:r>
+              <a:rPr lang="en-US" sz="1000" dirty="0"/>
+              <a:t>Year ↓</a:t>
+            </a:r>
+          </a:p>
+        </p:txBody>
+      </p:sp>
+      <p:sp>
+        <p:nvSpPr>
+          <p:cNvPr id="15" name="Rectangle: Rounded Corners 14">
+            <a:extLst>
+              <a:ext uri="{FF2B5EF4-FFF2-40B4-BE49-F238E27FC236}">
+                <a16:creationId xmlns:a16="http://schemas.microsoft.com/office/drawing/2014/main" id="{E4233E44-EE6F-3809-50AF-08D33016CD73}"/>
+              </a:ext>
+            </a:extLst>
+          </p:cNvPr>
+          <p:cNvSpPr/>
+          <p:nvPr/>
+        </p:nvSpPr>
+        <p:spPr>
+          <a:xfrm>
+            <a:off x="274226" y="1146048"/>
+            <a:ext cx="737709" cy="244198"/>
+          </a:xfrm>
+          <a:prstGeom prst="roundRect">
+            <a:avLst/>
+          </a:prstGeom>
+        </p:spPr>
+        <p:style>
+          <a:lnRef idx="2">
+            <a:schemeClr val="accent1">
+              <a:shade val="15000"/>
+            </a:schemeClr>
+          </a:lnRef>
+          <a:fillRef idx="1">
+            <a:schemeClr val="accent1"/>
+          </a:fillRef>
+          <a:effectRef idx="0">
+            <a:schemeClr val="accent1"/>
+          </a:effectRef>
+          <a:fontRef idx="minor">
+            <a:schemeClr val="lt1"/>
+          </a:fontRef>
+        </p:style>
+        <p:txBody>
+          <a:bodyPr rtlCol="0" anchor="ctr"/>
+          <a:lstStyle/>
+          <a:p>
+            <a:pPr algn="ctr"/>
+            <a:r>
+              <a:rPr lang="en-US" sz="1000" dirty="0"/>
+              <a:t>Week 1 ↓</a:t>
+            </a:r>
+          </a:p>
+        </p:txBody>
+      </p:sp>
+      <p:sp>
+        <p:nvSpPr>
+          <p:cNvPr id="16" name="Rectangle: Rounded Corners 15">
+            <a:extLst>
+              <a:ext uri="{FF2B5EF4-FFF2-40B4-BE49-F238E27FC236}">
+                <a16:creationId xmlns:a16="http://schemas.microsoft.com/office/drawing/2014/main" id="{CA763D7E-7BF8-88FA-4C57-6288B7B3D6AB}"/>
+              </a:ext>
+            </a:extLst>
+          </p:cNvPr>
+          <p:cNvSpPr/>
+          <p:nvPr/>
+        </p:nvSpPr>
+        <p:spPr>
+          <a:xfrm>
+            <a:off x="1087810" y="1146048"/>
+            <a:ext cx="737709" cy="244198"/>
+          </a:xfrm>
+          <a:prstGeom prst="roundRect">
+            <a:avLst/>
+          </a:prstGeom>
+        </p:spPr>
+        <p:style>
+          <a:lnRef idx="2">
+            <a:schemeClr val="accent1">
+              <a:shade val="15000"/>
+            </a:schemeClr>
+          </a:lnRef>
+          <a:fillRef idx="1">
+            <a:schemeClr val="accent1"/>
+          </a:fillRef>
+          <a:effectRef idx="0">
+            <a:schemeClr val="accent1"/>
+          </a:effectRef>
+          <a:fontRef idx="minor">
+            <a:schemeClr val="lt1"/>
+          </a:fontRef>
+        </p:style>
+        <p:txBody>
+          <a:bodyPr rtlCol="0" anchor="ctr"/>
+          <a:lstStyle/>
+          <a:p>
+            <a:pPr algn="ctr"/>
+            <a:r>
+              <a:rPr lang="en-US" sz="1000" dirty="0"/>
+              <a:t>Jan ↓</a:t>
+            </a:r>
+          </a:p>
+        </p:txBody>
+      </p:sp>
+      <p:sp>
+        <p:nvSpPr>
+          <p:cNvPr id="17" name="Rectangle: Rounded Corners 16">
+            <a:extLst>
+              <a:ext uri="{FF2B5EF4-FFF2-40B4-BE49-F238E27FC236}">
+                <a16:creationId xmlns:a16="http://schemas.microsoft.com/office/drawing/2014/main" id="{1D4F66D8-591A-822A-443E-0772D1783557}"/>
+              </a:ext>
+            </a:extLst>
+          </p:cNvPr>
+          <p:cNvSpPr/>
+          <p:nvPr/>
+        </p:nvSpPr>
+        <p:spPr>
+          <a:xfrm>
+            <a:off x="1891597" y="1146048"/>
+            <a:ext cx="737709" cy="244198"/>
+          </a:xfrm>
+          <a:prstGeom prst="roundRect">
+            <a:avLst/>
+          </a:prstGeom>
+        </p:spPr>
+        <p:style>
+          <a:lnRef idx="2">
+            <a:schemeClr val="accent1">
+              <a:shade val="15000"/>
+            </a:schemeClr>
+          </a:lnRef>
+          <a:fillRef idx="1">
+            <a:schemeClr val="accent1"/>
+          </a:fillRef>
+          <a:effectRef idx="0">
+            <a:schemeClr val="accent1"/>
+          </a:effectRef>
+          <a:fontRef idx="minor">
+            <a:schemeClr val="lt1"/>
+          </a:fontRef>
+        </p:style>
+        <p:txBody>
+          <a:bodyPr rtlCol="0" anchor="ctr"/>
+          <a:lstStyle/>
+          <a:p>
+            <a:pPr algn="ctr"/>
+            <a:r>
+              <a:rPr lang="en-US" sz="1000" dirty="0"/>
+              <a:t>2025 ↓</a:t>
+            </a:r>
+          </a:p>
+        </p:txBody>
+      </p:sp>
+      <p:sp>
+        <p:nvSpPr>
+          <p:cNvPr id="18" name="Rectangle: Rounded Corners 17">
+            <a:extLst>
+              <a:ext uri="{FF2B5EF4-FFF2-40B4-BE49-F238E27FC236}">
+                <a16:creationId xmlns:a16="http://schemas.microsoft.com/office/drawing/2014/main" id="{611A8C16-9F16-6C59-8ADB-B854CDB8F997}"/>
+              </a:ext>
+            </a:extLst>
+          </p:cNvPr>
+          <p:cNvSpPr/>
+          <p:nvPr/>
+        </p:nvSpPr>
+        <p:spPr>
+          <a:xfrm>
+            <a:off x="3195734" y="831416"/>
+            <a:ext cx="737709" cy="244198"/>
+          </a:xfrm>
+          <a:prstGeom prst="roundRect">
+            <a:avLst/>
+          </a:prstGeom>
+        </p:spPr>
+        <p:style>
+          <a:lnRef idx="2">
+            <a:schemeClr val="accent1">
+              <a:shade val="15000"/>
+            </a:schemeClr>
+          </a:lnRef>
+          <a:fillRef idx="1">
+            <a:schemeClr val="accent1"/>
+          </a:fillRef>
+          <a:effectRef idx="0">
+            <a:schemeClr val="accent1"/>
+          </a:effectRef>
+          <a:fontRef idx="minor">
+            <a:schemeClr val="lt1"/>
+          </a:fontRef>
+        </p:style>
+        <p:txBody>
+          <a:bodyPr rtlCol="0" anchor="ctr"/>
+          <a:lstStyle/>
+          <a:p>
+            <a:pPr algn="ctr"/>
+            <a:r>
+              <a:rPr lang="en-US" sz="1000" dirty="0"/>
+              <a:t>Quarter ↓</a:t>
+            </a:r>
+          </a:p>
+        </p:txBody>
+      </p:sp>
+      <p:sp>
+        <p:nvSpPr>
+          <p:cNvPr id="20" name="Rectangle: Rounded Corners 19">
+            <a:extLst>
+              <a:ext uri="{FF2B5EF4-FFF2-40B4-BE49-F238E27FC236}">
+                <a16:creationId xmlns:a16="http://schemas.microsoft.com/office/drawing/2014/main" id="{CB2B3383-8599-4D59-E950-AF8D362B81D6}"/>
+              </a:ext>
+            </a:extLst>
+          </p:cNvPr>
+          <p:cNvSpPr/>
+          <p:nvPr/>
+        </p:nvSpPr>
+        <p:spPr>
+          <a:xfrm>
+            <a:off x="4029779" y="822572"/>
+            <a:ext cx="737709" cy="244198"/>
+          </a:xfrm>
+          <a:prstGeom prst="roundRect">
+            <a:avLst/>
+          </a:prstGeom>
+        </p:spPr>
+        <p:style>
+          <a:lnRef idx="2">
+            <a:schemeClr val="accent1">
+              <a:shade val="15000"/>
+            </a:schemeClr>
+          </a:lnRef>
+          <a:fillRef idx="1">
+            <a:schemeClr val="accent1"/>
+          </a:fillRef>
+          <a:effectRef idx="0">
+            <a:schemeClr val="accent1"/>
+          </a:effectRef>
+          <a:fontRef idx="minor">
+            <a:schemeClr val="lt1"/>
+          </a:fontRef>
+        </p:style>
+        <p:txBody>
+          <a:bodyPr rtlCol="0" anchor="ctr"/>
+          <a:lstStyle/>
+          <a:p>
+            <a:pPr algn="ctr"/>
+            <a:r>
+              <a:rPr lang="en-US" sz="1000" dirty="0"/>
+              <a:t>Year ↓</a:t>
+            </a:r>
+          </a:p>
+        </p:txBody>
+      </p:sp>
+      <p:sp>
+        <p:nvSpPr>
+          <p:cNvPr id="21" name="Rectangle: Rounded Corners 20">
+            <a:extLst>
+              <a:ext uri="{FF2B5EF4-FFF2-40B4-BE49-F238E27FC236}">
+                <a16:creationId xmlns:a16="http://schemas.microsoft.com/office/drawing/2014/main" id="{AF9AC30D-94C2-7BBB-F573-4ACCC9FE2B9B}"/>
+              </a:ext>
+            </a:extLst>
+          </p:cNvPr>
+          <p:cNvSpPr/>
+          <p:nvPr/>
+        </p:nvSpPr>
+        <p:spPr>
+          <a:xfrm>
+            <a:off x="3195734" y="1170432"/>
+            <a:ext cx="737709" cy="244198"/>
+          </a:xfrm>
+          <a:prstGeom prst="roundRect">
+            <a:avLst/>
+          </a:prstGeom>
+        </p:spPr>
+        <p:style>
+          <a:lnRef idx="2">
+            <a:schemeClr val="accent1">
+              <a:shade val="15000"/>
+            </a:schemeClr>
+          </a:lnRef>
+          <a:fillRef idx="1">
+            <a:schemeClr val="accent1"/>
+          </a:fillRef>
+          <a:effectRef idx="0">
+            <a:schemeClr val="accent1"/>
+          </a:effectRef>
+          <a:fontRef idx="minor">
+            <a:schemeClr val="lt1"/>
+          </a:fontRef>
+        </p:style>
+        <p:txBody>
+          <a:bodyPr rtlCol="0" anchor="ctr"/>
+          <a:lstStyle/>
+          <a:p>
+            <a:pPr algn="ctr"/>
+            <a:r>
+              <a:rPr lang="en-US" sz="1000" dirty="0"/>
+              <a:t>2</a:t>
+            </a:r>
+            <a:r>
+              <a:rPr lang="en-US" sz="1000" baseline="30000" dirty="0"/>
+              <a:t>nd</a:t>
+            </a:r>
+            <a:r>
+              <a:rPr lang="en-US" sz="1000" dirty="0"/>
+              <a:t> ↓</a:t>
+            </a:r>
+          </a:p>
+        </p:txBody>
+      </p:sp>
+      <p:sp>
+        <p:nvSpPr>
+          <p:cNvPr id="23" name="Rectangle: Rounded Corners 22">
+            <a:extLst>
+              <a:ext uri="{FF2B5EF4-FFF2-40B4-BE49-F238E27FC236}">
+                <a16:creationId xmlns:a16="http://schemas.microsoft.com/office/drawing/2014/main" id="{EB1A4702-5058-9211-4A1A-82D1C34455DF}"/>
+              </a:ext>
+            </a:extLst>
+          </p:cNvPr>
+          <p:cNvSpPr/>
+          <p:nvPr/>
+        </p:nvSpPr>
+        <p:spPr>
+          <a:xfrm>
+            <a:off x="4029779" y="1161588"/>
+            <a:ext cx="737709" cy="244198"/>
+          </a:xfrm>
+          <a:prstGeom prst="roundRect">
+            <a:avLst/>
+          </a:prstGeom>
+        </p:spPr>
+        <p:style>
+          <a:lnRef idx="2">
+            <a:schemeClr val="accent1">
+              <a:shade val="15000"/>
+            </a:schemeClr>
+          </a:lnRef>
+          <a:fillRef idx="1">
+            <a:schemeClr val="accent1"/>
+          </a:fillRef>
+          <a:effectRef idx="0">
+            <a:schemeClr val="accent1"/>
+          </a:effectRef>
+          <a:fontRef idx="minor">
+            <a:schemeClr val="lt1"/>
+          </a:fontRef>
+        </p:style>
+        <p:txBody>
+          <a:bodyPr rtlCol="0" anchor="ctr"/>
+          <a:lstStyle/>
+          <a:p>
+            <a:pPr algn="ctr"/>
+            <a:r>
+              <a:rPr lang="en-US" sz="1000" dirty="0"/>
+              <a:t>2025 ↓</a:t>
+            </a:r>
+          </a:p>
+        </p:txBody>
+      </p:sp>
+      <p:graphicFrame>
+        <p:nvGraphicFramePr>
+          <p:cNvPr id="24" name="Table 23">
+            <a:extLst>
+              <a:ext uri="{FF2B5EF4-FFF2-40B4-BE49-F238E27FC236}">
+                <a16:creationId xmlns:a16="http://schemas.microsoft.com/office/drawing/2014/main" id="{C10A5E8D-1C0A-1B34-7DBE-8D6C2DD8CF87}"/>
+              </a:ext>
+            </a:extLst>
+          </p:cNvPr>
+          <p:cNvGraphicFramePr>
+            <a:graphicFrameLocks noGrp="1"/>
+          </p:cNvGraphicFramePr>
+          <p:nvPr>
+            <p:extLst>
+              <p:ext uri="{D42A27DB-BD31-4B8C-83A1-F6EECF244321}">
+                <p14:modId xmlns:p14="http://schemas.microsoft.com/office/powerpoint/2010/main" val="1198924115"/>
+              </p:ext>
+            </p:extLst>
+          </p:nvPr>
+        </p:nvGraphicFramePr>
+        <p:xfrm>
+          <a:off x="7047624" y="1641090"/>
+          <a:ext cx="4755757" cy="1281598"/>
+        </p:xfrm>
+        <a:graphic>
+          <a:graphicData uri="http://schemas.openxmlformats.org/drawingml/2006/table">
+            <a:tbl>
+              <a:tblPr firstRow="1" bandRow="1">
+                <a:tableStyleId>{5C22544A-7EE6-4342-B048-85BDC9FD1C3A}</a:tableStyleId>
+              </a:tblPr>
+              <a:tblGrid>
+                <a:gridCol w="615269">
+                  <a:extLst>
+                    <a:ext uri="{9D8B030D-6E8A-4147-A177-3AD203B41FA5}">
+                      <a16:colId xmlns:a16="http://schemas.microsoft.com/office/drawing/2014/main" val="3731313920"/>
+                    </a:ext>
+                  </a:extLst>
+                </a:gridCol>
+                <a:gridCol w="591498">
+                  <a:extLst>
+                    <a:ext uri="{9D8B030D-6E8A-4147-A177-3AD203B41FA5}">
+                      <a16:colId xmlns:a16="http://schemas.microsoft.com/office/drawing/2014/main" val="947986631"/>
+                    </a:ext>
+                  </a:extLst>
+                </a:gridCol>
+                <a:gridCol w="591500">
+                  <a:extLst>
+                    <a:ext uri="{9D8B030D-6E8A-4147-A177-3AD203B41FA5}">
+                      <a16:colId xmlns:a16="http://schemas.microsoft.com/office/drawing/2014/main" val="906388908"/>
+                    </a:ext>
+                  </a:extLst>
+                </a:gridCol>
+                <a:gridCol w="591498">
+                  <a:extLst>
+                    <a:ext uri="{9D8B030D-6E8A-4147-A177-3AD203B41FA5}">
+                      <a16:colId xmlns:a16="http://schemas.microsoft.com/office/drawing/2014/main" val="133631174"/>
+                    </a:ext>
+                  </a:extLst>
+                </a:gridCol>
+                <a:gridCol w="591498">
+                  <a:extLst>
+                    <a:ext uri="{9D8B030D-6E8A-4147-A177-3AD203B41FA5}">
+                      <a16:colId xmlns:a16="http://schemas.microsoft.com/office/drawing/2014/main" val="2705880004"/>
+                    </a:ext>
+                  </a:extLst>
+                </a:gridCol>
+                <a:gridCol w="591498">
+                  <a:extLst>
+                    <a:ext uri="{9D8B030D-6E8A-4147-A177-3AD203B41FA5}">
+                      <a16:colId xmlns:a16="http://schemas.microsoft.com/office/drawing/2014/main" val="1224346719"/>
+                    </a:ext>
+                  </a:extLst>
+                </a:gridCol>
+                <a:gridCol w="591498">
+                  <a:extLst>
+                    <a:ext uri="{9D8B030D-6E8A-4147-A177-3AD203B41FA5}">
+                      <a16:colId xmlns:a16="http://schemas.microsoft.com/office/drawing/2014/main" val="870593989"/>
+                    </a:ext>
+                  </a:extLst>
+                </a:gridCol>
+                <a:gridCol w="591498">
+                  <a:extLst>
+                    <a:ext uri="{9D8B030D-6E8A-4147-A177-3AD203B41FA5}">
+                      <a16:colId xmlns:a16="http://schemas.microsoft.com/office/drawing/2014/main" val="3501395715"/>
+                    </a:ext>
+                  </a:extLst>
+                </a:gridCol>
+              </a:tblGrid>
+              <a:tr h="244559">
+                <a:tc>
+                  <a:txBody>
+                    <a:bodyPr/>
+                    <a:lstStyle/>
+                    <a:p>
+                      <a:r>
+                        <a:rPr lang="en-US" sz="1000" dirty="0"/>
+                        <a:t>Property Name</a:t>
+                      </a:r>
+                    </a:p>
+                  </a:txBody>
+                  <a:tcPr/>
+                </a:tc>
+                <a:tc>
+                  <a:txBody>
+                    <a:bodyPr/>
+                    <a:lstStyle/>
+                    <a:p>
+                      <a:r>
+                        <a:rPr lang="en-US" sz="1000" dirty="0"/>
+                        <a:t>Jan</a:t>
+                      </a:r>
+                    </a:p>
+                  </a:txBody>
+                  <a:tcPr/>
+                </a:tc>
+                <a:tc>
+                  <a:txBody>
+                    <a:bodyPr/>
+                    <a:lstStyle/>
+                    <a:p>
+                      <a:r>
+                        <a:rPr lang="en-US" sz="1000" dirty="0"/>
+                        <a:t>Feb</a:t>
+                      </a:r>
+                    </a:p>
+                  </a:txBody>
+                  <a:tcPr/>
+                </a:tc>
+                <a:tc>
+                  <a:txBody>
+                    <a:bodyPr/>
+                    <a:lstStyle/>
+                    <a:p>
+                      <a:r>
+                        <a:rPr lang="en-US" sz="1000" dirty="0"/>
+                        <a:t>Mar</a:t>
+                      </a:r>
+                    </a:p>
+                  </a:txBody>
+                  <a:tcPr/>
+                </a:tc>
+                <a:tc>
+                  <a:txBody>
+                    <a:bodyPr/>
+                    <a:lstStyle/>
+                    <a:p>
+                      <a:r>
+                        <a:rPr lang="en-US" sz="1000" dirty="0"/>
+                        <a:t>Apr</a:t>
+                      </a:r>
+                    </a:p>
+                  </a:txBody>
+                  <a:tcPr/>
+                </a:tc>
+                <a:tc>
+                  <a:txBody>
+                    <a:bodyPr/>
+                    <a:lstStyle/>
+                    <a:p>
+                      <a:r>
+                        <a:rPr lang="en-US" sz="1000" dirty="0"/>
+                        <a:t>May</a:t>
+                      </a:r>
+                    </a:p>
+                  </a:txBody>
+                  <a:tcPr/>
+                </a:tc>
+                <a:tc>
+                  <a:txBody>
+                    <a:bodyPr/>
+                    <a:lstStyle/>
+                    <a:p>
+                      <a:r>
+                        <a:rPr lang="en-US" sz="1000" dirty="0"/>
+                        <a:t>Jun</a:t>
+                      </a:r>
+                    </a:p>
+                  </a:txBody>
+                  <a:tcPr/>
+                </a:tc>
+                <a:tc>
+                  <a:txBody>
+                    <a:bodyPr/>
+                    <a:lstStyle/>
+                    <a:p>
+                      <a:r>
+                        <a:rPr lang="en-US" sz="1000" dirty="0"/>
+                        <a:t>Earned</a:t>
+                      </a:r>
+                    </a:p>
+                  </a:txBody>
+                  <a:tcPr/>
+                </a:tc>
+                <a:extLst>
+                  <a:ext uri="{0D108BD9-81ED-4DB2-BD59-A6C34878D82A}">
+                    <a16:rowId xmlns:a16="http://schemas.microsoft.com/office/drawing/2014/main" val="2288197724"/>
+                  </a:ext>
+                </a:extLst>
+              </a:tr>
+              <a:tr h="244559">
+                <a:tc>
+                  <a:txBody>
+                    <a:bodyPr/>
+                    <a:lstStyle/>
+                    <a:p>
+                      <a:r>
+                        <a:rPr lang="en-US" sz="1000" dirty="0"/>
+                        <a:t>P1</a:t>
+                      </a:r>
+                    </a:p>
+                  </a:txBody>
+                  <a:tcPr/>
+                </a:tc>
+                <a:tc>
+                  <a:txBody>
+                    <a:bodyPr/>
+                    <a:lstStyle/>
+                    <a:p>
+                      <a:r>
+                        <a:rPr lang="en-US" sz="1000" dirty="0"/>
+                        <a:t>6,000</a:t>
+                      </a:r>
+                    </a:p>
+                  </a:txBody>
+                  <a:tcPr/>
+                </a:tc>
+                <a:tc>
+                  <a:txBody>
+                    <a:bodyPr/>
+                    <a:lstStyle/>
+                    <a:p>
+                      <a:r>
+                        <a:rPr lang="en-US" sz="1000" dirty="0"/>
+                        <a:t>4,000</a:t>
+                      </a:r>
+                    </a:p>
+                  </a:txBody>
+                  <a:tcPr/>
+                </a:tc>
+                <a:tc>
+                  <a:txBody>
+                    <a:bodyPr/>
+                    <a:lstStyle/>
+                    <a:p>
+                      <a:r>
+                        <a:rPr lang="en-US" sz="1000" dirty="0"/>
+                        <a:t>8,000</a:t>
+                      </a:r>
+                    </a:p>
+                  </a:txBody>
+                  <a:tcPr/>
+                </a:tc>
+                <a:tc>
+                  <a:txBody>
+                    <a:bodyPr/>
+                    <a:lstStyle/>
+                    <a:p>
+                      <a:r>
+                        <a:rPr lang="en-US" sz="1000" dirty="0"/>
+                        <a:t>5,000</a:t>
+                      </a:r>
+                    </a:p>
+                  </a:txBody>
+                  <a:tcPr/>
+                </a:tc>
+                <a:tc>
+                  <a:txBody>
+                    <a:bodyPr/>
+                    <a:lstStyle/>
+                    <a:p>
+                      <a:r>
+                        <a:rPr lang="en-US" sz="1000" dirty="0"/>
+                        <a:t>5,000</a:t>
+                      </a:r>
+                    </a:p>
+                  </a:txBody>
+                  <a:tcPr/>
+                </a:tc>
+                <a:tc>
+                  <a:txBody>
+                    <a:bodyPr/>
+                    <a:lstStyle/>
+                    <a:p>
+                      <a:r>
+                        <a:rPr lang="en-US" sz="1000" dirty="0"/>
+                        <a:t>5,000</a:t>
+                      </a:r>
+                    </a:p>
+                  </a:txBody>
+                  <a:tcPr/>
+                </a:tc>
+                <a:tc>
+                  <a:txBody>
+                    <a:bodyPr/>
+                    <a:lstStyle/>
+                    <a:p>
+                      <a:r>
+                        <a:rPr lang="en-US" sz="1000" dirty="0"/>
+                        <a:t>29,000</a:t>
+                      </a:r>
+                    </a:p>
+                  </a:txBody>
+                  <a:tcPr/>
+                </a:tc>
+                <a:extLst>
+                  <a:ext uri="{0D108BD9-81ED-4DB2-BD59-A6C34878D82A}">
+                    <a16:rowId xmlns:a16="http://schemas.microsoft.com/office/drawing/2014/main" val="3125870186"/>
+                  </a:ext>
+                </a:extLst>
+              </a:tr>
+              <a:tr h="244559">
+                <a:tc>
+                  <a:txBody>
+                    <a:bodyPr/>
+                    <a:lstStyle/>
+                    <a:p>
+                      <a:r>
+                        <a:rPr lang="en-US" sz="1000" dirty="0"/>
+                        <a:t>P2</a:t>
+                      </a:r>
+                    </a:p>
+                  </a:txBody>
+                  <a:tcPr/>
+                </a:tc>
+                <a:tc>
+                  <a:txBody>
+                    <a:bodyPr/>
+                    <a:lstStyle/>
+                    <a:p>
+                      <a:r>
+                        <a:rPr lang="en-US" sz="1000" dirty="0"/>
+                        <a:t>6,000</a:t>
+                      </a:r>
+                    </a:p>
+                  </a:txBody>
+                  <a:tcPr/>
+                </a:tc>
+                <a:tc>
+                  <a:txBody>
+                    <a:bodyPr/>
+                    <a:lstStyle/>
+                    <a:p>
+                      <a:r>
+                        <a:rPr lang="en-US" sz="1000" dirty="0"/>
+                        <a:t>4,000</a:t>
+                      </a:r>
+                    </a:p>
+                  </a:txBody>
+                  <a:tcPr/>
+                </a:tc>
+                <a:tc>
+                  <a:txBody>
+                    <a:bodyPr/>
+                    <a:lstStyle/>
+                    <a:p>
+                      <a:r>
+                        <a:rPr lang="en-US" sz="1000" dirty="0"/>
+                        <a:t>8,000</a:t>
+                      </a:r>
+                    </a:p>
+                  </a:txBody>
+                  <a:tcPr/>
+                </a:tc>
+                <a:tc>
+                  <a:txBody>
+                    <a:bodyPr/>
+                    <a:lstStyle/>
+                    <a:p>
+                      <a:r>
+                        <a:rPr lang="en-US" sz="1000" dirty="0"/>
+                        <a:t>5,000</a:t>
+                      </a:r>
+                    </a:p>
+                  </a:txBody>
+                  <a:tcPr/>
+                </a:tc>
+                <a:tc>
+                  <a:txBody>
+                    <a:bodyPr/>
+                    <a:lstStyle/>
+                    <a:p>
+                      <a:r>
+                        <a:rPr lang="en-US" sz="1000" dirty="0"/>
+                        <a:t>5,000</a:t>
+                      </a:r>
+                    </a:p>
+                  </a:txBody>
+                  <a:tcPr/>
+                </a:tc>
+                <a:tc>
+                  <a:txBody>
+                    <a:bodyPr/>
+                    <a:lstStyle/>
+                    <a:p>
+                      <a:r>
+                        <a:rPr lang="en-US" sz="1000" dirty="0"/>
+                        <a:t>5,000</a:t>
+                      </a:r>
+                    </a:p>
+                  </a:txBody>
+                  <a:tcPr/>
+                </a:tc>
+                <a:tc>
+                  <a:txBody>
+                    <a:bodyPr/>
+                    <a:lstStyle/>
+                    <a:p>
+                      <a:r>
+                        <a:rPr lang="en-US" sz="1000" dirty="0"/>
+                        <a:t>29,000</a:t>
+                      </a:r>
+                    </a:p>
+                  </a:txBody>
+                  <a:tcPr/>
+                </a:tc>
+                <a:extLst>
+                  <a:ext uri="{0D108BD9-81ED-4DB2-BD59-A6C34878D82A}">
+                    <a16:rowId xmlns:a16="http://schemas.microsoft.com/office/drawing/2014/main" val="4104906619"/>
+                  </a:ext>
+                </a:extLst>
+              </a:tr>
+              <a:tr h="148891">
+                <a:tc gridSpan="7">
+                  <a:txBody>
+                    <a:bodyPr/>
+                    <a:lstStyle/>
+                    <a:p>
+                      <a:r>
+                        <a:rPr lang="en-US" sz="1000" dirty="0"/>
+                        <a:t>TOTAL</a:t>
+                      </a:r>
+                    </a:p>
+                  </a:txBody>
+                  <a:tcPr/>
+                </a:tc>
+                <a:tc hMerge="1">
+                  <a:txBody>
+                    <a:bodyPr/>
+                    <a:lstStyle/>
+                    <a:p>
+                      <a:endParaRPr lang="en-US" sz="1000" dirty="0"/>
+                    </a:p>
+                  </a:txBody>
+                  <a:tcPr/>
+                </a:tc>
+                <a:tc hMerge="1">
+                  <a:txBody>
+                    <a:bodyPr/>
+                    <a:lstStyle/>
+                    <a:p>
+                      <a:endParaRPr lang="en-US" sz="1000" dirty="0"/>
+                    </a:p>
+                  </a:txBody>
+                  <a:tcPr/>
+                </a:tc>
+                <a:tc hMerge="1">
+                  <a:txBody>
+                    <a:bodyPr/>
+                    <a:lstStyle/>
+                    <a:p>
+                      <a:endParaRPr lang="en-US" sz="1000" dirty="0"/>
+                    </a:p>
+                  </a:txBody>
+                  <a:tcPr/>
+                </a:tc>
+                <a:tc hMerge="1">
+                  <a:txBody>
+                    <a:bodyPr/>
+                    <a:lstStyle/>
+                    <a:p>
+                      <a:endParaRPr lang="en-US" sz="1000" dirty="0"/>
+                    </a:p>
+                  </a:txBody>
+                  <a:tcPr/>
+                </a:tc>
+                <a:tc hMerge="1">
+                  <a:txBody>
+                    <a:bodyPr/>
+                    <a:lstStyle/>
+                    <a:p>
+                      <a:endParaRPr lang="en-US" sz="1000" dirty="0"/>
+                    </a:p>
+                  </a:txBody>
+                  <a:tcPr/>
+                </a:tc>
+                <a:tc hMerge="1">
+                  <a:txBody>
+                    <a:bodyPr/>
+                    <a:lstStyle/>
+                    <a:p>
+                      <a:pPr/>
+                      <a:endParaRPr dirty="0"/>
+                    </a:p>
+                  </a:txBody>
+                  <a:tcPr/>
+                </a:tc>
+                <a:tc>
+                  <a:txBody>
+                    <a:bodyPr/>
+                    <a:lstStyle/>
+                    <a:p>
+                      <a:pPr marL="0" marR="0" lvl="0" indent="0" algn="l" defTabSz="914400" rtl="0" eaLnBrk="1" fontAlgn="auto" latinLnBrk="0" hangingPunct="1">
+                        <a:lnSpc>
+                          <a:spcPct val="100000"/>
+                        </a:lnSpc>
+                        <a:spcBef>
+                          <a:spcPts val="0"/>
+                        </a:spcBef>
+                        <a:spcAft>
+                          <a:spcPts val="0"/>
+                        </a:spcAft>
+                        <a:buClrTx/>
+                        <a:buSzTx/>
+                        <a:buFontTx/>
+                        <a:buNone/>
+                        <a:tabLst/>
+                        <a:defRPr/>
+                      </a:pPr>
+                      <a:r>
+                        <a:rPr lang="en-US" sz="1000" dirty="0"/>
+                        <a:t>58,000</a:t>
+                      </a:r>
+                    </a:p>
+                  </a:txBody>
+                  <a:tcPr/>
+                </a:tc>
+                <a:extLst>
+                  <a:ext uri="{0D108BD9-81ED-4DB2-BD59-A6C34878D82A}">
+                    <a16:rowId xmlns:a16="http://schemas.microsoft.com/office/drawing/2014/main" val="742238911"/>
+                  </a:ext>
+                </a:extLst>
+              </a:tr>
+            </a:tbl>
+          </a:graphicData>
+        </a:graphic>
+      </p:graphicFrame>
+      <p:sp>
+        <p:nvSpPr>
+          <p:cNvPr id="25" name="TextBox 24">
+            <a:extLst>
+              <a:ext uri="{FF2B5EF4-FFF2-40B4-BE49-F238E27FC236}">
+                <a16:creationId xmlns:a16="http://schemas.microsoft.com/office/drawing/2014/main" id="{BA3EB886-31F4-A0C0-182B-17EDDDA3A67D}"/>
+              </a:ext>
+            </a:extLst>
+          </p:cNvPr>
+          <p:cNvSpPr txBox="1"/>
+          <p:nvPr/>
+        </p:nvSpPr>
+        <p:spPr>
+          <a:xfrm>
+            <a:off x="7047623" y="1420095"/>
+            <a:ext cx="1724938" cy="276999"/>
+          </a:xfrm>
+          <a:prstGeom prst="rect">
+            <a:avLst/>
+          </a:prstGeom>
+          <a:noFill/>
+        </p:spPr>
+        <p:txBody>
+          <a:bodyPr wrap="square" rtlCol="0">
+            <a:spAutoFit/>
+          </a:bodyPr>
+          <a:lstStyle/>
+          <a:p>
+            <a:r>
+              <a:rPr lang="en-US" sz="1200" b="1" dirty="0"/>
+              <a:t>First Annual, 2025</a:t>
+            </a:r>
+          </a:p>
+        </p:txBody>
+      </p:sp>
+      <p:sp>
+        <p:nvSpPr>
+          <p:cNvPr id="26" name="TextBox 25">
+            <a:extLst>
+              <a:ext uri="{FF2B5EF4-FFF2-40B4-BE49-F238E27FC236}">
+                <a16:creationId xmlns:a16="http://schemas.microsoft.com/office/drawing/2014/main" id="{A8254BF7-8514-C813-50FA-282D4C9AA9D5}"/>
+              </a:ext>
+            </a:extLst>
+          </p:cNvPr>
+          <p:cNvSpPr txBox="1"/>
+          <p:nvPr/>
+        </p:nvSpPr>
+        <p:spPr>
+          <a:xfrm>
+            <a:off x="7047623" y="553237"/>
+            <a:ext cx="3932474" cy="276999"/>
+          </a:xfrm>
+          <a:prstGeom prst="rect">
+            <a:avLst/>
+          </a:prstGeom>
+          <a:noFill/>
+        </p:spPr>
+        <p:txBody>
+          <a:bodyPr wrap="square" rtlCol="0">
+            <a:spAutoFit/>
+          </a:bodyPr>
+          <a:lstStyle/>
+          <a:p>
+            <a:r>
+              <a:rPr lang="en-US" sz="1200" b="1" dirty="0"/>
+              <a:t>Semi-Annual Example 1{</a:t>
+            </a:r>
+            <a:r>
+              <a:rPr lang="en-US" sz="1200" b="1" dirty="0" err="1"/>
+              <a:t>jan-jun</a:t>
+            </a:r>
+            <a:r>
+              <a:rPr lang="en-US" sz="1200" b="1" dirty="0"/>
+              <a:t>} 2{</a:t>
+            </a:r>
+            <a:r>
+              <a:rPr lang="en-US" sz="1200" b="1" dirty="0" err="1"/>
+              <a:t>jul</a:t>
+            </a:r>
+            <a:r>
+              <a:rPr lang="en-US" sz="1200" b="1" dirty="0"/>
+              <a:t>-dec} </a:t>
+            </a:r>
+          </a:p>
+        </p:txBody>
+      </p:sp>
+      <p:sp>
+        <p:nvSpPr>
+          <p:cNvPr id="27" name="Rectangle: Rounded Corners 26">
+            <a:extLst>
+              <a:ext uri="{FF2B5EF4-FFF2-40B4-BE49-F238E27FC236}">
+                <a16:creationId xmlns:a16="http://schemas.microsoft.com/office/drawing/2014/main" id="{92D18B4D-85D6-F085-4E01-DAEC9E11477A}"/>
+              </a:ext>
+            </a:extLst>
+          </p:cNvPr>
+          <p:cNvSpPr/>
+          <p:nvPr/>
+        </p:nvSpPr>
+        <p:spPr>
+          <a:xfrm>
+            <a:off x="7104471" y="861266"/>
+            <a:ext cx="737709" cy="244198"/>
+          </a:xfrm>
+          <a:prstGeom prst="roundRect">
+            <a:avLst/>
+          </a:prstGeom>
+        </p:spPr>
+        <p:style>
+          <a:lnRef idx="2">
+            <a:schemeClr val="accent1">
+              <a:shade val="15000"/>
+            </a:schemeClr>
+          </a:lnRef>
+          <a:fillRef idx="1">
+            <a:schemeClr val="accent1"/>
+          </a:fillRef>
+          <a:effectRef idx="0">
+            <a:schemeClr val="accent1"/>
+          </a:effectRef>
+          <a:fontRef idx="minor">
+            <a:schemeClr val="lt1"/>
+          </a:fontRef>
+        </p:style>
+        <p:txBody>
+          <a:bodyPr rtlCol="0" anchor="ctr"/>
+          <a:lstStyle/>
+          <a:p>
+            <a:pPr algn="ctr"/>
+            <a:r>
+              <a:rPr lang="en-US" sz="1000" dirty="0"/>
+              <a:t>Annual ↓</a:t>
+            </a:r>
+          </a:p>
+        </p:txBody>
+      </p:sp>
+      <p:sp>
+        <p:nvSpPr>
+          <p:cNvPr id="28" name="Rectangle: Rounded Corners 27">
+            <a:extLst>
+              <a:ext uri="{FF2B5EF4-FFF2-40B4-BE49-F238E27FC236}">
+                <a16:creationId xmlns:a16="http://schemas.microsoft.com/office/drawing/2014/main" id="{93A8273B-B987-143D-AC4E-FD0D2BE56926}"/>
+              </a:ext>
+            </a:extLst>
+          </p:cNvPr>
+          <p:cNvSpPr/>
+          <p:nvPr/>
+        </p:nvSpPr>
+        <p:spPr>
+          <a:xfrm>
+            <a:off x="7938516" y="852422"/>
+            <a:ext cx="737709" cy="244198"/>
+          </a:xfrm>
+          <a:prstGeom prst="roundRect">
+            <a:avLst/>
+          </a:prstGeom>
+        </p:spPr>
+        <p:style>
+          <a:lnRef idx="2">
+            <a:schemeClr val="accent1">
+              <a:shade val="15000"/>
+            </a:schemeClr>
+          </a:lnRef>
+          <a:fillRef idx="1">
+            <a:schemeClr val="accent1"/>
+          </a:fillRef>
+          <a:effectRef idx="0">
+            <a:schemeClr val="accent1"/>
+          </a:effectRef>
+          <a:fontRef idx="minor">
+            <a:schemeClr val="lt1"/>
+          </a:fontRef>
+        </p:style>
+        <p:txBody>
+          <a:bodyPr rtlCol="0" anchor="ctr"/>
+          <a:lstStyle/>
+          <a:p>
+            <a:pPr algn="ctr"/>
+            <a:r>
+              <a:rPr lang="en-US" sz="1000" dirty="0"/>
+              <a:t>Year ↓</a:t>
+            </a:r>
+          </a:p>
+        </p:txBody>
+      </p:sp>
+      <p:sp>
+        <p:nvSpPr>
+          <p:cNvPr id="29" name="Rectangle: Rounded Corners 28">
+            <a:extLst>
+              <a:ext uri="{FF2B5EF4-FFF2-40B4-BE49-F238E27FC236}">
+                <a16:creationId xmlns:a16="http://schemas.microsoft.com/office/drawing/2014/main" id="{C4027D7A-6B87-306F-4ED5-9A33A30F5B7D}"/>
+              </a:ext>
+            </a:extLst>
+          </p:cNvPr>
+          <p:cNvSpPr/>
+          <p:nvPr/>
+        </p:nvSpPr>
+        <p:spPr>
+          <a:xfrm>
+            <a:off x="7104471" y="1200282"/>
+            <a:ext cx="737709" cy="244198"/>
+          </a:xfrm>
+          <a:prstGeom prst="roundRect">
+            <a:avLst/>
+          </a:prstGeom>
+        </p:spPr>
+        <p:style>
+          <a:lnRef idx="2">
+            <a:schemeClr val="accent1">
+              <a:shade val="15000"/>
+            </a:schemeClr>
+          </a:lnRef>
+          <a:fillRef idx="1">
+            <a:schemeClr val="accent1"/>
+          </a:fillRef>
+          <a:effectRef idx="0">
+            <a:schemeClr val="accent1"/>
+          </a:effectRef>
+          <a:fontRef idx="minor">
+            <a:schemeClr val="lt1"/>
+          </a:fontRef>
+        </p:style>
+        <p:txBody>
+          <a:bodyPr rtlCol="0" anchor="ctr"/>
+          <a:lstStyle/>
+          <a:p>
+            <a:pPr algn="ctr"/>
+            <a:r>
+              <a:rPr lang="en-US" sz="1000" dirty="0"/>
+              <a:t>1st↓</a:t>
+            </a:r>
+          </a:p>
+        </p:txBody>
+      </p:sp>
+      <p:sp>
+        <p:nvSpPr>
+          <p:cNvPr id="30" name="Rectangle: Rounded Corners 29">
+            <a:extLst>
+              <a:ext uri="{FF2B5EF4-FFF2-40B4-BE49-F238E27FC236}">
+                <a16:creationId xmlns:a16="http://schemas.microsoft.com/office/drawing/2014/main" id="{11213F5D-0F1A-F5FB-61F8-21B5563FC7C8}"/>
+              </a:ext>
+            </a:extLst>
+          </p:cNvPr>
+          <p:cNvSpPr/>
+          <p:nvPr/>
+        </p:nvSpPr>
+        <p:spPr>
+          <a:xfrm>
+            <a:off x="7938516" y="1191438"/>
+            <a:ext cx="737709" cy="244198"/>
+          </a:xfrm>
+          <a:prstGeom prst="roundRect">
+            <a:avLst/>
+          </a:prstGeom>
+        </p:spPr>
+        <p:style>
+          <a:lnRef idx="2">
+            <a:schemeClr val="accent1">
+              <a:shade val="15000"/>
+            </a:schemeClr>
+          </a:lnRef>
+          <a:fillRef idx="1">
+            <a:schemeClr val="accent1"/>
+          </a:fillRef>
+          <a:effectRef idx="0">
+            <a:schemeClr val="accent1"/>
+          </a:effectRef>
+          <a:fontRef idx="minor">
+            <a:schemeClr val="lt1"/>
+          </a:fontRef>
+        </p:style>
+        <p:txBody>
+          <a:bodyPr rtlCol="0" anchor="ctr"/>
+          <a:lstStyle/>
+          <a:p>
+            <a:pPr algn="ctr"/>
+            <a:r>
+              <a:rPr lang="en-US" sz="1000" dirty="0"/>
+              <a:t>2025 ↓</a:t>
+            </a:r>
+          </a:p>
+        </p:txBody>
+      </p:sp>
+      <p:graphicFrame>
+        <p:nvGraphicFramePr>
+          <p:cNvPr id="31" name="Table 30">
+            <a:extLst>
+              <a:ext uri="{FF2B5EF4-FFF2-40B4-BE49-F238E27FC236}">
+                <a16:creationId xmlns:a16="http://schemas.microsoft.com/office/drawing/2014/main" id="{C10A5E8D-1C0A-1B34-7DBE-8D6C2DD8CF87}"/>
+              </a:ext>
+            </a:extLst>
+          </p:cNvPr>
+          <p:cNvGraphicFramePr>
+            <a:graphicFrameLocks noGrp="1"/>
+          </p:cNvGraphicFramePr>
+          <p:nvPr>
+            <p:extLst>
+              <p:ext uri="{D42A27DB-BD31-4B8C-83A1-F6EECF244321}">
+                <p14:modId xmlns:p14="http://schemas.microsoft.com/office/powerpoint/2010/main" val="1155612975"/>
+              </p:ext>
+            </p:extLst>
+          </p:nvPr>
+        </p:nvGraphicFramePr>
+        <p:xfrm>
+          <a:off x="336566" y="4489621"/>
+          <a:ext cx="9592291" cy="1354003"/>
+        </p:xfrm>
+        <a:graphic>
+          <a:graphicData uri="http://schemas.openxmlformats.org/drawingml/2006/table">
+            <a:tbl>
+              <a:tblPr firstRow="1" bandRow="1">
+                <a:tableStyleId>{5C22544A-7EE6-4342-B048-85BDC9FD1C3A}</a:tableStyleId>
+              </a:tblPr>
+              <a:tblGrid>
+                <a:gridCol w="710659">
+                  <a:extLst>
+                    <a:ext uri="{9D8B030D-6E8A-4147-A177-3AD203B41FA5}">
+                      <a16:colId xmlns:a16="http://schemas.microsoft.com/office/drawing/2014/main" val="3731313920"/>
+                    </a:ext>
+                  </a:extLst>
+                </a:gridCol>
+                <a:gridCol w="683202">
+                  <a:extLst>
+                    <a:ext uri="{9D8B030D-6E8A-4147-A177-3AD203B41FA5}">
+                      <a16:colId xmlns:a16="http://schemas.microsoft.com/office/drawing/2014/main" val="947986631"/>
+                    </a:ext>
+                  </a:extLst>
+                </a:gridCol>
+                <a:gridCol w="683208">
+                  <a:extLst>
+                    <a:ext uri="{9D8B030D-6E8A-4147-A177-3AD203B41FA5}">
+                      <a16:colId xmlns:a16="http://schemas.microsoft.com/office/drawing/2014/main" val="906388908"/>
+                    </a:ext>
+                  </a:extLst>
+                </a:gridCol>
+                <a:gridCol w="683202">
+                  <a:extLst>
+                    <a:ext uri="{9D8B030D-6E8A-4147-A177-3AD203B41FA5}">
+                      <a16:colId xmlns:a16="http://schemas.microsoft.com/office/drawing/2014/main" val="133631174"/>
+                    </a:ext>
+                  </a:extLst>
+                </a:gridCol>
+                <a:gridCol w="683202">
+                  <a:extLst>
+                    <a:ext uri="{9D8B030D-6E8A-4147-A177-3AD203B41FA5}">
+                      <a16:colId xmlns:a16="http://schemas.microsoft.com/office/drawing/2014/main" val="2705880004"/>
+                    </a:ext>
+                  </a:extLst>
+                </a:gridCol>
+                <a:gridCol w="683202">
+                  <a:extLst>
+                    <a:ext uri="{9D8B030D-6E8A-4147-A177-3AD203B41FA5}">
+                      <a16:colId xmlns:a16="http://schemas.microsoft.com/office/drawing/2014/main" val="1224346719"/>
+                    </a:ext>
+                  </a:extLst>
+                </a:gridCol>
+                <a:gridCol w="683202">
+                  <a:extLst>
+                    <a:ext uri="{9D8B030D-6E8A-4147-A177-3AD203B41FA5}">
+                      <a16:colId xmlns:a16="http://schemas.microsoft.com/office/drawing/2014/main" val="870593989"/>
+                    </a:ext>
+                  </a:extLst>
+                </a:gridCol>
+                <a:gridCol w="683202">
+                  <a:extLst>
+                    <a:ext uri="{9D8B030D-6E8A-4147-A177-3AD203B41FA5}">
+                      <a16:colId xmlns:a16="http://schemas.microsoft.com/office/drawing/2014/main" val="2554536177"/>
+                    </a:ext>
+                  </a:extLst>
+                </a:gridCol>
+                <a:gridCol w="683202">
+                  <a:extLst>
+                    <a:ext uri="{9D8B030D-6E8A-4147-A177-3AD203B41FA5}">
+                      <a16:colId xmlns:a16="http://schemas.microsoft.com/office/drawing/2014/main" val="1739481665"/>
+                    </a:ext>
+                  </a:extLst>
+                </a:gridCol>
+                <a:gridCol w="683202">
+                  <a:extLst>
+                    <a:ext uri="{9D8B030D-6E8A-4147-A177-3AD203B41FA5}">
+                      <a16:colId xmlns:a16="http://schemas.microsoft.com/office/drawing/2014/main" val="709595055"/>
+                    </a:ext>
+                  </a:extLst>
+                </a:gridCol>
+                <a:gridCol w="683202">
+                  <a:extLst>
+                    <a:ext uri="{9D8B030D-6E8A-4147-A177-3AD203B41FA5}">
+                      <a16:colId xmlns:a16="http://schemas.microsoft.com/office/drawing/2014/main" val="1638221643"/>
+                    </a:ext>
+                  </a:extLst>
+                </a:gridCol>
+                <a:gridCol w="683202">
+                  <a:extLst>
+                    <a:ext uri="{9D8B030D-6E8A-4147-A177-3AD203B41FA5}">
+                      <a16:colId xmlns:a16="http://schemas.microsoft.com/office/drawing/2014/main" val="207647737"/>
+                    </a:ext>
+                  </a:extLst>
+                </a:gridCol>
+                <a:gridCol w="683202">
+                  <a:extLst>
+                    <a:ext uri="{9D8B030D-6E8A-4147-A177-3AD203B41FA5}">
+                      <a16:colId xmlns:a16="http://schemas.microsoft.com/office/drawing/2014/main" val="3278669961"/>
+                    </a:ext>
+                  </a:extLst>
+                </a:gridCol>
+                <a:gridCol w="683202">
+                  <a:extLst>
+                    <a:ext uri="{9D8B030D-6E8A-4147-A177-3AD203B41FA5}">
+                      <a16:colId xmlns:a16="http://schemas.microsoft.com/office/drawing/2014/main" val="1839316062"/>
+                    </a:ext>
+                  </a:extLst>
+                </a:gridCol>
+              </a:tblGrid>
+              <a:tr h="503026">
+                <a:tc>
+                  <a:txBody>
+                    <a:bodyPr/>
+                    <a:lstStyle/>
+                    <a:p>
+                      <a:r>
+                        <a:rPr lang="en-US" sz="1000" dirty="0"/>
+                        <a:t>Property Name</a:t>
+                      </a:r>
+                    </a:p>
+                  </a:txBody>
+                  <a:tcPr/>
+                </a:tc>
+                <a:tc>
+                  <a:txBody>
+                    <a:bodyPr/>
+                    <a:lstStyle/>
+                    <a:p>
+                      <a:r>
+                        <a:rPr lang="en-US" sz="1000" dirty="0"/>
+                        <a:t>Jan</a:t>
+                      </a:r>
+                    </a:p>
+                  </a:txBody>
+                  <a:tcPr/>
+                </a:tc>
+                <a:tc>
+                  <a:txBody>
+                    <a:bodyPr/>
+                    <a:lstStyle/>
+                    <a:p>
+                      <a:r>
+                        <a:rPr lang="en-US" sz="1000" dirty="0"/>
+                        <a:t>Feb</a:t>
+                      </a:r>
+                    </a:p>
+                  </a:txBody>
+                  <a:tcPr/>
+                </a:tc>
+                <a:tc>
+                  <a:txBody>
+                    <a:bodyPr/>
+                    <a:lstStyle/>
+                    <a:p>
+                      <a:r>
+                        <a:rPr lang="en-US" sz="1000" dirty="0"/>
+                        <a:t>Mar</a:t>
+                      </a:r>
+                    </a:p>
+                  </a:txBody>
+                  <a:tcPr/>
+                </a:tc>
+                <a:tc>
+                  <a:txBody>
+                    <a:bodyPr/>
+                    <a:lstStyle/>
+                    <a:p>
+                      <a:r>
+                        <a:rPr lang="en-US" sz="1000" dirty="0"/>
+                        <a:t>Apr</a:t>
+                      </a:r>
+                    </a:p>
+                  </a:txBody>
+                  <a:tcPr/>
+                </a:tc>
+                <a:tc>
+                  <a:txBody>
+                    <a:bodyPr/>
+                    <a:lstStyle/>
+                    <a:p>
+                      <a:r>
+                        <a:rPr lang="en-US" sz="1000" dirty="0"/>
+                        <a:t>May</a:t>
+                      </a:r>
+                    </a:p>
+                  </a:txBody>
+                  <a:tcPr/>
+                </a:tc>
+                <a:tc>
+                  <a:txBody>
+                    <a:bodyPr/>
+                    <a:lstStyle/>
+                    <a:p>
+                      <a:r>
+                        <a:rPr lang="en-US" sz="1000" dirty="0"/>
+                        <a:t>Jun</a:t>
+                      </a:r>
+                    </a:p>
+                  </a:txBody>
+                  <a:tcPr/>
+                </a:tc>
+                <a:tc>
+                  <a:txBody>
+                    <a:bodyPr/>
+                    <a:lstStyle/>
+                    <a:p>
+                      <a:r>
+                        <a:rPr lang="en-US" sz="1000" dirty="0"/>
+                        <a:t>Jul</a:t>
+                      </a:r>
+                    </a:p>
+                  </a:txBody>
+                  <a:tcPr/>
+                </a:tc>
+                <a:tc>
+                  <a:txBody>
+                    <a:bodyPr/>
+                    <a:lstStyle/>
+                    <a:p>
+                      <a:r>
+                        <a:rPr lang="en-US" sz="1000" dirty="0"/>
+                        <a:t>Aug</a:t>
+                      </a:r>
+                    </a:p>
+                  </a:txBody>
+                  <a:tcPr/>
+                </a:tc>
+                <a:tc>
+                  <a:txBody>
+                    <a:bodyPr/>
+                    <a:lstStyle/>
+                    <a:p>
+                      <a:r>
+                        <a:rPr lang="en-US" sz="1000" dirty="0"/>
+                        <a:t>Sep</a:t>
+                      </a:r>
+                    </a:p>
+                  </a:txBody>
+                  <a:tcPr/>
+                </a:tc>
+                <a:tc>
+                  <a:txBody>
+                    <a:bodyPr/>
+                    <a:lstStyle/>
+                    <a:p>
+                      <a:r>
+                        <a:rPr lang="en-US" sz="1000" dirty="0"/>
+                        <a:t>Oct</a:t>
+                      </a:r>
+                    </a:p>
+                  </a:txBody>
+                  <a:tcPr/>
+                </a:tc>
+                <a:tc>
+                  <a:txBody>
+                    <a:bodyPr/>
+                    <a:lstStyle/>
+                    <a:p>
+                      <a:r>
+                        <a:rPr lang="en-US" sz="1000" dirty="0"/>
+                        <a:t>Nov</a:t>
+                      </a:r>
+                    </a:p>
+                  </a:txBody>
+                  <a:tcPr/>
+                </a:tc>
+                <a:tc>
+                  <a:txBody>
+                    <a:bodyPr/>
+                    <a:lstStyle/>
+                    <a:p>
+                      <a:r>
+                        <a:rPr lang="en-US" sz="1000" dirty="0"/>
+                        <a:t>Dec</a:t>
+                      </a:r>
+                    </a:p>
+                  </a:txBody>
+                  <a:tcPr/>
+                </a:tc>
+                <a:tc>
+                  <a:txBody>
+                    <a:bodyPr/>
+                    <a:lstStyle/>
+                    <a:p>
+                      <a:r>
+                        <a:rPr lang="en-US" sz="1000" dirty="0"/>
+                        <a:t>Earned</a:t>
+                      </a:r>
+                    </a:p>
+                  </a:txBody>
+                  <a:tcPr/>
+                </a:tc>
+                <a:extLst>
+                  <a:ext uri="{0D108BD9-81ED-4DB2-BD59-A6C34878D82A}">
+                    <a16:rowId xmlns:a16="http://schemas.microsoft.com/office/drawing/2014/main" val="2288197724"/>
+                  </a:ext>
+                </a:extLst>
+              </a:tr>
+              <a:tr h="240488">
+                <a:tc>
+                  <a:txBody>
+                    <a:bodyPr/>
+                    <a:lstStyle/>
+                    <a:p>
+                      <a:r>
+                        <a:rPr lang="en-US" sz="1000" dirty="0"/>
+                        <a:t>P1</a:t>
+                      </a:r>
+                    </a:p>
+                  </a:txBody>
+                  <a:tcPr/>
+                </a:tc>
+                <a:tc>
+                  <a:txBody>
+                    <a:bodyPr/>
+                    <a:lstStyle/>
+                    <a:p>
+                      <a:r>
+                        <a:rPr lang="en-US" sz="1000" dirty="0"/>
+                        <a:t>6,000</a:t>
+                      </a:r>
+                    </a:p>
+                  </a:txBody>
+                  <a:tcPr/>
+                </a:tc>
+                <a:tc>
+                  <a:txBody>
+                    <a:bodyPr/>
+                    <a:lstStyle/>
+                    <a:p>
+                      <a:r>
+                        <a:rPr lang="en-US" sz="1000" dirty="0"/>
+                        <a:t>4,000</a:t>
+                      </a:r>
+                    </a:p>
+                  </a:txBody>
+                  <a:tcPr/>
+                </a:tc>
+                <a:tc>
+                  <a:txBody>
+                    <a:bodyPr/>
+                    <a:lstStyle/>
+                    <a:p>
+                      <a:r>
+                        <a:rPr lang="en-US" sz="1000" dirty="0"/>
+                        <a:t>8,000</a:t>
+                      </a:r>
+                    </a:p>
+                  </a:txBody>
+                  <a:tcPr/>
+                </a:tc>
+                <a:tc>
+                  <a:txBody>
+                    <a:bodyPr/>
+                    <a:lstStyle/>
+                    <a:p>
+                      <a:r>
+                        <a:rPr lang="en-US" sz="1000" dirty="0"/>
+                        <a:t>5,000</a:t>
+                      </a:r>
+                    </a:p>
+                  </a:txBody>
+                  <a:tcPr/>
+                </a:tc>
+                <a:tc>
+                  <a:txBody>
+                    <a:bodyPr/>
+                    <a:lstStyle/>
+                    <a:p>
+                      <a:r>
+                        <a:rPr lang="en-US" sz="1000" dirty="0"/>
+                        <a:t>5,000</a:t>
+                      </a:r>
+                    </a:p>
+                  </a:txBody>
+                  <a:tcPr/>
+                </a:tc>
+                <a:tc>
+                  <a:txBody>
+                    <a:bodyPr/>
+                    <a:lstStyle/>
+                    <a:p>
+                      <a:r>
+                        <a:rPr lang="en-US" sz="1000" dirty="0"/>
+                        <a:t>5,000</a:t>
+                      </a:r>
+                    </a:p>
+                  </a:txBody>
+                  <a:tcPr/>
+                </a:tc>
+                <a:tc>
+                  <a:txBody>
+                    <a:bodyPr/>
+                    <a:lstStyle/>
+                    <a:p>
+                      <a:r>
+                        <a:rPr lang="en-US" sz="1000" dirty="0"/>
+                        <a:t>6,000</a:t>
+                      </a:r>
+                    </a:p>
+                  </a:txBody>
+                  <a:tcPr/>
+                </a:tc>
+                <a:tc>
+                  <a:txBody>
+                    <a:bodyPr/>
+                    <a:lstStyle/>
+                    <a:p>
+                      <a:r>
+                        <a:rPr lang="en-US" sz="1000" dirty="0"/>
+                        <a:t>4,000</a:t>
+                      </a:r>
+                    </a:p>
+                  </a:txBody>
+                  <a:tcPr/>
+                </a:tc>
+                <a:tc>
+                  <a:txBody>
+                    <a:bodyPr/>
+                    <a:lstStyle/>
+                    <a:p>
+                      <a:r>
+                        <a:rPr lang="en-US" sz="1000" dirty="0"/>
+                        <a:t>8,000</a:t>
+                      </a:r>
+                    </a:p>
+                  </a:txBody>
+                  <a:tcPr/>
+                </a:tc>
+                <a:tc>
+                  <a:txBody>
+                    <a:bodyPr/>
+                    <a:lstStyle/>
+                    <a:p>
+                      <a:r>
+                        <a:rPr lang="en-US" sz="1000" dirty="0"/>
+                        <a:t>5,000</a:t>
+                      </a:r>
+                    </a:p>
+                  </a:txBody>
+                  <a:tcPr/>
+                </a:tc>
+                <a:tc>
+                  <a:txBody>
+                    <a:bodyPr/>
+                    <a:lstStyle/>
+                    <a:p>
+                      <a:r>
+                        <a:rPr lang="en-US" sz="1000" dirty="0"/>
+                        <a:t>5,000</a:t>
+                      </a:r>
+                    </a:p>
+                  </a:txBody>
+                  <a:tcPr/>
+                </a:tc>
+                <a:tc>
+                  <a:txBody>
+                    <a:bodyPr/>
+                    <a:lstStyle/>
+                    <a:p>
+                      <a:r>
+                        <a:rPr lang="en-US" sz="1000" dirty="0"/>
+                        <a:t>5,000</a:t>
+                      </a:r>
+                    </a:p>
+                  </a:txBody>
+                  <a:tcPr/>
+                </a:tc>
+                <a:tc>
+                  <a:txBody>
+                    <a:bodyPr/>
+                    <a:lstStyle/>
+                    <a:p>
+                      <a:r>
+                        <a:rPr lang="en-US" sz="1000" dirty="0"/>
+                        <a:t>66,000</a:t>
+                      </a:r>
+                    </a:p>
+                  </a:txBody>
+                  <a:tcPr/>
+                </a:tc>
+                <a:extLst>
+                  <a:ext uri="{0D108BD9-81ED-4DB2-BD59-A6C34878D82A}">
+                    <a16:rowId xmlns:a16="http://schemas.microsoft.com/office/drawing/2014/main" val="3125870186"/>
+                  </a:ext>
+                </a:extLst>
+              </a:tr>
+              <a:tr h="240488">
+                <a:tc>
+                  <a:txBody>
+                    <a:bodyPr/>
+                    <a:lstStyle/>
+                    <a:p>
+                      <a:r>
+                        <a:rPr lang="en-US" sz="1000" dirty="0"/>
+                        <a:t>P2</a:t>
+                      </a:r>
+                    </a:p>
+                  </a:txBody>
+                  <a:tcPr/>
+                </a:tc>
+                <a:tc>
+                  <a:txBody>
+                    <a:bodyPr/>
+                    <a:lstStyle/>
+                    <a:p>
+                      <a:r>
+                        <a:rPr lang="en-US" sz="1000" dirty="0"/>
+                        <a:t>6,000</a:t>
+                      </a:r>
+                    </a:p>
+                  </a:txBody>
+                  <a:tcPr/>
+                </a:tc>
+                <a:tc>
+                  <a:txBody>
+                    <a:bodyPr/>
+                    <a:lstStyle/>
+                    <a:p>
+                      <a:r>
+                        <a:rPr lang="en-US" sz="1000" dirty="0"/>
+                        <a:t>4,000</a:t>
+                      </a:r>
+                    </a:p>
+                  </a:txBody>
+                  <a:tcPr/>
+                </a:tc>
+                <a:tc>
+                  <a:txBody>
+                    <a:bodyPr/>
+                    <a:lstStyle/>
+                    <a:p>
+                      <a:r>
+                        <a:rPr lang="en-US" sz="1000" dirty="0"/>
+                        <a:t>8,000</a:t>
+                      </a:r>
+                    </a:p>
+                  </a:txBody>
+                  <a:tcPr/>
+                </a:tc>
+                <a:tc>
+                  <a:txBody>
+                    <a:bodyPr/>
+                    <a:lstStyle/>
+                    <a:p>
+                      <a:r>
+                        <a:rPr lang="en-US" sz="1000" dirty="0"/>
+                        <a:t>5,000</a:t>
+                      </a:r>
+                    </a:p>
+                  </a:txBody>
+                  <a:tcPr/>
+                </a:tc>
+                <a:tc>
+                  <a:txBody>
+                    <a:bodyPr/>
+                    <a:lstStyle/>
+                    <a:p>
+                      <a:r>
+                        <a:rPr lang="en-US" sz="1000" dirty="0"/>
+                        <a:t>5,000</a:t>
+                      </a:r>
+                    </a:p>
+                  </a:txBody>
+                  <a:tcPr/>
+                </a:tc>
+                <a:tc>
+                  <a:txBody>
+                    <a:bodyPr/>
+                    <a:lstStyle/>
+                    <a:p>
+                      <a:r>
+                        <a:rPr lang="en-US" sz="1000" dirty="0"/>
+                        <a:t>5,000</a:t>
+                      </a:r>
+                    </a:p>
+                  </a:txBody>
+                  <a:tcPr/>
+                </a:tc>
+                <a:tc>
+                  <a:txBody>
+                    <a:bodyPr/>
+                    <a:lstStyle/>
+                    <a:p>
+                      <a:r>
+                        <a:rPr lang="en-US" sz="1000" dirty="0"/>
+                        <a:t>6,000</a:t>
+                      </a:r>
+                    </a:p>
+                  </a:txBody>
+                  <a:tcPr/>
+                </a:tc>
+                <a:tc>
+                  <a:txBody>
+                    <a:bodyPr/>
+                    <a:lstStyle/>
+                    <a:p>
+                      <a:r>
+                        <a:rPr lang="en-US" sz="1000" dirty="0"/>
+                        <a:t>4,000</a:t>
+                      </a:r>
+                    </a:p>
+                  </a:txBody>
+                  <a:tcPr/>
+                </a:tc>
+                <a:tc>
+                  <a:txBody>
+                    <a:bodyPr/>
+                    <a:lstStyle/>
+                    <a:p>
+                      <a:r>
+                        <a:rPr lang="en-US" sz="1000" dirty="0"/>
+                        <a:t>8,000</a:t>
+                      </a:r>
+                    </a:p>
+                  </a:txBody>
+                  <a:tcPr/>
+                </a:tc>
+                <a:tc>
+                  <a:txBody>
+                    <a:bodyPr/>
+                    <a:lstStyle/>
+                    <a:p>
+                      <a:r>
+                        <a:rPr lang="en-US" sz="1000" dirty="0"/>
+                        <a:t>5,000</a:t>
+                      </a:r>
+                    </a:p>
+                  </a:txBody>
+                  <a:tcPr/>
+                </a:tc>
+                <a:tc>
+                  <a:txBody>
+                    <a:bodyPr/>
+                    <a:lstStyle/>
+                    <a:p>
+                      <a:r>
+                        <a:rPr lang="en-US" sz="1000" dirty="0"/>
+                        <a:t>5,000</a:t>
+                      </a:r>
+                    </a:p>
+                  </a:txBody>
+                  <a:tcPr/>
+                </a:tc>
+                <a:tc>
+                  <a:txBody>
+                    <a:bodyPr/>
+                    <a:lstStyle/>
+                    <a:p>
+                      <a:r>
+                        <a:rPr lang="en-US" sz="1000" dirty="0"/>
+                        <a:t>5,000</a:t>
+                      </a:r>
+                    </a:p>
+                  </a:txBody>
+                  <a:tcPr/>
+                </a:tc>
+                <a:tc>
+                  <a:txBody>
+                    <a:bodyPr/>
+                    <a:lstStyle/>
+                    <a:p>
+                      <a:r>
+                        <a:rPr lang="en-US" sz="1000" dirty="0"/>
+                        <a:t>66,000</a:t>
+                      </a:r>
+                    </a:p>
+                  </a:txBody>
+                  <a:tcPr/>
+                </a:tc>
+                <a:extLst>
+                  <a:ext uri="{0D108BD9-81ED-4DB2-BD59-A6C34878D82A}">
+                    <a16:rowId xmlns:a16="http://schemas.microsoft.com/office/drawing/2014/main" val="4104906619"/>
+                  </a:ext>
+                </a:extLst>
+              </a:tr>
+              <a:tr h="363297">
+                <a:tc gridSpan="13">
+                  <a:txBody>
+                    <a:bodyPr/>
+                    <a:lstStyle/>
+                    <a:p>
+                      <a:r>
+                        <a:rPr lang="en-US" sz="1000" dirty="0"/>
+                        <a:t>TOTAL</a:t>
+                      </a:r>
+                    </a:p>
+                  </a:txBody>
+                  <a:tcPr/>
+                </a:tc>
+                <a:tc hMerge="1">
+                  <a:txBody>
+                    <a:bodyPr/>
+                    <a:lstStyle/>
+                    <a:p>
+                      <a:endParaRPr lang="en-US" sz="1000" dirty="0"/>
+                    </a:p>
+                  </a:txBody>
+                  <a:tcPr/>
+                </a:tc>
+                <a:tc hMerge="1">
+                  <a:txBody>
+                    <a:bodyPr/>
+                    <a:lstStyle/>
+                    <a:p>
+                      <a:endParaRPr lang="en-US" sz="1000" dirty="0"/>
+                    </a:p>
+                  </a:txBody>
+                  <a:tcPr/>
+                </a:tc>
+                <a:tc hMerge="1">
+                  <a:txBody>
+                    <a:bodyPr/>
+                    <a:lstStyle/>
+                    <a:p>
+                      <a:endParaRPr lang="en-US" sz="1000" dirty="0"/>
+                    </a:p>
+                  </a:txBody>
+                  <a:tcPr/>
+                </a:tc>
+                <a:tc hMerge="1">
+                  <a:txBody>
+                    <a:bodyPr/>
+                    <a:lstStyle/>
+                    <a:p>
+                      <a:endParaRPr lang="en-US" sz="1000" dirty="0"/>
+                    </a:p>
+                  </a:txBody>
+                  <a:tcPr/>
+                </a:tc>
+                <a:tc hMerge="1">
+                  <a:txBody>
+                    <a:bodyPr/>
+                    <a:lstStyle/>
+                    <a:p>
+                      <a:endParaRPr lang="en-US" sz="1000" dirty="0"/>
+                    </a:p>
+                  </a:txBody>
+                  <a:tcPr/>
+                </a:tc>
+                <a:tc hMerge="1">
+                  <a:txBody>
+                    <a:bodyPr/>
+                    <a:lstStyle/>
+                    <a:p>
+                      <a:pPr marL="0" marR="0" lvl="0" indent="0" algn="l" defTabSz="914400" rtl="0" eaLnBrk="1" fontAlgn="auto" latinLnBrk="0" hangingPunct="1">
+                        <a:lnSpc>
+                          <a:spcPct val="100000"/>
+                        </a:lnSpc>
+                        <a:spcBef>
+                          <a:spcPts val="0"/>
+                        </a:spcBef>
+                        <a:spcAft>
+                          <a:spcPts val="0"/>
+                        </a:spcAft>
+                        <a:buClrTx/>
+                        <a:buSzTx/>
+                        <a:buFontTx/>
+                        <a:buNone/>
+                        <a:tabLst/>
+                        <a:defRPr/>
+                      </a:pPr>
+                      <a:endParaRPr lang="en-US" sz="1000" dirty="0"/>
+                    </a:p>
+                  </a:txBody>
+                  <a:tcPr/>
+                </a:tc>
+                <a:tc hMerge="1">
+                  <a:txBody>
+                    <a:bodyPr/>
+                    <a:lstStyle/>
+                    <a:p>
+                      <a:pPr marL="0" marR="0" lvl="0" indent="0" algn="l" defTabSz="914400" rtl="0" eaLnBrk="1" fontAlgn="auto" latinLnBrk="0" hangingPunct="1">
+                        <a:lnSpc>
+                          <a:spcPct val="100000"/>
+                        </a:lnSpc>
+                        <a:spcBef>
+                          <a:spcPts val="0"/>
+                        </a:spcBef>
+                        <a:spcAft>
+                          <a:spcPts val="0"/>
+                        </a:spcAft>
+                        <a:buClrTx/>
+                        <a:buSzTx/>
+                        <a:buFontTx/>
+                        <a:buNone/>
+                        <a:tabLst/>
+                        <a:defRPr/>
+                      </a:pPr>
+                      <a:endParaRPr lang="en-US" sz="1000" dirty="0"/>
+                    </a:p>
+                  </a:txBody>
+                  <a:tcPr/>
+                </a:tc>
+                <a:tc hMerge="1">
+                  <a:txBody>
+                    <a:bodyPr/>
+                    <a:lstStyle/>
+                    <a:p>
+                      <a:pPr marL="0" marR="0" lvl="0" indent="0" algn="l" defTabSz="914400" rtl="0" eaLnBrk="1" fontAlgn="auto" latinLnBrk="0" hangingPunct="1">
+                        <a:lnSpc>
+                          <a:spcPct val="100000"/>
+                        </a:lnSpc>
+                        <a:spcBef>
+                          <a:spcPts val="0"/>
+                        </a:spcBef>
+                        <a:spcAft>
+                          <a:spcPts val="0"/>
+                        </a:spcAft>
+                        <a:buClrTx/>
+                        <a:buSzTx/>
+                        <a:buFontTx/>
+                        <a:buNone/>
+                        <a:tabLst/>
+                        <a:defRPr/>
+                      </a:pPr>
+                      <a:endParaRPr lang="en-US" sz="1000" dirty="0"/>
+                    </a:p>
+                  </a:txBody>
+                  <a:tcPr/>
+                </a:tc>
+                <a:tc hMerge="1">
+                  <a:txBody>
+                    <a:bodyPr/>
+                    <a:lstStyle/>
+                    <a:p>
+                      <a:pPr marL="0" marR="0" lvl="0" indent="0" algn="l" defTabSz="914400" rtl="0" eaLnBrk="1" fontAlgn="auto" latinLnBrk="0" hangingPunct="1">
+                        <a:lnSpc>
+                          <a:spcPct val="100000"/>
+                        </a:lnSpc>
+                        <a:spcBef>
+                          <a:spcPts val="0"/>
+                        </a:spcBef>
+                        <a:spcAft>
+                          <a:spcPts val="0"/>
+                        </a:spcAft>
+                        <a:buClrTx/>
+                        <a:buSzTx/>
+                        <a:buFontTx/>
+                        <a:buNone/>
+                        <a:tabLst/>
+                        <a:defRPr/>
+                      </a:pPr>
+                      <a:endParaRPr lang="en-US" sz="1000" dirty="0"/>
+                    </a:p>
+                  </a:txBody>
+                  <a:tcPr/>
+                </a:tc>
+                <a:tc hMerge="1">
+                  <a:txBody>
+                    <a:bodyPr/>
+                    <a:lstStyle/>
+                    <a:p>
+                      <a:pPr marL="0" marR="0" lvl="0" indent="0" algn="l" defTabSz="914400" rtl="0" eaLnBrk="1" fontAlgn="auto" latinLnBrk="0" hangingPunct="1">
+                        <a:lnSpc>
+                          <a:spcPct val="100000"/>
+                        </a:lnSpc>
+                        <a:spcBef>
+                          <a:spcPts val="0"/>
+                        </a:spcBef>
+                        <a:spcAft>
+                          <a:spcPts val="0"/>
+                        </a:spcAft>
+                        <a:buClrTx/>
+                        <a:buSzTx/>
+                        <a:buFontTx/>
+                        <a:buNone/>
+                        <a:tabLst/>
+                        <a:defRPr/>
+                      </a:pPr>
+                      <a:endParaRPr lang="en-US" sz="1000" dirty="0"/>
+                    </a:p>
+                  </a:txBody>
+                  <a:tcPr/>
+                </a:tc>
+                <a:tc hMerge="1">
+                  <a:txBody>
+                    <a:bodyPr/>
+                    <a:lstStyle/>
+                    <a:p>
+                      <a:pPr marL="0" marR="0" lvl="0" indent="0" algn="l" defTabSz="914400" rtl="0" eaLnBrk="1" fontAlgn="auto" latinLnBrk="0" hangingPunct="1">
+                        <a:lnSpc>
+                          <a:spcPct val="100000"/>
+                        </a:lnSpc>
+                        <a:spcBef>
+                          <a:spcPts val="0"/>
+                        </a:spcBef>
+                        <a:spcAft>
+                          <a:spcPts val="0"/>
+                        </a:spcAft>
+                        <a:buClrTx/>
+                        <a:buSzTx/>
+                        <a:buFontTx/>
+                        <a:buNone/>
+                        <a:tabLst/>
+                        <a:defRPr/>
+                      </a:pPr>
+                      <a:endParaRPr lang="en-US" sz="1000" dirty="0"/>
+                    </a:p>
+                  </a:txBody>
+                  <a:tcPr/>
+                </a:tc>
+                <a:tc hMerge="1">
+                  <a:txBody>
+                    <a:bodyPr/>
+                    <a:lstStyle/>
+                    <a:p>
+                      <a:pPr/>
+                      <a:endParaRPr dirty="0"/>
+                    </a:p>
+                  </a:txBody>
+                  <a:tcPr/>
+                </a:tc>
+                <a:tc>
+                  <a:txBody>
+                    <a:bodyPr/>
+                    <a:lstStyle/>
+                    <a:p>
+                      <a:pPr marL="0" marR="0" lvl="0" indent="0" algn="l" defTabSz="914400" rtl="0" eaLnBrk="1" fontAlgn="auto" latinLnBrk="0" hangingPunct="1">
+                        <a:lnSpc>
+                          <a:spcPct val="100000"/>
+                        </a:lnSpc>
+                        <a:spcBef>
+                          <a:spcPts val="0"/>
+                        </a:spcBef>
+                        <a:spcAft>
+                          <a:spcPts val="0"/>
+                        </a:spcAft>
+                        <a:buClrTx/>
+                        <a:buSzTx/>
+                        <a:buFontTx/>
+                        <a:buNone/>
+                        <a:tabLst/>
+                        <a:defRPr/>
+                      </a:pPr>
+                      <a:r>
+                        <a:rPr lang="en-US" sz="1000" dirty="0"/>
+                        <a:t>132,000</a:t>
+                      </a:r>
+                    </a:p>
+                  </a:txBody>
+                  <a:tcPr/>
+                </a:tc>
+                <a:extLst>
+                  <a:ext uri="{0D108BD9-81ED-4DB2-BD59-A6C34878D82A}">
+                    <a16:rowId xmlns:a16="http://schemas.microsoft.com/office/drawing/2014/main" val="742238911"/>
+                  </a:ext>
+                </a:extLst>
+              </a:tr>
+            </a:tbl>
+          </a:graphicData>
+        </a:graphic>
+      </p:graphicFrame>
+      <p:sp>
+        <p:nvSpPr>
+          <p:cNvPr id="32" name="TextBox 31">
+            <a:extLst>
+              <a:ext uri="{FF2B5EF4-FFF2-40B4-BE49-F238E27FC236}">
+                <a16:creationId xmlns:a16="http://schemas.microsoft.com/office/drawing/2014/main" id="{BA3EB886-31F4-A0C0-182B-17EDDDA3A67D}"/>
+              </a:ext>
+            </a:extLst>
+          </p:cNvPr>
+          <p:cNvSpPr txBox="1"/>
+          <p:nvPr/>
+        </p:nvSpPr>
+        <p:spPr>
+          <a:xfrm>
+            <a:off x="279720" y="4267188"/>
+            <a:ext cx="1724938" cy="276999"/>
+          </a:xfrm>
+          <a:prstGeom prst="rect">
+            <a:avLst/>
+          </a:prstGeom>
+          <a:noFill/>
+        </p:spPr>
+        <p:txBody>
+          <a:bodyPr wrap="square" rtlCol="0">
+            <a:spAutoFit/>
+          </a:bodyPr>
+          <a:lstStyle/>
+          <a:p>
+            <a:r>
+              <a:rPr lang="en-US" sz="1200" b="1" dirty="0"/>
+              <a:t>2025</a:t>
+            </a:r>
+          </a:p>
+        </p:txBody>
+      </p:sp>
+      <p:sp>
+        <p:nvSpPr>
+          <p:cNvPr id="33" name="TextBox 32">
+            <a:extLst>
+              <a:ext uri="{FF2B5EF4-FFF2-40B4-BE49-F238E27FC236}">
+                <a16:creationId xmlns:a16="http://schemas.microsoft.com/office/drawing/2014/main" id="{A8254BF7-8514-C813-50FA-282D4C9AA9D5}"/>
+              </a:ext>
+            </a:extLst>
+          </p:cNvPr>
+          <p:cNvSpPr txBox="1"/>
+          <p:nvPr/>
+        </p:nvSpPr>
+        <p:spPr>
+          <a:xfrm>
+            <a:off x="279720" y="3400330"/>
+            <a:ext cx="3932474" cy="276999"/>
+          </a:xfrm>
+          <a:prstGeom prst="rect">
+            <a:avLst/>
+          </a:prstGeom>
+          <a:noFill/>
+        </p:spPr>
+        <p:txBody>
+          <a:bodyPr wrap="square" rtlCol="0">
+            <a:spAutoFit/>
+          </a:bodyPr>
+          <a:lstStyle/>
+          <a:p>
+            <a:r>
+              <a:rPr lang="en-US" sz="1200" b="1" dirty="0"/>
+              <a:t>Annual Example</a:t>
+            </a:r>
+          </a:p>
+        </p:txBody>
+      </p:sp>
+      <p:sp>
+        <p:nvSpPr>
+          <p:cNvPr id="35" name="Rectangle: Rounded Corners 34">
+            <a:extLst>
+              <a:ext uri="{FF2B5EF4-FFF2-40B4-BE49-F238E27FC236}">
+                <a16:creationId xmlns:a16="http://schemas.microsoft.com/office/drawing/2014/main" id="{93A8273B-B987-143D-AC4E-FD0D2BE56926}"/>
+              </a:ext>
+            </a:extLst>
+          </p:cNvPr>
+          <p:cNvSpPr/>
+          <p:nvPr/>
+        </p:nvSpPr>
+        <p:spPr>
+          <a:xfrm>
+            <a:off x="327770" y="3678735"/>
+            <a:ext cx="737709" cy="244198"/>
+          </a:xfrm>
+          <a:prstGeom prst="roundRect">
+            <a:avLst/>
+          </a:prstGeom>
+        </p:spPr>
+        <p:style>
+          <a:lnRef idx="2">
+            <a:schemeClr val="accent1">
+              <a:shade val="15000"/>
+            </a:schemeClr>
+          </a:lnRef>
+          <a:fillRef idx="1">
+            <a:schemeClr val="accent1"/>
+          </a:fillRef>
+          <a:effectRef idx="0">
+            <a:schemeClr val="accent1"/>
+          </a:effectRef>
+          <a:fontRef idx="minor">
+            <a:schemeClr val="lt1"/>
+          </a:fontRef>
+        </p:style>
+        <p:txBody>
+          <a:bodyPr rtlCol="0" anchor="ctr"/>
+          <a:lstStyle/>
+          <a:p>
+            <a:pPr algn="ctr"/>
+            <a:r>
+              <a:rPr lang="en-US" sz="1000" dirty="0"/>
+              <a:t>Year ↓</a:t>
+            </a:r>
+          </a:p>
+        </p:txBody>
+      </p:sp>
+      <p:sp>
+        <p:nvSpPr>
+          <p:cNvPr id="37" name="Rectangle: Rounded Corners 36">
+            <a:extLst>
+              <a:ext uri="{FF2B5EF4-FFF2-40B4-BE49-F238E27FC236}">
+                <a16:creationId xmlns:a16="http://schemas.microsoft.com/office/drawing/2014/main" id="{11213F5D-0F1A-F5FB-61F8-21B5563FC7C8}"/>
+              </a:ext>
+            </a:extLst>
+          </p:cNvPr>
+          <p:cNvSpPr/>
+          <p:nvPr/>
+        </p:nvSpPr>
+        <p:spPr>
+          <a:xfrm>
+            <a:off x="327770" y="4017751"/>
+            <a:ext cx="737709" cy="244198"/>
+          </a:xfrm>
+          <a:prstGeom prst="roundRect">
+            <a:avLst/>
+          </a:prstGeom>
+        </p:spPr>
+        <p:style>
+          <a:lnRef idx="2">
+            <a:schemeClr val="accent1">
+              <a:shade val="15000"/>
+            </a:schemeClr>
+          </a:lnRef>
+          <a:fillRef idx="1">
+            <a:schemeClr val="accent1"/>
+          </a:fillRef>
+          <a:effectRef idx="0">
+            <a:schemeClr val="accent1"/>
+          </a:effectRef>
+          <a:fontRef idx="minor">
+            <a:schemeClr val="lt1"/>
+          </a:fontRef>
+        </p:style>
+        <p:txBody>
+          <a:bodyPr rtlCol="0" anchor="ctr"/>
+          <a:lstStyle/>
+          <a:p>
+            <a:pPr algn="ctr"/>
+            <a:r>
+              <a:rPr lang="en-US" sz="1000" dirty="0"/>
+              <a:t>2025 ↓</a:t>
+            </a:r>
+          </a:p>
+        </p:txBody>
+      </p:sp>
+    </p:spTree>
+    <p:extLst>
+      <p:ext uri="{BB962C8B-B14F-4D97-AF65-F5344CB8AC3E}">
+        <p14:creationId xmlns:p14="http://schemas.microsoft.com/office/powerpoint/2010/main" val="1113652919"/>
+      </p:ext>
+    </p:extLst>
+  </p:cSld>
+  <p:clrMapOvr>
+    <a:masterClrMapping/>
+  </p:clrMapOvr>
+</p:sld>
+</file>
+
+<file path=ppt/slides/slide44.xml><?xml version="1.0" encoding="utf-8"?>
+<p:sld xmlns:a="http://schemas.openxmlformats.org/drawingml/2006/main" xmlns:r="http://schemas.openxmlformats.org/officeDocument/2006/relationships" xmlns:p="http://schemas.openxmlformats.org/presentationml/2006/main">
+  <p:cSld>
+    <p:spTree>
+      <p:nvGrpSpPr>
+        <p:cNvPr id="1" name=""/>
+        <p:cNvGrpSpPr/>
+        <p:nvPr/>
+      </p:nvGrpSpPr>
+      <p:grpSpPr>
+        <a:xfrm>
+          <a:off x="0" y="0"/>
+          <a:ext cx="0" cy="0"/>
+          <a:chOff x="0" y="0"/>
+          <a:chExt cx="0" cy="0"/>
+        </a:xfrm>
+      </p:grpSpPr>
+      <p:sp>
+        <p:nvSpPr>
+          <p:cNvPr id="4" name="TextBox 3">
+            <a:extLst>
+              <a:ext uri="{FF2B5EF4-FFF2-40B4-BE49-F238E27FC236}">
+                <a16:creationId xmlns:a16="http://schemas.microsoft.com/office/drawing/2014/main" id="{5334CD5D-0501-F20B-E8F8-6EA1A7ED9283}"/>
+              </a:ext>
+            </a:extLst>
+          </p:cNvPr>
+          <p:cNvSpPr txBox="1"/>
+          <p:nvPr/>
+        </p:nvSpPr>
+        <p:spPr>
+          <a:xfrm>
+            <a:off x="-1" y="0"/>
+            <a:ext cx="4341092" cy="400110"/>
+          </a:xfrm>
+          <a:prstGeom prst="rect">
+            <a:avLst/>
+          </a:prstGeom>
+          <a:noFill/>
+        </p:spPr>
+        <p:txBody>
+          <a:bodyPr wrap="square" rtlCol="0">
+            <a:spAutoFit/>
+          </a:bodyPr>
+          <a:lstStyle/>
+          <a:p>
+            <a:r>
+              <a:rPr lang="en-US" sz="2000" b="1" dirty="0"/>
               <a:t>employeeTS.html</a:t>
             </a:r>
           </a:p>
@@ -14328,7 +17596,7 @@
 </p:sld>
 </file>
 
-<file path=ppt/slides/slide44.xml><?xml version="1.0" encoding="utf-8"?>
+<file path=ppt/slides/slide45.xml><?xml version="1.0" encoding="utf-8"?>
 <p:sld xmlns:a="http://schemas.openxmlformats.org/drawingml/2006/main" xmlns:r="http://schemas.openxmlformats.org/officeDocument/2006/relationships" xmlns:p="http://schemas.openxmlformats.org/presentationml/2006/main">
   <p:cSld>
     <p:spTree>
@@ -14670,7 +17938,7 @@
 </p:sld>
 </file>
 
-<file path=ppt/slides/slide45.xml><?xml version="1.0" encoding="utf-8"?>
+<file path=ppt/slides/slide46.xml><?xml version="1.0" encoding="utf-8"?>
 <p:sld xmlns:a="http://schemas.openxmlformats.org/drawingml/2006/main" xmlns:r="http://schemas.openxmlformats.org/officeDocument/2006/relationships" xmlns:p="http://schemas.openxmlformats.org/presentationml/2006/main">
   <p:cSld>
     <p:spTree>
@@ -14906,7 +18174,7 @@
 </p:sld>
 </file>
 
-<file path=ppt/slides/slide46.xml><?xml version="1.0" encoding="utf-8"?>
+<file path=ppt/slides/slide47.xml><?xml version="1.0" encoding="utf-8"?>
 <p:sld xmlns:a="http://schemas.openxmlformats.org/drawingml/2006/main" xmlns:r="http://schemas.openxmlformats.org/officeDocument/2006/relationships" xmlns:p="http://schemas.openxmlformats.org/presentationml/2006/main">
   <p:cSld>
     <p:spTree>
@@ -15719,7 +18987,7 @@
 </p:sld>
 </file>
 
-<file path=ppt/slides/slide47.xml><?xml version="1.0" encoding="utf-8"?>
+<file path=ppt/slides/slide48.xml><?xml version="1.0" encoding="utf-8"?>
 <p:sld xmlns:a="http://schemas.openxmlformats.org/drawingml/2006/main" xmlns:r="http://schemas.openxmlformats.org/officeDocument/2006/relationships" xmlns:p="http://schemas.openxmlformats.org/presentationml/2006/main">
   <p:cSld>
     <p:spTree>
@@ -15785,7 +19053,7 @@
 </p:sld>
 </file>
 
-<file path=ppt/slides/slide48.xml><?xml version="1.0" encoding="utf-8"?>
+<file path=ppt/slides/slide49.xml><?xml version="1.0" encoding="utf-8"?>
 <p:sld xmlns:a="http://schemas.openxmlformats.org/drawingml/2006/main" xmlns:r="http://schemas.openxmlformats.org/officeDocument/2006/relationships" xmlns:p="http://schemas.openxmlformats.org/presentationml/2006/main">
   <p:cSld>
     <p:spTree>
@@ -16499,192 +19767,6 @@
     <p:extLst>
       <p:ext uri="{BB962C8B-B14F-4D97-AF65-F5344CB8AC3E}">
         <p14:creationId xmlns:p14="http://schemas.microsoft.com/office/powerpoint/2010/main" val="227039594"/>
-      </p:ext>
-    </p:extLst>
-  </p:cSld>
-  <p:clrMapOvr>
-    <a:masterClrMapping/>
-  </p:clrMapOvr>
-</p:sld>
-</file>
-
-<file path=ppt/slides/slide49.xml><?xml version="1.0" encoding="utf-8"?>
-<p:sld xmlns:a="http://schemas.openxmlformats.org/drawingml/2006/main" xmlns:r="http://schemas.openxmlformats.org/officeDocument/2006/relationships" xmlns:p="http://schemas.openxmlformats.org/presentationml/2006/main">
-  <p:cSld>
-    <p:spTree>
-      <p:nvGrpSpPr>
-        <p:cNvPr id="1" name=""/>
-        <p:cNvGrpSpPr/>
-        <p:nvPr/>
-      </p:nvGrpSpPr>
-      <p:grpSpPr>
-        <a:xfrm>
-          <a:off x="0" y="0"/>
-          <a:ext cx="0" cy="0"/>
-          <a:chOff x="0" y="0"/>
-          <a:chExt cx="0" cy="0"/>
-        </a:xfrm>
-      </p:grpSpPr>
-      <p:sp>
-        <p:nvSpPr>
-          <p:cNvPr id="5" name="Rectangle: Rounded Corners 4">
-            <a:extLst>
-              <a:ext uri="{FF2B5EF4-FFF2-40B4-BE49-F238E27FC236}">
-                <a16:creationId xmlns:a16="http://schemas.microsoft.com/office/drawing/2014/main" id="{BADBB24C-5F57-A411-EB25-4559A2AFDB94}"/>
-              </a:ext>
-            </a:extLst>
-          </p:cNvPr>
-          <p:cNvSpPr/>
-          <p:nvPr/>
-        </p:nvSpPr>
-        <p:spPr>
-          <a:xfrm>
-            <a:off x="1872672" y="1742046"/>
-            <a:ext cx="8446656" cy="3373908"/>
-          </a:xfrm>
-          <a:prstGeom prst="roundRect">
-            <a:avLst>
-              <a:gd name="adj" fmla="val 8182"/>
-            </a:avLst>
-          </a:prstGeom>
-          <a:solidFill>
-            <a:schemeClr val="accent6">
-              <a:lumMod val="50000"/>
-            </a:schemeClr>
-          </a:solidFill>
-          <a:ln>
-            <a:noFill/>
-          </a:ln>
-        </p:spPr>
-        <p:style>
-          <a:lnRef idx="2">
-            <a:schemeClr val="accent1">
-              <a:shade val="15000"/>
-            </a:schemeClr>
-          </a:lnRef>
-          <a:fillRef idx="1">
-            <a:schemeClr val="accent1"/>
-          </a:fillRef>
-          <a:effectRef idx="0">
-            <a:schemeClr val="accent1"/>
-          </a:effectRef>
-          <a:fontRef idx="minor">
-            <a:schemeClr val="lt1"/>
-          </a:fontRef>
-        </p:style>
-        <p:txBody>
-          <a:bodyPr rtlCol="0" anchor="ctr"/>
-          <a:lstStyle/>
-          <a:p>
-            <a:r>
-              <a:rPr lang="en-US" sz="2000" b="1" dirty="0"/>
-              <a:t>Dashboard : Featured Property auto scroll{</a:t>
-            </a:r>
-          </a:p>
-          <a:p>
-            <a:pPr marL="800100" lvl="1" indent="-342900">
-              <a:buFont typeface="Arial" panose="020B0604020202020204" pitchFamily="34" charset="0"/>
-              <a:buChar char="•"/>
-            </a:pPr>
-            <a:r>
-              <a:rPr lang="en-US" sz="2000" b="1" dirty="0"/>
-              <a:t>List 6 Property w/ button : {guestViewProperty.html} </a:t>
-            </a:r>
-          </a:p>
-          <a:p>
-            <a:r>
-              <a:rPr lang="en-US" sz="2000" b="1" dirty="0"/>
-              <a:t>}</a:t>
-            </a:r>
-          </a:p>
-          <a:p>
-            <a:endParaRPr lang="en-US" sz="2000" b="1" dirty="0"/>
-          </a:p>
-          <a:p>
-            <a:r>
-              <a:rPr lang="en-US" sz="2000" b="1" dirty="0" err="1"/>
-              <a:t>Catergory</a:t>
-            </a:r>
-            <a:r>
-              <a:rPr lang="en-US" sz="2000" b="1" dirty="0"/>
-              <a:t> of property (Top Rated, </a:t>
-            </a:r>
-            <a:r>
-              <a:rPr lang="en-US" sz="2000" b="1" dirty="0" err="1"/>
-              <a:t>barkada</a:t>
-            </a:r>
-            <a:r>
-              <a:rPr lang="en-US" sz="2000" b="1" dirty="0"/>
-              <a:t>, family, couple, &amp; others){</a:t>
-            </a:r>
-          </a:p>
-          <a:p>
-            <a:pPr marL="800100" lvl="1" indent="-342900">
-              <a:buFont typeface="Arial" panose="020B0604020202020204" pitchFamily="34" charset="0"/>
-              <a:buChar char="•"/>
-            </a:pPr>
-            <a:r>
-              <a:rPr lang="en-US" sz="2000" b="1" dirty="0"/>
-              <a:t>List of property (Picture, Name, Address, Price/Day)</a:t>
-            </a:r>
-          </a:p>
-          <a:p>
-            <a:pPr marL="800100" lvl="1" indent="-342900">
-              <a:buFont typeface="Arial" panose="020B0604020202020204" pitchFamily="34" charset="0"/>
-              <a:buChar char="•"/>
-            </a:pPr>
-            <a:r>
-              <a:rPr lang="en-US" sz="2000" b="1" dirty="0"/>
-              <a:t>Onclick {guestViewProperty.html}</a:t>
-            </a:r>
-          </a:p>
-          <a:p>
-            <a:r>
-              <a:rPr lang="en-US" sz="2000" b="1" dirty="0"/>
-              <a:t>}</a:t>
-            </a:r>
-          </a:p>
-        </p:txBody>
-      </p:sp>
-      <p:sp>
-        <p:nvSpPr>
-          <p:cNvPr id="4" name="TextBox 3">
-            <a:extLst>
-              <a:ext uri="{FF2B5EF4-FFF2-40B4-BE49-F238E27FC236}">
-                <a16:creationId xmlns:a16="http://schemas.microsoft.com/office/drawing/2014/main" id="{F259B9EF-2882-3D95-7422-68A27385F852}"/>
-              </a:ext>
-            </a:extLst>
-          </p:cNvPr>
-          <p:cNvSpPr txBox="1"/>
-          <p:nvPr/>
-        </p:nvSpPr>
-        <p:spPr>
-          <a:xfrm>
-            <a:off x="-1" y="0"/>
-            <a:ext cx="4341092" cy="400110"/>
-          </a:xfrm>
-          <a:prstGeom prst="rect">
-            <a:avLst/>
-          </a:prstGeom>
-          <a:noFill/>
-        </p:spPr>
-        <p:txBody>
-          <a:bodyPr wrap="square" rtlCol="0">
-            <a:spAutoFit/>
-          </a:bodyPr>
-          <a:lstStyle/>
-          <a:p>
-            <a:r>
-              <a:rPr lang="en-US" sz="2000" b="1" dirty="0"/>
-              <a:t>guestDashboard.html</a:t>
-            </a:r>
-          </a:p>
-        </p:txBody>
-      </p:sp>
-    </p:spTree>
-    <p:extLst>
-      <p:ext uri="{BB962C8B-B14F-4D97-AF65-F5344CB8AC3E}">
-        <p14:creationId xmlns:p14="http://schemas.microsoft.com/office/powerpoint/2010/main" val="1450779734"/>
       </p:ext>
     </p:extLst>
   </p:cSld>
@@ -17258,6 +20340,192 @@
       </p:grpSpPr>
       <p:sp>
         <p:nvSpPr>
+          <p:cNvPr id="5" name="Rectangle: Rounded Corners 4">
+            <a:extLst>
+              <a:ext uri="{FF2B5EF4-FFF2-40B4-BE49-F238E27FC236}">
+                <a16:creationId xmlns:a16="http://schemas.microsoft.com/office/drawing/2014/main" id="{BADBB24C-5F57-A411-EB25-4559A2AFDB94}"/>
+              </a:ext>
+            </a:extLst>
+          </p:cNvPr>
+          <p:cNvSpPr/>
+          <p:nvPr/>
+        </p:nvSpPr>
+        <p:spPr>
+          <a:xfrm>
+            <a:off x="1872672" y="1742046"/>
+            <a:ext cx="8446656" cy="3373908"/>
+          </a:xfrm>
+          <a:prstGeom prst="roundRect">
+            <a:avLst>
+              <a:gd name="adj" fmla="val 8182"/>
+            </a:avLst>
+          </a:prstGeom>
+          <a:solidFill>
+            <a:schemeClr val="accent6">
+              <a:lumMod val="50000"/>
+            </a:schemeClr>
+          </a:solidFill>
+          <a:ln>
+            <a:noFill/>
+          </a:ln>
+        </p:spPr>
+        <p:style>
+          <a:lnRef idx="2">
+            <a:schemeClr val="accent1">
+              <a:shade val="15000"/>
+            </a:schemeClr>
+          </a:lnRef>
+          <a:fillRef idx="1">
+            <a:schemeClr val="accent1"/>
+          </a:fillRef>
+          <a:effectRef idx="0">
+            <a:schemeClr val="accent1"/>
+          </a:effectRef>
+          <a:fontRef idx="minor">
+            <a:schemeClr val="lt1"/>
+          </a:fontRef>
+        </p:style>
+        <p:txBody>
+          <a:bodyPr rtlCol="0" anchor="ctr"/>
+          <a:lstStyle/>
+          <a:p>
+            <a:r>
+              <a:rPr lang="en-US" sz="2000" b="1" dirty="0"/>
+              <a:t>Dashboard : Featured Property auto scroll{</a:t>
+            </a:r>
+          </a:p>
+          <a:p>
+            <a:pPr marL="800100" lvl="1" indent="-342900">
+              <a:buFont typeface="Arial" panose="020B0604020202020204" pitchFamily="34" charset="0"/>
+              <a:buChar char="•"/>
+            </a:pPr>
+            <a:r>
+              <a:rPr lang="en-US" sz="2000" b="1" dirty="0"/>
+              <a:t>List 6 Property w/ button : {guestViewProperty.html} </a:t>
+            </a:r>
+          </a:p>
+          <a:p>
+            <a:r>
+              <a:rPr lang="en-US" sz="2000" b="1" dirty="0"/>
+              <a:t>}</a:t>
+            </a:r>
+          </a:p>
+          <a:p>
+            <a:endParaRPr lang="en-US" sz="2000" b="1" dirty="0"/>
+          </a:p>
+          <a:p>
+            <a:r>
+              <a:rPr lang="en-US" sz="2000" b="1" dirty="0" err="1"/>
+              <a:t>Catergory</a:t>
+            </a:r>
+            <a:r>
+              <a:rPr lang="en-US" sz="2000" b="1" dirty="0"/>
+              <a:t> of property (Top Rated, </a:t>
+            </a:r>
+            <a:r>
+              <a:rPr lang="en-US" sz="2000" b="1" dirty="0" err="1"/>
+              <a:t>barkada</a:t>
+            </a:r>
+            <a:r>
+              <a:rPr lang="en-US" sz="2000" b="1" dirty="0"/>
+              <a:t>, family, couple, &amp; others){</a:t>
+            </a:r>
+          </a:p>
+          <a:p>
+            <a:pPr marL="800100" lvl="1" indent="-342900">
+              <a:buFont typeface="Arial" panose="020B0604020202020204" pitchFamily="34" charset="0"/>
+              <a:buChar char="•"/>
+            </a:pPr>
+            <a:r>
+              <a:rPr lang="en-US" sz="2000" b="1" dirty="0"/>
+              <a:t>List of property (Picture, Name, Address, Price/Day)</a:t>
+            </a:r>
+          </a:p>
+          <a:p>
+            <a:pPr marL="800100" lvl="1" indent="-342900">
+              <a:buFont typeface="Arial" panose="020B0604020202020204" pitchFamily="34" charset="0"/>
+              <a:buChar char="•"/>
+            </a:pPr>
+            <a:r>
+              <a:rPr lang="en-US" sz="2000" b="1" dirty="0"/>
+              <a:t>Onclick {guestViewProperty.html}</a:t>
+            </a:r>
+          </a:p>
+          <a:p>
+            <a:r>
+              <a:rPr lang="en-US" sz="2000" b="1" dirty="0"/>
+              <a:t>}</a:t>
+            </a:r>
+          </a:p>
+        </p:txBody>
+      </p:sp>
+      <p:sp>
+        <p:nvSpPr>
+          <p:cNvPr id="4" name="TextBox 3">
+            <a:extLst>
+              <a:ext uri="{FF2B5EF4-FFF2-40B4-BE49-F238E27FC236}">
+                <a16:creationId xmlns:a16="http://schemas.microsoft.com/office/drawing/2014/main" id="{F259B9EF-2882-3D95-7422-68A27385F852}"/>
+              </a:ext>
+            </a:extLst>
+          </p:cNvPr>
+          <p:cNvSpPr txBox="1"/>
+          <p:nvPr/>
+        </p:nvSpPr>
+        <p:spPr>
+          <a:xfrm>
+            <a:off x="-1" y="0"/>
+            <a:ext cx="4341092" cy="400110"/>
+          </a:xfrm>
+          <a:prstGeom prst="rect">
+            <a:avLst/>
+          </a:prstGeom>
+          <a:noFill/>
+        </p:spPr>
+        <p:txBody>
+          <a:bodyPr wrap="square" rtlCol="0">
+            <a:spAutoFit/>
+          </a:bodyPr>
+          <a:lstStyle/>
+          <a:p>
+            <a:r>
+              <a:rPr lang="en-US" sz="2000" b="1" dirty="0"/>
+              <a:t>guestDashboard.html</a:t>
+            </a:r>
+          </a:p>
+        </p:txBody>
+      </p:sp>
+    </p:spTree>
+    <p:extLst>
+      <p:ext uri="{BB962C8B-B14F-4D97-AF65-F5344CB8AC3E}">
+        <p14:creationId xmlns:p14="http://schemas.microsoft.com/office/powerpoint/2010/main" val="1450779734"/>
+      </p:ext>
+    </p:extLst>
+  </p:cSld>
+  <p:clrMapOvr>
+    <a:masterClrMapping/>
+  </p:clrMapOvr>
+</p:sld>
+</file>
+
+<file path=ppt/slides/slide51.xml><?xml version="1.0" encoding="utf-8"?>
+<p:sld xmlns:a="http://schemas.openxmlformats.org/drawingml/2006/main" xmlns:r="http://schemas.openxmlformats.org/officeDocument/2006/relationships" xmlns:p="http://schemas.openxmlformats.org/presentationml/2006/main">
+  <p:cSld>
+    <p:spTree>
+      <p:nvGrpSpPr>
+        <p:cNvPr id="1" name=""/>
+        <p:cNvGrpSpPr/>
+        <p:nvPr/>
+      </p:nvGrpSpPr>
+      <p:grpSpPr>
+        <a:xfrm>
+          <a:off x="0" y="0"/>
+          <a:ext cx="0" cy="0"/>
+          <a:chOff x="0" y="0"/>
+          <a:chExt cx="0" cy="0"/>
+        </a:xfrm>
+      </p:grpSpPr>
+      <p:sp>
+        <p:nvSpPr>
           <p:cNvPr id="7" name="TextBox 6">
             <a:extLst>
               <a:ext uri="{FF2B5EF4-FFF2-40B4-BE49-F238E27FC236}">
@@ -17385,7 +20653,7 @@
 </p:sld>
 </file>
 
-<file path=ppt/slides/slide51.xml><?xml version="1.0" encoding="utf-8"?>
+<file path=ppt/slides/slide52.xml><?xml version="1.0" encoding="utf-8"?>
 <p:sld xmlns:a="http://schemas.openxmlformats.org/drawingml/2006/main" xmlns:r="http://schemas.openxmlformats.org/officeDocument/2006/relationships" xmlns:p="http://schemas.openxmlformats.org/presentationml/2006/main">
   <p:cSld>
     <p:spTree>
@@ -18057,7 +21325,7 @@
 </p:sld>
 </file>
 
-<file path=ppt/slides/slide52.xml><?xml version="1.0" encoding="utf-8"?>
+<file path=ppt/slides/slide53.xml><?xml version="1.0" encoding="utf-8"?>
 <p:sld xmlns:a="http://schemas.openxmlformats.org/drawingml/2006/main" xmlns:r="http://schemas.openxmlformats.org/officeDocument/2006/relationships" xmlns:p="http://schemas.openxmlformats.org/presentationml/2006/main">
   <p:cSld>
     <p:spTree>
@@ -18351,7 +21619,7 @@
 </p:sld>
 </file>
 
-<file path=ppt/slides/slide53.xml><?xml version="1.0" encoding="utf-8"?>
+<file path=ppt/slides/slide54.xml><?xml version="1.0" encoding="utf-8"?>
 <p:sld xmlns:a="http://schemas.openxmlformats.org/drawingml/2006/main" xmlns:r="http://schemas.openxmlformats.org/officeDocument/2006/relationships" xmlns:p="http://schemas.openxmlformats.org/presentationml/2006/main">
   <p:cSld>
     <p:spTree>
@@ -18656,7 +21924,7 @@
 </p:sld>
 </file>
 
-<file path=ppt/slides/slide54.xml><?xml version="1.0" encoding="utf-8"?>
+<file path=ppt/slides/slide55.xml><?xml version="1.0" encoding="utf-8"?>
 <p:sld xmlns:a="http://schemas.openxmlformats.org/drawingml/2006/main" xmlns:r="http://schemas.openxmlformats.org/officeDocument/2006/relationships" xmlns:p="http://schemas.openxmlformats.org/presentationml/2006/main">
   <p:cSld>
     <p:spTree>
@@ -18935,7 +22203,7 @@
 </p:sld>
 </file>
 
-<file path=ppt/slides/slide55.xml><?xml version="1.0" encoding="utf-8"?>
+<file path=ppt/slides/slide56.xml><?xml version="1.0" encoding="utf-8"?>
 <p:sld xmlns:a="http://schemas.openxmlformats.org/drawingml/2006/main" xmlns:r="http://schemas.openxmlformats.org/officeDocument/2006/relationships" xmlns:p="http://schemas.openxmlformats.org/presentationml/2006/main">
   <p:cSld>
     <p:spTree>
@@ -19135,7 +22403,7 @@
 </p:sld>
 </file>
 
-<file path=ppt/slides/slide56.xml><?xml version="1.0" encoding="utf-8"?>
+<file path=ppt/slides/slide57.xml><?xml version="1.0" encoding="utf-8"?>
 <p:sld xmlns:a="http://schemas.openxmlformats.org/drawingml/2006/main" xmlns:r="http://schemas.openxmlformats.org/officeDocument/2006/relationships" xmlns:p="http://schemas.openxmlformats.org/presentationml/2006/main">
   <p:cSld>
     <p:spTree>
@@ -19294,7 +22562,7 @@
 </p:sld>
 </file>
 
-<file path=ppt/slides/slide57.xml><?xml version="1.0" encoding="utf-8"?>
+<file path=ppt/slides/slide58.xml><?xml version="1.0" encoding="utf-8"?>
 <p:sld xmlns:a="http://schemas.openxmlformats.org/drawingml/2006/main" xmlns:r="http://schemas.openxmlformats.org/officeDocument/2006/relationships" xmlns:p="http://schemas.openxmlformats.org/presentationml/2006/main">
   <p:cSld>
     <p:spTree>
@@ -19443,7 +22711,7 @@
 </p:sld>
 </file>
 
-<file path=ppt/slides/slide58.xml><?xml version="1.0" encoding="utf-8"?>
+<file path=ppt/slides/slide59.xml><?xml version="1.0" encoding="utf-8"?>
 <p:sld xmlns:a="http://schemas.openxmlformats.org/drawingml/2006/main" xmlns:r="http://schemas.openxmlformats.org/officeDocument/2006/relationships" xmlns:p="http://schemas.openxmlformats.org/presentationml/2006/main">
   <p:cSld>
     <p:spTree>

--- a/betchaBooking-USECASE.pptx
+++ b/betchaBooking-USECASE.pptx
@@ -64,6 +64,7 @@
     <p:sldId id="301" r:id="rId58"/>
     <p:sldId id="303" r:id="rId59"/>
     <p:sldId id="304" r:id="rId60"/>
+    <p:sldId id="318" r:id="rId61"/>
   </p:sldIdLst>
   <p:sldSz cx="12192000" cy="6858000"/>
   <p:notesSz cx="6858000" cy="9144000"/>
@@ -317,7 +318,7 @@
           <a:p>
             <a:fld id="{D723CA93-4BBF-43AB-A538-39903E4C269C}" type="datetimeFigureOut">
               <a:rPr lang="en-US" smtClean="0"/>
-              <a:t>5/21/2025</a:t>
+              <a:t>6/21/2025</a:t>
             </a:fld>
             <a:endParaRPr lang="en-US"/>
           </a:p>
@@ -515,7 +516,7 @@
           <a:p>
             <a:fld id="{D723CA93-4BBF-43AB-A538-39903E4C269C}" type="datetimeFigureOut">
               <a:rPr lang="en-US" smtClean="0"/>
-              <a:t>5/21/2025</a:t>
+              <a:t>6/21/2025</a:t>
             </a:fld>
             <a:endParaRPr lang="en-US"/>
           </a:p>
@@ -723,7 +724,7 @@
           <a:p>
             <a:fld id="{D723CA93-4BBF-43AB-A538-39903E4C269C}" type="datetimeFigureOut">
               <a:rPr lang="en-US" smtClean="0"/>
-              <a:t>5/21/2025</a:t>
+              <a:t>6/21/2025</a:t>
             </a:fld>
             <a:endParaRPr lang="en-US"/>
           </a:p>
@@ -921,7 +922,7 @@
           <a:p>
             <a:fld id="{D723CA93-4BBF-43AB-A538-39903E4C269C}" type="datetimeFigureOut">
               <a:rPr lang="en-US" smtClean="0"/>
-              <a:t>5/21/2025</a:t>
+              <a:t>6/21/2025</a:t>
             </a:fld>
             <a:endParaRPr lang="en-US"/>
           </a:p>
@@ -1196,7 +1197,7 @@
           <a:p>
             <a:fld id="{D723CA93-4BBF-43AB-A538-39903E4C269C}" type="datetimeFigureOut">
               <a:rPr lang="en-US" smtClean="0"/>
-              <a:t>5/21/2025</a:t>
+              <a:t>6/21/2025</a:t>
             </a:fld>
             <a:endParaRPr lang="en-US"/>
           </a:p>
@@ -1461,7 +1462,7 @@
           <a:p>
             <a:fld id="{D723CA93-4BBF-43AB-A538-39903E4C269C}" type="datetimeFigureOut">
               <a:rPr lang="en-US" smtClean="0"/>
-              <a:t>5/21/2025</a:t>
+              <a:t>6/21/2025</a:t>
             </a:fld>
             <a:endParaRPr lang="en-US"/>
           </a:p>
@@ -1873,7 +1874,7 @@
           <a:p>
             <a:fld id="{D723CA93-4BBF-43AB-A538-39903E4C269C}" type="datetimeFigureOut">
               <a:rPr lang="en-US" smtClean="0"/>
-              <a:t>5/21/2025</a:t>
+              <a:t>6/21/2025</a:t>
             </a:fld>
             <a:endParaRPr lang="en-US"/>
           </a:p>
@@ -2014,7 +2015,7 @@
           <a:p>
             <a:fld id="{D723CA93-4BBF-43AB-A538-39903E4C269C}" type="datetimeFigureOut">
               <a:rPr lang="en-US" smtClean="0"/>
-              <a:t>5/21/2025</a:t>
+              <a:t>6/21/2025</a:t>
             </a:fld>
             <a:endParaRPr lang="en-US"/>
           </a:p>
@@ -2127,7 +2128,7 @@
           <a:p>
             <a:fld id="{D723CA93-4BBF-43AB-A538-39903E4C269C}" type="datetimeFigureOut">
               <a:rPr lang="en-US" smtClean="0"/>
-              <a:t>5/21/2025</a:t>
+              <a:t>6/21/2025</a:t>
             </a:fld>
             <a:endParaRPr lang="en-US"/>
           </a:p>
@@ -2438,7 +2439,7 @@
           <a:p>
             <a:fld id="{D723CA93-4BBF-43AB-A538-39903E4C269C}" type="datetimeFigureOut">
               <a:rPr lang="en-US" smtClean="0"/>
-              <a:t>5/21/2025</a:t>
+              <a:t>6/21/2025</a:t>
             </a:fld>
             <a:endParaRPr lang="en-US"/>
           </a:p>
@@ -2726,7 +2727,7 @@
           <a:p>
             <a:fld id="{D723CA93-4BBF-43AB-A538-39903E4C269C}" type="datetimeFigureOut">
               <a:rPr lang="en-US" smtClean="0"/>
-              <a:t>5/21/2025</a:t>
+              <a:t>6/21/2025</a:t>
             </a:fld>
             <a:endParaRPr lang="en-US"/>
           </a:p>
@@ -2967,7 +2968,7 @@
           <a:p>
             <a:fld id="{D723CA93-4BBF-43AB-A538-39903E4C269C}" type="datetimeFigureOut">
               <a:rPr lang="en-US" smtClean="0"/>
-              <a:t>5/21/2025</a:t>
+              <a:t>6/21/2025</a:t>
             </a:fld>
             <a:endParaRPr lang="en-US"/>
           </a:p>
@@ -8376,7 +8377,7 @@
             </a:pPr>
             <a:r>
               <a:rPr lang="en-US" sz="2000" b="1" dirty="0"/>
-              <a:t>// the privilege is ONLY PSR, No Add Properties &amp; Properties.</a:t>
+              <a:t>// if the privilege is ONLY PSR, No Add Properties &amp; Properties section.</a:t>
             </a:r>
           </a:p>
           <a:p>
@@ -13515,6 +13516,16 @@
             <a:r>
               <a:rPr lang="en-US" sz="2000" b="1" dirty="0"/>
               <a:t>Email</a:t>
+            </a:r>
+          </a:p>
+          <a:p>
+            <a:pPr marL="800100" lvl="1" indent="-342900">
+              <a:buFont typeface="Arial" panose="020B0604020202020204" pitchFamily="34" charset="0"/>
+              <a:buChar char="•"/>
+            </a:pPr>
+            <a:r>
+              <a:rPr lang="en-US" sz="2000" b="1" dirty="0"/>
+              <a:t>Role</a:t>
             </a:r>
           </a:p>
           <a:p>
@@ -15974,7 +15985,6 @@
                     <a:bodyPr/>
                     <a:lstStyle/>
                     <a:p>
-                      <a:pPr/>
                       <a:endParaRPr dirty="0"/>
                     </a:p>
                   </a:txBody>
@@ -17230,7 +17240,6 @@
                     <a:bodyPr/>
                     <a:lstStyle/>
                     <a:p>
-                      <a:pPr/>
                       <a:endParaRPr dirty="0"/>
                     </a:p>
                   </a:txBody>
@@ -22632,7 +22641,7 @@
           <a:p>
             <a:r>
               <a:rPr lang="en-US" b="1" dirty="0"/>
-              <a:t>Pending / Completed {</a:t>
+              <a:t>Pending / Completed/ Rate {</a:t>
             </a:r>
           </a:p>
           <a:p>
@@ -22653,6 +22662,48 @@
             <a:r>
               <a:rPr lang="en-US" b="1" dirty="0"/>
               <a:t>Onclick (guestViewBooking.html)</a:t>
+            </a:r>
+          </a:p>
+          <a:p>
+            <a:pPr marL="742950" lvl="1" indent="-285750">
+              <a:buFont typeface="Arial" panose="020B0604020202020204" pitchFamily="34" charset="0"/>
+              <a:buChar char="•"/>
+            </a:pPr>
+            <a:r>
+              <a:rPr lang="en-US" b="1" dirty="0"/>
+              <a:t>If Completed without rate will go to rate section list{</a:t>
+            </a:r>
+          </a:p>
+          <a:p>
+            <a:pPr marL="1200150" lvl="2" indent="-285750">
+              <a:buFont typeface="Arial" panose="020B0604020202020204" pitchFamily="34" charset="0"/>
+              <a:buChar char="•"/>
+            </a:pPr>
+            <a:r>
+              <a:rPr lang="en-US" b="1" dirty="0"/>
+              <a:t>Click one of the list -&gt; modal to rate 1-5 star </a:t>
+            </a:r>
+          </a:p>
+          <a:p>
+            <a:pPr marL="1200150" lvl="2" indent="-285750">
+              <a:buFont typeface="Arial" panose="020B0604020202020204" pitchFamily="34" charset="0"/>
+              <a:buChar char="•"/>
+            </a:pPr>
+            <a:r>
+              <a:rPr lang="en-US" b="1" dirty="0"/>
+              <a:t>Buttons: Submit</a:t>
+            </a:r>
+            <a:r>
+              <a:rPr lang="en-US" b="1"/>
+              <a:t>, Cancel</a:t>
+            </a:r>
+            <a:endParaRPr lang="en-US" b="1" dirty="0"/>
+          </a:p>
+          <a:p>
+            <a:pPr lvl="1"/>
+            <a:r>
+              <a:rPr lang="en-US" b="1" dirty="0"/>
+              <a:t>}</a:t>
             </a:r>
           </a:p>
           <a:p>
@@ -24111,6 +24162,314 @@
     <p:extLst>
       <p:ext uri="{BB962C8B-B14F-4D97-AF65-F5344CB8AC3E}">
         <p14:creationId xmlns:p14="http://schemas.microsoft.com/office/powerpoint/2010/main" val="2739558923"/>
+      </p:ext>
+    </p:extLst>
+  </p:cSld>
+  <p:clrMapOvr>
+    <a:masterClrMapping/>
+  </p:clrMapOvr>
+</p:sld>
+</file>
+
+<file path=ppt/slides/slide60.xml><?xml version="1.0" encoding="utf-8"?>
+<p:sld xmlns:a="http://schemas.openxmlformats.org/drawingml/2006/main" xmlns:r="http://schemas.openxmlformats.org/officeDocument/2006/relationships" xmlns:p="http://schemas.openxmlformats.org/presentationml/2006/main">
+  <p:cSld>
+    <p:spTree>
+      <p:nvGrpSpPr>
+        <p:cNvPr id="1" name=""/>
+        <p:cNvGrpSpPr/>
+        <p:nvPr/>
+      </p:nvGrpSpPr>
+      <p:grpSpPr>
+        <a:xfrm>
+          <a:off x="0" y="0"/>
+          <a:ext cx="0" cy="0"/>
+          <a:chOff x="0" y="0"/>
+          <a:chExt cx="0" cy="0"/>
+        </a:xfrm>
+      </p:grpSpPr>
+      <p:sp>
+        <p:nvSpPr>
+          <p:cNvPr id="5" name="Rectangle: Rounded Corners 4">
+            <a:extLst>
+              <a:ext uri="{FF2B5EF4-FFF2-40B4-BE49-F238E27FC236}">
+                <a16:creationId xmlns:a16="http://schemas.microsoft.com/office/drawing/2014/main" id="{BADBB24C-5F57-A411-EB25-4559A2AFDB94}"/>
+              </a:ext>
+            </a:extLst>
+          </p:cNvPr>
+          <p:cNvSpPr/>
+          <p:nvPr/>
+        </p:nvSpPr>
+        <p:spPr>
+          <a:xfrm>
+            <a:off x="2192769" y="573870"/>
+            <a:ext cx="7806461" cy="5858041"/>
+          </a:xfrm>
+          <a:prstGeom prst="roundRect">
+            <a:avLst>
+              <a:gd name="adj" fmla="val 5789"/>
+            </a:avLst>
+          </a:prstGeom>
+          <a:solidFill>
+            <a:schemeClr val="accent6">
+              <a:lumMod val="50000"/>
+            </a:schemeClr>
+          </a:solidFill>
+          <a:ln>
+            <a:noFill/>
+          </a:ln>
+        </p:spPr>
+        <p:style>
+          <a:lnRef idx="2">
+            <a:schemeClr val="accent1">
+              <a:shade val="15000"/>
+            </a:schemeClr>
+          </a:lnRef>
+          <a:fillRef idx="1">
+            <a:schemeClr val="accent1"/>
+          </a:fillRef>
+          <a:effectRef idx="0">
+            <a:schemeClr val="accent1"/>
+          </a:effectRef>
+          <a:fontRef idx="minor">
+            <a:schemeClr val="lt1"/>
+          </a:fontRef>
+        </p:style>
+        <p:txBody>
+          <a:bodyPr rtlCol="0" anchor="ctr"/>
+          <a:lstStyle/>
+          <a:p>
+            <a:r>
+              <a:rPr lang="en-US" b="1" dirty="0"/>
+              <a:t>{</a:t>
+            </a:r>
+          </a:p>
+          <a:p>
+            <a:pPr marL="742950" lvl="1" indent="-285750">
+              <a:buFont typeface="Arial" panose="020B0604020202020204" pitchFamily="34" charset="0"/>
+              <a:buChar char="•"/>
+            </a:pPr>
+            <a:r>
+              <a:rPr lang="en-US" b="1" dirty="0"/>
+              <a:t>Property Name</a:t>
+            </a:r>
+          </a:p>
+          <a:p>
+            <a:pPr marL="742950" lvl="1" indent="-285750">
+              <a:buFont typeface="Arial" panose="020B0604020202020204" pitchFamily="34" charset="0"/>
+              <a:buChar char="•"/>
+            </a:pPr>
+            <a:r>
+              <a:rPr lang="en-US" b="1" dirty="0"/>
+              <a:t>Ref id</a:t>
+            </a:r>
+          </a:p>
+          <a:p>
+            <a:pPr marL="742950" lvl="1" indent="-285750">
+              <a:buFont typeface="Arial" panose="020B0604020202020204" pitchFamily="34" charset="0"/>
+              <a:buChar char="•"/>
+            </a:pPr>
+            <a:r>
+              <a:rPr lang="en-US" b="1" dirty="0"/>
+              <a:t>Pictures of property</a:t>
+            </a:r>
+          </a:p>
+          <a:p>
+            <a:pPr marL="742950" lvl="1" indent="-285750">
+              <a:buFont typeface="Arial" panose="020B0604020202020204" pitchFamily="34" charset="0"/>
+              <a:buChar char="•"/>
+            </a:pPr>
+            <a:r>
+              <a:rPr lang="en-US" b="1" dirty="0"/>
+              <a:t>Address</a:t>
+            </a:r>
+          </a:p>
+          <a:p>
+            <a:pPr marL="742950" lvl="1" indent="-285750">
+              <a:buFont typeface="Arial" panose="020B0604020202020204" pitchFamily="34" charset="0"/>
+              <a:buChar char="•"/>
+            </a:pPr>
+            <a:r>
+              <a:rPr lang="en-US" b="1" dirty="0"/>
+              <a:t>Embed map</a:t>
+            </a:r>
+          </a:p>
+          <a:p>
+            <a:pPr marL="742950" lvl="1" indent="-285750">
+              <a:buFont typeface="Arial" panose="020B0604020202020204" pitchFamily="34" charset="0"/>
+              <a:buChar char="•"/>
+            </a:pPr>
+            <a:r>
+              <a:rPr lang="en-US" b="1" dirty="0"/>
+              <a:t>Date</a:t>
+            </a:r>
+          </a:p>
+          <a:p>
+            <a:pPr marL="742950" lvl="1" indent="-285750">
+              <a:buFont typeface="Arial" panose="020B0604020202020204" pitchFamily="34" charset="0"/>
+              <a:buChar char="•"/>
+            </a:pPr>
+            <a:r>
+              <a:rPr lang="en-US" b="1" dirty="0"/>
+              <a:t>Time of Check In</a:t>
+            </a:r>
+          </a:p>
+          <a:p>
+            <a:pPr marL="742950" lvl="1" indent="-285750">
+              <a:buFont typeface="Arial" panose="020B0604020202020204" pitchFamily="34" charset="0"/>
+              <a:buChar char="•"/>
+            </a:pPr>
+            <a:r>
+              <a:rPr lang="en-US" b="1" dirty="0"/>
+              <a:t>Time of Checking out</a:t>
+            </a:r>
+          </a:p>
+          <a:p>
+            <a:pPr marL="742950" lvl="1" indent="-285750">
+              <a:buFont typeface="Arial" panose="020B0604020202020204" pitchFamily="34" charset="0"/>
+              <a:buChar char="•"/>
+            </a:pPr>
+            <a:endParaRPr lang="en-US" b="1" dirty="0"/>
+          </a:p>
+          <a:p>
+            <a:pPr marL="742950" lvl="1" indent="-285750">
+              <a:buFont typeface="Arial" panose="020B0604020202020204" pitchFamily="34" charset="0"/>
+              <a:buChar char="•"/>
+            </a:pPr>
+            <a:r>
+              <a:rPr lang="en-US" b="1" dirty="0"/>
+              <a:t>Details of transaction{</a:t>
+            </a:r>
+          </a:p>
+          <a:p>
+            <a:pPr marL="1200150" lvl="2" indent="-285750">
+              <a:buFont typeface="Arial" panose="020B0604020202020204" pitchFamily="34" charset="0"/>
+              <a:buChar char="•"/>
+            </a:pPr>
+            <a:r>
+              <a:rPr lang="en-US" b="1" dirty="0"/>
+              <a:t>Payment mode</a:t>
+            </a:r>
+          </a:p>
+          <a:p>
+            <a:pPr marL="1200150" lvl="2" indent="-285750">
+              <a:buFont typeface="Arial" panose="020B0604020202020204" pitchFamily="34" charset="0"/>
+              <a:buChar char="•"/>
+            </a:pPr>
+            <a:r>
+              <a:rPr lang="en-US" b="1" dirty="0"/>
+              <a:t>Price per day * Additional Pax : `Unpaid or Paid (PHP2,000)`</a:t>
+            </a:r>
+          </a:p>
+          <a:p>
+            <a:pPr marL="1200150" lvl="2" indent="-285750">
+              <a:buFont typeface="Arial" panose="020B0604020202020204" pitchFamily="34" charset="0"/>
+              <a:buChar char="•"/>
+            </a:pPr>
+            <a:r>
+              <a:rPr lang="en-US" b="1" dirty="0"/>
+              <a:t>Discount</a:t>
+            </a:r>
+          </a:p>
+          <a:p>
+            <a:pPr marL="1200150" lvl="2" indent="-285750">
+              <a:buFont typeface="Arial" panose="020B0604020202020204" pitchFamily="34" charset="0"/>
+              <a:buChar char="•"/>
+            </a:pPr>
+            <a:r>
+              <a:rPr lang="en-US" b="1" dirty="0"/>
+              <a:t>Reservation Fee: `Paid (PHP 500)`</a:t>
+            </a:r>
+          </a:p>
+          <a:p>
+            <a:pPr marL="1200150" lvl="2" indent="-285750">
+              <a:buFont typeface="Arial" panose="020B0604020202020204" pitchFamily="34" charset="0"/>
+              <a:buChar char="•"/>
+            </a:pPr>
+            <a:r>
+              <a:rPr lang="en-US" b="1" dirty="0"/>
+              <a:t>Status</a:t>
+            </a:r>
+          </a:p>
+          <a:p>
+            <a:pPr marL="1200150" lvl="2" indent="-285750">
+              <a:buFont typeface="Arial" panose="020B0604020202020204" pitchFamily="34" charset="0"/>
+              <a:buChar char="•"/>
+            </a:pPr>
+            <a:r>
+              <a:rPr lang="en-US" b="1" dirty="0"/>
+              <a:t>TOTAL REMAINING BALANCE or TOTAL: </a:t>
+            </a:r>
+          </a:p>
+          <a:p>
+            <a:pPr lvl="2"/>
+            <a:r>
+              <a:rPr lang="en-US" b="1" dirty="0"/>
+              <a:t>}</a:t>
+            </a:r>
+          </a:p>
+          <a:p>
+            <a:pPr lvl="2"/>
+            <a:r>
+              <a:rPr lang="en-US" b="1" dirty="0"/>
+              <a:t>If (!</a:t>
+            </a:r>
+            <a:r>
+              <a:rPr lang="en-US" b="1" dirty="0" err="1"/>
+              <a:t>fullpayment</a:t>
+            </a:r>
+            <a:r>
+              <a:rPr lang="en-US" b="1" dirty="0"/>
+              <a:t>){button: pay remaining balance (go to guestPayment.html)}</a:t>
+            </a:r>
+          </a:p>
+          <a:p>
+            <a:r>
+              <a:rPr lang="en-US" b="1" dirty="0"/>
+              <a:t>}</a:t>
+            </a:r>
+          </a:p>
+        </p:txBody>
+      </p:sp>
+      <p:sp>
+        <p:nvSpPr>
+          <p:cNvPr id="4" name="TextBox 3">
+            <a:extLst>
+              <a:ext uri="{FF2B5EF4-FFF2-40B4-BE49-F238E27FC236}">
+                <a16:creationId xmlns:a16="http://schemas.microsoft.com/office/drawing/2014/main" id="{F259B9EF-2882-3D95-7422-68A27385F852}"/>
+              </a:ext>
+            </a:extLst>
+          </p:cNvPr>
+          <p:cNvSpPr txBox="1"/>
+          <p:nvPr/>
+        </p:nvSpPr>
+        <p:spPr>
+          <a:xfrm>
+            <a:off x="-1" y="0"/>
+            <a:ext cx="4341092" cy="400110"/>
+          </a:xfrm>
+          <a:prstGeom prst="rect">
+            <a:avLst/>
+          </a:prstGeom>
+          <a:noFill/>
+        </p:spPr>
+        <p:txBody>
+          <a:bodyPr wrap="square" rtlCol="0">
+            <a:spAutoFit/>
+          </a:bodyPr>
+          <a:lstStyle/>
+          <a:p>
+            <a:r>
+              <a:rPr lang="en-US" sz="2000" b="1" dirty="0"/>
+              <a:t>guestViewBooking.html</a:t>
+            </a:r>
+          </a:p>
+        </p:txBody>
+      </p:sp>
+    </p:spTree>
+    <p:extLst>
+      <p:ext uri="{BB962C8B-B14F-4D97-AF65-F5344CB8AC3E}">
+        <p14:creationId xmlns:p14="http://schemas.microsoft.com/office/powerpoint/2010/main" val="3275893975"/>
       </p:ext>
     </p:extLst>
   </p:cSld>

--- a/betchaBooking-USECASE.pptx
+++ b/betchaBooking-USECASE.pptx
@@ -318,7 +318,7 @@
           <a:p>
             <a:fld id="{D723CA93-4BBF-43AB-A538-39903E4C269C}" type="datetimeFigureOut">
               <a:rPr lang="en-US" smtClean="0"/>
-              <a:t>6/21/2025</a:t>
+              <a:t>6/23/2025</a:t>
             </a:fld>
             <a:endParaRPr lang="en-US"/>
           </a:p>
@@ -516,7 +516,7 @@
           <a:p>
             <a:fld id="{D723CA93-4BBF-43AB-A538-39903E4C269C}" type="datetimeFigureOut">
               <a:rPr lang="en-US" smtClean="0"/>
-              <a:t>6/21/2025</a:t>
+              <a:t>6/23/2025</a:t>
             </a:fld>
             <a:endParaRPr lang="en-US"/>
           </a:p>
@@ -724,7 +724,7 @@
           <a:p>
             <a:fld id="{D723CA93-4BBF-43AB-A538-39903E4C269C}" type="datetimeFigureOut">
               <a:rPr lang="en-US" smtClean="0"/>
-              <a:t>6/21/2025</a:t>
+              <a:t>6/23/2025</a:t>
             </a:fld>
             <a:endParaRPr lang="en-US"/>
           </a:p>
@@ -922,7 +922,7 @@
           <a:p>
             <a:fld id="{D723CA93-4BBF-43AB-A538-39903E4C269C}" type="datetimeFigureOut">
               <a:rPr lang="en-US" smtClean="0"/>
-              <a:t>6/21/2025</a:t>
+              <a:t>6/23/2025</a:t>
             </a:fld>
             <a:endParaRPr lang="en-US"/>
           </a:p>
@@ -1197,7 +1197,7 @@
           <a:p>
             <a:fld id="{D723CA93-4BBF-43AB-A538-39903E4C269C}" type="datetimeFigureOut">
               <a:rPr lang="en-US" smtClean="0"/>
-              <a:t>6/21/2025</a:t>
+              <a:t>6/23/2025</a:t>
             </a:fld>
             <a:endParaRPr lang="en-US"/>
           </a:p>
@@ -1462,7 +1462,7 @@
           <a:p>
             <a:fld id="{D723CA93-4BBF-43AB-A538-39903E4C269C}" type="datetimeFigureOut">
               <a:rPr lang="en-US" smtClean="0"/>
-              <a:t>6/21/2025</a:t>
+              <a:t>6/23/2025</a:t>
             </a:fld>
             <a:endParaRPr lang="en-US"/>
           </a:p>
@@ -1874,7 +1874,7 @@
           <a:p>
             <a:fld id="{D723CA93-4BBF-43AB-A538-39903E4C269C}" type="datetimeFigureOut">
               <a:rPr lang="en-US" smtClean="0"/>
-              <a:t>6/21/2025</a:t>
+              <a:t>6/23/2025</a:t>
             </a:fld>
             <a:endParaRPr lang="en-US"/>
           </a:p>
@@ -2015,7 +2015,7 @@
           <a:p>
             <a:fld id="{D723CA93-4BBF-43AB-A538-39903E4C269C}" type="datetimeFigureOut">
               <a:rPr lang="en-US" smtClean="0"/>
-              <a:t>6/21/2025</a:t>
+              <a:t>6/23/2025</a:t>
             </a:fld>
             <a:endParaRPr lang="en-US"/>
           </a:p>
@@ -2128,7 +2128,7 @@
           <a:p>
             <a:fld id="{D723CA93-4BBF-43AB-A538-39903E4C269C}" type="datetimeFigureOut">
               <a:rPr lang="en-US" smtClean="0"/>
-              <a:t>6/21/2025</a:t>
+              <a:t>6/23/2025</a:t>
             </a:fld>
             <a:endParaRPr lang="en-US"/>
           </a:p>
@@ -2439,7 +2439,7 @@
           <a:p>
             <a:fld id="{D723CA93-4BBF-43AB-A538-39903E4C269C}" type="datetimeFigureOut">
               <a:rPr lang="en-US" smtClean="0"/>
-              <a:t>6/21/2025</a:t>
+              <a:t>6/23/2025</a:t>
             </a:fld>
             <a:endParaRPr lang="en-US"/>
           </a:p>
@@ -2727,7 +2727,7 @@
           <a:p>
             <a:fld id="{D723CA93-4BBF-43AB-A538-39903E4C269C}" type="datetimeFigureOut">
               <a:rPr lang="en-US" smtClean="0"/>
-              <a:t>6/21/2025</a:t>
+              <a:t>6/23/2025</a:t>
             </a:fld>
             <a:endParaRPr lang="en-US"/>
           </a:p>
@@ -2968,7 +2968,7 @@
           <a:p>
             <a:fld id="{D723CA93-4BBF-43AB-A538-39903E4C269C}" type="datetimeFigureOut">
               <a:rPr lang="en-US" smtClean="0"/>
-              <a:t>6/21/2025</a:t>
+              <a:t>6/23/2025</a:t>
             </a:fld>
             <a:endParaRPr lang="en-US"/>
           </a:p>
@@ -5483,6 +5483,16 @@
             <a:r>
               <a:rPr lang="en-US" sz="1600" b="1" dirty="0"/>
               <a:t>Discount</a:t>
+            </a:r>
+          </a:p>
+          <a:p>
+            <a:pPr marL="1257300" lvl="2" indent="-342900">
+              <a:buFont typeface="Arial" panose="020B0604020202020204" pitchFamily="34" charset="0"/>
+              <a:buChar char="•"/>
+            </a:pPr>
+            <a:r>
+              <a:rPr lang="en-US" sz="1600" b="1" dirty="0"/>
+              <a:t>Rating</a:t>
             </a:r>
           </a:p>
           <a:p>

--- a/betchaBooking-USECASE.pptx
+++ b/betchaBooking-USECASE.pptx
@@ -5493,6 +5493,16 @@
             <a:r>
               <a:rPr lang="en-US" sz="1600" b="1" dirty="0"/>
               <a:t>Rating</a:t>
+            </a:r>
+          </a:p>
+          <a:p>
+            <a:pPr marL="1257300" lvl="2" indent="-342900">
+              <a:buFont typeface="Arial" panose="020B0604020202020204" pitchFamily="34" charset="0"/>
+              <a:buChar char="•"/>
+            </a:pPr>
+            <a:r>
+              <a:rPr lang="en-US" sz="1600" b="1" dirty="0"/>
+              <a:t>calendar</a:t>
             </a:r>
           </a:p>
           <a:p>

--- a/betchaBooking-USECASE.pptx
+++ b/betchaBooking-USECASE.pptx
@@ -318,7 +318,7 @@
           <a:p>
             <a:fld id="{D723CA93-4BBF-43AB-A538-39903E4C269C}" type="datetimeFigureOut">
               <a:rPr lang="en-US" smtClean="0"/>
-              <a:t>6/23/2025</a:t>
+              <a:t>6/26/2025</a:t>
             </a:fld>
             <a:endParaRPr lang="en-US"/>
           </a:p>
@@ -516,7 +516,7 @@
           <a:p>
             <a:fld id="{D723CA93-4BBF-43AB-A538-39903E4C269C}" type="datetimeFigureOut">
               <a:rPr lang="en-US" smtClean="0"/>
-              <a:t>6/23/2025</a:t>
+              <a:t>6/26/2025</a:t>
             </a:fld>
             <a:endParaRPr lang="en-US"/>
           </a:p>
@@ -724,7 +724,7 @@
           <a:p>
             <a:fld id="{D723CA93-4BBF-43AB-A538-39903E4C269C}" type="datetimeFigureOut">
               <a:rPr lang="en-US" smtClean="0"/>
-              <a:t>6/23/2025</a:t>
+              <a:t>6/26/2025</a:t>
             </a:fld>
             <a:endParaRPr lang="en-US"/>
           </a:p>
@@ -922,7 +922,7 @@
           <a:p>
             <a:fld id="{D723CA93-4BBF-43AB-A538-39903E4C269C}" type="datetimeFigureOut">
               <a:rPr lang="en-US" smtClean="0"/>
-              <a:t>6/23/2025</a:t>
+              <a:t>6/26/2025</a:t>
             </a:fld>
             <a:endParaRPr lang="en-US"/>
           </a:p>
@@ -1197,7 +1197,7 @@
           <a:p>
             <a:fld id="{D723CA93-4BBF-43AB-A538-39903E4C269C}" type="datetimeFigureOut">
               <a:rPr lang="en-US" smtClean="0"/>
-              <a:t>6/23/2025</a:t>
+              <a:t>6/26/2025</a:t>
             </a:fld>
             <a:endParaRPr lang="en-US"/>
           </a:p>
@@ -1462,7 +1462,7 @@
           <a:p>
             <a:fld id="{D723CA93-4BBF-43AB-A538-39903E4C269C}" type="datetimeFigureOut">
               <a:rPr lang="en-US" smtClean="0"/>
-              <a:t>6/23/2025</a:t>
+              <a:t>6/26/2025</a:t>
             </a:fld>
             <a:endParaRPr lang="en-US"/>
           </a:p>
@@ -1874,7 +1874,7 @@
           <a:p>
             <a:fld id="{D723CA93-4BBF-43AB-A538-39903E4C269C}" type="datetimeFigureOut">
               <a:rPr lang="en-US" smtClean="0"/>
-              <a:t>6/23/2025</a:t>
+              <a:t>6/26/2025</a:t>
             </a:fld>
             <a:endParaRPr lang="en-US"/>
           </a:p>
@@ -2015,7 +2015,7 @@
           <a:p>
             <a:fld id="{D723CA93-4BBF-43AB-A538-39903E4C269C}" type="datetimeFigureOut">
               <a:rPr lang="en-US" smtClean="0"/>
-              <a:t>6/23/2025</a:t>
+              <a:t>6/26/2025</a:t>
             </a:fld>
             <a:endParaRPr lang="en-US"/>
           </a:p>
@@ -2128,7 +2128,7 @@
           <a:p>
             <a:fld id="{D723CA93-4BBF-43AB-A538-39903E4C269C}" type="datetimeFigureOut">
               <a:rPr lang="en-US" smtClean="0"/>
-              <a:t>6/23/2025</a:t>
+              <a:t>6/26/2025</a:t>
             </a:fld>
             <a:endParaRPr lang="en-US"/>
           </a:p>
@@ -2439,7 +2439,7 @@
           <a:p>
             <a:fld id="{D723CA93-4BBF-43AB-A538-39903E4C269C}" type="datetimeFigureOut">
               <a:rPr lang="en-US" smtClean="0"/>
-              <a:t>6/23/2025</a:t>
+              <a:t>6/26/2025</a:t>
             </a:fld>
             <a:endParaRPr lang="en-US"/>
           </a:p>
@@ -2727,7 +2727,7 @@
           <a:p>
             <a:fld id="{D723CA93-4BBF-43AB-A538-39903E4C269C}" type="datetimeFigureOut">
               <a:rPr lang="en-US" smtClean="0"/>
-              <a:t>6/23/2025</a:t>
+              <a:t>6/26/2025</a:t>
             </a:fld>
             <a:endParaRPr lang="en-US"/>
           </a:p>
@@ -2968,7 +2968,7 @@
           <a:p>
             <a:fld id="{D723CA93-4BBF-43AB-A538-39903E4C269C}" type="datetimeFigureOut">
               <a:rPr lang="en-US" smtClean="0"/>
-              <a:t>6/23/2025</a:t>
+              <a:t>6/26/2025</a:t>
             </a:fld>
             <a:endParaRPr lang="en-US"/>
           </a:p>
@@ -17691,8 +17691,8 @@
         </p:nvSpPr>
         <p:spPr>
           <a:xfrm>
-            <a:off x="277090" y="2012722"/>
-            <a:ext cx="6077528" cy="2832556"/>
+            <a:off x="277090" y="1789043"/>
+            <a:ext cx="6077528" cy="3056235"/>
           </a:xfrm>
           <a:prstGeom prst="roundRect">
             <a:avLst>
@@ -17788,7 +17788,15 @@
             </a:pPr>
             <a:r>
               <a:rPr lang="en-US" b="1" dirty="0"/>
-              <a:t>Breakdown of payment (Reservation + (Package Payment – discount) * Additional Pax )</a:t>
+              <a:t>Breakdown of payment (Reservation + (Package Payment * discount/100) + Additional Pax Price* additional </a:t>
+            </a:r>
+            <a:r>
+              <a:rPr lang="en-US" b="1" dirty="0" err="1"/>
+              <a:t>pax</a:t>
+            </a:r>
+            <a:r>
+              <a:rPr lang="en-US" b="1" dirty="0"/>
+              <a:t> )</a:t>
             </a:r>
           </a:p>
           <a:p>
@@ -17916,7 +17924,7 @@
             </a:pPr>
             <a:r>
               <a:rPr lang="en-US" b="1" dirty="0"/>
-              <a:t>Transaction Number</a:t>
+              <a:t>Payment Transaction Number</a:t>
             </a:r>
           </a:p>
           <a:p>

--- a/betchaBooking-USECASE.pptx
+++ b/betchaBooking-USECASE.pptx
@@ -318,7 +318,7 @@
           <a:p>
             <a:fld id="{D723CA93-4BBF-43AB-A538-39903E4C269C}" type="datetimeFigureOut">
               <a:rPr lang="en-US" smtClean="0"/>
-              <a:t>6/26/2025</a:t>
+              <a:t>6/27/2025</a:t>
             </a:fld>
             <a:endParaRPr lang="en-US"/>
           </a:p>
@@ -516,7 +516,7 @@
           <a:p>
             <a:fld id="{D723CA93-4BBF-43AB-A538-39903E4C269C}" type="datetimeFigureOut">
               <a:rPr lang="en-US" smtClean="0"/>
-              <a:t>6/26/2025</a:t>
+              <a:t>6/27/2025</a:t>
             </a:fld>
             <a:endParaRPr lang="en-US"/>
           </a:p>
@@ -724,7 +724,7 @@
           <a:p>
             <a:fld id="{D723CA93-4BBF-43AB-A538-39903E4C269C}" type="datetimeFigureOut">
               <a:rPr lang="en-US" smtClean="0"/>
-              <a:t>6/26/2025</a:t>
+              <a:t>6/27/2025</a:t>
             </a:fld>
             <a:endParaRPr lang="en-US"/>
           </a:p>
@@ -922,7 +922,7 @@
           <a:p>
             <a:fld id="{D723CA93-4BBF-43AB-A538-39903E4C269C}" type="datetimeFigureOut">
               <a:rPr lang="en-US" smtClean="0"/>
-              <a:t>6/26/2025</a:t>
+              <a:t>6/27/2025</a:t>
             </a:fld>
             <a:endParaRPr lang="en-US"/>
           </a:p>
@@ -1197,7 +1197,7 @@
           <a:p>
             <a:fld id="{D723CA93-4BBF-43AB-A538-39903E4C269C}" type="datetimeFigureOut">
               <a:rPr lang="en-US" smtClean="0"/>
-              <a:t>6/26/2025</a:t>
+              <a:t>6/27/2025</a:t>
             </a:fld>
             <a:endParaRPr lang="en-US"/>
           </a:p>
@@ -1462,7 +1462,7 @@
           <a:p>
             <a:fld id="{D723CA93-4BBF-43AB-A538-39903E4C269C}" type="datetimeFigureOut">
               <a:rPr lang="en-US" smtClean="0"/>
-              <a:t>6/26/2025</a:t>
+              <a:t>6/27/2025</a:t>
             </a:fld>
             <a:endParaRPr lang="en-US"/>
           </a:p>
@@ -1874,7 +1874,7 @@
           <a:p>
             <a:fld id="{D723CA93-4BBF-43AB-A538-39903E4C269C}" type="datetimeFigureOut">
               <a:rPr lang="en-US" smtClean="0"/>
-              <a:t>6/26/2025</a:t>
+              <a:t>6/27/2025</a:t>
             </a:fld>
             <a:endParaRPr lang="en-US"/>
           </a:p>
@@ -2015,7 +2015,7 @@
           <a:p>
             <a:fld id="{D723CA93-4BBF-43AB-A538-39903E4C269C}" type="datetimeFigureOut">
               <a:rPr lang="en-US" smtClean="0"/>
-              <a:t>6/26/2025</a:t>
+              <a:t>6/27/2025</a:t>
             </a:fld>
             <a:endParaRPr lang="en-US"/>
           </a:p>
@@ -2128,7 +2128,7 @@
           <a:p>
             <a:fld id="{D723CA93-4BBF-43AB-A538-39903E4C269C}" type="datetimeFigureOut">
               <a:rPr lang="en-US" smtClean="0"/>
-              <a:t>6/26/2025</a:t>
+              <a:t>6/27/2025</a:t>
             </a:fld>
             <a:endParaRPr lang="en-US"/>
           </a:p>
@@ -2439,7 +2439,7 @@
           <a:p>
             <a:fld id="{D723CA93-4BBF-43AB-A538-39903E4C269C}" type="datetimeFigureOut">
               <a:rPr lang="en-US" smtClean="0"/>
-              <a:t>6/26/2025</a:t>
+              <a:t>6/27/2025</a:t>
             </a:fld>
             <a:endParaRPr lang="en-US"/>
           </a:p>
@@ -2727,7 +2727,7 @@
           <a:p>
             <a:fld id="{D723CA93-4BBF-43AB-A538-39903E4C269C}" type="datetimeFigureOut">
               <a:rPr lang="en-US" smtClean="0"/>
-              <a:t>6/26/2025</a:t>
+              <a:t>6/27/2025</a:t>
             </a:fld>
             <a:endParaRPr lang="en-US"/>
           </a:p>
@@ -2968,7 +2968,7 @@
           <a:p>
             <a:fld id="{D723CA93-4BBF-43AB-A538-39903E4C269C}" type="datetimeFigureOut">
               <a:rPr lang="en-US" smtClean="0"/>
-              <a:t>6/26/2025</a:t>
+              <a:t>6/27/2025</a:t>
             </a:fld>
             <a:endParaRPr lang="en-US"/>
           </a:p>
@@ -3630,7 +3630,7 @@
         <p:spPr>
           <a:xfrm>
             <a:off x="252614" y="4083595"/>
-            <a:ext cx="5853084" cy="2272145"/>
+            <a:ext cx="5853084" cy="2622005"/>
           </a:xfrm>
           <a:prstGeom prst="roundRect">
             <a:avLst/>
@@ -3665,11 +3665,11 @@
           <a:lstStyle/>
           <a:p>
             <a:r>
-              <a:rPr lang="en-US" sz="2000" b="1" dirty="0" err="1"/>
+              <a:rPr lang="en-US" sz="1600" b="1" dirty="0" err="1"/>
               <a:t>modalNotif</a:t>
             </a:r>
             <a:r>
-              <a:rPr lang="en-US" sz="2000" b="1" dirty="0"/>
+              <a:rPr lang="en-US" sz="1600" b="1" dirty="0"/>
               <a:t>(</a:t>
             </a:r>
           </a:p>
@@ -3679,11 +3679,11 @@
               <a:buChar char="•"/>
             </a:pPr>
             <a:r>
-              <a:rPr lang="en-US" sz="2000" b="1" dirty="0" err="1"/>
+              <a:rPr lang="en-US" sz="1600" b="1" dirty="0" err="1"/>
               <a:t>Notif</a:t>
             </a:r>
             <a:r>
-              <a:rPr lang="en-US" sz="2000" b="1" dirty="0"/>
+              <a:rPr lang="en-US" sz="1600" b="1" dirty="0"/>
               <a:t>-Category (Cancellation Req, Message)</a:t>
             </a:r>
           </a:p>
@@ -3693,10 +3693,10 @@
               <a:buChar char="•"/>
             </a:pPr>
             <a:r>
-              <a:rPr lang="en-US" sz="2000" b="1" dirty="0" err="1"/>
+              <a:rPr lang="en-US" sz="1600" b="1" dirty="0" err="1"/>
               <a:t>senderName</a:t>
             </a:r>
-            <a:endParaRPr lang="en-US" sz="2000" b="1" dirty="0"/>
+            <a:endParaRPr lang="en-US" sz="1600" b="1" dirty="0"/>
           </a:p>
           <a:p>
             <a:pPr marL="342900" indent="-342900">
@@ -3704,7 +3704,17 @@
               <a:buChar char="•"/>
             </a:pPr>
             <a:r>
-              <a:rPr lang="en-US" sz="2000" b="1" dirty="0"/>
+              <a:rPr lang="en-US" sz="1600" b="1" dirty="0"/>
+              <a:t>Role of sender</a:t>
+            </a:r>
+          </a:p>
+          <a:p>
+            <a:pPr marL="342900" indent="-342900">
+              <a:buFont typeface="Arial" panose="020B0604020202020204" pitchFamily="34" charset="0"/>
+              <a:buChar char="•"/>
+            </a:pPr>
+            <a:r>
+              <a:rPr lang="en-US" sz="1600" b="1" dirty="0"/>
               <a:t>Date and time</a:t>
             </a:r>
           </a:p>
@@ -3714,7 +3724,7 @@
               <a:buChar char="•"/>
             </a:pPr>
             <a:r>
-              <a:rPr lang="en-US" sz="2000" b="1" dirty="0"/>
+              <a:rPr lang="en-US" sz="1600" b="1" dirty="0"/>
               <a:t>Message</a:t>
             </a:r>
           </a:p>
@@ -3724,21 +3734,31 @@
               <a:buChar char="•"/>
             </a:pPr>
             <a:r>
-              <a:rPr lang="en-US" sz="2000" b="1" dirty="0"/>
+              <a:rPr lang="en-US" sz="1600" b="1" dirty="0"/>
+              <a:t>// if cancel request ? Reason to send for guest</a:t>
+            </a:r>
+          </a:p>
+          <a:p>
+            <a:pPr marL="342900" indent="-342900">
+              <a:buFont typeface="Arial" panose="020B0604020202020204" pitchFamily="34" charset="0"/>
+              <a:buChar char="•"/>
+            </a:pPr>
+            <a:r>
+              <a:rPr lang="en-US" sz="1600" b="1" dirty="0"/>
               <a:t>If (Cancel Request ? toggle </a:t>
             </a:r>
             <a:r>
-              <a:rPr lang="en-US" sz="2000" b="1" dirty="0" err="1"/>
+              <a:rPr lang="en-US" sz="1600" b="1" dirty="0" err="1"/>
               <a:t>btnApproval</a:t>
             </a:r>
             <a:r>
-              <a:rPr lang="en-US" sz="2000" b="1" dirty="0"/>
+              <a:rPr lang="en-US" sz="1600" b="1" dirty="0"/>
               <a:t>)</a:t>
             </a:r>
           </a:p>
           <a:p>
             <a:r>
-              <a:rPr lang="en-US" sz="2000" b="1" dirty="0"/>
+              <a:rPr lang="en-US" sz="1600" b="1" dirty="0"/>
               <a:t>)</a:t>
             </a:r>
           </a:p>
@@ -3948,7 +3968,7 @@
         </p:nvSpPr>
         <p:spPr>
           <a:xfrm>
-            <a:off x="8398626" y="5906472"/>
+            <a:off x="8268856" y="6122271"/>
             <a:ext cx="3670530" cy="707886"/>
           </a:xfrm>
           <a:prstGeom prst="rect">
@@ -3985,7 +4005,7 @@
         <p:spPr>
           <a:xfrm>
             <a:off x="6338916" y="4212904"/>
-            <a:ext cx="2842029" cy="1596769"/>
+            <a:ext cx="5400502" cy="1975861"/>
           </a:xfrm>
           <a:prstGeom prst="roundRect">
             <a:avLst/>
@@ -4035,7 +4055,14 @@
             </a:pPr>
             <a:r>
               <a:rPr lang="en-US" sz="2000" b="1" dirty="0"/>
-              <a:t>Approve</a:t>
+              <a:t>Approve (refund information modal: </a:t>
+            </a:r>
+          </a:p>
+          <a:p>
+            <a:pPr lvl="1"/>
+            <a:r>
+              <a:rPr lang="en-US" sz="2000" b="1" dirty="0"/>
+              <a:t>‘Transaction #, Amount refund, Mode of refund, Number [bank || e-wallet]’)</a:t>
             </a:r>
           </a:p>
           <a:p>
@@ -4072,12 +4099,12 @@
         </p:nvCxnSpPr>
         <p:spPr>
           <a:xfrm rot="10800000" flipV="1">
-            <a:off x="4701310" y="4668985"/>
-            <a:ext cx="1756761" cy="891305"/>
+            <a:off x="4238172" y="4668985"/>
+            <a:ext cx="2219901" cy="1519780"/>
           </a:xfrm>
           <a:prstGeom prst="curvedConnector3">
             <a:avLst>
-              <a:gd name="adj1" fmla="val 99947"/>
+              <a:gd name="adj1" fmla="val 50000"/>
             </a:avLst>
           </a:prstGeom>
           <a:ln w="19050" cap="flat" cmpd="sng" algn="ctr">
@@ -15537,7 +15564,7 @@
         </p:nvGraphicFramePr>
         <p:xfrm>
           <a:off x="7047624" y="1641090"/>
-          <a:ext cx="4755757" cy="1281598"/>
+          <a:ext cx="4755757" cy="1129198"/>
         </p:xfrm>
         <a:graphic>
           <a:graphicData uri="http://schemas.openxmlformats.org/drawingml/2006/table">
@@ -17691,7 +17718,7 @@
         </p:nvSpPr>
         <p:spPr>
           <a:xfrm>
-            <a:off x="277090" y="1789043"/>
+            <a:off x="3057236" y="372765"/>
             <a:ext cx="6077528" cy="3056235"/>
           </a:xfrm>
           <a:prstGeom prst="roundRect">
@@ -17831,8 +17858,8 @@
         </p:nvSpPr>
         <p:spPr>
           <a:xfrm>
-            <a:off x="6890329" y="2012722"/>
-            <a:ext cx="4858326" cy="2832556"/>
+            <a:off x="3147391" y="3538328"/>
+            <a:ext cx="5897217" cy="3056236"/>
           </a:xfrm>
           <a:prstGeom prst="roundRect">
             <a:avLst>
@@ -17870,31 +17897,27 @@
           <a:p>
             <a:r>
               <a:rPr lang="en-US" b="1" dirty="0"/>
-              <a:t>Confirm Payment{</a:t>
-            </a:r>
-          </a:p>
-          <a:p>
-            <a:pPr marL="742950" lvl="1" indent="-285750">
-              <a:buFont typeface="Arial" panose="020B0604020202020204" pitchFamily="34" charset="0"/>
-              <a:buChar char="•"/>
-            </a:pPr>
+              <a:t>Payments{</a:t>
+            </a:r>
+          </a:p>
+          <a:p>
             <a:r>
               <a:rPr lang="en-US" b="1" dirty="0"/>
-              <a:t>For: Reservation/Full Payment</a:t>
-            </a:r>
-          </a:p>
-          <a:p>
-            <a:pPr marL="742950" lvl="1" indent="-285750">
+              <a:t>List {</a:t>
+            </a:r>
+          </a:p>
+          <a:p>
+            <a:pPr marL="285750" indent="-285750">
               <a:buFont typeface="Arial" panose="020B0604020202020204" pitchFamily="34" charset="0"/>
               <a:buChar char="•"/>
             </a:pPr>
             <a:r>
               <a:rPr lang="en-US" b="1" dirty="0"/>
-              <a:t>Mode of Payment (</a:t>
+              <a:t>Reservation, </a:t>
             </a:r>
             <a:r>
               <a:rPr lang="en-US" b="1" dirty="0" err="1"/>
-              <a:t>Gcash</a:t>
+              <a:t>PaymentNo</a:t>
             </a:r>
             <a:r>
               <a:rPr lang="en-US" b="1" dirty="0"/>
@@ -17902,56 +17925,55 @@
             </a:r>
             <a:r>
               <a:rPr lang="en-US" b="1" dirty="0" err="1"/>
-              <a:t>Gotyme</a:t>
+              <a:t>PaymentMode</a:t>
             </a:r>
             <a:r>
               <a:rPr lang="en-US" b="1" dirty="0"/>
-              <a:t>, maya, </a:t>
+              <a:t>, Amount, </a:t>
+            </a:r>
+          </a:p>
+          <a:p>
+            <a:r>
+              <a:rPr lang="en-US" b="1" dirty="0"/>
+              <a:t>Button: Approve, Decline</a:t>
+            </a:r>
+          </a:p>
+          <a:p>
+            <a:pPr marL="285750" indent="-285750">
+              <a:buFont typeface="Arial" panose="020B0604020202020204" pitchFamily="34" charset="0"/>
+              <a:buChar char="•"/>
+            </a:pPr>
+            <a:r>
+              <a:rPr lang="en-US" b="1" dirty="0"/>
+              <a:t>Package Payment, </a:t>
             </a:r>
             <a:r>
               <a:rPr lang="en-US" b="1" dirty="0" err="1"/>
-              <a:t>UnionBank</a:t>
+              <a:t>PaymentNo</a:t>
             </a:r>
             <a:r>
               <a:rPr lang="en-US" b="1" dirty="0"/>
-              <a:t>)</a:t>
-            </a:r>
-          </a:p>
-          <a:p>
-            <a:pPr marL="742950" lvl="1" indent="-285750">
-              <a:buFont typeface="Arial" panose="020B0604020202020204" pitchFamily="34" charset="0"/>
-              <a:buChar char="•"/>
-            </a:pPr>
+              <a:t>, </a:t>
+            </a:r>
+            <a:r>
+              <a:rPr lang="en-US" b="1" dirty="0" err="1"/>
+              <a:t>PaymentMode</a:t>
+            </a:r>
             <a:r>
               <a:rPr lang="en-US" b="1" dirty="0"/>
-              <a:t>Payment Transaction Number</a:t>
-            </a:r>
-          </a:p>
-          <a:p>
-            <a:pPr marL="742950" lvl="1" indent="-285750">
-              <a:buFont typeface="Arial" panose="020B0604020202020204" pitchFamily="34" charset="0"/>
-              <a:buChar char="•"/>
-            </a:pPr>
+              <a:t> Amount, </a:t>
+            </a:r>
+          </a:p>
+          <a:p>
             <a:r>
               <a:rPr lang="en-US" b="1" dirty="0"/>
-              <a:t>Date &amp; time of payment</a:t>
-            </a:r>
-          </a:p>
-          <a:p>
-            <a:pPr marL="742950" lvl="1" indent="-285750">
-              <a:buFont typeface="Arial" panose="020B0604020202020204" pitchFamily="34" charset="0"/>
-              <a:buChar char="•"/>
-            </a:pPr>
-            <a:endParaRPr lang="en-US" b="1" dirty="0"/>
-          </a:p>
-          <a:p>
-            <a:pPr marL="742950" lvl="1" indent="-285750">
-              <a:buFont typeface="Arial" panose="020B0604020202020204" pitchFamily="34" charset="0"/>
-              <a:buChar char="•"/>
-            </a:pPr>
+              <a:t>Button: Approve, Decline</a:t>
+            </a:r>
+          </a:p>
+          <a:p>
             <a:r>
               <a:rPr lang="en-US" b="1" dirty="0"/>
-              <a:t>Button : Confirm and Decline</a:t>
+              <a:t>}</a:t>
             </a:r>
           </a:p>
           <a:p>
@@ -18277,8 +18299,8 @@
         </p:nvSpPr>
         <p:spPr>
           <a:xfrm>
-            <a:off x="122383" y="267855"/>
-            <a:ext cx="7081981" cy="4100945"/>
+            <a:off x="122383" y="350981"/>
+            <a:ext cx="7081981" cy="4017819"/>
           </a:xfrm>
           <a:prstGeom prst="roundRect">
             <a:avLst>
@@ -18315,7 +18337,7 @@
           <a:lstStyle/>
           <a:p>
             <a:r>
-              <a:rPr lang="en-US" sz="1600" b="1" dirty="0"/>
+              <a:rPr lang="en-US" sz="1400" b="1" dirty="0"/>
               <a:t>Section 1{</a:t>
             </a:r>
           </a:p>
@@ -18325,19 +18347,19 @@
               <a:buChar char="•"/>
             </a:pPr>
             <a:r>
-              <a:rPr lang="en-US" sz="1600" b="1" dirty="0"/>
+              <a:rPr lang="en-US" sz="1400" b="1" dirty="0"/>
               <a:t>Calendar with booked dates and maintenance</a:t>
             </a:r>
           </a:p>
           <a:p>
             <a:r>
-              <a:rPr lang="en-US" sz="1600" b="1" dirty="0"/>
+              <a:rPr lang="en-US" sz="1400" b="1" dirty="0"/>
               <a:t>}</a:t>
             </a:r>
           </a:p>
           <a:p>
             <a:r>
-              <a:rPr lang="en-US" sz="1600" b="1" dirty="0"/>
+              <a:rPr lang="en-US" sz="1400" b="1" dirty="0"/>
               <a:t>Section 2{</a:t>
             </a:r>
           </a:p>
@@ -18347,16 +18369,16 @@
               <a:buChar char="•"/>
             </a:pPr>
             <a:r>
-              <a:rPr lang="en-US" sz="1600" b="1" dirty="0"/>
+              <a:rPr lang="en-US" sz="1400" b="1" dirty="0"/>
               <a:t>Stack of booking list </a:t>
             </a:r>
             <a:r>
-              <a:rPr lang="en-US" sz="1600" b="1" dirty="0" err="1"/>
+              <a:rPr lang="en-US" sz="1400" b="1" dirty="0" err="1"/>
               <a:t>Accorfing</a:t>
             </a:r>
             <a:r>
-              <a:rPr lang="en-US" sz="1600" b="1" dirty="0"/>
-              <a:t> to selected date from calendar</a:t>
+              <a:rPr lang="en-US" sz="1400" b="1" dirty="0"/>
+              <a:t> to selected date from calendar (section 1)</a:t>
             </a:r>
           </a:p>
           <a:p>
@@ -18365,38 +18387,38 @@
               <a:buChar char="•"/>
             </a:pPr>
             <a:r>
-              <a:rPr lang="en-US" sz="1600" b="1" dirty="0"/>
+              <a:rPr lang="en-US" sz="1400" b="1" dirty="0"/>
               <a:t>(Name of property, </a:t>
             </a:r>
             <a:r>
-              <a:rPr lang="en-US" sz="1600" b="1" dirty="0" err="1"/>
+              <a:rPr lang="en-US" sz="1400" b="1" dirty="0" err="1"/>
               <a:t>CheckIn-CheckOut</a:t>
             </a:r>
             <a:r>
-              <a:rPr lang="en-US" sz="1600" b="1" dirty="0"/>
+              <a:rPr lang="en-US" sz="1400" b="1" dirty="0"/>
               <a:t> (Time, date), button : (</a:t>
             </a:r>
             <a:r>
-              <a:rPr lang="en-US" sz="1600" b="1" dirty="0" err="1"/>
+              <a:rPr lang="en-US" sz="1400" b="1" dirty="0" err="1"/>
               <a:t>viewBookingModal</a:t>
             </a:r>
             <a:r>
-              <a:rPr lang="en-US" sz="1600" b="1" dirty="0"/>
+              <a:rPr lang="en-US" sz="1400" b="1" dirty="0"/>
               <a:t>))</a:t>
             </a:r>
           </a:p>
           <a:p>
             <a:r>
-              <a:rPr lang="en-US" sz="1600" b="1" dirty="0"/>
+              <a:rPr lang="en-US" sz="1400" b="1" dirty="0"/>
               <a:t>}</a:t>
             </a:r>
           </a:p>
           <a:p>
-            <a:endParaRPr lang="en-US" sz="1600" b="1" dirty="0"/>
-          </a:p>
-          <a:p>
-            <a:r>
-              <a:rPr lang="en-US" sz="1600" b="1" dirty="0"/>
+            <a:endParaRPr lang="en-US" sz="1400" b="1" dirty="0"/>
+          </a:p>
+          <a:p>
+            <a:r>
+              <a:rPr lang="en-US" sz="1400" b="1" dirty="0"/>
               <a:t>Section 3 {</a:t>
             </a:r>
           </a:p>
@@ -18406,30 +18428,30 @@
               <a:buChar char="•"/>
             </a:pPr>
             <a:r>
-              <a:rPr lang="en-US" sz="1600" b="1" dirty="0"/>
+              <a:rPr lang="en-US" sz="1400" b="1" dirty="0"/>
               <a:t>Category (</a:t>
             </a:r>
             <a:r>
-              <a:rPr lang="en-US" sz="1600" b="1" dirty="0" err="1"/>
+              <a:rPr lang="en-US" sz="1400" b="1" dirty="0" err="1"/>
               <a:t>CheckIn</a:t>
             </a:r>
             <a:r>
-              <a:rPr lang="en-US" sz="1600" b="1" dirty="0"/>
+              <a:rPr lang="en-US" sz="1400" b="1" dirty="0"/>
               <a:t>, </a:t>
             </a:r>
             <a:r>
-              <a:rPr lang="en-US" sz="1600" b="1" dirty="0" err="1"/>
+              <a:rPr lang="en-US" sz="1400" b="1" dirty="0" err="1"/>
               <a:t>CheckOut</a:t>
             </a:r>
             <a:r>
-              <a:rPr lang="en-US" sz="1600" b="1" dirty="0"/>
+              <a:rPr lang="en-US" sz="1400" b="1" dirty="0"/>
               <a:t> Today List)</a:t>
             </a:r>
           </a:p>
           <a:p>
             <a:pPr lvl="2"/>
             <a:r>
-              <a:rPr lang="en-US" sz="1600" b="1" dirty="0"/>
+              <a:rPr lang="en-US" sz="1400" b="1" dirty="0"/>
               <a:t>(for check in only)</a:t>
             </a:r>
           </a:p>
@@ -18439,11 +18461,11 @@
               <a:buChar char="•"/>
             </a:pPr>
             <a:r>
-              <a:rPr lang="en-US" sz="1600" b="1" dirty="0"/>
+              <a:rPr lang="en-US" sz="1400" b="1" dirty="0"/>
               <a:t>Button : confirmation of </a:t>
             </a:r>
             <a:r>
-              <a:rPr lang="en-US" sz="1600" b="1" dirty="0">
+              <a:rPr lang="en-US" sz="1400" b="1" dirty="0">
                 <a:solidFill>
                   <a:srgbClr val="FF0000"/>
                 </a:solidFill>
@@ -18451,11 +18473,11 @@
               <a:t>check in </a:t>
             </a:r>
             <a:r>
-              <a:rPr lang="en-US" sz="1600" b="1" dirty="0"/>
+              <a:rPr lang="en-US" sz="1400" b="1" dirty="0"/>
               <a:t>and</a:t>
             </a:r>
             <a:r>
-              <a:rPr lang="en-US" sz="1600" b="1" dirty="0">
+              <a:rPr lang="en-US" sz="1400" b="1" dirty="0">
                 <a:solidFill>
                   <a:srgbClr val="FF0000"/>
                 </a:solidFill>
@@ -18463,7 +18485,7 @@
               <a:t> cash payment </a:t>
             </a:r>
             <a:r>
-              <a:rPr lang="en-US" sz="1600" b="1" dirty="0"/>
+              <a:rPr lang="en-US" sz="1400" b="1" dirty="0"/>
               <a:t>modal</a:t>
             </a:r>
           </a:p>
@@ -18473,7 +18495,7 @@
               <a:buChar char="•"/>
             </a:pPr>
             <a:r>
-              <a:rPr lang="en-US" sz="1600" b="1" dirty="0"/>
+              <a:rPr lang="en-US" sz="1400" b="1" dirty="0"/>
               <a:t> Property Name</a:t>
             </a:r>
           </a:p>
@@ -18483,7 +18505,7 @@
               <a:buChar char="•"/>
             </a:pPr>
             <a:r>
-              <a:rPr lang="en-US" sz="1600" b="1" dirty="0"/>
+              <a:rPr lang="en-US" sz="1400" b="1" dirty="0"/>
               <a:t>Guest Name</a:t>
             </a:r>
           </a:p>
@@ -18493,7 +18515,7 @@
               <a:buChar char="•"/>
             </a:pPr>
             <a:r>
-              <a:rPr lang="en-US" sz="1600" b="1" dirty="0"/>
+              <a:rPr lang="en-US" sz="1400" b="1" dirty="0"/>
               <a:t>Check In or Check Out time</a:t>
             </a:r>
           </a:p>
@@ -18503,29 +18525,29 @@
               <a:buChar char="•"/>
             </a:pPr>
             <a:r>
-              <a:rPr lang="en-US" sz="1600" b="1" dirty="0"/>
+              <a:rPr lang="en-US" sz="1400" b="1" dirty="0"/>
               <a:t>Button : </a:t>
             </a:r>
             <a:r>
-              <a:rPr lang="en-US" sz="1600" b="1" dirty="0" err="1"/>
+              <a:rPr lang="en-US" sz="1400" b="1" dirty="0" err="1"/>
               <a:t>completeBtn</a:t>
             </a:r>
             <a:r>
-              <a:rPr lang="en-US" sz="1600" b="1" dirty="0"/>
+              <a:rPr lang="en-US" sz="1400" b="1" dirty="0"/>
               <a:t>(</a:t>
             </a:r>
             <a:r>
-              <a:rPr lang="en-US" sz="1600" b="1" dirty="0" err="1"/>
+              <a:rPr lang="en-US" sz="1400" b="1" dirty="0" err="1"/>
               <a:t>completeModal</a:t>
             </a:r>
             <a:r>
-              <a:rPr lang="en-US" sz="1600" b="1" dirty="0"/>
+              <a:rPr lang="en-US" sz="1400" b="1" dirty="0"/>
               <a:t>) for checkout</a:t>
             </a:r>
           </a:p>
           <a:p>
             <a:r>
-              <a:rPr lang="en-US" sz="1600" b="1" dirty="0"/>
+              <a:rPr lang="en-US" sz="1400" b="1" dirty="0"/>
               <a:t>}</a:t>
             </a:r>
           </a:p>
@@ -18545,8 +18567,8 @@
         </p:nvSpPr>
         <p:spPr>
           <a:xfrm>
-            <a:off x="7571511" y="430446"/>
-            <a:ext cx="4341092" cy="2647575"/>
+            <a:off x="7571511" y="87746"/>
+            <a:ext cx="4341092" cy="2990276"/>
           </a:xfrm>
           <a:prstGeom prst="roundRect">
             <a:avLst>
@@ -18601,16 +18623,6 @@
               <a:t>DisplayDetails</a:t>
             </a:r>
             <a:endParaRPr lang="en-US" sz="1600" b="1" dirty="0"/>
-          </a:p>
-          <a:p>
-            <a:pPr marL="1200150" lvl="2" indent="-285750">
-              <a:buFont typeface="Arial" panose="020B0604020202020204" pitchFamily="34" charset="0"/>
-              <a:buChar char="•"/>
-            </a:pPr>
-            <a:r>
-              <a:rPr lang="en-US" sz="1600" b="1" dirty="0"/>
-              <a:t>Name of property</a:t>
-            </a:r>
           </a:p>
           <a:p>
             <a:pPr marL="1200150" lvl="2" indent="-285750">
@@ -18877,13 +18889,15 @@
               </a:ext>
             </a:extLst>
           </p:cNvPr>
-          <p:cNvCxnSpPr/>
+          <p:cNvCxnSpPr>
+            <a:cxnSpLocks/>
+          </p:cNvCxnSpPr>
           <p:nvPr/>
         </p:nvCxnSpPr>
         <p:spPr>
-          <a:xfrm flipV="1">
-            <a:off x="2881745" y="2013527"/>
-            <a:ext cx="4765964" cy="83128"/>
+          <a:xfrm>
+            <a:off x="2690191" y="1842052"/>
+            <a:ext cx="4957518" cy="171475"/>
           </a:xfrm>
           <a:prstGeom prst="curvedConnector3">
             <a:avLst/>
@@ -18929,8 +18943,8 @@
         </p:nvCxnSpPr>
         <p:spPr>
           <a:xfrm flipV="1">
-            <a:off x="5994400" y="2447636"/>
-            <a:ext cx="2429164" cy="2225964"/>
+            <a:off x="5994400" y="2619111"/>
+            <a:ext cx="4144821" cy="2054489"/>
           </a:xfrm>
           <a:prstGeom prst="curvedConnector3">
             <a:avLst>
@@ -18978,8 +18992,8 @@
         </p:nvCxnSpPr>
         <p:spPr>
           <a:xfrm flipV="1">
-            <a:off x="5089236" y="3537527"/>
-            <a:ext cx="2849422" cy="757382"/>
+            <a:off x="5340626" y="3537527"/>
+            <a:ext cx="2598032" cy="398369"/>
           </a:xfrm>
           <a:prstGeom prst="curvedConnector3">
             <a:avLst>

--- a/betchaBooking-USECASE.pptx
+++ b/betchaBooking-USECASE.pptx
@@ -318,7 +318,7 @@
           <a:p>
             <a:fld id="{D723CA93-4BBF-43AB-A538-39903E4C269C}" type="datetimeFigureOut">
               <a:rPr lang="en-US" smtClean="0"/>
-              <a:t>6/27/2025</a:t>
+              <a:t>6/28/2025</a:t>
             </a:fld>
             <a:endParaRPr lang="en-US"/>
           </a:p>
@@ -516,7 +516,7 @@
           <a:p>
             <a:fld id="{D723CA93-4BBF-43AB-A538-39903E4C269C}" type="datetimeFigureOut">
               <a:rPr lang="en-US" smtClean="0"/>
-              <a:t>6/27/2025</a:t>
+              <a:t>6/28/2025</a:t>
             </a:fld>
             <a:endParaRPr lang="en-US"/>
           </a:p>
@@ -724,7 +724,7 @@
           <a:p>
             <a:fld id="{D723CA93-4BBF-43AB-A538-39903E4C269C}" type="datetimeFigureOut">
               <a:rPr lang="en-US" smtClean="0"/>
-              <a:t>6/27/2025</a:t>
+              <a:t>6/28/2025</a:t>
             </a:fld>
             <a:endParaRPr lang="en-US"/>
           </a:p>
@@ -922,7 +922,7 @@
           <a:p>
             <a:fld id="{D723CA93-4BBF-43AB-A538-39903E4C269C}" type="datetimeFigureOut">
               <a:rPr lang="en-US" smtClean="0"/>
-              <a:t>6/27/2025</a:t>
+              <a:t>6/28/2025</a:t>
             </a:fld>
             <a:endParaRPr lang="en-US"/>
           </a:p>
@@ -1197,7 +1197,7 @@
           <a:p>
             <a:fld id="{D723CA93-4BBF-43AB-A538-39903E4C269C}" type="datetimeFigureOut">
               <a:rPr lang="en-US" smtClean="0"/>
-              <a:t>6/27/2025</a:t>
+              <a:t>6/28/2025</a:t>
             </a:fld>
             <a:endParaRPr lang="en-US"/>
           </a:p>
@@ -1462,7 +1462,7 @@
           <a:p>
             <a:fld id="{D723CA93-4BBF-43AB-A538-39903E4C269C}" type="datetimeFigureOut">
               <a:rPr lang="en-US" smtClean="0"/>
-              <a:t>6/27/2025</a:t>
+              <a:t>6/28/2025</a:t>
             </a:fld>
             <a:endParaRPr lang="en-US"/>
           </a:p>
@@ -1874,7 +1874,7 @@
           <a:p>
             <a:fld id="{D723CA93-4BBF-43AB-A538-39903E4C269C}" type="datetimeFigureOut">
               <a:rPr lang="en-US" smtClean="0"/>
-              <a:t>6/27/2025</a:t>
+              <a:t>6/28/2025</a:t>
             </a:fld>
             <a:endParaRPr lang="en-US"/>
           </a:p>
@@ -2015,7 +2015,7 @@
           <a:p>
             <a:fld id="{D723CA93-4BBF-43AB-A538-39903E4C269C}" type="datetimeFigureOut">
               <a:rPr lang="en-US" smtClean="0"/>
-              <a:t>6/27/2025</a:t>
+              <a:t>6/28/2025</a:t>
             </a:fld>
             <a:endParaRPr lang="en-US"/>
           </a:p>
@@ -2128,7 +2128,7 @@
           <a:p>
             <a:fld id="{D723CA93-4BBF-43AB-A538-39903E4C269C}" type="datetimeFigureOut">
               <a:rPr lang="en-US" smtClean="0"/>
-              <a:t>6/27/2025</a:t>
+              <a:t>6/28/2025</a:t>
             </a:fld>
             <a:endParaRPr lang="en-US"/>
           </a:p>
@@ -2439,7 +2439,7 @@
           <a:p>
             <a:fld id="{D723CA93-4BBF-43AB-A538-39903E4C269C}" type="datetimeFigureOut">
               <a:rPr lang="en-US" smtClean="0"/>
-              <a:t>6/27/2025</a:t>
+              <a:t>6/28/2025</a:t>
             </a:fld>
             <a:endParaRPr lang="en-US"/>
           </a:p>
@@ -2727,7 +2727,7 @@
           <a:p>
             <a:fld id="{D723CA93-4BBF-43AB-A538-39903E4C269C}" type="datetimeFigureOut">
               <a:rPr lang="en-US" smtClean="0"/>
-              <a:t>6/27/2025</a:t>
+              <a:t>6/28/2025</a:t>
             </a:fld>
             <a:endParaRPr lang="en-US"/>
           </a:p>
@@ -2968,7 +2968,7 @@
           <a:p>
             <a:fld id="{D723CA93-4BBF-43AB-A538-39903E4C269C}" type="datetimeFigureOut">
               <a:rPr lang="en-US" smtClean="0"/>
-              <a:t>6/27/2025</a:t>
+              <a:t>6/28/2025</a:t>
             </a:fld>
             <a:endParaRPr lang="en-US"/>
           </a:p>
@@ -11103,8 +11103,13 @@
           <a:p>
             <a:r>
               <a:rPr lang="en-US" sz="2000" b="1" dirty="0"/>
-              <a:t>Search (By: Date &amp; time, Query(Name, Activity, Role))</a:t>
-            </a:r>
+              <a:t>Search (By: Date &amp; time </a:t>
+            </a:r>
+            <a:r>
+              <a:rPr lang="en-US" sz="2000" b="1"/>
+              <a:t>or Query)</a:t>
+            </a:r>
+            <a:endParaRPr lang="en-US" sz="2000" b="1" dirty="0"/>
           </a:p>
           <a:p>
             <a:endParaRPr lang="en-US" sz="2000" b="1" dirty="0"/>
@@ -11120,7 +11125,15 @@
             </a:r>
             <a:r>
               <a:rPr lang="en-US" sz="2000" b="1" dirty="0"/>
-              <a:t>, Name, Activity, Role)</a:t>
+              <a:t>, Name, Activity, </a:t>
+            </a:r>
+            <a:r>
+              <a:rPr lang="en-US" sz="2000" b="1" dirty="0" err="1"/>
+              <a:t>userType</a:t>
+            </a:r>
+            <a:r>
+              <a:rPr lang="en-US" sz="2000" b="1" dirty="0"/>
+              <a:t>)</a:t>
             </a:r>
           </a:p>
         </p:txBody>
@@ -12924,7 +12937,7 @@
             </a:pPr>
             <a:r>
               <a:rPr lang="en-US" sz="1600" b="1" dirty="0"/>
-              <a:t>Most Peak Booking Day this (Toggle):</a:t>
+              <a:t>Most Peak Property this (Toggle):</a:t>
             </a:r>
           </a:p>
           <a:p>

--- a/betchaBooking-USECASE.pptx
+++ b/betchaBooking-USECASE.pptx
@@ -12937,7 +12937,7 @@
             </a:pPr>
             <a:r>
               <a:rPr lang="en-US" sz="1600" b="1" dirty="0"/>
-              <a:t>Most Peak Property this (Toggle):</a:t>
+              <a:t>Most Peak Booking Day this (Toggle):</a:t>
             </a:r>
           </a:p>
           <a:p>

--- a/betchaBooking-USECASE.pptx
+++ b/betchaBooking-USECASE.pptx
@@ -16387,13 +16387,13 @@
           <p:nvPr>
             <p:extLst>
               <p:ext uri="{D42A27DB-BD31-4B8C-83A1-F6EECF244321}">
-                <p14:modId xmlns:p14="http://schemas.microsoft.com/office/powerpoint/2010/main" val="1155612975"/>
+                <p14:modId xmlns:p14="http://schemas.microsoft.com/office/powerpoint/2010/main" val="1905982679"/>
               </p:ext>
             </p:extLst>
           </p:nvPr>
         </p:nvGraphicFramePr>
         <p:xfrm>
-          <a:off x="336566" y="4489621"/>
+          <a:off x="241826" y="5437905"/>
           <a:ext cx="9592291" cy="1354003"/>
         </p:xfrm>
         <a:graphic>
@@ -17359,7 +17359,7 @@
         </p:nvSpPr>
         <p:spPr>
           <a:xfrm>
-            <a:off x="279720" y="4267188"/>
+            <a:off x="184980" y="5215472"/>
             <a:ext cx="1724938" cy="276999"/>
           </a:xfrm>
           <a:prstGeom prst="rect">
@@ -17394,7 +17394,7 @@
         </p:nvSpPr>
         <p:spPr>
           <a:xfrm>
-            <a:off x="279720" y="3400330"/>
+            <a:off x="184980" y="4348614"/>
             <a:ext cx="3932474" cy="276999"/>
           </a:xfrm>
           <a:prstGeom prst="rect">
@@ -17429,7 +17429,7 @@
         </p:nvSpPr>
         <p:spPr>
           <a:xfrm>
-            <a:off x="327770" y="3678735"/>
+            <a:off x="233030" y="4627019"/>
             <a:ext cx="737709" cy="244198"/>
           </a:xfrm>
           <a:prstGeom prst="roundRect">
@@ -17478,7 +17478,632 @@
         </p:nvSpPr>
         <p:spPr>
           <a:xfrm>
-            <a:off x="327770" y="4017751"/>
+            <a:off x="233030" y="4966035"/>
+            <a:ext cx="737709" cy="244198"/>
+          </a:xfrm>
+          <a:prstGeom prst="roundRect">
+            <a:avLst/>
+          </a:prstGeom>
+        </p:spPr>
+        <p:style>
+          <a:lnRef idx="2">
+            <a:schemeClr val="accent1">
+              <a:shade val="15000"/>
+            </a:schemeClr>
+          </a:lnRef>
+          <a:fillRef idx="1">
+            <a:schemeClr val="accent1"/>
+          </a:fillRef>
+          <a:effectRef idx="0">
+            <a:schemeClr val="accent1"/>
+          </a:effectRef>
+          <a:fontRef idx="minor">
+            <a:schemeClr val="lt1"/>
+          </a:fontRef>
+        </p:style>
+        <p:txBody>
+          <a:bodyPr rtlCol="0" anchor="ctr"/>
+          <a:lstStyle/>
+          <a:p>
+            <a:pPr algn="ctr"/>
+            <a:r>
+              <a:rPr lang="en-US" sz="1000" dirty="0"/>
+              <a:t>2025 ↓</a:t>
+            </a:r>
+          </a:p>
+        </p:txBody>
+      </p:sp>
+      <p:graphicFrame>
+        <p:nvGraphicFramePr>
+          <p:cNvPr id="43" name="Table 42">
+            <a:extLst>
+              <a:ext uri="{FF2B5EF4-FFF2-40B4-BE49-F238E27FC236}">
+                <a16:creationId xmlns:a16="http://schemas.microsoft.com/office/drawing/2014/main" id="{174A3F03-EF4B-48A1-ACD7-CA612D7D7FA9}"/>
+              </a:ext>
+            </a:extLst>
+          </p:cNvPr>
+          <p:cNvGraphicFramePr>
+            <a:graphicFrameLocks noGrp="1"/>
+          </p:cNvGraphicFramePr>
+          <p:nvPr>
+            <p:extLst>
+              <p:ext uri="{D42A27DB-BD31-4B8C-83A1-F6EECF244321}">
+                <p14:modId xmlns:p14="http://schemas.microsoft.com/office/powerpoint/2010/main" val="3114196968"/>
+              </p:ext>
+            </p:extLst>
+          </p:nvPr>
+        </p:nvGraphicFramePr>
+        <p:xfrm>
+          <a:off x="3283982" y="3859496"/>
+          <a:ext cx="3502967" cy="1129917"/>
+        </p:xfrm>
+        <a:graphic>
+          <a:graphicData uri="http://schemas.openxmlformats.org/drawingml/2006/table">
+            <a:tbl>
+              <a:tblPr firstRow="1" bandRow="1">
+                <a:tableStyleId>{5C22544A-7EE6-4342-B048-85BDC9FD1C3A}</a:tableStyleId>
+              </a:tblPr>
+              <a:tblGrid>
+                <a:gridCol w="706049">
+                  <a:extLst>
+                    <a:ext uri="{9D8B030D-6E8A-4147-A177-3AD203B41FA5}">
+                      <a16:colId xmlns:a16="http://schemas.microsoft.com/office/drawing/2014/main" val="3731313920"/>
+                    </a:ext>
+                  </a:extLst>
+                </a:gridCol>
+                <a:gridCol w="706049">
+                  <a:extLst>
+                    <a:ext uri="{9D8B030D-6E8A-4147-A177-3AD203B41FA5}">
+                      <a16:colId xmlns:a16="http://schemas.microsoft.com/office/drawing/2014/main" val="1959877130"/>
+                    </a:ext>
+                  </a:extLst>
+                </a:gridCol>
+                <a:gridCol w="706049">
+                  <a:extLst>
+                    <a:ext uri="{9D8B030D-6E8A-4147-A177-3AD203B41FA5}">
+                      <a16:colId xmlns:a16="http://schemas.microsoft.com/office/drawing/2014/main" val="2617612810"/>
+                    </a:ext>
+                  </a:extLst>
+                </a:gridCol>
+                <a:gridCol w="706049">
+                  <a:extLst>
+                    <a:ext uri="{9D8B030D-6E8A-4147-A177-3AD203B41FA5}">
+                      <a16:colId xmlns:a16="http://schemas.microsoft.com/office/drawing/2014/main" val="144315485"/>
+                    </a:ext>
+                  </a:extLst>
+                </a:gridCol>
+                <a:gridCol w="678771">
+                  <a:extLst>
+                    <a:ext uri="{9D8B030D-6E8A-4147-A177-3AD203B41FA5}">
+                      <a16:colId xmlns:a16="http://schemas.microsoft.com/office/drawing/2014/main" val="947986631"/>
+                    </a:ext>
+                  </a:extLst>
+                </a:gridCol>
+              </a:tblGrid>
+              <a:tr h="244559">
+                <a:tc>
+                  <a:txBody>
+                    <a:bodyPr/>
+                    <a:lstStyle/>
+                    <a:p>
+                      <a:r>
+                        <a:rPr lang="en-US" sz="1000" dirty="0"/>
+                        <a:t>Property Name</a:t>
+                      </a:r>
+                    </a:p>
+                  </a:txBody>
+                  <a:tcPr/>
+                </a:tc>
+                <a:tc>
+                  <a:txBody>
+                    <a:bodyPr/>
+                    <a:lstStyle/>
+                    <a:p>
+                      <a:r>
+                        <a:rPr lang="en-US" sz="1000" dirty="0"/>
+                        <a:t>Week1</a:t>
+                      </a:r>
+                    </a:p>
+                  </a:txBody>
+                  <a:tcPr/>
+                </a:tc>
+                <a:tc>
+                  <a:txBody>
+                    <a:bodyPr/>
+                    <a:lstStyle/>
+                    <a:p>
+                      <a:r>
+                        <a:rPr lang="en-US" sz="1000" dirty="0"/>
+                        <a:t>Week2</a:t>
+                      </a:r>
+                    </a:p>
+                  </a:txBody>
+                  <a:tcPr/>
+                </a:tc>
+                <a:tc>
+                  <a:txBody>
+                    <a:bodyPr/>
+                    <a:lstStyle/>
+                    <a:p>
+                      <a:r>
+                        <a:rPr lang="en-US" sz="1000" dirty="0"/>
+                        <a:t>Week 3</a:t>
+                      </a:r>
+                    </a:p>
+                  </a:txBody>
+                  <a:tcPr/>
+                </a:tc>
+                <a:tc>
+                  <a:txBody>
+                    <a:bodyPr/>
+                    <a:lstStyle/>
+                    <a:p>
+                      <a:r>
+                        <a:rPr lang="en-US" sz="1000" dirty="0"/>
+                        <a:t>Earned</a:t>
+                      </a:r>
+                    </a:p>
+                  </a:txBody>
+                  <a:tcPr/>
+                </a:tc>
+                <a:extLst>
+                  <a:ext uri="{0D108BD9-81ED-4DB2-BD59-A6C34878D82A}">
+                    <a16:rowId xmlns:a16="http://schemas.microsoft.com/office/drawing/2014/main" val="2288197724"/>
+                  </a:ext>
+                </a:extLst>
+              </a:tr>
+              <a:tr h="244559">
+                <a:tc>
+                  <a:txBody>
+                    <a:bodyPr/>
+                    <a:lstStyle/>
+                    <a:p>
+                      <a:r>
+                        <a:rPr lang="en-US" sz="1000" dirty="0"/>
+                        <a:t>P1</a:t>
+                      </a:r>
+                    </a:p>
+                  </a:txBody>
+                  <a:tcPr/>
+                </a:tc>
+                <a:tc>
+                  <a:txBody>
+                    <a:bodyPr/>
+                    <a:lstStyle/>
+                    <a:p>
+                      <a:r>
+                        <a:rPr lang="en-US" sz="1000" dirty="0"/>
+                        <a:t>3k</a:t>
+                      </a:r>
+                    </a:p>
+                  </a:txBody>
+                  <a:tcPr/>
+                </a:tc>
+                <a:tc>
+                  <a:txBody>
+                    <a:bodyPr/>
+                    <a:lstStyle/>
+                    <a:p>
+                      <a:r>
+                        <a:rPr lang="en-US" sz="1000" dirty="0"/>
+                        <a:t>2k</a:t>
+                      </a:r>
+                    </a:p>
+                  </a:txBody>
+                  <a:tcPr/>
+                </a:tc>
+                <a:tc>
+                  <a:txBody>
+                    <a:bodyPr/>
+                    <a:lstStyle/>
+                    <a:p>
+                      <a:r>
+                        <a:rPr lang="en-US" sz="1000" dirty="0"/>
+                        <a:t>1k</a:t>
+                      </a:r>
+                    </a:p>
+                  </a:txBody>
+                  <a:tcPr/>
+                </a:tc>
+                <a:tc>
+                  <a:txBody>
+                    <a:bodyPr/>
+                    <a:lstStyle/>
+                    <a:p>
+                      <a:r>
+                        <a:rPr lang="en-US" sz="1000" dirty="0"/>
+                        <a:t>6,000</a:t>
+                      </a:r>
+                    </a:p>
+                  </a:txBody>
+                  <a:tcPr/>
+                </a:tc>
+                <a:extLst>
+                  <a:ext uri="{0D108BD9-81ED-4DB2-BD59-A6C34878D82A}">
+                    <a16:rowId xmlns:a16="http://schemas.microsoft.com/office/drawing/2014/main" val="3125870186"/>
+                  </a:ext>
+                </a:extLst>
+              </a:tr>
+              <a:tr h="244559">
+                <a:tc>
+                  <a:txBody>
+                    <a:bodyPr/>
+                    <a:lstStyle/>
+                    <a:p>
+                      <a:r>
+                        <a:rPr lang="en-US" sz="1000" dirty="0"/>
+                        <a:t>P2</a:t>
+                      </a:r>
+                    </a:p>
+                  </a:txBody>
+                  <a:tcPr/>
+                </a:tc>
+                <a:tc>
+                  <a:txBody>
+                    <a:bodyPr/>
+                    <a:lstStyle/>
+                    <a:p>
+                      <a:r>
+                        <a:rPr lang="en-US" sz="1000" dirty="0"/>
+                        <a:t>1k</a:t>
+                      </a:r>
+                    </a:p>
+                  </a:txBody>
+                  <a:tcPr/>
+                </a:tc>
+                <a:tc>
+                  <a:txBody>
+                    <a:bodyPr/>
+                    <a:lstStyle/>
+                    <a:p>
+                      <a:r>
+                        <a:rPr lang="en-US" sz="1000" dirty="0"/>
+                        <a:t>1k</a:t>
+                      </a:r>
+                    </a:p>
+                  </a:txBody>
+                  <a:tcPr/>
+                </a:tc>
+                <a:tc>
+                  <a:txBody>
+                    <a:bodyPr/>
+                    <a:lstStyle/>
+                    <a:p>
+                      <a:r>
+                        <a:rPr lang="en-US" sz="1000" dirty="0"/>
+                        <a:t>2k</a:t>
+                      </a:r>
+                    </a:p>
+                  </a:txBody>
+                  <a:tcPr/>
+                </a:tc>
+                <a:tc>
+                  <a:txBody>
+                    <a:bodyPr/>
+                    <a:lstStyle/>
+                    <a:p>
+                      <a:r>
+                        <a:rPr lang="en-US" sz="1000" dirty="0"/>
+                        <a:t>4,000</a:t>
+                      </a:r>
+                    </a:p>
+                  </a:txBody>
+                  <a:tcPr/>
+                </a:tc>
+                <a:extLst>
+                  <a:ext uri="{0D108BD9-81ED-4DB2-BD59-A6C34878D82A}">
+                    <a16:rowId xmlns:a16="http://schemas.microsoft.com/office/drawing/2014/main" val="4104906619"/>
+                  </a:ext>
+                </a:extLst>
+              </a:tr>
+              <a:tr h="244559">
+                <a:tc>
+                  <a:txBody>
+                    <a:bodyPr/>
+                    <a:lstStyle/>
+                    <a:p>
+                      <a:r>
+                        <a:rPr lang="en-US" sz="1000" dirty="0"/>
+                        <a:t>TOTAL</a:t>
+                      </a:r>
+                    </a:p>
+                  </a:txBody>
+                  <a:tcPr/>
+                </a:tc>
+                <a:tc>
+                  <a:txBody>
+                    <a:bodyPr/>
+                    <a:lstStyle/>
+                    <a:p>
+                      <a:r>
+                        <a:rPr lang="en-US" sz="1000" dirty="0"/>
+                        <a:t>4k</a:t>
+                      </a:r>
+                    </a:p>
+                  </a:txBody>
+                  <a:tcPr/>
+                </a:tc>
+                <a:tc>
+                  <a:txBody>
+                    <a:bodyPr/>
+                    <a:lstStyle/>
+                    <a:p>
+                      <a:r>
+                        <a:rPr lang="en-US" sz="1000" dirty="0"/>
+                        <a:t>3k</a:t>
+                      </a:r>
+                    </a:p>
+                  </a:txBody>
+                  <a:tcPr/>
+                </a:tc>
+                <a:tc>
+                  <a:txBody>
+                    <a:bodyPr/>
+                    <a:lstStyle/>
+                    <a:p>
+                      <a:r>
+                        <a:rPr lang="en-US" sz="1000" dirty="0"/>
+                        <a:t>3k</a:t>
+                      </a:r>
+                    </a:p>
+                  </a:txBody>
+                  <a:tcPr/>
+                </a:tc>
+                <a:tc>
+                  <a:txBody>
+                    <a:bodyPr/>
+                    <a:lstStyle/>
+                    <a:p>
+                      <a:r>
+                        <a:rPr lang="en-US" sz="1000" dirty="0"/>
+                        <a:t>10,000</a:t>
+                      </a:r>
+                    </a:p>
+                  </a:txBody>
+                  <a:tcPr/>
+                </a:tc>
+                <a:extLst>
+                  <a:ext uri="{0D108BD9-81ED-4DB2-BD59-A6C34878D82A}">
+                    <a16:rowId xmlns:a16="http://schemas.microsoft.com/office/drawing/2014/main" val="742238911"/>
+                  </a:ext>
+                </a:extLst>
+              </a:tr>
+            </a:tbl>
+          </a:graphicData>
+        </a:graphic>
+      </p:graphicFrame>
+      <p:sp>
+        <p:nvSpPr>
+          <p:cNvPr id="44" name="TextBox 43">
+            <a:extLst>
+              <a:ext uri="{FF2B5EF4-FFF2-40B4-BE49-F238E27FC236}">
+                <a16:creationId xmlns:a16="http://schemas.microsoft.com/office/drawing/2014/main" id="{79DFB871-2A43-4021-8EFC-9A43DABC2EC7}"/>
+              </a:ext>
+            </a:extLst>
+          </p:cNvPr>
+          <p:cNvSpPr txBox="1"/>
+          <p:nvPr/>
+        </p:nvSpPr>
+        <p:spPr>
+          <a:xfrm>
+            <a:off x="3194736" y="3638502"/>
+            <a:ext cx="1952013" cy="276999"/>
+          </a:xfrm>
+          <a:prstGeom prst="rect">
+            <a:avLst/>
+          </a:prstGeom>
+          <a:noFill/>
+        </p:spPr>
+        <p:txBody>
+          <a:bodyPr wrap="square" rtlCol="0">
+            <a:spAutoFit/>
+          </a:bodyPr>
+          <a:lstStyle/>
+          <a:p>
+            <a:r>
+              <a:rPr lang="en-US" sz="1200" b="1" dirty="0"/>
+              <a:t>Week 1 of January, 2025</a:t>
+            </a:r>
+          </a:p>
+        </p:txBody>
+      </p:sp>
+      <p:sp>
+        <p:nvSpPr>
+          <p:cNvPr id="45" name="TextBox 44">
+            <a:extLst>
+              <a:ext uri="{FF2B5EF4-FFF2-40B4-BE49-F238E27FC236}">
+                <a16:creationId xmlns:a16="http://schemas.microsoft.com/office/drawing/2014/main" id="{E38FBA3F-B0C1-4191-9F51-157A7E4BF739}"/>
+              </a:ext>
+            </a:extLst>
+          </p:cNvPr>
+          <p:cNvSpPr txBox="1"/>
+          <p:nvPr/>
+        </p:nvSpPr>
+        <p:spPr>
+          <a:xfrm>
+            <a:off x="3208107" y="2801493"/>
+            <a:ext cx="1376450" cy="276999"/>
+          </a:xfrm>
+          <a:prstGeom prst="rect">
+            <a:avLst/>
+          </a:prstGeom>
+          <a:noFill/>
+        </p:spPr>
+        <p:txBody>
+          <a:bodyPr wrap="square" rtlCol="0">
+            <a:spAutoFit/>
+          </a:bodyPr>
+          <a:lstStyle/>
+          <a:p>
+            <a:r>
+              <a:rPr lang="en-US" sz="1200" b="1" dirty="0"/>
+              <a:t>MONTH Example</a:t>
+            </a:r>
+          </a:p>
+        </p:txBody>
+      </p:sp>
+      <p:sp>
+        <p:nvSpPr>
+          <p:cNvPr id="47" name="Rectangle: Rounded Corners 46">
+            <a:extLst>
+              <a:ext uri="{FF2B5EF4-FFF2-40B4-BE49-F238E27FC236}">
+                <a16:creationId xmlns:a16="http://schemas.microsoft.com/office/drawing/2014/main" id="{1B22FD9D-AEFC-4137-8B02-2DFCEC99A31C}"/>
+              </a:ext>
+            </a:extLst>
+          </p:cNvPr>
+          <p:cNvSpPr/>
+          <p:nvPr/>
+        </p:nvSpPr>
+        <p:spPr>
+          <a:xfrm>
+            <a:off x="3330166" y="3055288"/>
+            <a:ext cx="737709" cy="244198"/>
+          </a:xfrm>
+          <a:prstGeom prst="roundRect">
+            <a:avLst/>
+          </a:prstGeom>
+        </p:spPr>
+        <p:style>
+          <a:lnRef idx="2">
+            <a:schemeClr val="accent1">
+              <a:shade val="15000"/>
+            </a:schemeClr>
+          </a:lnRef>
+          <a:fillRef idx="1">
+            <a:schemeClr val="accent1"/>
+          </a:fillRef>
+          <a:effectRef idx="0">
+            <a:schemeClr val="accent1"/>
+          </a:effectRef>
+          <a:fontRef idx="minor">
+            <a:schemeClr val="lt1"/>
+          </a:fontRef>
+        </p:style>
+        <p:txBody>
+          <a:bodyPr rtlCol="0" anchor="ctr"/>
+          <a:lstStyle/>
+          <a:p>
+            <a:pPr algn="ctr"/>
+            <a:r>
+              <a:rPr lang="en-US" sz="1000" dirty="0"/>
+              <a:t>Month ↓</a:t>
+            </a:r>
+          </a:p>
+        </p:txBody>
+      </p:sp>
+      <p:sp>
+        <p:nvSpPr>
+          <p:cNvPr id="48" name="Rectangle: Rounded Corners 47">
+            <a:extLst>
+              <a:ext uri="{FF2B5EF4-FFF2-40B4-BE49-F238E27FC236}">
+                <a16:creationId xmlns:a16="http://schemas.microsoft.com/office/drawing/2014/main" id="{5716818E-4B5C-4AE4-B001-785D357DFF75}"/>
+              </a:ext>
+            </a:extLst>
+          </p:cNvPr>
+          <p:cNvSpPr/>
+          <p:nvPr/>
+        </p:nvSpPr>
+        <p:spPr>
+          <a:xfrm>
+            <a:off x="4133953" y="3055288"/>
+            <a:ext cx="737709" cy="244198"/>
+          </a:xfrm>
+          <a:prstGeom prst="roundRect">
+            <a:avLst/>
+          </a:prstGeom>
+        </p:spPr>
+        <p:style>
+          <a:lnRef idx="2">
+            <a:schemeClr val="accent1">
+              <a:shade val="15000"/>
+            </a:schemeClr>
+          </a:lnRef>
+          <a:fillRef idx="1">
+            <a:schemeClr val="accent1"/>
+          </a:fillRef>
+          <a:effectRef idx="0">
+            <a:schemeClr val="accent1"/>
+          </a:effectRef>
+          <a:fontRef idx="minor">
+            <a:schemeClr val="lt1"/>
+          </a:fontRef>
+        </p:style>
+        <p:txBody>
+          <a:bodyPr rtlCol="0" anchor="ctr"/>
+          <a:lstStyle/>
+          <a:p>
+            <a:pPr algn="ctr"/>
+            <a:r>
+              <a:rPr lang="en-US" sz="1000" dirty="0"/>
+              <a:t>Year ↓</a:t>
+            </a:r>
+          </a:p>
+        </p:txBody>
+      </p:sp>
+      <p:sp>
+        <p:nvSpPr>
+          <p:cNvPr id="50" name="Rectangle: Rounded Corners 49">
+            <a:extLst>
+              <a:ext uri="{FF2B5EF4-FFF2-40B4-BE49-F238E27FC236}">
+                <a16:creationId xmlns:a16="http://schemas.microsoft.com/office/drawing/2014/main" id="{F6BC6590-0C5D-4281-89B6-1724F3B72A6A}"/>
+              </a:ext>
+            </a:extLst>
+          </p:cNvPr>
+          <p:cNvSpPr/>
+          <p:nvPr/>
+        </p:nvSpPr>
+        <p:spPr>
+          <a:xfrm>
+            <a:off x="3330166" y="3394304"/>
+            <a:ext cx="737709" cy="244198"/>
+          </a:xfrm>
+          <a:prstGeom prst="roundRect">
+            <a:avLst/>
+          </a:prstGeom>
+        </p:spPr>
+        <p:style>
+          <a:lnRef idx="2">
+            <a:schemeClr val="accent1">
+              <a:shade val="15000"/>
+            </a:schemeClr>
+          </a:lnRef>
+          <a:fillRef idx="1">
+            <a:schemeClr val="accent1"/>
+          </a:fillRef>
+          <a:effectRef idx="0">
+            <a:schemeClr val="accent1"/>
+          </a:effectRef>
+          <a:fontRef idx="minor">
+            <a:schemeClr val="lt1"/>
+          </a:fontRef>
+        </p:style>
+        <p:txBody>
+          <a:bodyPr rtlCol="0" anchor="ctr"/>
+          <a:lstStyle/>
+          <a:p>
+            <a:pPr algn="ctr"/>
+            <a:r>
+              <a:rPr lang="en-US" sz="1000" dirty="0"/>
+              <a:t>Jan ↓</a:t>
+            </a:r>
+          </a:p>
+        </p:txBody>
+      </p:sp>
+      <p:sp>
+        <p:nvSpPr>
+          <p:cNvPr id="51" name="Rectangle: Rounded Corners 50">
+            <a:extLst>
+              <a:ext uri="{FF2B5EF4-FFF2-40B4-BE49-F238E27FC236}">
+                <a16:creationId xmlns:a16="http://schemas.microsoft.com/office/drawing/2014/main" id="{A36346A5-F83B-486B-A493-E9B22F6D8525}"/>
+              </a:ext>
+            </a:extLst>
+          </p:cNvPr>
+          <p:cNvSpPr/>
+          <p:nvPr/>
+        </p:nvSpPr>
+        <p:spPr>
+          <a:xfrm>
+            <a:off x="4133953" y="3394304"/>
             <a:ext cx="737709" cy="244198"/>
           </a:xfrm>
           <a:prstGeom prst="roundRect">

--- a/betchaBooking-USECASE.pptx
+++ b/betchaBooking-USECASE.pptx
@@ -14572,7 +14572,7 @@
           <p:nvPr>
             <p:extLst>
               <p:ext uri="{D42A27DB-BD31-4B8C-83A1-F6EECF244321}">
-                <p14:modId xmlns:p14="http://schemas.microsoft.com/office/powerpoint/2010/main" val="3774109859"/>
+                <p14:modId xmlns:p14="http://schemas.microsoft.com/office/powerpoint/2010/main" val="1913174576"/>
               </p:ext>
             </p:extLst>
           </p:nvPr>
@@ -15012,8 +15012,8 @@
         </p:nvSpPr>
         <p:spPr>
           <a:xfrm>
-            <a:off x="3138886" y="523387"/>
-            <a:ext cx="3932474" cy="276999"/>
+            <a:off x="3104875" y="339944"/>
+            <a:ext cx="4552600" cy="276999"/>
           </a:xfrm>
           <a:prstGeom prst="rect">
             <a:avLst/>
@@ -15028,31 +15028,7 @@
           <a:p>
             <a:r>
               <a:rPr lang="en-US" sz="1200" b="1" dirty="0"/>
-              <a:t>QUARTER Example 1{</a:t>
-            </a:r>
-            <a:r>
-              <a:rPr lang="en-US" sz="1200" b="1" dirty="0" err="1"/>
-              <a:t>jan-apr</a:t>
-            </a:r>
-            <a:r>
-              <a:rPr lang="en-US" sz="1200" b="1" dirty="0"/>
-              <a:t>} 2{may-</a:t>
-            </a:r>
-            <a:r>
-              <a:rPr lang="en-US" sz="1200" b="1" dirty="0" err="1"/>
-              <a:t>aug</a:t>
-            </a:r>
-            <a:r>
-              <a:rPr lang="en-US" sz="1200" b="1" dirty="0"/>
-              <a:t>} 3{</a:t>
-            </a:r>
-            <a:r>
-              <a:rPr lang="en-US" sz="1200" b="1" dirty="0" err="1"/>
-              <a:t>sep</a:t>
-            </a:r>
-            <a:r>
-              <a:rPr lang="en-US" sz="1200" b="1" dirty="0"/>
-              <a:t>-dec}</a:t>
+              <a:t>QUARTER Example 1 {Jan-Mar}  2 {Apr-Jun}  3 {Jul-Sep}  4 {Oct-Dec}</a:t>
             </a:r>
           </a:p>
         </p:txBody>
@@ -17902,7 +17878,7 @@
           <a:p>
             <a:r>
               <a:rPr lang="en-US" sz="1200" b="1" dirty="0"/>
-              <a:t>Week 1 of January, 2025</a:t>
+              <a:t>January, 2025</a:t>
             </a:r>
           </a:p>
         </p:txBody>
